--- a/figures/fig1_diagram.pptx
+++ b/figures/fig1_diagram.pptx
@@ -6,6 +6,11 @@
   </p:sldMasterIdLst>
   <p:sldIdLst>
     <p:sldId id="258" r:id="rId2"/>
+    <p:sldId id="264" r:id="rId3"/>
+    <p:sldId id="265" r:id="rId4"/>
+    <p:sldId id="266" r:id="rId5"/>
+    <p:sldId id="267" r:id="rId6"/>
+    <p:sldId id="268" r:id="rId7"/>
   </p:sldIdLst>
   <p:sldSz cx="12192000" cy="6858000"/>
   <p:notesSz cx="6858000" cy="9144000"/>
@@ -259,7 +264,7 @@
           <a:p>
             <a:fld id="{75A9CF98-CC55-774D-9AE2-4D7D2CE05F38}" type="datetimeFigureOut">
               <a:rPr lang="en-US" smtClean="0"/>
-              <a:t>8/20/25</a:t>
+              <a:t>9/1/25</a:t>
             </a:fld>
             <a:endParaRPr lang="en-US"/>
           </a:p>
@@ -457,7 +462,7 @@
           <a:p>
             <a:fld id="{75A9CF98-CC55-774D-9AE2-4D7D2CE05F38}" type="datetimeFigureOut">
               <a:rPr lang="en-US" smtClean="0"/>
-              <a:t>8/20/25</a:t>
+              <a:t>9/1/25</a:t>
             </a:fld>
             <a:endParaRPr lang="en-US"/>
           </a:p>
@@ -665,7 +670,7 @@
           <a:p>
             <a:fld id="{75A9CF98-CC55-774D-9AE2-4D7D2CE05F38}" type="datetimeFigureOut">
               <a:rPr lang="en-US" smtClean="0"/>
-              <a:t>8/20/25</a:t>
+              <a:t>9/1/25</a:t>
             </a:fld>
             <a:endParaRPr lang="en-US"/>
           </a:p>
@@ -863,7 +868,7 @@
           <a:p>
             <a:fld id="{75A9CF98-CC55-774D-9AE2-4D7D2CE05F38}" type="datetimeFigureOut">
               <a:rPr lang="en-US" smtClean="0"/>
-              <a:t>8/20/25</a:t>
+              <a:t>9/1/25</a:t>
             </a:fld>
             <a:endParaRPr lang="en-US"/>
           </a:p>
@@ -1138,7 +1143,7 @@
           <a:p>
             <a:fld id="{75A9CF98-CC55-774D-9AE2-4D7D2CE05F38}" type="datetimeFigureOut">
               <a:rPr lang="en-US" smtClean="0"/>
-              <a:t>8/20/25</a:t>
+              <a:t>9/1/25</a:t>
             </a:fld>
             <a:endParaRPr lang="en-US"/>
           </a:p>
@@ -1403,7 +1408,7 @@
           <a:p>
             <a:fld id="{75A9CF98-CC55-774D-9AE2-4D7D2CE05F38}" type="datetimeFigureOut">
               <a:rPr lang="en-US" smtClean="0"/>
-              <a:t>8/20/25</a:t>
+              <a:t>9/1/25</a:t>
             </a:fld>
             <a:endParaRPr lang="en-US"/>
           </a:p>
@@ -1815,7 +1820,7 @@
           <a:p>
             <a:fld id="{75A9CF98-CC55-774D-9AE2-4D7D2CE05F38}" type="datetimeFigureOut">
               <a:rPr lang="en-US" smtClean="0"/>
-              <a:t>8/20/25</a:t>
+              <a:t>9/1/25</a:t>
             </a:fld>
             <a:endParaRPr lang="en-US"/>
           </a:p>
@@ -1956,7 +1961,7 @@
           <a:p>
             <a:fld id="{75A9CF98-CC55-774D-9AE2-4D7D2CE05F38}" type="datetimeFigureOut">
               <a:rPr lang="en-US" smtClean="0"/>
-              <a:t>8/20/25</a:t>
+              <a:t>9/1/25</a:t>
             </a:fld>
             <a:endParaRPr lang="en-US"/>
           </a:p>
@@ -2069,7 +2074,7 @@
           <a:p>
             <a:fld id="{75A9CF98-CC55-774D-9AE2-4D7D2CE05F38}" type="datetimeFigureOut">
               <a:rPr lang="en-US" smtClean="0"/>
-              <a:t>8/20/25</a:t>
+              <a:t>9/1/25</a:t>
             </a:fld>
             <a:endParaRPr lang="en-US"/>
           </a:p>
@@ -2380,7 +2385,7 @@
           <a:p>
             <a:fld id="{75A9CF98-CC55-774D-9AE2-4D7D2CE05F38}" type="datetimeFigureOut">
               <a:rPr lang="en-US" smtClean="0"/>
-              <a:t>8/20/25</a:t>
+              <a:t>9/1/25</a:t>
             </a:fld>
             <a:endParaRPr lang="en-US"/>
           </a:p>
@@ -2668,7 +2673,7 @@
           <a:p>
             <a:fld id="{75A9CF98-CC55-774D-9AE2-4D7D2CE05F38}" type="datetimeFigureOut">
               <a:rPr lang="en-US" smtClean="0"/>
-              <a:t>8/20/25</a:t>
+              <a:t>9/1/25</a:t>
             </a:fld>
             <a:endParaRPr lang="en-US"/>
           </a:p>
@@ -2909,7 +2914,7 @@
           <a:p>
             <a:fld id="{75A9CF98-CC55-774D-9AE2-4D7D2CE05F38}" type="datetimeFigureOut">
               <a:rPr lang="en-US" smtClean="0"/>
-              <a:t>8/20/25</a:t>
+              <a:t>9/1/25</a:t>
             </a:fld>
             <a:endParaRPr lang="en-US"/>
           </a:p>
@@ -4786,8 +4791,8 @@
             </a:fontRef>
           </p:style>
         </p:cxnSp>
-        <mc:AlternateContent xmlns:mc="http://schemas.openxmlformats.org/markup-compatibility/2006">
-          <mc:Choice xmlns:a14="http://schemas.microsoft.com/office/drawing/2010/main" Requires="a14">
+        <mc:AlternateContent xmlns:mc="http://schemas.openxmlformats.org/markup-compatibility/2006" xmlns:a14="http://schemas.microsoft.com/office/drawing/2010/main">
+          <mc:Choice Requires="a14">
             <p:sp>
               <p:nvSpPr>
                 <p:cNvPr id="20" name="TextBox 35">
@@ -4933,7 +4938,7 @@
               </p:txBody>
             </p:sp>
           </mc:Choice>
-          <mc:Fallback>
+          <mc:Fallback xmlns="">
             <p:sp>
               <p:nvSpPr>
                 <p:cNvPr id="20" name="TextBox 35">
@@ -5124,8 +5129,8 @@
             </a:p>
           </p:txBody>
         </p:sp>
-        <mc:AlternateContent xmlns:mc="http://schemas.openxmlformats.org/markup-compatibility/2006">
-          <mc:Choice xmlns:a14="http://schemas.microsoft.com/office/drawing/2010/main" Requires="a14">
+        <mc:AlternateContent xmlns:mc="http://schemas.openxmlformats.org/markup-compatibility/2006" xmlns:a14="http://schemas.microsoft.com/office/drawing/2010/main">
+          <mc:Choice Requires="a14">
             <p:sp>
               <p:nvSpPr>
                 <p:cNvPr id="53" name="TextBox 35">
@@ -5271,7 +5276,7 @@
               </p:txBody>
             </p:sp>
           </mc:Choice>
-          <mc:Fallback>
+          <mc:Fallback xmlns="">
             <p:sp>
               <p:nvSpPr>
                 <p:cNvPr id="53" name="TextBox 35">
@@ -5360,8 +5365,8 @@
             </a:fontRef>
           </p:style>
         </p:cxnSp>
-        <mc:AlternateContent xmlns:mc="http://schemas.openxmlformats.org/markup-compatibility/2006">
-          <mc:Choice xmlns:a14="http://schemas.microsoft.com/office/drawing/2010/main" Requires="a14">
+        <mc:AlternateContent xmlns:mc="http://schemas.openxmlformats.org/markup-compatibility/2006" xmlns:a14="http://schemas.microsoft.com/office/drawing/2010/main">
+          <mc:Choice Requires="a14">
             <p:sp>
               <p:nvSpPr>
                 <p:cNvPr id="56" name="TextBox 35">
@@ -5507,7 +5512,7 @@
               </p:txBody>
             </p:sp>
           </mc:Choice>
-          <mc:Fallback>
+          <mc:Fallback xmlns="">
             <p:sp>
               <p:nvSpPr>
                 <p:cNvPr id="56" name="TextBox 35">
@@ -5850,8 +5855,8 @@
             </a:p>
           </p:txBody>
         </p:sp>
-        <mc:AlternateContent xmlns:mc="http://schemas.openxmlformats.org/markup-compatibility/2006">
-          <mc:Choice xmlns:a14="http://schemas.microsoft.com/office/drawing/2010/main" Requires="a14">
+        <mc:AlternateContent xmlns:mc="http://schemas.openxmlformats.org/markup-compatibility/2006" xmlns:a14="http://schemas.microsoft.com/office/drawing/2010/main">
+          <mc:Choice Requires="a14">
             <p:sp>
               <p:nvSpPr>
                 <p:cNvPr id="76" name="TextBox 35">
@@ -6015,7 +6020,7 @@
               </p:txBody>
             </p:sp>
           </mc:Choice>
-          <mc:Fallback>
+          <mc:Fallback xmlns="">
             <p:sp>
               <p:nvSpPr>
                 <p:cNvPr id="76" name="TextBox 35">
@@ -6060,8 +6065,8 @@
             </p:sp>
           </mc:Fallback>
         </mc:AlternateContent>
-        <mc:AlternateContent xmlns:mc="http://schemas.openxmlformats.org/markup-compatibility/2006">
-          <mc:Choice xmlns:a14="http://schemas.microsoft.com/office/drawing/2010/main" Requires="a14">
+        <mc:AlternateContent xmlns:mc="http://schemas.openxmlformats.org/markup-compatibility/2006" xmlns:a14="http://schemas.microsoft.com/office/drawing/2010/main">
+          <mc:Choice Requires="a14">
             <p:sp>
               <p:nvSpPr>
                 <p:cNvPr id="77" name="TextBox 35">
@@ -6313,7 +6318,7 @@
               </p:txBody>
             </p:sp>
           </mc:Choice>
-          <mc:Fallback>
+          <mc:Fallback xmlns="">
             <p:sp>
               <p:nvSpPr>
                 <p:cNvPr id="77" name="TextBox 35">
@@ -6428,8 +6433,8 @@
             </a:p>
           </p:txBody>
         </p:sp>
-        <mc:AlternateContent xmlns:mc="http://schemas.openxmlformats.org/markup-compatibility/2006">
-          <mc:Choice xmlns:a14="http://schemas.microsoft.com/office/drawing/2010/main" Requires="a14">
+        <mc:AlternateContent xmlns:mc="http://schemas.openxmlformats.org/markup-compatibility/2006" xmlns:a14="http://schemas.microsoft.com/office/drawing/2010/main">
+          <mc:Choice Requires="a14">
             <p:sp>
               <p:nvSpPr>
                 <p:cNvPr id="14" name="TextBox 35">
@@ -6745,7 +6750,7 @@
               </p:txBody>
             </p:sp>
           </mc:Choice>
-          <mc:Fallback>
+          <mc:Fallback xmlns="">
             <p:sp>
               <p:nvSpPr>
                 <p:cNvPr id="14" name="TextBox 35">
@@ -6889,6 +6894,2571 @@
     <p:extLst>
       <p:ext uri="{BB962C8B-B14F-4D97-AF65-F5344CB8AC3E}">
         <p14:creationId xmlns:p14="http://schemas.microsoft.com/office/powerpoint/2010/main" val="3319264901"/>
+      </p:ext>
+    </p:extLst>
+  </p:cSld>
+  <p:clrMapOvr>
+    <a:masterClrMapping/>
+  </p:clrMapOvr>
+</p:sld>
+</file>
+
+<file path=ppt/slides/slide2.xml><?xml version="1.0" encoding="utf-8"?>
+<p:sld xmlns:a="http://schemas.openxmlformats.org/drawingml/2006/main" xmlns:r="http://schemas.openxmlformats.org/officeDocument/2006/relationships" xmlns:p="http://schemas.openxmlformats.org/presentationml/2006/main">
+  <p:cSld>
+    <p:spTree>
+      <p:nvGrpSpPr>
+        <p:cNvPr id="1" name="">
+          <a:extLst>
+            <a:ext uri="{FF2B5EF4-FFF2-40B4-BE49-F238E27FC236}">
+              <a16:creationId xmlns:a16="http://schemas.microsoft.com/office/drawing/2014/main" id="{F269C566-30FB-C5E0-1004-2C3929CB867C}"/>
+            </a:ext>
+          </a:extLst>
+        </p:cNvPr>
+        <p:cNvGrpSpPr/>
+        <p:nvPr/>
+      </p:nvGrpSpPr>
+      <p:grpSpPr>
+        <a:xfrm>
+          <a:off x="0" y="0"/>
+          <a:ext cx="0" cy="0"/>
+          <a:chOff x="0" y="0"/>
+          <a:chExt cx="0" cy="0"/>
+        </a:xfrm>
+      </p:grpSpPr>
+      <p:sp>
+        <p:nvSpPr>
+          <p:cNvPr id="16" name="TextBox 15">
+            <a:extLst>
+              <a:ext uri="{FF2B5EF4-FFF2-40B4-BE49-F238E27FC236}">
+                <a16:creationId xmlns:a16="http://schemas.microsoft.com/office/drawing/2014/main" id="{B01BEE00-70EF-A39D-2975-6C6AB8379312}"/>
+              </a:ext>
+            </a:extLst>
+          </p:cNvPr>
+          <p:cNvSpPr txBox="1"/>
+          <p:nvPr/>
+        </p:nvSpPr>
+        <p:spPr>
+          <a:xfrm>
+            <a:off x="298724" y="303817"/>
+            <a:ext cx="2259479" cy="369332"/>
+          </a:xfrm>
+          <a:prstGeom prst="rect">
+            <a:avLst/>
+          </a:prstGeom>
+          <a:noFill/>
+        </p:spPr>
+        <p:txBody>
+          <a:bodyPr wrap="square" rtlCol="0">
+            <a:spAutoFit/>
+          </a:bodyPr>
+          <a:lstStyle/>
+          <a:p>
+            <a:r>
+              <a:rPr lang="en-US" b="1" dirty="0">
+                <a:latin typeface="Aptos" panose="020B0004020202020204" pitchFamily="34" charset="0"/>
+              </a:rPr>
+              <a:t>a) </a:t>
+            </a:r>
+            <a:r>
+              <a:rPr lang="en-US" dirty="0">
+                <a:latin typeface="Aptos" panose="020B0004020202020204" pitchFamily="34" charset="0"/>
+              </a:rPr>
+              <a:t>80min</a:t>
+            </a:r>
+            <a:endParaRPr lang="en-US" dirty="0">
+              <a:solidFill>
+                <a:schemeClr val="tx1"/>
+              </a:solidFill>
+              <a:latin typeface="Aptos" panose="020B0004020202020204" pitchFamily="34" charset="0"/>
+            </a:endParaRPr>
+          </a:p>
+        </p:txBody>
+      </p:sp>
+      <p:pic>
+        <p:nvPicPr>
+          <p:cNvPr id="34" name="Picture 33">
+            <a:extLst>
+              <a:ext uri="{FF2B5EF4-FFF2-40B4-BE49-F238E27FC236}">
+                <a16:creationId xmlns:a16="http://schemas.microsoft.com/office/drawing/2014/main" id="{B147E5E7-98C2-EFF8-7F50-D62F1A059E22}"/>
+              </a:ext>
+            </a:extLst>
+          </p:cNvPr>
+          <p:cNvPicPr>
+            <a:picLocks noChangeAspect="1"/>
+          </p:cNvPicPr>
+          <p:nvPr/>
+        </p:nvPicPr>
+        <p:blipFill>
+          <a:blip r:embed="rId2"/>
+          <a:srcRect l="22911" t="10494" r="17774" b="6296"/>
+          <a:stretch>
+            <a:fillRect/>
+          </a:stretch>
+        </p:blipFill>
+        <p:spPr>
+          <a:xfrm>
+            <a:off x="103375" y="826696"/>
+            <a:ext cx="2665945" cy="3549940"/>
+          </a:xfrm>
+          <a:prstGeom prst="rect">
+            <a:avLst/>
+          </a:prstGeom>
+        </p:spPr>
+      </p:pic>
+      <p:pic>
+        <p:nvPicPr>
+          <p:cNvPr id="40" name="Picture 39">
+            <a:extLst>
+              <a:ext uri="{FF2B5EF4-FFF2-40B4-BE49-F238E27FC236}">
+                <a16:creationId xmlns:a16="http://schemas.microsoft.com/office/drawing/2014/main" id="{4C8D3FB2-FF0F-9AC6-D560-8197FAAAEC4E}"/>
+              </a:ext>
+            </a:extLst>
+          </p:cNvPr>
+          <p:cNvPicPr>
+            <a:picLocks noChangeAspect="1"/>
+          </p:cNvPicPr>
+          <p:nvPr/>
+        </p:nvPicPr>
+        <p:blipFill>
+          <a:blip r:embed="rId3"/>
+          <a:srcRect l="21814" t="11509" r="18870" b="5404"/>
+          <a:stretch>
+            <a:fillRect/>
+          </a:stretch>
+        </p:blipFill>
+        <p:spPr>
+          <a:xfrm>
+            <a:off x="2769320" y="826696"/>
+            <a:ext cx="2669865" cy="3549940"/>
+          </a:xfrm>
+          <a:prstGeom prst="rect">
+            <a:avLst/>
+          </a:prstGeom>
+        </p:spPr>
+      </p:pic>
+      <p:pic>
+        <p:nvPicPr>
+          <p:cNvPr id="42" name="Picture 41">
+            <a:extLst>
+              <a:ext uri="{FF2B5EF4-FFF2-40B4-BE49-F238E27FC236}">
+                <a16:creationId xmlns:a16="http://schemas.microsoft.com/office/drawing/2014/main" id="{8FCE5C16-FB0A-522B-34EA-3F261378EFEE}"/>
+              </a:ext>
+            </a:extLst>
+          </p:cNvPr>
+          <p:cNvPicPr>
+            <a:picLocks noChangeAspect="1"/>
+          </p:cNvPicPr>
+          <p:nvPr/>
+        </p:nvPicPr>
+        <p:blipFill>
+          <a:blip r:embed="rId4"/>
+          <a:srcRect l="21814" t="11930" r="18870" b="5123"/>
+          <a:stretch>
+            <a:fillRect/>
+          </a:stretch>
+        </p:blipFill>
+        <p:spPr>
+          <a:xfrm>
+            <a:off x="5603276" y="826696"/>
+            <a:ext cx="2674383" cy="3549941"/>
+          </a:xfrm>
+          <a:prstGeom prst="rect">
+            <a:avLst/>
+          </a:prstGeom>
+        </p:spPr>
+      </p:pic>
+      <p:sp>
+        <p:nvSpPr>
+          <p:cNvPr id="43" name="TextBox 42">
+            <a:extLst>
+              <a:ext uri="{FF2B5EF4-FFF2-40B4-BE49-F238E27FC236}">
+                <a16:creationId xmlns:a16="http://schemas.microsoft.com/office/drawing/2014/main" id="{E41D20DC-4C0A-FBC7-C334-5E59503B54AA}"/>
+              </a:ext>
+            </a:extLst>
+          </p:cNvPr>
+          <p:cNvSpPr txBox="1"/>
+          <p:nvPr/>
+        </p:nvSpPr>
+        <p:spPr>
+          <a:xfrm>
+            <a:off x="2648774" y="303817"/>
+            <a:ext cx="2259479" cy="369332"/>
+          </a:xfrm>
+          <a:prstGeom prst="rect">
+            <a:avLst/>
+          </a:prstGeom>
+          <a:noFill/>
+        </p:spPr>
+        <p:txBody>
+          <a:bodyPr wrap="square" rtlCol="0">
+            <a:spAutoFit/>
+          </a:bodyPr>
+          <a:lstStyle/>
+          <a:p>
+            <a:r>
+              <a:rPr lang="en-US" b="1" dirty="0">
+                <a:latin typeface="Aptos" panose="020B0004020202020204" pitchFamily="34" charset="0"/>
+              </a:rPr>
+              <a:t>b) </a:t>
+            </a:r>
+            <a:r>
+              <a:rPr lang="en-US" dirty="0">
+                <a:latin typeface="Aptos" panose="020B0004020202020204" pitchFamily="34" charset="0"/>
+              </a:rPr>
+              <a:t>1.5h*</a:t>
+            </a:r>
+          </a:p>
+        </p:txBody>
+      </p:sp>
+      <p:sp>
+        <p:nvSpPr>
+          <p:cNvPr id="44" name="TextBox 43">
+            <a:extLst>
+              <a:ext uri="{FF2B5EF4-FFF2-40B4-BE49-F238E27FC236}">
+                <a16:creationId xmlns:a16="http://schemas.microsoft.com/office/drawing/2014/main" id="{C194BB7B-3CD1-C566-D69D-5874EE42D86B}"/>
+              </a:ext>
+            </a:extLst>
+          </p:cNvPr>
+          <p:cNvSpPr txBox="1"/>
+          <p:nvPr/>
+        </p:nvSpPr>
+        <p:spPr>
+          <a:xfrm>
+            <a:off x="4839231" y="328535"/>
+            <a:ext cx="2259479" cy="369332"/>
+          </a:xfrm>
+          <a:prstGeom prst="rect">
+            <a:avLst/>
+          </a:prstGeom>
+          <a:noFill/>
+        </p:spPr>
+        <p:txBody>
+          <a:bodyPr wrap="square" rtlCol="0">
+            <a:spAutoFit/>
+          </a:bodyPr>
+          <a:lstStyle/>
+          <a:p>
+            <a:pPr algn="ctr"/>
+            <a:r>
+              <a:rPr lang="en-US" b="1" dirty="0">
+                <a:latin typeface="Aptos" panose="020B0004020202020204" pitchFamily="34" charset="0"/>
+              </a:rPr>
+              <a:t>c) </a:t>
+            </a:r>
+            <a:r>
+              <a:rPr lang="en-US" dirty="0">
+                <a:latin typeface="Aptos" panose="020B0004020202020204" pitchFamily="34" charset="0"/>
+              </a:rPr>
+              <a:t>2h</a:t>
+            </a:r>
+            <a:endParaRPr lang="en-US" dirty="0">
+              <a:solidFill>
+                <a:schemeClr val="tx1"/>
+              </a:solidFill>
+              <a:latin typeface="Aptos" panose="020B0004020202020204" pitchFamily="34" charset="0"/>
+            </a:endParaRPr>
+          </a:p>
+        </p:txBody>
+      </p:sp>
+      <p:sp>
+        <p:nvSpPr>
+          <p:cNvPr id="45" name="TextBox 44">
+            <a:extLst>
+              <a:ext uri="{FF2B5EF4-FFF2-40B4-BE49-F238E27FC236}">
+                <a16:creationId xmlns:a16="http://schemas.microsoft.com/office/drawing/2014/main" id="{C01EA530-737D-1D06-CB07-44BA23DA9B4E}"/>
+              </a:ext>
+            </a:extLst>
+          </p:cNvPr>
+          <p:cNvSpPr txBox="1"/>
+          <p:nvPr/>
+        </p:nvSpPr>
+        <p:spPr>
+          <a:xfrm>
+            <a:off x="7891603" y="303817"/>
+            <a:ext cx="2259479" cy="369332"/>
+          </a:xfrm>
+          <a:prstGeom prst="rect">
+            <a:avLst/>
+          </a:prstGeom>
+          <a:noFill/>
+        </p:spPr>
+        <p:txBody>
+          <a:bodyPr wrap="square" rtlCol="0">
+            <a:spAutoFit/>
+          </a:bodyPr>
+          <a:lstStyle/>
+          <a:p>
+            <a:pPr algn="ctr"/>
+            <a:r>
+              <a:rPr lang="en-US" b="1" dirty="0">
+                <a:latin typeface="Aptos" panose="020B0004020202020204" pitchFamily="34" charset="0"/>
+              </a:rPr>
+              <a:t>d) </a:t>
+            </a:r>
+            <a:r>
+              <a:rPr lang="en-US" dirty="0">
+                <a:latin typeface="Aptos" panose="020B0004020202020204" pitchFamily="34" charset="0"/>
+              </a:rPr>
+              <a:t>RICO: 20h</a:t>
+            </a:r>
+            <a:endParaRPr lang="en-US" dirty="0">
+              <a:solidFill>
+                <a:schemeClr val="tx1"/>
+              </a:solidFill>
+              <a:latin typeface="Aptos" panose="020B0004020202020204" pitchFamily="34" charset="0"/>
+            </a:endParaRPr>
+          </a:p>
+        </p:txBody>
+      </p:sp>
+      <p:pic>
+        <p:nvPicPr>
+          <p:cNvPr id="47" name="Picture 46">
+            <a:extLst>
+              <a:ext uri="{FF2B5EF4-FFF2-40B4-BE49-F238E27FC236}">
+                <a16:creationId xmlns:a16="http://schemas.microsoft.com/office/drawing/2014/main" id="{61AF4A96-A5D3-BABE-E483-17CB720D1C78}"/>
+              </a:ext>
+            </a:extLst>
+          </p:cNvPr>
+          <p:cNvPicPr>
+            <a:picLocks noChangeAspect="1"/>
+          </p:cNvPicPr>
+          <p:nvPr/>
+        </p:nvPicPr>
+        <p:blipFill>
+          <a:blip r:embed="rId5"/>
+          <a:srcRect l="12904" t="31733" r="3854" b="26597"/>
+          <a:stretch>
+            <a:fillRect/>
+          </a:stretch>
+        </p:blipFill>
+        <p:spPr>
+          <a:xfrm>
+            <a:off x="8334008" y="826696"/>
+            <a:ext cx="3880056" cy="1843690"/>
+          </a:xfrm>
+          <a:prstGeom prst="rect">
+            <a:avLst/>
+          </a:prstGeom>
+        </p:spPr>
+      </p:pic>
+      <p:pic>
+        <p:nvPicPr>
+          <p:cNvPr id="49" name="Picture 48">
+            <a:extLst>
+              <a:ext uri="{FF2B5EF4-FFF2-40B4-BE49-F238E27FC236}">
+                <a16:creationId xmlns:a16="http://schemas.microsoft.com/office/drawing/2014/main" id="{0FFDDE2D-7227-1EDF-2E56-EA1CB4847720}"/>
+              </a:ext>
+            </a:extLst>
+          </p:cNvPr>
+          <p:cNvPicPr>
+            <a:picLocks noChangeAspect="1"/>
+          </p:cNvPicPr>
+          <p:nvPr/>
+        </p:nvPicPr>
+        <p:blipFill>
+          <a:blip r:embed="rId6"/>
+          <a:stretch>
+            <a:fillRect/>
+          </a:stretch>
+        </p:blipFill>
+        <p:spPr>
+          <a:xfrm>
+            <a:off x="0" y="4346029"/>
+            <a:ext cx="2558203" cy="2558203"/>
+          </a:xfrm>
+          <a:prstGeom prst="rect">
+            <a:avLst/>
+          </a:prstGeom>
+        </p:spPr>
+      </p:pic>
+      <p:pic>
+        <p:nvPicPr>
+          <p:cNvPr id="51" name="Picture 50">
+            <a:extLst>
+              <a:ext uri="{FF2B5EF4-FFF2-40B4-BE49-F238E27FC236}">
+                <a16:creationId xmlns:a16="http://schemas.microsoft.com/office/drawing/2014/main" id="{CACA0E46-754D-2EB0-1586-363797A2BF7E}"/>
+              </a:ext>
+            </a:extLst>
+          </p:cNvPr>
+          <p:cNvPicPr>
+            <a:picLocks noChangeAspect="1"/>
+          </p:cNvPicPr>
+          <p:nvPr/>
+        </p:nvPicPr>
+        <p:blipFill>
+          <a:blip r:embed="rId7"/>
+          <a:stretch>
+            <a:fillRect/>
+          </a:stretch>
+        </p:blipFill>
+        <p:spPr>
+          <a:xfrm>
+            <a:off x="2665945" y="4361333"/>
+            <a:ext cx="2558203" cy="2558203"/>
+          </a:xfrm>
+          <a:prstGeom prst="rect">
+            <a:avLst/>
+          </a:prstGeom>
+        </p:spPr>
+      </p:pic>
+      <p:pic>
+        <p:nvPicPr>
+          <p:cNvPr id="53" name="Picture 52">
+            <a:extLst>
+              <a:ext uri="{FF2B5EF4-FFF2-40B4-BE49-F238E27FC236}">
+                <a16:creationId xmlns:a16="http://schemas.microsoft.com/office/drawing/2014/main" id="{ABC0C8EF-0F97-1D37-DFC6-1C731D2F8223}"/>
+              </a:ext>
+            </a:extLst>
+          </p:cNvPr>
+          <p:cNvPicPr>
+            <a:picLocks noChangeAspect="1"/>
+          </p:cNvPicPr>
+          <p:nvPr/>
+        </p:nvPicPr>
+        <p:blipFill>
+          <a:blip r:embed="rId8"/>
+          <a:stretch>
+            <a:fillRect/>
+          </a:stretch>
+        </p:blipFill>
+        <p:spPr>
+          <a:xfrm>
+            <a:off x="8441750" y="4315421"/>
+            <a:ext cx="2558203" cy="2558203"/>
+          </a:xfrm>
+          <a:prstGeom prst="rect">
+            <a:avLst/>
+          </a:prstGeom>
+        </p:spPr>
+      </p:pic>
+      <p:pic>
+        <p:nvPicPr>
+          <p:cNvPr id="55" name="Picture 54">
+            <a:extLst>
+              <a:ext uri="{FF2B5EF4-FFF2-40B4-BE49-F238E27FC236}">
+                <a16:creationId xmlns:a16="http://schemas.microsoft.com/office/drawing/2014/main" id="{A65EDE24-CF53-6C60-393D-2B5F180D8765}"/>
+              </a:ext>
+            </a:extLst>
+          </p:cNvPr>
+          <p:cNvPicPr>
+            <a:picLocks noChangeAspect="1"/>
+          </p:cNvPicPr>
+          <p:nvPr/>
+        </p:nvPicPr>
+        <p:blipFill>
+          <a:blip r:embed="rId9"/>
+          <a:stretch>
+            <a:fillRect/>
+          </a:stretch>
+        </p:blipFill>
+        <p:spPr>
+          <a:xfrm>
+            <a:off x="5542560" y="4315421"/>
+            <a:ext cx="2558203" cy="2558203"/>
+          </a:xfrm>
+          <a:prstGeom prst="rect">
+            <a:avLst/>
+          </a:prstGeom>
+        </p:spPr>
+      </p:pic>
+      <p:cxnSp>
+        <p:nvCxnSpPr>
+          <p:cNvPr id="57" name="Straight Connector 56">
+            <a:extLst>
+              <a:ext uri="{FF2B5EF4-FFF2-40B4-BE49-F238E27FC236}">
+                <a16:creationId xmlns:a16="http://schemas.microsoft.com/office/drawing/2014/main" id="{600E3752-23D7-5496-A15A-6EDE87B96A43}"/>
+              </a:ext>
+            </a:extLst>
+          </p:cNvPr>
+          <p:cNvCxnSpPr>
+            <a:cxnSpLocks/>
+          </p:cNvCxnSpPr>
+          <p:nvPr/>
+        </p:nvCxnSpPr>
+        <p:spPr>
+          <a:xfrm>
+            <a:off x="8277659" y="826696"/>
+            <a:ext cx="0" cy="5910988"/>
+          </a:xfrm>
+          <a:prstGeom prst="line">
+            <a:avLst/>
+          </a:prstGeom>
+          <a:ln>
+            <a:solidFill>
+              <a:schemeClr val="tx1">
+                <a:lumMod val="50000"/>
+                <a:lumOff val="50000"/>
+              </a:schemeClr>
+            </a:solidFill>
+            <a:prstDash val="solid"/>
+          </a:ln>
+        </p:spPr>
+        <p:style>
+          <a:lnRef idx="2">
+            <a:schemeClr val="accent1"/>
+          </a:lnRef>
+          <a:fillRef idx="0">
+            <a:schemeClr val="accent1"/>
+          </a:fillRef>
+          <a:effectRef idx="1">
+            <a:schemeClr val="accent1"/>
+          </a:effectRef>
+          <a:fontRef idx="minor">
+            <a:schemeClr val="tx1"/>
+          </a:fontRef>
+        </p:style>
+      </p:cxnSp>
+    </p:spTree>
+    <p:extLst>
+      <p:ext uri="{BB962C8B-B14F-4D97-AF65-F5344CB8AC3E}">
+        <p14:creationId xmlns:p14="http://schemas.microsoft.com/office/powerpoint/2010/main" val="3124289402"/>
+      </p:ext>
+    </p:extLst>
+  </p:cSld>
+  <p:clrMapOvr>
+    <a:masterClrMapping/>
+  </p:clrMapOvr>
+</p:sld>
+</file>
+
+<file path=ppt/slides/slide3.xml><?xml version="1.0" encoding="utf-8"?>
+<p:sld xmlns:a="http://schemas.openxmlformats.org/drawingml/2006/main" xmlns:r="http://schemas.openxmlformats.org/officeDocument/2006/relationships" xmlns:p="http://schemas.openxmlformats.org/presentationml/2006/main">
+  <p:cSld>
+    <p:spTree>
+      <p:nvGrpSpPr>
+        <p:cNvPr id="1" name=""/>
+        <p:cNvGrpSpPr/>
+        <p:nvPr/>
+      </p:nvGrpSpPr>
+      <p:grpSpPr>
+        <a:xfrm>
+          <a:off x="0" y="0"/>
+          <a:ext cx="0" cy="0"/>
+          <a:chOff x="0" y="0"/>
+          <a:chExt cx="0" cy="0"/>
+        </a:xfrm>
+      </p:grpSpPr>
+      <p:pic>
+        <p:nvPicPr>
+          <p:cNvPr id="13" name="Picture 12">
+            <a:extLst>
+              <a:ext uri="{FF2B5EF4-FFF2-40B4-BE49-F238E27FC236}">
+                <a16:creationId xmlns:a16="http://schemas.microsoft.com/office/drawing/2014/main" id="{3716017B-CF74-6DC9-C8E0-FBDC21E6C932}"/>
+              </a:ext>
+            </a:extLst>
+          </p:cNvPr>
+          <p:cNvPicPr>
+            <a:picLocks noChangeAspect="1"/>
+          </p:cNvPicPr>
+          <p:nvPr/>
+        </p:nvPicPr>
+        <p:blipFill>
+          <a:blip r:embed="rId2"/>
+          <a:srcRect l="1972" r="26536"/>
+          <a:stretch>
+            <a:fillRect/>
+          </a:stretch>
+        </p:blipFill>
+        <p:spPr>
+          <a:xfrm>
+            <a:off x="306042" y="1907252"/>
+            <a:ext cx="3438968" cy="3610329"/>
+          </a:xfrm>
+          <a:prstGeom prst="rect">
+            <a:avLst/>
+          </a:prstGeom>
+        </p:spPr>
+      </p:pic>
+      <p:pic>
+        <p:nvPicPr>
+          <p:cNvPr id="15" name="Picture 14">
+            <a:extLst>
+              <a:ext uri="{FF2B5EF4-FFF2-40B4-BE49-F238E27FC236}">
+                <a16:creationId xmlns:a16="http://schemas.microsoft.com/office/drawing/2014/main" id="{4422557D-440D-7C4A-127F-99CF8FA8CB29}"/>
+              </a:ext>
+            </a:extLst>
+          </p:cNvPr>
+          <p:cNvPicPr>
+            <a:picLocks noChangeAspect="1"/>
+          </p:cNvPicPr>
+          <p:nvPr/>
+        </p:nvPicPr>
+        <p:blipFill>
+          <a:blip r:embed="rId3"/>
+          <a:srcRect l="2193" r="24776"/>
+          <a:stretch>
+            <a:fillRect/>
+          </a:stretch>
+        </p:blipFill>
+        <p:spPr>
+          <a:xfrm>
+            <a:off x="3745010" y="1842268"/>
+            <a:ext cx="3576270" cy="3675313"/>
+          </a:xfrm>
+          <a:prstGeom prst="rect">
+            <a:avLst/>
+          </a:prstGeom>
+        </p:spPr>
+      </p:pic>
+      <p:pic>
+        <p:nvPicPr>
+          <p:cNvPr id="17" name="Picture 16">
+            <a:extLst>
+              <a:ext uri="{FF2B5EF4-FFF2-40B4-BE49-F238E27FC236}">
+                <a16:creationId xmlns:a16="http://schemas.microsoft.com/office/drawing/2014/main" id="{9C2722EB-82CC-99AE-B645-39EB95BABF92}"/>
+              </a:ext>
+            </a:extLst>
+          </p:cNvPr>
+          <p:cNvPicPr>
+            <a:picLocks noChangeAspect="1"/>
+          </p:cNvPicPr>
+          <p:nvPr/>
+        </p:nvPicPr>
+        <p:blipFill>
+          <a:blip r:embed="rId4"/>
+          <a:srcRect l="8791"/>
+          <a:stretch>
+            <a:fillRect/>
+          </a:stretch>
+        </p:blipFill>
+        <p:spPr>
+          <a:xfrm>
+            <a:off x="7321280" y="1842268"/>
+            <a:ext cx="4387403" cy="3610329"/>
+          </a:xfrm>
+          <a:prstGeom prst="rect">
+            <a:avLst/>
+          </a:prstGeom>
+        </p:spPr>
+      </p:pic>
+      <p:sp>
+        <p:nvSpPr>
+          <p:cNvPr id="18" name="TextBox 17">
+            <a:extLst>
+              <a:ext uri="{FF2B5EF4-FFF2-40B4-BE49-F238E27FC236}">
+                <a16:creationId xmlns:a16="http://schemas.microsoft.com/office/drawing/2014/main" id="{D826E07D-A6DA-40ED-F1D5-A488DAFA13CE}"/>
+              </a:ext>
+            </a:extLst>
+          </p:cNvPr>
+          <p:cNvSpPr txBox="1"/>
+          <p:nvPr/>
+        </p:nvSpPr>
+        <p:spPr>
+          <a:xfrm>
+            <a:off x="-233953" y="1983522"/>
+            <a:ext cx="2259479" cy="369332"/>
+          </a:xfrm>
+          <a:prstGeom prst="rect">
+            <a:avLst/>
+          </a:prstGeom>
+          <a:noFill/>
+        </p:spPr>
+        <p:txBody>
+          <a:bodyPr wrap="square" rtlCol="0">
+            <a:spAutoFit/>
+          </a:bodyPr>
+          <a:lstStyle/>
+          <a:p>
+            <a:pPr algn="ctr"/>
+            <a:r>
+              <a:rPr lang="en-US" b="1" dirty="0">
+                <a:latin typeface="Aptos" panose="020B0004020202020204" pitchFamily="34" charset="0"/>
+              </a:rPr>
+              <a:t>a)</a:t>
+            </a:r>
+            <a:r>
+              <a:rPr lang="en-US" b="1" dirty="0">
+                <a:solidFill>
+                  <a:schemeClr val="tx1"/>
+                </a:solidFill>
+                <a:latin typeface="Aptos" panose="020B0004020202020204" pitchFamily="34" charset="0"/>
+              </a:rPr>
+              <a:t> </a:t>
+            </a:r>
+            <a:r>
+              <a:rPr lang="en-US" b="1" dirty="0" err="1">
+                <a:solidFill>
+                  <a:schemeClr val="tx1"/>
+                </a:solidFill>
+                <a:latin typeface="Aptos" panose="020B0004020202020204" pitchFamily="34" charset="0"/>
+              </a:rPr>
+              <a:t>SINDy</a:t>
+            </a:r>
+            <a:endParaRPr lang="en-US" b="1" dirty="0">
+              <a:solidFill>
+                <a:schemeClr val="tx1"/>
+              </a:solidFill>
+              <a:latin typeface="Aptos" panose="020B0004020202020204" pitchFamily="34" charset="0"/>
+            </a:endParaRPr>
+          </a:p>
+        </p:txBody>
+      </p:sp>
+      <p:sp>
+        <p:nvSpPr>
+          <p:cNvPr id="19" name="TextBox 18">
+            <a:extLst>
+              <a:ext uri="{FF2B5EF4-FFF2-40B4-BE49-F238E27FC236}">
+                <a16:creationId xmlns:a16="http://schemas.microsoft.com/office/drawing/2014/main" id="{E9548505-F0F3-312D-F32C-413928F824FB}"/>
+              </a:ext>
+            </a:extLst>
+          </p:cNvPr>
+          <p:cNvSpPr txBox="1"/>
+          <p:nvPr/>
+        </p:nvSpPr>
+        <p:spPr>
+          <a:xfrm>
+            <a:off x="3548031" y="1968080"/>
+            <a:ext cx="2259479" cy="369332"/>
+          </a:xfrm>
+          <a:prstGeom prst="rect">
+            <a:avLst/>
+          </a:prstGeom>
+          <a:noFill/>
+        </p:spPr>
+        <p:txBody>
+          <a:bodyPr wrap="square" rtlCol="0">
+            <a:spAutoFit/>
+          </a:bodyPr>
+          <a:lstStyle/>
+          <a:p>
+            <a:pPr algn="ctr"/>
+            <a:r>
+              <a:rPr lang="en-US" b="1" dirty="0">
+                <a:latin typeface="Aptos" panose="020B0004020202020204" pitchFamily="34" charset="0"/>
+              </a:rPr>
+              <a:t>b)</a:t>
+            </a:r>
+            <a:r>
+              <a:rPr lang="en-US" b="1" dirty="0">
+                <a:solidFill>
+                  <a:schemeClr val="tx1"/>
+                </a:solidFill>
+                <a:latin typeface="Aptos" panose="020B0004020202020204" pitchFamily="34" charset="0"/>
+              </a:rPr>
+              <a:t> NN-driven</a:t>
+            </a:r>
+          </a:p>
+        </p:txBody>
+      </p:sp>
+      <p:sp>
+        <p:nvSpPr>
+          <p:cNvPr id="20" name="TextBox 19">
+            <a:extLst>
+              <a:ext uri="{FF2B5EF4-FFF2-40B4-BE49-F238E27FC236}">
+                <a16:creationId xmlns:a16="http://schemas.microsoft.com/office/drawing/2014/main" id="{3F8275C6-77D0-1357-A7B7-C805BB20D113}"/>
+              </a:ext>
+            </a:extLst>
+          </p:cNvPr>
+          <p:cNvSpPr txBox="1"/>
+          <p:nvPr/>
+        </p:nvSpPr>
+        <p:spPr>
+          <a:xfrm>
+            <a:off x="7321280" y="1955790"/>
+            <a:ext cx="2458150" cy="369332"/>
+          </a:xfrm>
+          <a:prstGeom prst="rect">
+            <a:avLst/>
+          </a:prstGeom>
+          <a:noFill/>
+        </p:spPr>
+        <p:txBody>
+          <a:bodyPr wrap="square" rtlCol="0">
+            <a:spAutoFit/>
+          </a:bodyPr>
+          <a:lstStyle/>
+          <a:p>
+            <a:pPr algn="ctr"/>
+            <a:r>
+              <a:rPr lang="en-US" b="1" dirty="0">
+                <a:latin typeface="Aptos" panose="020B0004020202020204" pitchFamily="34" charset="0"/>
+              </a:rPr>
+              <a:t>c)</a:t>
+            </a:r>
+            <a:r>
+              <a:rPr lang="en-US" b="1" dirty="0">
+                <a:solidFill>
+                  <a:schemeClr val="tx1"/>
+                </a:solidFill>
+                <a:latin typeface="Aptos" panose="020B0004020202020204" pitchFamily="34" charset="0"/>
+              </a:rPr>
+              <a:t> Autoregressive (AR)</a:t>
+            </a:r>
+          </a:p>
+        </p:txBody>
+      </p:sp>
+    </p:spTree>
+    <p:extLst>
+      <p:ext uri="{BB962C8B-B14F-4D97-AF65-F5344CB8AC3E}">
+        <p14:creationId xmlns:p14="http://schemas.microsoft.com/office/powerpoint/2010/main" val="1356583262"/>
+      </p:ext>
+    </p:extLst>
+  </p:cSld>
+  <p:clrMapOvr>
+    <a:masterClrMapping/>
+  </p:clrMapOvr>
+</p:sld>
+</file>
+
+<file path=ppt/slides/slide4.xml><?xml version="1.0" encoding="utf-8"?>
+<p:sld xmlns:a="http://schemas.openxmlformats.org/drawingml/2006/main" xmlns:r="http://schemas.openxmlformats.org/officeDocument/2006/relationships" xmlns:p="http://schemas.openxmlformats.org/presentationml/2006/main">
+  <p:cSld>
+    <p:spTree>
+      <p:nvGrpSpPr>
+        <p:cNvPr id="1" name=""/>
+        <p:cNvGrpSpPr/>
+        <p:nvPr/>
+      </p:nvGrpSpPr>
+      <p:grpSpPr>
+        <a:xfrm>
+          <a:off x="0" y="0"/>
+          <a:ext cx="0" cy="0"/>
+          <a:chOff x="0" y="0"/>
+          <a:chExt cx="0" cy="0"/>
+        </a:xfrm>
+      </p:grpSpPr>
+      <p:sp>
+        <p:nvSpPr>
+          <p:cNvPr id="10" name="TextBox 9">
+            <a:extLst>
+              <a:ext uri="{FF2B5EF4-FFF2-40B4-BE49-F238E27FC236}">
+                <a16:creationId xmlns:a16="http://schemas.microsoft.com/office/drawing/2014/main" id="{1AC15706-19FA-F1F8-50C9-256D40185904}"/>
+              </a:ext>
+            </a:extLst>
+          </p:cNvPr>
+          <p:cNvSpPr txBox="1"/>
+          <p:nvPr/>
+        </p:nvSpPr>
+        <p:spPr>
+          <a:xfrm>
+            <a:off x="8986641" y="81002"/>
+            <a:ext cx="3651354" cy="369332"/>
+          </a:xfrm>
+          <a:prstGeom prst="rect">
+            <a:avLst/>
+          </a:prstGeom>
+          <a:noFill/>
+        </p:spPr>
+        <p:txBody>
+          <a:bodyPr wrap="square" rtlCol="0">
+            <a:spAutoFit/>
+          </a:bodyPr>
+          <a:lstStyle/>
+          <a:p>
+            <a:r>
+              <a:rPr lang="en-US" dirty="0"/>
+              <a:t>Figure 4 concept (</a:t>
+            </a:r>
+            <a:r>
+              <a:rPr lang="en-US" dirty="0" err="1"/>
+              <a:t>NNdzdt</a:t>
+            </a:r>
+            <a:r>
+              <a:rPr lang="en-US" dirty="0"/>
+              <a:t>)</a:t>
+            </a:r>
+          </a:p>
+        </p:txBody>
+      </p:sp>
+      <p:pic>
+        <p:nvPicPr>
+          <p:cNvPr id="18" name="Picture 17">
+            <a:extLst>
+              <a:ext uri="{FF2B5EF4-FFF2-40B4-BE49-F238E27FC236}">
+                <a16:creationId xmlns:a16="http://schemas.microsoft.com/office/drawing/2014/main" id="{E94B7A5B-C913-F31C-05F5-7BF25A18110F}"/>
+              </a:ext>
+            </a:extLst>
+          </p:cNvPr>
+          <p:cNvPicPr>
+            <a:picLocks noChangeAspect="1"/>
+          </p:cNvPicPr>
+          <p:nvPr/>
+        </p:nvPicPr>
+        <p:blipFill>
+          <a:blip r:embed="rId2"/>
+          <a:stretch>
+            <a:fillRect/>
+          </a:stretch>
+        </p:blipFill>
+        <p:spPr>
+          <a:xfrm>
+            <a:off x="1456843" y="265668"/>
+            <a:ext cx="6457951" cy="2870200"/>
+          </a:xfrm>
+          <a:prstGeom prst="rect">
+            <a:avLst/>
+          </a:prstGeom>
+        </p:spPr>
+      </p:pic>
+      <p:pic>
+        <p:nvPicPr>
+          <p:cNvPr id="36" name="Picture 35">
+            <a:extLst>
+              <a:ext uri="{FF2B5EF4-FFF2-40B4-BE49-F238E27FC236}">
+                <a16:creationId xmlns:a16="http://schemas.microsoft.com/office/drawing/2014/main" id="{B89A3767-2AE1-67D8-B2DD-1AA000E5225D}"/>
+              </a:ext>
+            </a:extLst>
+          </p:cNvPr>
+          <p:cNvPicPr>
+            <a:picLocks noChangeAspect="1"/>
+          </p:cNvPicPr>
+          <p:nvPr/>
+        </p:nvPicPr>
+        <p:blipFill>
+          <a:blip r:embed="rId3"/>
+          <a:srcRect l="25163" t="30501" r="26851" b="34140"/>
+          <a:stretch>
+            <a:fillRect/>
+          </a:stretch>
+        </p:blipFill>
+        <p:spPr>
+          <a:xfrm>
+            <a:off x="1472618" y="3082789"/>
+            <a:ext cx="6426400" cy="1420608"/>
+          </a:xfrm>
+          <a:prstGeom prst="rect">
+            <a:avLst/>
+          </a:prstGeom>
+        </p:spPr>
+      </p:pic>
+      <p:sp>
+        <p:nvSpPr>
+          <p:cNvPr id="21" name="TextBox 20">
+            <a:extLst>
+              <a:ext uri="{FF2B5EF4-FFF2-40B4-BE49-F238E27FC236}">
+                <a16:creationId xmlns:a16="http://schemas.microsoft.com/office/drawing/2014/main" id="{E9E2FBCF-1310-E099-5DC1-43F723F20C02}"/>
+              </a:ext>
+            </a:extLst>
+          </p:cNvPr>
+          <p:cNvSpPr txBox="1"/>
+          <p:nvPr/>
+        </p:nvSpPr>
+        <p:spPr>
+          <a:xfrm>
+            <a:off x="1456843" y="265668"/>
+            <a:ext cx="841709" cy="276999"/>
+          </a:xfrm>
+          <a:prstGeom prst="rect">
+            <a:avLst/>
+          </a:prstGeom>
+          <a:noFill/>
+        </p:spPr>
+        <p:txBody>
+          <a:bodyPr wrap="square" rtlCol="0">
+            <a:spAutoFit/>
+          </a:bodyPr>
+          <a:lstStyle/>
+          <a:p>
+            <a:r>
+              <a:rPr lang="en-US" sz="1200" b="1" dirty="0"/>
+              <a:t>a)</a:t>
+            </a:r>
+          </a:p>
+        </p:txBody>
+      </p:sp>
+      <p:sp>
+        <p:nvSpPr>
+          <p:cNvPr id="22" name="TextBox 21">
+            <a:extLst>
+              <a:ext uri="{FF2B5EF4-FFF2-40B4-BE49-F238E27FC236}">
+                <a16:creationId xmlns:a16="http://schemas.microsoft.com/office/drawing/2014/main" id="{0ED42712-F12E-14C4-1513-953CA28B91C6}"/>
+              </a:ext>
+            </a:extLst>
+          </p:cNvPr>
+          <p:cNvSpPr txBox="1"/>
+          <p:nvPr/>
+        </p:nvSpPr>
+        <p:spPr>
+          <a:xfrm>
+            <a:off x="1472618" y="3121223"/>
+            <a:ext cx="1013798" cy="276999"/>
+          </a:xfrm>
+          <a:prstGeom prst="rect">
+            <a:avLst/>
+          </a:prstGeom>
+          <a:noFill/>
+        </p:spPr>
+        <p:txBody>
+          <a:bodyPr wrap="square" rtlCol="0">
+            <a:spAutoFit/>
+          </a:bodyPr>
+          <a:lstStyle/>
+          <a:p>
+            <a:r>
+              <a:rPr lang="en-US" sz="1200" b="1" dirty="0"/>
+              <a:t>b) </a:t>
+            </a:r>
+            <a:r>
+              <a:rPr lang="en-US" sz="1200" dirty="0" err="1"/>
+              <a:t>SINDy</a:t>
+            </a:r>
+            <a:endParaRPr lang="en-US" sz="1200" b="1" dirty="0"/>
+          </a:p>
+        </p:txBody>
+      </p:sp>
+      <p:grpSp>
+        <p:nvGrpSpPr>
+          <p:cNvPr id="30" name="Group 29">
+            <a:extLst>
+              <a:ext uri="{FF2B5EF4-FFF2-40B4-BE49-F238E27FC236}">
+                <a16:creationId xmlns:a16="http://schemas.microsoft.com/office/drawing/2014/main" id="{F95332E1-E96E-6894-2BB9-0788C160B6BA}"/>
+              </a:ext>
+            </a:extLst>
+          </p:cNvPr>
+          <p:cNvGrpSpPr/>
+          <p:nvPr/>
+        </p:nvGrpSpPr>
+        <p:grpSpPr>
+          <a:xfrm>
+            <a:off x="1489979" y="4644687"/>
+            <a:ext cx="6457951" cy="948072"/>
+            <a:chOff x="1270784" y="4947915"/>
+            <a:chExt cx="7715856" cy="1218440"/>
+          </a:xfrm>
+        </p:grpSpPr>
+        <p:pic>
+          <p:nvPicPr>
+            <p:cNvPr id="20" name="Picture 19">
+              <a:extLst>
+                <a:ext uri="{FF2B5EF4-FFF2-40B4-BE49-F238E27FC236}">
+                  <a16:creationId xmlns:a16="http://schemas.microsoft.com/office/drawing/2014/main" id="{53E1E383-A30A-1A4F-AC3F-6D69AAED2D9A}"/>
+                </a:ext>
+              </a:extLst>
+            </p:cNvPr>
+            <p:cNvPicPr>
+              <a:picLocks noChangeAspect="1"/>
+            </p:cNvPicPr>
+            <p:nvPr/>
+          </p:nvPicPr>
+          <p:blipFill>
+            <a:blip r:embed="rId4"/>
+            <a:srcRect l="25551" t="41292" r="26606" b="35304"/>
+            <a:stretch>
+              <a:fillRect/>
+            </a:stretch>
+          </p:blipFill>
+          <p:spPr>
+            <a:xfrm>
+              <a:off x="1270784" y="4947915"/>
+              <a:ext cx="7715856" cy="1132372"/>
+            </a:xfrm>
+            <a:prstGeom prst="rect">
+              <a:avLst/>
+            </a:prstGeom>
+            <a:ln w="19050">
+              <a:noFill/>
+            </a:ln>
+          </p:spPr>
+        </p:pic>
+        <p:sp>
+          <p:nvSpPr>
+            <p:cNvPr id="23" name="Rectangle 22">
+              <a:extLst>
+                <a:ext uri="{FF2B5EF4-FFF2-40B4-BE49-F238E27FC236}">
+                  <a16:creationId xmlns:a16="http://schemas.microsoft.com/office/drawing/2014/main" id="{806A2A18-044D-7325-C995-5E2D6957237E}"/>
+                </a:ext>
+              </a:extLst>
+            </p:cNvPr>
+            <p:cNvSpPr/>
+            <p:nvPr/>
+          </p:nvSpPr>
+          <p:spPr>
+            <a:xfrm>
+              <a:off x="8097864" y="5112369"/>
+              <a:ext cx="61994" cy="790413"/>
+            </a:xfrm>
+            <a:prstGeom prst="rect">
+              <a:avLst/>
+            </a:prstGeom>
+            <a:noFill/>
+            <a:ln>
+              <a:solidFill>
+                <a:schemeClr val="bg1"/>
+              </a:solidFill>
+            </a:ln>
+          </p:spPr>
+          <p:style>
+            <a:lnRef idx="2">
+              <a:schemeClr val="accent2"/>
+            </a:lnRef>
+            <a:fillRef idx="1">
+              <a:schemeClr val="lt1"/>
+            </a:fillRef>
+            <a:effectRef idx="0">
+              <a:schemeClr val="accent2"/>
+            </a:effectRef>
+            <a:fontRef idx="minor">
+              <a:schemeClr val="dk1"/>
+            </a:fontRef>
+          </p:style>
+          <p:txBody>
+            <a:bodyPr rtlCol="0" anchor="ctr"/>
+            <a:lstStyle/>
+            <a:p>
+              <a:pPr algn="ctr"/>
+              <a:endParaRPr lang="en-US"/>
+            </a:p>
+          </p:txBody>
+        </p:sp>
+        <p:sp>
+          <p:nvSpPr>
+            <p:cNvPr id="24" name="Rectangle 23">
+              <a:extLst>
+                <a:ext uri="{FF2B5EF4-FFF2-40B4-BE49-F238E27FC236}">
+                  <a16:creationId xmlns:a16="http://schemas.microsoft.com/office/drawing/2014/main" id="{1968F59C-7DFD-20FF-5566-05C89916F407}"/>
+                </a:ext>
+              </a:extLst>
+            </p:cNvPr>
+            <p:cNvSpPr/>
+            <p:nvPr/>
+          </p:nvSpPr>
+          <p:spPr>
+            <a:xfrm>
+              <a:off x="3104825" y="5111650"/>
+              <a:ext cx="61994" cy="790413"/>
+            </a:xfrm>
+            <a:prstGeom prst="rect">
+              <a:avLst/>
+            </a:prstGeom>
+            <a:noFill/>
+            <a:ln>
+              <a:solidFill>
+                <a:schemeClr val="bg1"/>
+              </a:solidFill>
+            </a:ln>
+          </p:spPr>
+          <p:style>
+            <a:lnRef idx="2">
+              <a:schemeClr val="accent2"/>
+            </a:lnRef>
+            <a:fillRef idx="1">
+              <a:schemeClr val="lt1"/>
+            </a:fillRef>
+            <a:effectRef idx="0">
+              <a:schemeClr val="accent2"/>
+            </a:effectRef>
+            <a:fontRef idx="minor">
+              <a:schemeClr val="dk1"/>
+            </a:fontRef>
+          </p:style>
+          <p:txBody>
+            <a:bodyPr rtlCol="0" anchor="ctr"/>
+            <a:lstStyle/>
+            <a:p>
+              <a:pPr algn="ctr"/>
+              <a:endParaRPr lang="en-US"/>
+            </a:p>
+          </p:txBody>
+        </p:sp>
+        <p:sp>
+          <p:nvSpPr>
+            <p:cNvPr id="25" name="Rectangle 24">
+              <a:extLst>
+                <a:ext uri="{FF2B5EF4-FFF2-40B4-BE49-F238E27FC236}">
+                  <a16:creationId xmlns:a16="http://schemas.microsoft.com/office/drawing/2014/main" id="{85ADE2DD-C830-8AA1-5DBE-97C098FE9F48}"/>
+                </a:ext>
+              </a:extLst>
+            </p:cNvPr>
+            <p:cNvSpPr/>
+            <p:nvPr/>
+          </p:nvSpPr>
+          <p:spPr>
+            <a:xfrm>
+              <a:off x="6364635" y="5112369"/>
+              <a:ext cx="61994" cy="790413"/>
+            </a:xfrm>
+            <a:prstGeom prst="rect">
+              <a:avLst/>
+            </a:prstGeom>
+            <a:noFill/>
+            <a:ln>
+              <a:solidFill>
+                <a:schemeClr val="bg1"/>
+              </a:solidFill>
+            </a:ln>
+          </p:spPr>
+          <p:style>
+            <a:lnRef idx="2">
+              <a:schemeClr val="accent2"/>
+            </a:lnRef>
+            <a:fillRef idx="1">
+              <a:schemeClr val="lt1"/>
+            </a:fillRef>
+            <a:effectRef idx="0">
+              <a:schemeClr val="accent2"/>
+            </a:effectRef>
+            <a:fontRef idx="minor">
+              <a:schemeClr val="dk1"/>
+            </a:fontRef>
+          </p:style>
+          <p:txBody>
+            <a:bodyPr rtlCol="0" anchor="ctr"/>
+            <a:lstStyle/>
+            <a:p>
+              <a:pPr algn="ctr"/>
+              <a:endParaRPr lang="en-US"/>
+            </a:p>
+          </p:txBody>
+        </p:sp>
+        <p:sp>
+          <p:nvSpPr>
+            <p:cNvPr id="26" name="TextBox 25">
+              <a:extLst>
+                <a:ext uri="{FF2B5EF4-FFF2-40B4-BE49-F238E27FC236}">
+                  <a16:creationId xmlns:a16="http://schemas.microsoft.com/office/drawing/2014/main" id="{41E7C119-6CC1-840C-A682-4A0F8BA962D4}"/>
+                </a:ext>
+              </a:extLst>
+            </p:cNvPr>
+            <p:cNvSpPr txBox="1"/>
+            <p:nvPr/>
+          </p:nvSpPr>
+          <p:spPr>
+            <a:xfrm>
+              <a:off x="2921756" y="5881607"/>
+              <a:ext cx="841709" cy="276999"/>
+            </a:xfrm>
+            <a:prstGeom prst="rect">
+              <a:avLst/>
+            </a:prstGeom>
+            <a:noFill/>
+          </p:spPr>
+          <p:txBody>
+            <a:bodyPr wrap="square" rtlCol="0">
+              <a:spAutoFit/>
+            </a:bodyPr>
+            <a:lstStyle/>
+            <a:p>
+              <a:r>
+                <a:rPr lang="en-US" sz="1200" i="1" dirty="0"/>
+                <a:t>P50</a:t>
+              </a:r>
+            </a:p>
+          </p:txBody>
+        </p:sp>
+        <p:sp>
+          <p:nvSpPr>
+            <p:cNvPr id="27" name="TextBox 26">
+              <a:extLst>
+                <a:ext uri="{FF2B5EF4-FFF2-40B4-BE49-F238E27FC236}">
+                  <a16:creationId xmlns:a16="http://schemas.microsoft.com/office/drawing/2014/main" id="{40550AFB-8D2D-4157-EF62-09269555323D}"/>
+                </a:ext>
+              </a:extLst>
+            </p:cNvPr>
+            <p:cNvSpPr txBox="1"/>
+            <p:nvPr/>
+          </p:nvSpPr>
+          <p:spPr>
+            <a:xfrm>
+              <a:off x="6181567" y="5881606"/>
+              <a:ext cx="841709" cy="276999"/>
+            </a:xfrm>
+            <a:prstGeom prst="rect">
+              <a:avLst/>
+            </a:prstGeom>
+            <a:noFill/>
+          </p:spPr>
+          <p:txBody>
+            <a:bodyPr wrap="square" rtlCol="0">
+              <a:spAutoFit/>
+            </a:bodyPr>
+            <a:lstStyle/>
+            <a:p>
+              <a:r>
+                <a:rPr lang="en-US" sz="1200" i="1" dirty="0"/>
+                <a:t>P90</a:t>
+              </a:r>
+            </a:p>
+          </p:txBody>
+        </p:sp>
+        <p:sp>
+          <p:nvSpPr>
+            <p:cNvPr id="28" name="TextBox 27">
+              <a:extLst>
+                <a:ext uri="{FF2B5EF4-FFF2-40B4-BE49-F238E27FC236}">
+                  <a16:creationId xmlns:a16="http://schemas.microsoft.com/office/drawing/2014/main" id="{7B23B2AF-7287-F328-42B6-B782700FEFA6}"/>
+                </a:ext>
+              </a:extLst>
+            </p:cNvPr>
+            <p:cNvSpPr txBox="1"/>
+            <p:nvPr/>
+          </p:nvSpPr>
+          <p:spPr>
+            <a:xfrm>
+              <a:off x="7914794" y="5889356"/>
+              <a:ext cx="841709" cy="276999"/>
+            </a:xfrm>
+            <a:prstGeom prst="rect">
+              <a:avLst/>
+            </a:prstGeom>
+            <a:noFill/>
+          </p:spPr>
+          <p:txBody>
+            <a:bodyPr wrap="square" rtlCol="0">
+              <a:spAutoFit/>
+            </a:bodyPr>
+            <a:lstStyle/>
+            <a:p>
+              <a:r>
+                <a:rPr lang="en-US" sz="1200" i="1" dirty="0"/>
+                <a:t>P10</a:t>
+              </a:r>
+            </a:p>
+          </p:txBody>
+        </p:sp>
+      </p:grpSp>
+      <p:sp>
+        <p:nvSpPr>
+          <p:cNvPr id="31" name="TextBox 30">
+            <a:extLst>
+              <a:ext uri="{FF2B5EF4-FFF2-40B4-BE49-F238E27FC236}">
+                <a16:creationId xmlns:a16="http://schemas.microsoft.com/office/drawing/2014/main" id="{E2C56078-3DE1-C826-3241-A978C08F126A}"/>
+              </a:ext>
+            </a:extLst>
+          </p:cNvPr>
+          <p:cNvSpPr txBox="1"/>
+          <p:nvPr/>
+        </p:nvSpPr>
+        <p:spPr>
+          <a:xfrm>
+            <a:off x="1456841" y="4389363"/>
+            <a:ext cx="1240060" cy="276999"/>
+          </a:xfrm>
+          <a:prstGeom prst="rect">
+            <a:avLst/>
+          </a:prstGeom>
+          <a:noFill/>
+        </p:spPr>
+        <p:txBody>
+          <a:bodyPr wrap="square" rtlCol="0">
+            <a:spAutoFit/>
+          </a:bodyPr>
+          <a:lstStyle/>
+          <a:p>
+            <a:r>
+              <a:rPr lang="en-US" sz="1200" b="1" dirty="0"/>
+              <a:t>c) </a:t>
+            </a:r>
+            <a:r>
+              <a:rPr lang="en-US" sz="1200" dirty="0"/>
+              <a:t>NN-driven*</a:t>
+            </a:r>
+            <a:endParaRPr lang="en-US" sz="1200" b="1" dirty="0"/>
+          </a:p>
+        </p:txBody>
+      </p:sp>
+      <p:sp>
+        <p:nvSpPr>
+          <p:cNvPr id="32" name="TextBox 31">
+            <a:extLst>
+              <a:ext uri="{FF2B5EF4-FFF2-40B4-BE49-F238E27FC236}">
+                <a16:creationId xmlns:a16="http://schemas.microsoft.com/office/drawing/2014/main" id="{BEF1AA45-60D2-6D72-94A7-2D5AC5AD7312}"/>
+              </a:ext>
+            </a:extLst>
+          </p:cNvPr>
+          <p:cNvSpPr txBox="1"/>
+          <p:nvPr/>
+        </p:nvSpPr>
+        <p:spPr>
+          <a:xfrm>
+            <a:off x="1456841" y="5460003"/>
+            <a:ext cx="841709" cy="276999"/>
+          </a:xfrm>
+          <a:prstGeom prst="rect">
+            <a:avLst/>
+          </a:prstGeom>
+          <a:noFill/>
+        </p:spPr>
+        <p:txBody>
+          <a:bodyPr wrap="square" rtlCol="0">
+            <a:spAutoFit/>
+          </a:bodyPr>
+          <a:lstStyle/>
+          <a:p>
+            <a:r>
+              <a:rPr lang="en-US" sz="1200" b="1" dirty="0"/>
+              <a:t>d) </a:t>
+            </a:r>
+            <a:r>
+              <a:rPr lang="en-US" sz="1200" dirty="0"/>
+              <a:t>AR</a:t>
+            </a:r>
+            <a:endParaRPr lang="en-US" sz="1200" b="1" dirty="0"/>
+          </a:p>
+        </p:txBody>
+      </p:sp>
+      <p:pic>
+        <p:nvPicPr>
+          <p:cNvPr id="34" name="Picture 33">
+            <a:extLst>
+              <a:ext uri="{FF2B5EF4-FFF2-40B4-BE49-F238E27FC236}">
+                <a16:creationId xmlns:a16="http://schemas.microsoft.com/office/drawing/2014/main" id="{EAB931B3-373B-3E1C-3561-65BD0004AAEA}"/>
+              </a:ext>
+            </a:extLst>
+          </p:cNvPr>
+          <p:cNvPicPr>
+            <a:picLocks noChangeAspect="1"/>
+          </p:cNvPicPr>
+          <p:nvPr/>
+        </p:nvPicPr>
+        <p:blipFill>
+          <a:blip r:embed="rId5"/>
+          <a:srcRect l="25163" t="41191" r="26613" b="34140"/>
+          <a:stretch>
+            <a:fillRect/>
+          </a:stretch>
+        </p:blipFill>
+        <p:spPr>
+          <a:xfrm>
+            <a:off x="1419874" y="5734050"/>
+            <a:ext cx="6541216" cy="1003862"/>
+          </a:xfrm>
+          <a:prstGeom prst="rect">
+            <a:avLst/>
+          </a:prstGeom>
+        </p:spPr>
+      </p:pic>
+    </p:spTree>
+    <p:extLst>
+      <p:ext uri="{BB962C8B-B14F-4D97-AF65-F5344CB8AC3E}">
+        <p14:creationId xmlns:p14="http://schemas.microsoft.com/office/powerpoint/2010/main" val="3679371250"/>
+      </p:ext>
+    </p:extLst>
+  </p:cSld>
+  <p:clrMapOvr>
+    <a:masterClrMapping/>
+  </p:clrMapOvr>
+</p:sld>
+</file>
+
+<file path=ppt/slides/slide5.xml><?xml version="1.0" encoding="utf-8"?>
+<p:sld xmlns:a="http://schemas.openxmlformats.org/drawingml/2006/main" xmlns:r="http://schemas.openxmlformats.org/officeDocument/2006/relationships" xmlns:p="http://schemas.openxmlformats.org/presentationml/2006/main">
+  <p:cSld>
+    <p:spTree>
+      <p:nvGrpSpPr>
+        <p:cNvPr id="1" name=""/>
+        <p:cNvGrpSpPr/>
+        <p:nvPr/>
+      </p:nvGrpSpPr>
+      <p:grpSpPr>
+        <a:xfrm>
+          <a:off x="0" y="0"/>
+          <a:ext cx="0" cy="0"/>
+          <a:chOff x="0" y="0"/>
+          <a:chExt cx="0" cy="0"/>
+        </a:xfrm>
+      </p:grpSpPr>
+      <p:pic>
+        <p:nvPicPr>
+          <p:cNvPr id="5" name="Picture 4">
+            <a:extLst>
+              <a:ext uri="{FF2B5EF4-FFF2-40B4-BE49-F238E27FC236}">
+                <a16:creationId xmlns:a16="http://schemas.microsoft.com/office/drawing/2014/main" id="{EF9474AD-595A-EBD1-4D17-4E6912AEB38C}"/>
+              </a:ext>
+            </a:extLst>
+          </p:cNvPr>
+          <p:cNvPicPr>
+            <a:picLocks noChangeAspect="1"/>
+          </p:cNvPicPr>
+          <p:nvPr/>
+        </p:nvPicPr>
+        <p:blipFill>
+          <a:blip r:embed="rId2"/>
+          <a:stretch>
+            <a:fillRect/>
+          </a:stretch>
+        </p:blipFill>
+        <p:spPr>
+          <a:xfrm>
+            <a:off x="2545492" y="408830"/>
+            <a:ext cx="4085967" cy="2042984"/>
+          </a:xfrm>
+          <a:prstGeom prst="rect">
+            <a:avLst/>
+          </a:prstGeom>
+        </p:spPr>
+      </p:pic>
+      <p:sp>
+        <p:nvSpPr>
+          <p:cNvPr id="6" name="TextBox 5">
+            <a:extLst>
+              <a:ext uri="{FF2B5EF4-FFF2-40B4-BE49-F238E27FC236}">
+                <a16:creationId xmlns:a16="http://schemas.microsoft.com/office/drawing/2014/main" id="{3943EFA6-50E9-CEBE-D1B3-97626D1A6C08}"/>
+              </a:ext>
+            </a:extLst>
+          </p:cNvPr>
+          <p:cNvSpPr txBox="1"/>
+          <p:nvPr/>
+        </p:nvSpPr>
+        <p:spPr>
+          <a:xfrm>
+            <a:off x="2534657" y="290440"/>
+            <a:ext cx="1013798" cy="261610"/>
+          </a:xfrm>
+          <a:prstGeom prst="rect">
+            <a:avLst/>
+          </a:prstGeom>
+          <a:noFill/>
+        </p:spPr>
+        <p:txBody>
+          <a:bodyPr wrap="square" rtlCol="0">
+            <a:spAutoFit/>
+          </a:bodyPr>
+          <a:lstStyle/>
+          <a:p>
+            <a:r>
+              <a:rPr lang="en-US" sz="1100" b="1" dirty="0"/>
+              <a:t>a) </a:t>
+            </a:r>
+            <a:r>
+              <a:rPr lang="en-US" sz="1100" dirty="0" err="1"/>
+              <a:t>SINDy</a:t>
+            </a:r>
+            <a:endParaRPr lang="en-US" sz="1100" b="1" dirty="0"/>
+          </a:p>
+        </p:txBody>
+      </p:sp>
+      <p:pic>
+        <p:nvPicPr>
+          <p:cNvPr id="10" name="Picture 9">
+            <a:extLst>
+              <a:ext uri="{FF2B5EF4-FFF2-40B4-BE49-F238E27FC236}">
+                <a16:creationId xmlns:a16="http://schemas.microsoft.com/office/drawing/2014/main" id="{20655E92-A156-DBB2-48DD-2433901556F7}"/>
+              </a:ext>
+            </a:extLst>
+          </p:cNvPr>
+          <p:cNvPicPr>
+            <a:picLocks noChangeAspect="1"/>
+          </p:cNvPicPr>
+          <p:nvPr/>
+        </p:nvPicPr>
+        <p:blipFill>
+          <a:blip r:embed="rId3"/>
+          <a:stretch>
+            <a:fillRect/>
+          </a:stretch>
+        </p:blipFill>
+        <p:spPr>
+          <a:xfrm>
+            <a:off x="2545492" y="2582619"/>
+            <a:ext cx="4085967" cy="2042984"/>
+          </a:xfrm>
+          <a:prstGeom prst="rect">
+            <a:avLst/>
+          </a:prstGeom>
+        </p:spPr>
+      </p:pic>
+      <p:sp>
+        <p:nvSpPr>
+          <p:cNvPr id="11" name="TextBox 10">
+            <a:extLst>
+              <a:ext uri="{FF2B5EF4-FFF2-40B4-BE49-F238E27FC236}">
+                <a16:creationId xmlns:a16="http://schemas.microsoft.com/office/drawing/2014/main" id="{0E7B52B4-01D8-0898-7E41-8B0419FB3EE4}"/>
+              </a:ext>
+            </a:extLst>
+          </p:cNvPr>
+          <p:cNvSpPr txBox="1"/>
+          <p:nvPr/>
+        </p:nvSpPr>
+        <p:spPr>
+          <a:xfrm>
+            <a:off x="2457473" y="2486139"/>
+            <a:ext cx="1240060" cy="261610"/>
+          </a:xfrm>
+          <a:prstGeom prst="rect">
+            <a:avLst/>
+          </a:prstGeom>
+          <a:noFill/>
+        </p:spPr>
+        <p:txBody>
+          <a:bodyPr wrap="square" rtlCol="0">
+            <a:spAutoFit/>
+          </a:bodyPr>
+          <a:lstStyle/>
+          <a:p>
+            <a:r>
+              <a:rPr lang="en-US" sz="1100" b="1" dirty="0"/>
+              <a:t>b) </a:t>
+            </a:r>
+            <a:r>
+              <a:rPr lang="en-US" sz="1100" dirty="0"/>
+              <a:t>NN-driven</a:t>
+            </a:r>
+            <a:endParaRPr lang="en-US" sz="1100" b="1" dirty="0"/>
+          </a:p>
+        </p:txBody>
+      </p:sp>
+      <p:pic>
+        <p:nvPicPr>
+          <p:cNvPr id="13" name="Picture 12">
+            <a:extLst>
+              <a:ext uri="{FF2B5EF4-FFF2-40B4-BE49-F238E27FC236}">
+                <a16:creationId xmlns:a16="http://schemas.microsoft.com/office/drawing/2014/main" id="{74AB1E86-D1E8-833F-D3A9-6D08ED0F85E9}"/>
+              </a:ext>
+            </a:extLst>
+          </p:cNvPr>
+          <p:cNvPicPr>
+            <a:picLocks noChangeAspect="1"/>
+          </p:cNvPicPr>
+          <p:nvPr/>
+        </p:nvPicPr>
+        <p:blipFill>
+          <a:blip r:embed="rId4"/>
+          <a:stretch>
+            <a:fillRect/>
+          </a:stretch>
+        </p:blipFill>
+        <p:spPr>
+          <a:xfrm>
+            <a:off x="2534657" y="4691507"/>
+            <a:ext cx="4085968" cy="2042984"/>
+          </a:xfrm>
+          <a:prstGeom prst="rect">
+            <a:avLst/>
+          </a:prstGeom>
+        </p:spPr>
+      </p:pic>
+      <p:sp>
+        <p:nvSpPr>
+          <p:cNvPr id="14" name="TextBox 13">
+            <a:extLst>
+              <a:ext uri="{FF2B5EF4-FFF2-40B4-BE49-F238E27FC236}">
+                <a16:creationId xmlns:a16="http://schemas.microsoft.com/office/drawing/2014/main" id="{1BC1A71A-BE91-75CF-E81F-7AD88F0EFF75}"/>
+              </a:ext>
+            </a:extLst>
+          </p:cNvPr>
+          <p:cNvSpPr txBox="1"/>
+          <p:nvPr/>
+        </p:nvSpPr>
+        <p:spPr>
+          <a:xfrm>
+            <a:off x="2545492" y="4596400"/>
+            <a:ext cx="841709" cy="261610"/>
+          </a:xfrm>
+          <a:prstGeom prst="rect">
+            <a:avLst/>
+          </a:prstGeom>
+          <a:noFill/>
+        </p:spPr>
+        <p:txBody>
+          <a:bodyPr wrap="square" rtlCol="0">
+            <a:spAutoFit/>
+          </a:bodyPr>
+          <a:lstStyle/>
+          <a:p>
+            <a:r>
+              <a:rPr lang="en-US" sz="1100" b="1" dirty="0"/>
+              <a:t>c) </a:t>
+            </a:r>
+            <a:r>
+              <a:rPr lang="en-US" sz="1100" dirty="0"/>
+              <a:t>AR</a:t>
+            </a:r>
+            <a:endParaRPr lang="en-US" sz="1100" b="1" dirty="0"/>
+          </a:p>
+        </p:txBody>
+      </p:sp>
+    </p:spTree>
+    <p:extLst>
+      <p:ext uri="{BB962C8B-B14F-4D97-AF65-F5344CB8AC3E}">
+        <p14:creationId xmlns:p14="http://schemas.microsoft.com/office/powerpoint/2010/main" val="1736462962"/>
+      </p:ext>
+    </p:extLst>
+  </p:cSld>
+  <p:clrMapOvr>
+    <a:masterClrMapping/>
+  </p:clrMapOvr>
+</p:sld>
+</file>
+
+<file path=ppt/slides/slide6.xml><?xml version="1.0" encoding="utf-8"?>
+<p:sld xmlns:a="http://schemas.openxmlformats.org/drawingml/2006/main" xmlns:r="http://schemas.openxmlformats.org/officeDocument/2006/relationships" xmlns:p="http://schemas.openxmlformats.org/presentationml/2006/main">
+  <p:cSld>
+    <p:spTree>
+      <p:nvGrpSpPr>
+        <p:cNvPr id="1" name="">
+          <a:extLst>
+            <a:ext uri="{FF2B5EF4-FFF2-40B4-BE49-F238E27FC236}">
+              <a16:creationId xmlns:a16="http://schemas.microsoft.com/office/drawing/2014/main" id="{22833A9F-1143-B35A-9828-04A5EF283A34}"/>
+            </a:ext>
+          </a:extLst>
+        </p:cNvPr>
+        <p:cNvGrpSpPr/>
+        <p:nvPr/>
+      </p:nvGrpSpPr>
+      <p:grpSpPr>
+        <a:xfrm>
+          <a:off x="0" y="0"/>
+          <a:ext cx="0" cy="0"/>
+          <a:chOff x="0" y="0"/>
+          <a:chExt cx="0" cy="0"/>
+        </a:xfrm>
+      </p:grpSpPr>
+      <p:pic>
+        <p:nvPicPr>
+          <p:cNvPr id="3" name="Picture 2">
+            <a:extLst>
+              <a:ext uri="{FF2B5EF4-FFF2-40B4-BE49-F238E27FC236}">
+                <a16:creationId xmlns:a16="http://schemas.microsoft.com/office/drawing/2014/main" id="{5A694F39-970F-97C9-AAEF-421C6356269C}"/>
+              </a:ext>
+            </a:extLst>
+          </p:cNvPr>
+          <p:cNvPicPr>
+            <a:picLocks noChangeAspect="1"/>
+          </p:cNvPicPr>
+          <p:nvPr/>
+        </p:nvPicPr>
+        <p:blipFill>
+          <a:blip r:embed="rId2"/>
+          <a:stretch>
+            <a:fillRect/>
+          </a:stretch>
+        </p:blipFill>
+        <p:spPr>
+          <a:xfrm>
+            <a:off x="1498630" y="167387"/>
+            <a:ext cx="6400388" cy="2880175"/>
+          </a:xfrm>
+          <a:prstGeom prst="rect">
+            <a:avLst/>
+          </a:prstGeom>
+        </p:spPr>
+      </p:pic>
+      <p:sp>
+        <p:nvSpPr>
+          <p:cNvPr id="10" name="TextBox 9">
+            <a:extLst>
+              <a:ext uri="{FF2B5EF4-FFF2-40B4-BE49-F238E27FC236}">
+                <a16:creationId xmlns:a16="http://schemas.microsoft.com/office/drawing/2014/main" id="{F79C25CB-890F-AD31-7380-E2292CEC071D}"/>
+              </a:ext>
+            </a:extLst>
+          </p:cNvPr>
+          <p:cNvSpPr txBox="1"/>
+          <p:nvPr/>
+        </p:nvSpPr>
+        <p:spPr>
+          <a:xfrm>
+            <a:off x="8986641" y="81002"/>
+            <a:ext cx="3651354" cy="369332"/>
+          </a:xfrm>
+          <a:prstGeom prst="rect">
+            <a:avLst/>
+          </a:prstGeom>
+          <a:noFill/>
+        </p:spPr>
+        <p:txBody>
+          <a:bodyPr wrap="square" rtlCol="0">
+            <a:spAutoFit/>
+          </a:bodyPr>
+          <a:lstStyle/>
+          <a:p>
+            <a:r>
+              <a:rPr lang="en-US" dirty="0"/>
+              <a:t>Figure 6 concept (</a:t>
+            </a:r>
+            <a:r>
+              <a:rPr lang="en-US" dirty="0" err="1"/>
+              <a:t>NNdzdt</a:t>
+            </a:r>
+            <a:r>
+              <a:rPr lang="en-US" dirty="0"/>
+              <a:t>)</a:t>
+            </a:r>
+          </a:p>
+        </p:txBody>
+      </p:sp>
+      <p:pic>
+        <p:nvPicPr>
+          <p:cNvPr id="5" name="Picture 4">
+            <a:extLst>
+              <a:ext uri="{FF2B5EF4-FFF2-40B4-BE49-F238E27FC236}">
+                <a16:creationId xmlns:a16="http://schemas.microsoft.com/office/drawing/2014/main" id="{6D16E929-6A65-B67E-D260-12BDE50EF2D8}"/>
+              </a:ext>
+            </a:extLst>
+          </p:cNvPr>
+          <p:cNvPicPr>
+            <a:picLocks noChangeAspect="1"/>
+          </p:cNvPicPr>
+          <p:nvPr/>
+        </p:nvPicPr>
+        <p:blipFill>
+          <a:blip r:embed="rId3"/>
+          <a:srcRect t="32153" b="35673"/>
+          <a:stretch>
+            <a:fillRect/>
+          </a:stretch>
+        </p:blipFill>
+        <p:spPr>
+          <a:xfrm>
+            <a:off x="1419874" y="3121223"/>
+            <a:ext cx="6541216" cy="1262754"/>
+          </a:xfrm>
+          <a:prstGeom prst="rect">
+            <a:avLst/>
+          </a:prstGeom>
+        </p:spPr>
+      </p:pic>
+      <p:sp>
+        <p:nvSpPr>
+          <p:cNvPr id="21" name="TextBox 20">
+            <a:extLst>
+              <a:ext uri="{FF2B5EF4-FFF2-40B4-BE49-F238E27FC236}">
+                <a16:creationId xmlns:a16="http://schemas.microsoft.com/office/drawing/2014/main" id="{1D67421B-EBAE-967E-0B04-566DE651F3A1}"/>
+              </a:ext>
+            </a:extLst>
+          </p:cNvPr>
+          <p:cNvSpPr txBox="1"/>
+          <p:nvPr/>
+        </p:nvSpPr>
+        <p:spPr>
+          <a:xfrm>
+            <a:off x="1456843" y="265668"/>
+            <a:ext cx="841709" cy="276999"/>
+          </a:xfrm>
+          <a:prstGeom prst="rect">
+            <a:avLst/>
+          </a:prstGeom>
+          <a:noFill/>
+        </p:spPr>
+        <p:txBody>
+          <a:bodyPr wrap="square" rtlCol="0">
+            <a:spAutoFit/>
+          </a:bodyPr>
+          <a:lstStyle/>
+          <a:p>
+            <a:r>
+              <a:rPr lang="en-US" sz="1200" b="1" dirty="0"/>
+              <a:t>a)</a:t>
+            </a:r>
+          </a:p>
+        </p:txBody>
+      </p:sp>
+      <p:sp>
+        <p:nvSpPr>
+          <p:cNvPr id="22" name="TextBox 21">
+            <a:extLst>
+              <a:ext uri="{FF2B5EF4-FFF2-40B4-BE49-F238E27FC236}">
+                <a16:creationId xmlns:a16="http://schemas.microsoft.com/office/drawing/2014/main" id="{6E62F884-791D-56BE-79C6-CF77C4B9FD76}"/>
+              </a:ext>
+            </a:extLst>
+          </p:cNvPr>
+          <p:cNvSpPr txBox="1"/>
+          <p:nvPr/>
+        </p:nvSpPr>
+        <p:spPr>
+          <a:xfrm>
+            <a:off x="1472618" y="3121223"/>
+            <a:ext cx="1013798" cy="276999"/>
+          </a:xfrm>
+          <a:prstGeom prst="rect">
+            <a:avLst/>
+          </a:prstGeom>
+          <a:noFill/>
+        </p:spPr>
+        <p:txBody>
+          <a:bodyPr wrap="square" rtlCol="0">
+            <a:spAutoFit/>
+          </a:bodyPr>
+          <a:lstStyle/>
+          <a:p>
+            <a:r>
+              <a:rPr lang="en-US" sz="1200" b="1" dirty="0"/>
+              <a:t>b) </a:t>
+            </a:r>
+            <a:r>
+              <a:rPr lang="en-US" sz="1200" dirty="0" err="1"/>
+              <a:t>SINDy</a:t>
+            </a:r>
+            <a:endParaRPr lang="en-US" sz="1200" b="1" dirty="0"/>
+          </a:p>
+        </p:txBody>
+      </p:sp>
+      <p:sp>
+        <p:nvSpPr>
+          <p:cNvPr id="31" name="TextBox 30">
+            <a:extLst>
+              <a:ext uri="{FF2B5EF4-FFF2-40B4-BE49-F238E27FC236}">
+                <a16:creationId xmlns:a16="http://schemas.microsoft.com/office/drawing/2014/main" id="{7E52A0E3-CDEA-4573-3335-AA9D6E0AC4D5}"/>
+              </a:ext>
+            </a:extLst>
+          </p:cNvPr>
+          <p:cNvSpPr txBox="1"/>
+          <p:nvPr/>
+        </p:nvSpPr>
+        <p:spPr>
+          <a:xfrm>
+            <a:off x="1456841" y="4389363"/>
+            <a:ext cx="1240060" cy="276999"/>
+          </a:xfrm>
+          <a:prstGeom prst="rect">
+            <a:avLst/>
+          </a:prstGeom>
+          <a:noFill/>
+        </p:spPr>
+        <p:txBody>
+          <a:bodyPr wrap="square" rtlCol="0">
+            <a:spAutoFit/>
+          </a:bodyPr>
+          <a:lstStyle/>
+          <a:p>
+            <a:r>
+              <a:rPr lang="en-US" sz="1200" b="1" dirty="0"/>
+              <a:t>c) </a:t>
+            </a:r>
+            <a:r>
+              <a:rPr lang="en-US" sz="1200" dirty="0"/>
+              <a:t>NN-driven*</a:t>
+            </a:r>
+            <a:endParaRPr lang="en-US" sz="1200" b="1" dirty="0"/>
+          </a:p>
+        </p:txBody>
+      </p:sp>
+      <p:sp>
+        <p:nvSpPr>
+          <p:cNvPr id="32" name="TextBox 31">
+            <a:extLst>
+              <a:ext uri="{FF2B5EF4-FFF2-40B4-BE49-F238E27FC236}">
+                <a16:creationId xmlns:a16="http://schemas.microsoft.com/office/drawing/2014/main" id="{3146527C-BE20-5AFF-EBFD-EBAF34970DAA}"/>
+              </a:ext>
+            </a:extLst>
+          </p:cNvPr>
+          <p:cNvSpPr txBox="1"/>
+          <p:nvPr/>
+        </p:nvSpPr>
+        <p:spPr>
+          <a:xfrm>
+            <a:off x="1456841" y="5460003"/>
+            <a:ext cx="841709" cy="276999"/>
+          </a:xfrm>
+          <a:prstGeom prst="rect">
+            <a:avLst/>
+          </a:prstGeom>
+          <a:noFill/>
+        </p:spPr>
+        <p:txBody>
+          <a:bodyPr wrap="square" rtlCol="0">
+            <a:spAutoFit/>
+          </a:bodyPr>
+          <a:lstStyle/>
+          <a:p>
+            <a:r>
+              <a:rPr lang="en-US" sz="1200" b="1" dirty="0"/>
+              <a:t>d) </a:t>
+            </a:r>
+            <a:r>
+              <a:rPr lang="en-US" sz="1200" dirty="0"/>
+              <a:t>AR</a:t>
+            </a:r>
+            <a:endParaRPr lang="en-US" sz="1200" b="1" dirty="0"/>
+          </a:p>
+        </p:txBody>
+      </p:sp>
+      <p:pic>
+        <p:nvPicPr>
+          <p:cNvPr id="7" name="Picture 6">
+            <a:extLst>
+              <a:ext uri="{FF2B5EF4-FFF2-40B4-BE49-F238E27FC236}">
+                <a16:creationId xmlns:a16="http://schemas.microsoft.com/office/drawing/2014/main" id="{69E37D20-54FD-AE17-F7A6-585A0C8548EF}"/>
+              </a:ext>
+            </a:extLst>
+          </p:cNvPr>
+          <p:cNvPicPr>
+            <a:picLocks noChangeAspect="1"/>
+          </p:cNvPicPr>
+          <p:nvPr/>
+        </p:nvPicPr>
+        <p:blipFill>
+          <a:blip r:embed="rId4"/>
+          <a:srcRect t="41998" b="36391"/>
+          <a:stretch>
+            <a:fillRect/>
+          </a:stretch>
+        </p:blipFill>
+        <p:spPr>
+          <a:xfrm>
+            <a:off x="1419874" y="4611850"/>
+            <a:ext cx="6541216" cy="848153"/>
+          </a:xfrm>
+          <a:prstGeom prst="rect">
+            <a:avLst/>
+          </a:prstGeom>
+        </p:spPr>
+      </p:pic>
+      <p:pic>
+        <p:nvPicPr>
+          <p:cNvPr id="9" name="Picture 8">
+            <a:extLst>
+              <a:ext uri="{FF2B5EF4-FFF2-40B4-BE49-F238E27FC236}">
+                <a16:creationId xmlns:a16="http://schemas.microsoft.com/office/drawing/2014/main" id="{28404A84-4B15-A024-278A-A2F3821DBF13}"/>
+              </a:ext>
+            </a:extLst>
+          </p:cNvPr>
+          <p:cNvPicPr>
+            <a:picLocks noChangeAspect="1"/>
+          </p:cNvPicPr>
+          <p:nvPr/>
+        </p:nvPicPr>
+        <p:blipFill>
+          <a:blip r:embed="rId5"/>
+          <a:srcRect t="41998" b="35745"/>
+          <a:stretch>
+            <a:fillRect/>
+          </a:stretch>
+        </p:blipFill>
+        <p:spPr>
+          <a:xfrm>
+            <a:off x="1419874" y="5688559"/>
+            <a:ext cx="6541216" cy="873549"/>
+          </a:xfrm>
+          <a:prstGeom prst="rect">
+            <a:avLst/>
+          </a:prstGeom>
+        </p:spPr>
+      </p:pic>
+      <p:sp>
+        <p:nvSpPr>
+          <p:cNvPr id="11" name="Rectangle 10">
+            <a:extLst>
+              <a:ext uri="{FF2B5EF4-FFF2-40B4-BE49-F238E27FC236}">
+                <a16:creationId xmlns:a16="http://schemas.microsoft.com/office/drawing/2014/main" id="{19D2A339-2D89-085D-23ED-8CDAC6B960F4}"/>
+              </a:ext>
+            </a:extLst>
+          </p:cNvPr>
+          <p:cNvSpPr/>
+          <p:nvPr/>
+        </p:nvSpPr>
+        <p:spPr>
+          <a:xfrm>
+            <a:off x="6301780" y="3665285"/>
+            <a:ext cx="45719" cy="2872758"/>
+          </a:xfrm>
+          <a:prstGeom prst="rect">
+            <a:avLst/>
+          </a:prstGeom>
+          <a:noFill/>
+          <a:ln>
+            <a:solidFill>
+              <a:schemeClr val="bg1"/>
+            </a:solidFill>
+          </a:ln>
+        </p:spPr>
+        <p:style>
+          <a:lnRef idx="2">
+            <a:schemeClr val="accent2"/>
+          </a:lnRef>
+          <a:fillRef idx="1">
+            <a:schemeClr val="lt1"/>
+          </a:fillRef>
+          <a:effectRef idx="0">
+            <a:schemeClr val="accent2"/>
+          </a:effectRef>
+          <a:fontRef idx="minor">
+            <a:schemeClr val="dk1"/>
+          </a:fontRef>
+        </p:style>
+        <p:txBody>
+          <a:bodyPr rtlCol="0" anchor="ctr"/>
+          <a:lstStyle/>
+          <a:p>
+            <a:pPr algn="ctr"/>
+            <a:endParaRPr lang="en-US"/>
+          </a:p>
+        </p:txBody>
+      </p:sp>
+      <p:sp>
+        <p:nvSpPr>
+          <p:cNvPr id="12" name="TextBox 11">
+            <a:extLst>
+              <a:ext uri="{FF2B5EF4-FFF2-40B4-BE49-F238E27FC236}">
+                <a16:creationId xmlns:a16="http://schemas.microsoft.com/office/drawing/2014/main" id="{5D0A600B-C457-F588-64FE-38DE6B29BD22}"/>
+              </a:ext>
+            </a:extLst>
+          </p:cNvPr>
+          <p:cNvSpPr txBox="1"/>
+          <p:nvPr/>
+        </p:nvSpPr>
+        <p:spPr>
+          <a:xfrm>
+            <a:off x="6099829" y="6453084"/>
+            <a:ext cx="704486" cy="261610"/>
+          </a:xfrm>
+          <a:prstGeom prst="rect">
+            <a:avLst/>
+          </a:prstGeom>
+          <a:noFill/>
+        </p:spPr>
+        <p:txBody>
+          <a:bodyPr wrap="square" rtlCol="0">
+            <a:spAutoFit/>
+          </a:bodyPr>
+          <a:lstStyle/>
+          <a:p>
+            <a:r>
+              <a:rPr lang="en-US" sz="1050" i="1" dirty="0"/>
+              <a:t>P5</a:t>
+            </a:r>
+          </a:p>
+        </p:txBody>
+      </p:sp>
+      <p:sp>
+        <p:nvSpPr>
+          <p:cNvPr id="14" name="Rectangle 13">
+            <a:extLst>
+              <a:ext uri="{FF2B5EF4-FFF2-40B4-BE49-F238E27FC236}">
+                <a16:creationId xmlns:a16="http://schemas.microsoft.com/office/drawing/2014/main" id="{82416DC7-C611-E1EE-8FE3-4FEDEC06BB01}"/>
+              </a:ext>
+            </a:extLst>
+          </p:cNvPr>
+          <p:cNvSpPr/>
+          <p:nvPr/>
+        </p:nvSpPr>
+        <p:spPr>
+          <a:xfrm>
+            <a:off x="6646427" y="3652754"/>
+            <a:ext cx="45719" cy="730539"/>
+          </a:xfrm>
+          <a:prstGeom prst="rect">
+            <a:avLst/>
+          </a:prstGeom>
+          <a:noFill/>
+          <a:ln>
+            <a:solidFill>
+              <a:schemeClr val="bg1"/>
+            </a:solidFill>
+          </a:ln>
+        </p:spPr>
+        <p:style>
+          <a:lnRef idx="2">
+            <a:schemeClr val="accent2"/>
+          </a:lnRef>
+          <a:fillRef idx="1">
+            <a:schemeClr val="lt1"/>
+          </a:fillRef>
+          <a:effectRef idx="0">
+            <a:schemeClr val="accent2"/>
+          </a:effectRef>
+          <a:fontRef idx="minor">
+            <a:schemeClr val="dk1"/>
+          </a:fontRef>
+        </p:style>
+        <p:txBody>
+          <a:bodyPr rtlCol="0" anchor="ctr"/>
+          <a:lstStyle/>
+          <a:p>
+            <a:pPr algn="ctr"/>
+            <a:endParaRPr lang="en-US"/>
+          </a:p>
+        </p:txBody>
+      </p:sp>
+      <p:sp>
+        <p:nvSpPr>
+          <p:cNvPr id="15" name="TextBox 14">
+            <a:extLst>
+              <a:ext uri="{FF2B5EF4-FFF2-40B4-BE49-F238E27FC236}">
+                <a16:creationId xmlns:a16="http://schemas.microsoft.com/office/drawing/2014/main" id="{9BBDC054-2ADA-A82F-B1EB-27537093A0E1}"/>
+              </a:ext>
+            </a:extLst>
+          </p:cNvPr>
+          <p:cNvSpPr txBox="1"/>
+          <p:nvPr/>
+        </p:nvSpPr>
+        <p:spPr>
+          <a:xfrm>
+            <a:off x="6547851" y="6455008"/>
+            <a:ext cx="704486" cy="261610"/>
+          </a:xfrm>
+          <a:prstGeom prst="rect">
+            <a:avLst/>
+          </a:prstGeom>
+          <a:noFill/>
+        </p:spPr>
+        <p:txBody>
+          <a:bodyPr wrap="square" rtlCol="0">
+            <a:spAutoFit/>
+          </a:bodyPr>
+          <a:lstStyle/>
+          <a:p>
+            <a:r>
+              <a:rPr lang="en-US" sz="1050" i="1" dirty="0"/>
+              <a:t>P25</a:t>
+            </a:r>
+          </a:p>
+        </p:txBody>
+      </p:sp>
+      <p:sp>
+        <p:nvSpPr>
+          <p:cNvPr id="16" name="Rectangle 15">
+            <a:extLst>
+              <a:ext uri="{FF2B5EF4-FFF2-40B4-BE49-F238E27FC236}">
+                <a16:creationId xmlns:a16="http://schemas.microsoft.com/office/drawing/2014/main" id="{D0E2B3F0-7BEC-CA63-AB30-0AD9881FD89D}"/>
+              </a:ext>
+            </a:extLst>
+          </p:cNvPr>
+          <p:cNvSpPr/>
+          <p:nvPr/>
+        </p:nvSpPr>
+        <p:spPr>
+          <a:xfrm>
+            <a:off x="6401272" y="3634838"/>
+            <a:ext cx="45719" cy="2872758"/>
+          </a:xfrm>
+          <a:prstGeom prst="rect">
+            <a:avLst/>
+          </a:prstGeom>
+          <a:noFill/>
+          <a:ln>
+            <a:solidFill>
+              <a:schemeClr val="bg1"/>
+            </a:solidFill>
+          </a:ln>
+        </p:spPr>
+        <p:style>
+          <a:lnRef idx="2">
+            <a:schemeClr val="accent2"/>
+          </a:lnRef>
+          <a:fillRef idx="1">
+            <a:schemeClr val="lt1"/>
+          </a:fillRef>
+          <a:effectRef idx="0">
+            <a:schemeClr val="accent2"/>
+          </a:effectRef>
+          <a:fontRef idx="minor">
+            <a:schemeClr val="dk1"/>
+          </a:fontRef>
+        </p:style>
+        <p:txBody>
+          <a:bodyPr rtlCol="0" anchor="ctr"/>
+          <a:lstStyle/>
+          <a:p>
+            <a:pPr algn="ctr"/>
+            <a:endParaRPr lang="en-US"/>
+          </a:p>
+        </p:txBody>
+      </p:sp>
+      <p:sp>
+        <p:nvSpPr>
+          <p:cNvPr id="17" name="TextBox 16">
+            <a:extLst>
+              <a:ext uri="{FF2B5EF4-FFF2-40B4-BE49-F238E27FC236}">
+                <a16:creationId xmlns:a16="http://schemas.microsoft.com/office/drawing/2014/main" id="{22965D34-05F5-0730-0688-4F6D29F23B64}"/>
+              </a:ext>
+            </a:extLst>
+          </p:cNvPr>
+          <p:cNvSpPr txBox="1"/>
+          <p:nvPr/>
+        </p:nvSpPr>
+        <p:spPr>
+          <a:xfrm>
+            <a:off x="6294184" y="6453084"/>
+            <a:ext cx="459331" cy="261610"/>
+          </a:xfrm>
+          <a:prstGeom prst="rect">
+            <a:avLst/>
+          </a:prstGeom>
+          <a:noFill/>
+        </p:spPr>
+        <p:txBody>
+          <a:bodyPr wrap="square" rtlCol="0">
+            <a:spAutoFit/>
+          </a:bodyPr>
+          <a:lstStyle/>
+          <a:p>
+            <a:r>
+              <a:rPr lang="en-US" sz="1050" i="1" dirty="0"/>
+              <a:t>P50</a:t>
+            </a:r>
+          </a:p>
+        </p:txBody>
+      </p:sp>
+      <p:sp>
+        <p:nvSpPr>
+          <p:cNvPr id="19" name="Rectangle 18">
+            <a:extLst>
+              <a:ext uri="{FF2B5EF4-FFF2-40B4-BE49-F238E27FC236}">
+                <a16:creationId xmlns:a16="http://schemas.microsoft.com/office/drawing/2014/main" id="{320DCEEB-7A41-8B19-9225-4A2FF4C76745}"/>
+              </a:ext>
+            </a:extLst>
+          </p:cNvPr>
+          <p:cNvSpPr/>
+          <p:nvPr/>
+        </p:nvSpPr>
+        <p:spPr>
+          <a:xfrm>
+            <a:off x="2808359" y="3652755"/>
+            <a:ext cx="45719" cy="688239"/>
+          </a:xfrm>
+          <a:prstGeom prst="rect">
+            <a:avLst/>
+          </a:prstGeom>
+          <a:noFill/>
+          <a:ln>
+            <a:solidFill>
+              <a:schemeClr val="bg1"/>
+            </a:solidFill>
+          </a:ln>
+        </p:spPr>
+        <p:style>
+          <a:lnRef idx="2">
+            <a:schemeClr val="accent2"/>
+          </a:lnRef>
+          <a:fillRef idx="1">
+            <a:schemeClr val="lt1"/>
+          </a:fillRef>
+          <a:effectRef idx="0">
+            <a:schemeClr val="accent2"/>
+          </a:effectRef>
+          <a:fontRef idx="minor">
+            <a:schemeClr val="dk1"/>
+          </a:fontRef>
+        </p:style>
+        <p:txBody>
+          <a:bodyPr rtlCol="0" anchor="ctr"/>
+          <a:lstStyle/>
+          <a:p>
+            <a:pPr algn="ctr"/>
+            <a:endParaRPr lang="en-US"/>
+          </a:p>
+        </p:txBody>
+      </p:sp>
+      <p:sp>
+        <p:nvSpPr>
+          <p:cNvPr id="29" name="TextBox 28">
+            <a:extLst>
+              <a:ext uri="{FF2B5EF4-FFF2-40B4-BE49-F238E27FC236}">
+                <a16:creationId xmlns:a16="http://schemas.microsoft.com/office/drawing/2014/main" id="{C44F9334-2536-7221-76AD-4DD100651570}"/>
+              </a:ext>
+            </a:extLst>
+          </p:cNvPr>
+          <p:cNvSpPr txBox="1"/>
+          <p:nvPr/>
+        </p:nvSpPr>
+        <p:spPr>
+          <a:xfrm>
+            <a:off x="2642601" y="6459929"/>
+            <a:ext cx="704486" cy="261610"/>
+          </a:xfrm>
+          <a:prstGeom prst="rect">
+            <a:avLst/>
+          </a:prstGeom>
+          <a:noFill/>
+        </p:spPr>
+        <p:txBody>
+          <a:bodyPr wrap="square" rtlCol="0">
+            <a:spAutoFit/>
+          </a:bodyPr>
+          <a:lstStyle/>
+          <a:p>
+            <a:r>
+              <a:rPr lang="en-US" sz="1050" i="1" dirty="0"/>
+              <a:t>P75</a:t>
+            </a:r>
+          </a:p>
+        </p:txBody>
+      </p:sp>
+      <p:sp>
+        <p:nvSpPr>
+          <p:cNvPr id="33" name="Rectangle 32">
+            <a:extLst>
+              <a:ext uri="{FF2B5EF4-FFF2-40B4-BE49-F238E27FC236}">
+                <a16:creationId xmlns:a16="http://schemas.microsoft.com/office/drawing/2014/main" id="{90E05789-5089-0136-B22F-3B8047594817}"/>
+              </a:ext>
+            </a:extLst>
+          </p:cNvPr>
+          <p:cNvSpPr/>
+          <p:nvPr/>
+        </p:nvSpPr>
+        <p:spPr>
+          <a:xfrm>
+            <a:off x="6646427" y="4782548"/>
+            <a:ext cx="45719" cy="730539"/>
+          </a:xfrm>
+          <a:prstGeom prst="rect">
+            <a:avLst/>
+          </a:prstGeom>
+          <a:noFill/>
+          <a:ln>
+            <a:solidFill>
+              <a:schemeClr val="bg1"/>
+            </a:solidFill>
+          </a:ln>
+        </p:spPr>
+        <p:style>
+          <a:lnRef idx="2">
+            <a:schemeClr val="accent2"/>
+          </a:lnRef>
+          <a:fillRef idx="1">
+            <a:schemeClr val="lt1"/>
+          </a:fillRef>
+          <a:effectRef idx="0">
+            <a:schemeClr val="accent2"/>
+          </a:effectRef>
+          <a:fontRef idx="minor">
+            <a:schemeClr val="dk1"/>
+          </a:fontRef>
+        </p:style>
+        <p:txBody>
+          <a:bodyPr rtlCol="0" anchor="ctr"/>
+          <a:lstStyle/>
+          <a:p>
+            <a:pPr algn="ctr"/>
+            <a:endParaRPr lang="en-US"/>
+          </a:p>
+        </p:txBody>
+      </p:sp>
+      <p:sp>
+        <p:nvSpPr>
+          <p:cNvPr id="35" name="Rectangle 34">
+            <a:extLst>
+              <a:ext uri="{FF2B5EF4-FFF2-40B4-BE49-F238E27FC236}">
+                <a16:creationId xmlns:a16="http://schemas.microsoft.com/office/drawing/2014/main" id="{05F29C22-400C-84DC-A7BF-3D840740C484}"/>
+              </a:ext>
+            </a:extLst>
+          </p:cNvPr>
+          <p:cNvSpPr/>
+          <p:nvPr/>
+        </p:nvSpPr>
+        <p:spPr>
+          <a:xfrm>
+            <a:off x="6646426" y="5813659"/>
+            <a:ext cx="54232" cy="693937"/>
+          </a:xfrm>
+          <a:prstGeom prst="rect">
+            <a:avLst/>
+          </a:prstGeom>
+          <a:noFill/>
+          <a:ln>
+            <a:solidFill>
+              <a:schemeClr val="bg1"/>
+            </a:solidFill>
+          </a:ln>
+        </p:spPr>
+        <p:style>
+          <a:lnRef idx="2">
+            <a:schemeClr val="accent2"/>
+          </a:lnRef>
+          <a:fillRef idx="1">
+            <a:schemeClr val="lt1"/>
+          </a:fillRef>
+          <a:effectRef idx="0">
+            <a:schemeClr val="accent2"/>
+          </a:effectRef>
+          <a:fontRef idx="minor">
+            <a:schemeClr val="dk1"/>
+          </a:fontRef>
+        </p:style>
+        <p:txBody>
+          <a:bodyPr rtlCol="0" anchor="ctr"/>
+          <a:lstStyle/>
+          <a:p>
+            <a:pPr algn="ctr"/>
+            <a:endParaRPr lang="en-US"/>
+          </a:p>
+        </p:txBody>
+      </p:sp>
+      <p:sp>
+        <p:nvSpPr>
+          <p:cNvPr id="37" name="Rectangle 36">
+            <a:extLst>
+              <a:ext uri="{FF2B5EF4-FFF2-40B4-BE49-F238E27FC236}">
+                <a16:creationId xmlns:a16="http://schemas.microsoft.com/office/drawing/2014/main" id="{11E8E405-1451-24BB-DC99-8A019728D276}"/>
+              </a:ext>
+            </a:extLst>
+          </p:cNvPr>
+          <p:cNvSpPr/>
+          <p:nvPr/>
+        </p:nvSpPr>
+        <p:spPr>
+          <a:xfrm>
+            <a:off x="2804102" y="4765395"/>
+            <a:ext cx="54232" cy="693937"/>
+          </a:xfrm>
+          <a:prstGeom prst="rect">
+            <a:avLst/>
+          </a:prstGeom>
+          <a:noFill/>
+          <a:ln>
+            <a:solidFill>
+              <a:schemeClr val="bg1"/>
+            </a:solidFill>
+          </a:ln>
+        </p:spPr>
+        <p:style>
+          <a:lnRef idx="2">
+            <a:schemeClr val="accent2"/>
+          </a:lnRef>
+          <a:fillRef idx="1">
+            <a:schemeClr val="lt1"/>
+          </a:fillRef>
+          <a:effectRef idx="0">
+            <a:schemeClr val="accent2"/>
+          </a:effectRef>
+          <a:fontRef idx="minor">
+            <a:schemeClr val="dk1"/>
+          </a:fontRef>
+        </p:style>
+        <p:txBody>
+          <a:bodyPr rtlCol="0" anchor="ctr"/>
+          <a:lstStyle/>
+          <a:p>
+            <a:pPr algn="ctr"/>
+            <a:endParaRPr lang="en-US"/>
+          </a:p>
+        </p:txBody>
+      </p:sp>
+      <p:sp>
+        <p:nvSpPr>
+          <p:cNvPr id="38" name="Rectangle 37">
+            <a:extLst>
+              <a:ext uri="{FF2B5EF4-FFF2-40B4-BE49-F238E27FC236}">
+                <a16:creationId xmlns:a16="http://schemas.microsoft.com/office/drawing/2014/main" id="{B5D93E19-6A82-FE05-F233-AE6A193CD1F8}"/>
+              </a:ext>
+            </a:extLst>
+          </p:cNvPr>
+          <p:cNvSpPr/>
+          <p:nvPr/>
+        </p:nvSpPr>
+        <p:spPr>
+          <a:xfrm>
+            <a:off x="2804102" y="5813659"/>
+            <a:ext cx="54232" cy="693937"/>
+          </a:xfrm>
+          <a:prstGeom prst="rect">
+            <a:avLst/>
+          </a:prstGeom>
+          <a:noFill/>
+          <a:ln>
+            <a:solidFill>
+              <a:schemeClr val="bg1"/>
+            </a:solidFill>
+          </a:ln>
+        </p:spPr>
+        <p:style>
+          <a:lnRef idx="2">
+            <a:schemeClr val="accent2"/>
+          </a:lnRef>
+          <a:fillRef idx="1">
+            <a:schemeClr val="lt1"/>
+          </a:fillRef>
+          <a:effectRef idx="0">
+            <a:schemeClr val="accent2"/>
+          </a:effectRef>
+          <a:fontRef idx="minor">
+            <a:schemeClr val="dk1"/>
+          </a:fontRef>
+        </p:style>
+        <p:txBody>
+          <a:bodyPr rtlCol="0" anchor="ctr"/>
+          <a:lstStyle/>
+          <a:p>
+            <a:pPr algn="ctr"/>
+            <a:endParaRPr lang="en-US"/>
+          </a:p>
+        </p:txBody>
+      </p:sp>
+    </p:spTree>
+    <p:extLst>
+      <p:ext uri="{BB962C8B-B14F-4D97-AF65-F5344CB8AC3E}">
+        <p14:creationId xmlns:p14="http://schemas.microsoft.com/office/powerpoint/2010/main" val="3846216359"/>
       </p:ext>
     </p:extLst>
   </p:cSld>

--- a/figures/fig1_diagram.pptx
+++ b/figures/fig1_diagram.pptx
@@ -264,7 +264,7 @@
           <a:p>
             <a:fld id="{75A9CF98-CC55-774D-9AE2-4D7D2CE05F38}" type="datetimeFigureOut">
               <a:rPr lang="en-US" smtClean="0"/>
-              <a:t>9/1/25</a:t>
+              <a:t>9/8/25</a:t>
             </a:fld>
             <a:endParaRPr lang="en-US"/>
           </a:p>
@@ -462,7 +462,7 @@
           <a:p>
             <a:fld id="{75A9CF98-CC55-774D-9AE2-4D7D2CE05F38}" type="datetimeFigureOut">
               <a:rPr lang="en-US" smtClean="0"/>
-              <a:t>9/1/25</a:t>
+              <a:t>9/8/25</a:t>
             </a:fld>
             <a:endParaRPr lang="en-US"/>
           </a:p>
@@ -670,7 +670,7 @@
           <a:p>
             <a:fld id="{75A9CF98-CC55-774D-9AE2-4D7D2CE05F38}" type="datetimeFigureOut">
               <a:rPr lang="en-US" smtClean="0"/>
-              <a:t>9/1/25</a:t>
+              <a:t>9/8/25</a:t>
             </a:fld>
             <a:endParaRPr lang="en-US"/>
           </a:p>
@@ -868,7 +868,7 @@
           <a:p>
             <a:fld id="{75A9CF98-CC55-774D-9AE2-4D7D2CE05F38}" type="datetimeFigureOut">
               <a:rPr lang="en-US" smtClean="0"/>
-              <a:t>9/1/25</a:t>
+              <a:t>9/8/25</a:t>
             </a:fld>
             <a:endParaRPr lang="en-US"/>
           </a:p>
@@ -1143,7 +1143,7 @@
           <a:p>
             <a:fld id="{75A9CF98-CC55-774D-9AE2-4D7D2CE05F38}" type="datetimeFigureOut">
               <a:rPr lang="en-US" smtClean="0"/>
-              <a:t>9/1/25</a:t>
+              <a:t>9/8/25</a:t>
             </a:fld>
             <a:endParaRPr lang="en-US"/>
           </a:p>
@@ -1408,7 +1408,7 @@
           <a:p>
             <a:fld id="{75A9CF98-CC55-774D-9AE2-4D7D2CE05F38}" type="datetimeFigureOut">
               <a:rPr lang="en-US" smtClean="0"/>
-              <a:t>9/1/25</a:t>
+              <a:t>9/8/25</a:t>
             </a:fld>
             <a:endParaRPr lang="en-US"/>
           </a:p>
@@ -1820,7 +1820,7 @@
           <a:p>
             <a:fld id="{75A9CF98-CC55-774D-9AE2-4D7D2CE05F38}" type="datetimeFigureOut">
               <a:rPr lang="en-US" smtClean="0"/>
-              <a:t>9/1/25</a:t>
+              <a:t>9/8/25</a:t>
             </a:fld>
             <a:endParaRPr lang="en-US"/>
           </a:p>
@@ -1961,7 +1961,7 @@
           <a:p>
             <a:fld id="{75A9CF98-CC55-774D-9AE2-4D7D2CE05F38}" type="datetimeFigureOut">
               <a:rPr lang="en-US" smtClean="0"/>
-              <a:t>9/1/25</a:t>
+              <a:t>9/8/25</a:t>
             </a:fld>
             <a:endParaRPr lang="en-US"/>
           </a:p>
@@ -2074,7 +2074,7 @@
           <a:p>
             <a:fld id="{75A9CF98-CC55-774D-9AE2-4D7D2CE05F38}" type="datetimeFigureOut">
               <a:rPr lang="en-US" smtClean="0"/>
-              <a:t>9/1/25</a:t>
+              <a:t>9/8/25</a:t>
             </a:fld>
             <a:endParaRPr lang="en-US"/>
           </a:p>
@@ -2385,7 +2385,7 @@
           <a:p>
             <a:fld id="{75A9CF98-CC55-774D-9AE2-4D7D2CE05F38}" type="datetimeFigureOut">
               <a:rPr lang="en-US" smtClean="0"/>
-              <a:t>9/1/25</a:t>
+              <a:t>9/8/25</a:t>
             </a:fld>
             <a:endParaRPr lang="en-US"/>
           </a:p>
@@ -2673,7 +2673,7 @@
           <a:p>
             <a:fld id="{75A9CF98-CC55-774D-9AE2-4D7D2CE05F38}" type="datetimeFigureOut">
               <a:rPr lang="en-US" smtClean="0"/>
-              <a:t>9/1/25</a:t>
+              <a:t>9/8/25</a:t>
             </a:fld>
             <a:endParaRPr lang="en-US"/>
           </a:p>
@@ -2914,7 +2914,7 @@
           <a:p>
             <a:fld id="{75A9CF98-CC55-774D-9AE2-4D7D2CE05F38}" type="datetimeFigureOut">
               <a:rPr lang="en-US" smtClean="0"/>
-              <a:t>9/1/25</a:t>
+              <a:t>9/8/25</a:t>
             </a:fld>
             <a:endParaRPr lang="en-US"/>
           </a:p>
@@ -8318,6 +8318,89 @@
           </a:prstGeom>
         </p:spPr>
       </p:pic>
+      <p:sp>
+        <p:nvSpPr>
+          <p:cNvPr id="3" name="Rectangle 2">
+            <a:extLst>
+              <a:ext uri="{FF2B5EF4-FFF2-40B4-BE49-F238E27FC236}">
+                <a16:creationId xmlns:a16="http://schemas.microsoft.com/office/drawing/2014/main" id="{93884AC3-5AA5-0496-DD33-854737B2FBB4}"/>
+              </a:ext>
+            </a:extLst>
+          </p:cNvPr>
+          <p:cNvSpPr/>
+          <p:nvPr/>
+        </p:nvSpPr>
+        <p:spPr>
+          <a:xfrm>
+            <a:off x="3813717" y="3082790"/>
+            <a:ext cx="1991557" cy="128762"/>
+          </a:xfrm>
+          <a:prstGeom prst="rect">
+            <a:avLst/>
+          </a:prstGeom>
+          <a:solidFill>
+            <a:schemeClr val="bg1"/>
+          </a:solidFill>
+          <a:ln>
+            <a:noFill/>
+          </a:ln>
+        </p:spPr>
+        <p:style>
+          <a:lnRef idx="2">
+            <a:schemeClr val="accent1">
+              <a:shade val="15000"/>
+            </a:schemeClr>
+          </a:lnRef>
+          <a:fillRef idx="1">
+            <a:schemeClr val="accent1"/>
+          </a:fillRef>
+          <a:effectRef idx="0">
+            <a:schemeClr val="accent1"/>
+          </a:effectRef>
+          <a:fontRef idx="minor">
+            <a:schemeClr val="lt1"/>
+          </a:fontRef>
+        </p:style>
+        <p:txBody>
+          <a:bodyPr rtlCol="0" anchor="ctr"/>
+          <a:lstStyle/>
+          <a:p>
+            <a:pPr algn="ctr"/>
+            <a:endParaRPr lang="en-US"/>
+          </a:p>
+        </p:txBody>
+      </p:sp>
+      <p:pic>
+        <p:nvPicPr>
+          <p:cNvPr id="4" name="Picture 3">
+            <a:extLst>
+              <a:ext uri="{FF2B5EF4-FFF2-40B4-BE49-F238E27FC236}">
+                <a16:creationId xmlns:a16="http://schemas.microsoft.com/office/drawing/2014/main" id="{0204FB71-371B-2CB7-377D-1CF9CB50BEC6}"/>
+              </a:ext>
+            </a:extLst>
+          </p:cNvPr>
+          <p:cNvPicPr>
+            <a:picLocks noChangeAspect="1"/>
+          </p:cNvPicPr>
+          <p:nvPr/>
+        </p:nvPicPr>
+        <p:blipFill>
+          <a:blip r:embed="rId3"/>
+          <a:srcRect l="43095" t="31110" r="49335" b="65684"/>
+          <a:stretch>
+            <a:fillRect/>
+          </a:stretch>
+        </p:blipFill>
+        <p:spPr>
+          <a:xfrm>
+            <a:off x="4435431" y="3099707"/>
+            <a:ext cx="1013798" cy="128762"/>
+          </a:xfrm>
+          <a:prstGeom prst="rect">
+            <a:avLst/>
+          </a:prstGeom>
+        </p:spPr>
+      </p:pic>
     </p:spTree>
     <p:extLst>
       <p:ext uri="{BB962C8B-B14F-4D97-AF65-F5344CB8AC3E}">
@@ -9455,6 +9538,89 @@
           </a:p>
         </p:txBody>
       </p:sp>
+      <p:sp>
+        <p:nvSpPr>
+          <p:cNvPr id="2" name="Rectangle 1">
+            <a:extLst>
+              <a:ext uri="{FF2B5EF4-FFF2-40B4-BE49-F238E27FC236}">
+                <a16:creationId xmlns:a16="http://schemas.microsoft.com/office/drawing/2014/main" id="{23E96BD3-258F-7BE7-4548-A920A3781F00}"/>
+              </a:ext>
+            </a:extLst>
+          </p:cNvPr>
+          <p:cNvSpPr/>
+          <p:nvPr/>
+        </p:nvSpPr>
+        <p:spPr>
+          <a:xfrm>
+            <a:off x="3813717" y="3097658"/>
+            <a:ext cx="1991557" cy="128762"/>
+          </a:xfrm>
+          <a:prstGeom prst="rect">
+            <a:avLst/>
+          </a:prstGeom>
+          <a:solidFill>
+            <a:schemeClr val="bg1"/>
+          </a:solidFill>
+          <a:ln>
+            <a:noFill/>
+          </a:ln>
+        </p:spPr>
+        <p:style>
+          <a:lnRef idx="2">
+            <a:schemeClr val="accent1">
+              <a:shade val="15000"/>
+            </a:schemeClr>
+          </a:lnRef>
+          <a:fillRef idx="1">
+            <a:schemeClr val="accent1"/>
+          </a:fillRef>
+          <a:effectRef idx="0">
+            <a:schemeClr val="accent1"/>
+          </a:effectRef>
+          <a:fontRef idx="minor">
+            <a:schemeClr val="lt1"/>
+          </a:fontRef>
+        </p:style>
+        <p:txBody>
+          <a:bodyPr rtlCol="0" anchor="ctr"/>
+          <a:lstStyle/>
+          <a:p>
+            <a:pPr algn="ctr"/>
+            <a:endParaRPr lang="en-US"/>
+          </a:p>
+        </p:txBody>
+      </p:sp>
+      <p:pic>
+        <p:nvPicPr>
+          <p:cNvPr id="4" name="Picture 3">
+            <a:extLst>
+              <a:ext uri="{FF2B5EF4-FFF2-40B4-BE49-F238E27FC236}">
+                <a16:creationId xmlns:a16="http://schemas.microsoft.com/office/drawing/2014/main" id="{D423C88C-37BB-7B11-B166-D8EB683006F5}"/>
+              </a:ext>
+            </a:extLst>
+          </p:cNvPr>
+          <p:cNvPicPr>
+            <a:picLocks noChangeAspect="1"/>
+          </p:cNvPicPr>
+          <p:nvPr/>
+        </p:nvPicPr>
+        <p:blipFill>
+          <a:blip r:embed="rId6"/>
+          <a:srcRect l="43095" t="31110" r="49335" b="65684"/>
+          <a:stretch>
+            <a:fillRect/>
+          </a:stretch>
+        </p:blipFill>
+        <p:spPr>
+          <a:xfrm>
+            <a:off x="4435431" y="3114575"/>
+            <a:ext cx="1013798" cy="128762"/>
+          </a:xfrm>
+          <a:prstGeom prst="rect">
+            <a:avLst/>
+          </a:prstGeom>
+        </p:spPr>
+      </p:pic>
     </p:spTree>
     <p:extLst>
       <p:ext uri="{BB962C8B-B14F-4D97-AF65-F5344CB8AC3E}">

--- a/figures/fig1_diagram.pptx
+++ b/figures/fig1_diagram.pptx
@@ -10,7 +10,8 @@
     <p:sldId id="265" r:id="rId4"/>
     <p:sldId id="266" r:id="rId5"/>
     <p:sldId id="267" r:id="rId6"/>
-    <p:sldId id="268" r:id="rId7"/>
+    <p:sldId id="269" r:id="rId7"/>
+    <p:sldId id="268" r:id="rId8"/>
   </p:sldIdLst>
   <p:sldSz cx="12192000" cy="6858000"/>
   <p:notesSz cx="6858000" cy="9144000"/>
@@ -264,7 +265,7 @@
           <a:p>
             <a:fld id="{75A9CF98-CC55-774D-9AE2-4D7D2CE05F38}" type="datetimeFigureOut">
               <a:rPr lang="en-US" smtClean="0"/>
-              <a:t>9/8/25</a:t>
+              <a:t>9/9/25</a:t>
             </a:fld>
             <a:endParaRPr lang="en-US"/>
           </a:p>
@@ -462,7 +463,7 @@
           <a:p>
             <a:fld id="{75A9CF98-CC55-774D-9AE2-4D7D2CE05F38}" type="datetimeFigureOut">
               <a:rPr lang="en-US" smtClean="0"/>
-              <a:t>9/8/25</a:t>
+              <a:t>9/9/25</a:t>
             </a:fld>
             <a:endParaRPr lang="en-US"/>
           </a:p>
@@ -670,7 +671,7 @@
           <a:p>
             <a:fld id="{75A9CF98-CC55-774D-9AE2-4D7D2CE05F38}" type="datetimeFigureOut">
               <a:rPr lang="en-US" smtClean="0"/>
-              <a:t>9/8/25</a:t>
+              <a:t>9/9/25</a:t>
             </a:fld>
             <a:endParaRPr lang="en-US"/>
           </a:p>
@@ -868,7 +869,7 @@
           <a:p>
             <a:fld id="{75A9CF98-CC55-774D-9AE2-4D7D2CE05F38}" type="datetimeFigureOut">
               <a:rPr lang="en-US" smtClean="0"/>
-              <a:t>9/8/25</a:t>
+              <a:t>9/9/25</a:t>
             </a:fld>
             <a:endParaRPr lang="en-US"/>
           </a:p>
@@ -1143,7 +1144,7 @@
           <a:p>
             <a:fld id="{75A9CF98-CC55-774D-9AE2-4D7D2CE05F38}" type="datetimeFigureOut">
               <a:rPr lang="en-US" smtClean="0"/>
-              <a:t>9/8/25</a:t>
+              <a:t>9/9/25</a:t>
             </a:fld>
             <a:endParaRPr lang="en-US"/>
           </a:p>
@@ -1408,7 +1409,7 @@
           <a:p>
             <a:fld id="{75A9CF98-CC55-774D-9AE2-4D7D2CE05F38}" type="datetimeFigureOut">
               <a:rPr lang="en-US" smtClean="0"/>
-              <a:t>9/8/25</a:t>
+              <a:t>9/9/25</a:t>
             </a:fld>
             <a:endParaRPr lang="en-US"/>
           </a:p>
@@ -1820,7 +1821,7 @@
           <a:p>
             <a:fld id="{75A9CF98-CC55-774D-9AE2-4D7D2CE05F38}" type="datetimeFigureOut">
               <a:rPr lang="en-US" smtClean="0"/>
-              <a:t>9/8/25</a:t>
+              <a:t>9/9/25</a:t>
             </a:fld>
             <a:endParaRPr lang="en-US"/>
           </a:p>
@@ -1961,7 +1962,7 @@
           <a:p>
             <a:fld id="{75A9CF98-CC55-774D-9AE2-4D7D2CE05F38}" type="datetimeFigureOut">
               <a:rPr lang="en-US" smtClean="0"/>
-              <a:t>9/8/25</a:t>
+              <a:t>9/9/25</a:t>
             </a:fld>
             <a:endParaRPr lang="en-US"/>
           </a:p>
@@ -2074,7 +2075,7 @@
           <a:p>
             <a:fld id="{75A9CF98-CC55-774D-9AE2-4D7D2CE05F38}" type="datetimeFigureOut">
               <a:rPr lang="en-US" smtClean="0"/>
-              <a:t>9/8/25</a:t>
+              <a:t>9/9/25</a:t>
             </a:fld>
             <a:endParaRPr lang="en-US"/>
           </a:p>
@@ -2385,7 +2386,7 @@
           <a:p>
             <a:fld id="{75A9CF98-CC55-774D-9AE2-4D7D2CE05F38}" type="datetimeFigureOut">
               <a:rPr lang="en-US" smtClean="0"/>
-              <a:t>9/8/25</a:t>
+              <a:t>9/9/25</a:t>
             </a:fld>
             <a:endParaRPr lang="en-US"/>
           </a:p>
@@ -2673,7 +2674,7 @@
           <a:p>
             <a:fld id="{75A9CF98-CC55-774D-9AE2-4D7D2CE05F38}" type="datetimeFigureOut">
               <a:rPr lang="en-US" smtClean="0"/>
-              <a:t>9/8/25</a:t>
+              <a:t>9/9/25</a:t>
             </a:fld>
             <a:endParaRPr lang="en-US"/>
           </a:p>
@@ -2914,7 +2915,7 @@
           <a:p>
             <a:fld id="{75A9CF98-CC55-774D-9AE2-4D7D2CE05F38}" type="datetimeFigureOut">
               <a:rPr lang="en-US" smtClean="0"/>
-              <a:t>9/8/25</a:t>
+              <a:t>9/9/25</a:t>
             </a:fld>
             <a:endParaRPr lang="en-US"/>
           </a:p>
@@ -8662,6 +8663,252 @@
         <p:cNvPr id="1" name="">
           <a:extLst>
             <a:ext uri="{FF2B5EF4-FFF2-40B4-BE49-F238E27FC236}">
+              <a16:creationId xmlns:a16="http://schemas.microsoft.com/office/drawing/2014/main" id="{D31DA676-BC81-FE4B-0909-3AC912A5F9A8}"/>
+            </a:ext>
+          </a:extLst>
+        </p:cNvPr>
+        <p:cNvGrpSpPr/>
+        <p:nvPr/>
+      </p:nvGrpSpPr>
+      <p:grpSpPr>
+        <a:xfrm>
+          <a:off x="0" y="0"/>
+          <a:ext cx="0" cy="0"/>
+          <a:chOff x="0" y="0"/>
+          <a:chExt cx="0" cy="0"/>
+        </a:xfrm>
+      </p:grpSpPr>
+      <p:pic>
+        <p:nvPicPr>
+          <p:cNvPr id="15" name="Picture 14">
+            <a:extLst>
+              <a:ext uri="{FF2B5EF4-FFF2-40B4-BE49-F238E27FC236}">
+                <a16:creationId xmlns:a16="http://schemas.microsoft.com/office/drawing/2014/main" id="{CA21A4DF-2FD2-2536-3AD6-3FC70E6011CD}"/>
+              </a:ext>
+            </a:extLst>
+          </p:cNvPr>
+          <p:cNvPicPr>
+            <a:picLocks noChangeAspect="1"/>
+          </p:cNvPicPr>
+          <p:nvPr/>
+        </p:nvPicPr>
+        <p:blipFill>
+          <a:blip r:embed="rId2"/>
+          <a:stretch>
+            <a:fillRect/>
+          </a:stretch>
+        </p:blipFill>
+        <p:spPr>
+          <a:xfrm>
+            <a:off x="2545492" y="4611031"/>
+            <a:ext cx="4493938" cy="2246969"/>
+          </a:xfrm>
+          <a:prstGeom prst="rect">
+            <a:avLst/>
+          </a:prstGeom>
+        </p:spPr>
+      </p:pic>
+      <p:pic>
+        <p:nvPicPr>
+          <p:cNvPr id="7" name="Picture 6">
+            <a:extLst>
+              <a:ext uri="{FF2B5EF4-FFF2-40B4-BE49-F238E27FC236}">
+                <a16:creationId xmlns:a16="http://schemas.microsoft.com/office/drawing/2014/main" id="{930F7D46-E8B9-8B38-B113-97E201573CC2}"/>
+              </a:ext>
+            </a:extLst>
+          </p:cNvPr>
+          <p:cNvPicPr>
+            <a:picLocks noChangeAspect="1"/>
+          </p:cNvPicPr>
+          <p:nvPr/>
+        </p:nvPicPr>
+        <p:blipFill>
+          <a:blip r:embed="rId3"/>
+          <a:stretch>
+            <a:fillRect/>
+          </a:stretch>
+        </p:blipFill>
+        <p:spPr>
+          <a:xfrm>
+            <a:off x="2545492" y="290440"/>
+            <a:ext cx="4493937" cy="2246969"/>
+          </a:xfrm>
+          <a:prstGeom prst="rect">
+            <a:avLst/>
+          </a:prstGeom>
+        </p:spPr>
+      </p:pic>
+      <p:pic>
+        <p:nvPicPr>
+          <p:cNvPr id="9" name="Picture 8">
+            <a:extLst>
+              <a:ext uri="{FF2B5EF4-FFF2-40B4-BE49-F238E27FC236}">
+                <a16:creationId xmlns:a16="http://schemas.microsoft.com/office/drawing/2014/main" id="{84392866-86A5-2DC9-74F1-367B16EDCD46}"/>
+              </a:ext>
+            </a:extLst>
+          </p:cNvPr>
+          <p:cNvPicPr>
+            <a:picLocks noChangeAspect="1"/>
+          </p:cNvPicPr>
+          <p:nvPr/>
+        </p:nvPicPr>
+        <p:blipFill>
+          <a:blip r:embed="rId4"/>
+          <a:stretch>
+            <a:fillRect/>
+          </a:stretch>
+        </p:blipFill>
+        <p:spPr>
+          <a:xfrm>
+            <a:off x="2545492" y="2480236"/>
+            <a:ext cx="4493938" cy="2246969"/>
+          </a:xfrm>
+          <a:prstGeom prst="rect">
+            <a:avLst/>
+          </a:prstGeom>
+        </p:spPr>
+      </p:pic>
+      <p:sp>
+        <p:nvSpPr>
+          <p:cNvPr id="6" name="TextBox 5">
+            <a:extLst>
+              <a:ext uri="{FF2B5EF4-FFF2-40B4-BE49-F238E27FC236}">
+                <a16:creationId xmlns:a16="http://schemas.microsoft.com/office/drawing/2014/main" id="{591473C1-A6F8-5822-32F1-C708156808BD}"/>
+              </a:ext>
+            </a:extLst>
+          </p:cNvPr>
+          <p:cNvSpPr txBox="1"/>
+          <p:nvPr/>
+        </p:nvSpPr>
+        <p:spPr>
+          <a:xfrm>
+            <a:off x="2534657" y="290440"/>
+            <a:ext cx="1013798" cy="261610"/>
+          </a:xfrm>
+          <a:prstGeom prst="rect">
+            <a:avLst/>
+          </a:prstGeom>
+          <a:noFill/>
+        </p:spPr>
+        <p:txBody>
+          <a:bodyPr wrap="square" rtlCol="0">
+            <a:spAutoFit/>
+          </a:bodyPr>
+          <a:lstStyle/>
+          <a:p>
+            <a:r>
+              <a:rPr lang="en-US" sz="1100" b="1" dirty="0"/>
+              <a:t>a) </a:t>
+            </a:r>
+            <a:r>
+              <a:rPr lang="en-US" sz="1100" dirty="0" err="1"/>
+              <a:t>SINDy</a:t>
+            </a:r>
+            <a:endParaRPr lang="en-US" sz="1100" b="1" dirty="0"/>
+          </a:p>
+        </p:txBody>
+      </p:sp>
+      <p:sp>
+        <p:nvSpPr>
+          <p:cNvPr id="11" name="TextBox 10">
+            <a:extLst>
+              <a:ext uri="{FF2B5EF4-FFF2-40B4-BE49-F238E27FC236}">
+                <a16:creationId xmlns:a16="http://schemas.microsoft.com/office/drawing/2014/main" id="{3EE761BB-86A8-C807-07EE-CDC9C356C9A8}"/>
+              </a:ext>
+            </a:extLst>
+          </p:cNvPr>
+          <p:cNvSpPr txBox="1"/>
+          <p:nvPr/>
+        </p:nvSpPr>
+        <p:spPr>
+          <a:xfrm>
+            <a:off x="2457473" y="2486139"/>
+            <a:ext cx="1240060" cy="261610"/>
+          </a:xfrm>
+          <a:prstGeom prst="rect">
+            <a:avLst/>
+          </a:prstGeom>
+          <a:noFill/>
+        </p:spPr>
+        <p:txBody>
+          <a:bodyPr wrap="square" rtlCol="0">
+            <a:spAutoFit/>
+          </a:bodyPr>
+          <a:lstStyle/>
+          <a:p>
+            <a:r>
+              <a:rPr lang="en-US" sz="1100" b="1" dirty="0"/>
+              <a:t>b) </a:t>
+            </a:r>
+            <a:r>
+              <a:rPr lang="en-US" sz="1100" dirty="0"/>
+              <a:t>NN-driven</a:t>
+            </a:r>
+            <a:endParaRPr lang="en-US" sz="1100" b="1" dirty="0"/>
+          </a:p>
+        </p:txBody>
+      </p:sp>
+      <p:sp>
+        <p:nvSpPr>
+          <p:cNvPr id="14" name="TextBox 13">
+            <a:extLst>
+              <a:ext uri="{FF2B5EF4-FFF2-40B4-BE49-F238E27FC236}">
+                <a16:creationId xmlns:a16="http://schemas.microsoft.com/office/drawing/2014/main" id="{58E0F855-0807-2C78-F577-3E9A635BFC79}"/>
+              </a:ext>
+            </a:extLst>
+          </p:cNvPr>
+          <p:cNvSpPr txBox="1"/>
+          <p:nvPr/>
+        </p:nvSpPr>
+        <p:spPr>
+          <a:xfrm>
+            <a:off x="2545492" y="4596400"/>
+            <a:ext cx="841709" cy="261610"/>
+          </a:xfrm>
+          <a:prstGeom prst="rect">
+            <a:avLst/>
+          </a:prstGeom>
+          <a:noFill/>
+        </p:spPr>
+        <p:txBody>
+          <a:bodyPr wrap="square" rtlCol="0">
+            <a:spAutoFit/>
+          </a:bodyPr>
+          <a:lstStyle/>
+          <a:p>
+            <a:r>
+              <a:rPr lang="en-US" sz="1100" b="1" dirty="0"/>
+              <a:t>c) </a:t>
+            </a:r>
+            <a:r>
+              <a:rPr lang="en-US" sz="1100" dirty="0"/>
+              <a:t>AR</a:t>
+            </a:r>
+            <a:endParaRPr lang="en-US" sz="1100" b="1" dirty="0"/>
+          </a:p>
+        </p:txBody>
+      </p:sp>
+    </p:spTree>
+    <p:extLst>
+      <p:ext uri="{BB962C8B-B14F-4D97-AF65-F5344CB8AC3E}">
+        <p14:creationId xmlns:p14="http://schemas.microsoft.com/office/powerpoint/2010/main" val="1765821347"/>
+      </p:ext>
+    </p:extLst>
+  </p:cSld>
+  <p:clrMapOvr>
+    <a:masterClrMapping/>
+  </p:clrMapOvr>
+</p:sld>
+</file>
+
+<file path=ppt/slides/slide7.xml><?xml version="1.0" encoding="utf-8"?>
+<p:sld xmlns:a="http://schemas.openxmlformats.org/drawingml/2006/main" xmlns:r="http://schemas.openxmlformats.org/officeDocument/2006/relationships" xmlns:p="http://schemas.openxmlformats.org/presentationml/2006/main">
+  <p:cSld>
+    <p:spTree>
+      <p:nvGrpSpPr>
+        <p:cNvPr id="1" name="">
+          <a:extLst>
+            <a:ext uri="{FF2B5EF4-FFF2-40B4-BE49-F238E27FC236}">
               <a16:creationId xmlns:a16="http://schemas.microsoft.com/office/drawing/2014/main" id="{22833A9F-1143-B35A-9828-04A5EF283A34}"/>
             </a:ext>
           </a:extLst>

--- a/figures/fig1_diagram.pptx
+++ b/figures/fig1_diagram.pptx
@@ -265,7 +265,7 @@
           <a:p>
             <a:fld id="{75A9CF98-CC55-774D-9AE2-4D7D2CE05F38}" type="datetimeFigureOut">
               <a:rPr lang="en-US" smtClean="0"/>
-              <a:t>9/9/25</a:t>
+              <a:t>9/18/25</a:t>
             </a:fld>
             <a:endParaRPr lang="en-US"/>
           </a:p>
@@ -463,7 +463,7 @@
           <a:p>
             <a:fld id="{75A9CF98-CC55-774D-9AE2-4D7D2CE05F38}" type="datetimeFigureOut">
               <a:rPr lang="en-US" smtClean="0"/>
-              <a:t>9/9/25</a:t>
+              <a:t>9/18/25</a:t>
             </a:fld>
             <a:endParaRPr lang="en-US"/>
           </a:p>
@@ -671,7 +671,7 @@
           <a:p>
             <a:fld id="{75A9CF98-CC55-774D-9AE2-4D7D2CE05F38}" type="datetimeFigureOut">
               <a:rPr lang="en-US" smtClean="0"/>
-              <a:t>9/9/25</a:t>
+              <a:t>9/18/25</a:t>
             </a:fld>
             <a:endParaRPr lang="en-US"/>
           </a:p>
@@ -869,7 +869,7 @@
           <a:p>
             <a:fld id="{75A9CF98-CC55-774D-9AE2-4D7D2CE05F38}" type="datetimeFigureOut">
               <a:rPr lang="en-US" smtClean="0"/>
-              <a:t>9/9/25</a:t>
+              <a:t>9/18/25</a:t>
             </a:fld>
             <a:endParaRPr lang="en-US"/>
           </a:p>
@@ -1144,7 +1144,7 @@
           <a:p>
             <a:fld id="{75A9CF98-CC55-774D-9AE2-4D7D2CE05F38}" type="datetimeFigureOut">
               <a:rPr lang="en-US" smtClean="0"/>
-              <a:t>9/9/25</a:t>
+              <a:t>9/18/25</a:t>
             </a:fld>
             <a:endParaRPr lang="en-US"/>
           </a:p>
@@ -1409,7 +1409,7 @@
           <a:p>
             <a:fld id="{75A9CF98-CC55-774D-9AE2-4D7D2CE05F38}" type="datetimeFigureOut">
               <a:rPr lang="en-US" smtClean="0"/>
-              <a:t>9/9/25</a:t>
+              <a:t>9/18/25</a:t>
             </a:fld>
             <a:endParaRPr lang="en-US"/>
           </a:p>
@@ -1821,7 +1821,7 @@
           <a:p>
             <a:fld id="{75A9CF98-CC55-774D-9AE2-4D7D2CE05F38}" type="datetimeFigureOut">
               <a:rPr lang="en-US" smtClean="0"/>
-              <a:t>9/9/25</a:t>
+              <a:t>9/18/25</a:t>
             </a:fld>
             <a:endParaRPr lang="en-US"/>
           </a:p>
@@ -1962,7 +1962,7 @@
           <a:p>
             <a:fld id="{75A9CF98-CC55-774D-9AE2-4D7D2CE05F38}" type="datetimeFigureOut">
               <a:rPr lang="en-US" smtClean="0"/>
-              <a:t>9/9/25</a:t>
+              <a:t>9/18/25</a:t>
             </a:fld>
             <a:endParaRPr lang="en-US"/>
           </a:p>
@@ -2075,7 +2075,7 @@
           <a:p>
             <a:fld id="{75A9CF98-CC55-774D-9AE2-4D7D2CE05F38}" type="datetimeFigureOut">
               <a:rPr lang="en-US" smtClean="0"/>
-              <a:t>9/9/25</a:t>
+              <a:t>9/18/25</a:t>
             </a:fld>
             <a:endParaRPr lang="en-US"/>
           </a:p>
@@ -2386,7 +2386,7 @@
           <a:p>
             <a:fld id="{75A9CF98-CC55-774D-9AE2-4D7D2CE05F38}" type="datetimeFigureOut">
               <a:rPr lang="en-US" smtClean="0"/>
-              <a:t>9/9/25</a:t>
+              <a:t>9/18/25</a:t>
             </a:fld>
             <a:endParaRPr lang="en-US"/>
           </a:p>
@@ -2674,7 +2674,7 @@
           <a:p>
             <a:fld id="{75A9CF98-CC55-774D-9AE2-4D7D2CE05F38}" type="datetimeFigureOut">
               <a:rPr lang="en-US" smtClean="0"/>
-              <a:t>9/9/25</a:t>
+              <a:t>9/18/25</a:t>
             </a:fld>
             <a:endParaRPr lang="en-US"/>
           </a:p>
@@ -2915,7 +2915,7 @@
           <a:p>
             <a:fld id="{75A9CF98-CC55-774D-9AE2-4D7D2CE05F38}" type="datetimeFigureOut">
               <a:rPr lang="en-US" smtClean="0"/>
-              <a:t>9/9/25</a:t>
+              <a:t>9/18/25</a:t>
             </a:fld>
             <a:endParaRPr lang="en-US"/>
           </a:p>
@@ -7442,10 +7442,10 @@
       </p:grpSpPr>
       <p:pic>
         <p:nvPicPr>
-          <p:cNvPr id="13" name="Picture 12">
-            <a:extLst>
-              <a:ext uri="{FF2B5EF4-FFF2-40B4-BE49-F238E27FC236}">
-                <a16:creationId xmlns:a16="http://schemas.microsoft.com/office/drawing/2014/main" id="{3716017B-CF74-6DC9-C8E0-FBDC21E6C932}"/>
+          <p:cNvPr id="3" name="Picture 2">
+            <a:extLst>
+              <a:ext uri="{FF2B5EF4-FFF2-40B4-BE49-F238E27FC236}">
+                <a16:creationId xmlns:a16="http://schemas.microsoft.com/office/drawing/2014/main" id="{82EE29B0-0D1B-DD6B-BCBE-06358188E22F}"/>
               </a:ext>
             </a:extLst>
           </p:cNvPr>
@@ -7456,6 +7456,36 @@
         </p:nvPicPr>
         <p:blipFill>
           <a:blip r:embed="rId2"/>
+          <a:stretch>
+            <a:fillRect/>
+          </a:stretch>
+        </p:blipFill>
+        <p:spPr>
+          <a:xfrm>
+            <a:off x="6891762" y="1690897"/>
+            <a:ext cx="5300238" cy="3978053"/>
+          </a:xfrm>
+          <a:prstGeom prst="rect">
+            <a:avLst/>
+          </a:prstGeom>
+        </p:spPr>
+      </p:pic>
+      <p:pic>
+        <p:nvPicPr>
+          <p:cNvPr id="13" name="Picture 12">
+            <a:extLst>
+              <a:ext uri="{FF2B5EF4-FFF2-40B4-BE49-F238E27FC236}">
+                <a16:creationId xmlns:a16="http://schemas.microsoft.com/office/drawing/2014/main" id="{3716017B-CF74-6DC9-C8E0-FBDC21E6C932}"/>
+              </a:ext>
+            </a:extLst>
+          </p:cNvPr>
+          <p:cNvPicPr>
+            <a:picLocks noChangeAspect="1"/>
+          </p:cNvPicPr>
+          <p:nvPr/>
+        </p:nvPicPr>
+        <p:blipFill>
+          <a:blip r:embed="rId3"/>
           <a:srcRect l="1972" r="26536"/>
           <a:stretch>
             <a:fillRect/>
@@ -7486,7 +7516,7 @@
           <p:nvPr/>
         </p:nvPicPr>
         <p:blipFill>
-          <a:blip r:embed="rId3"/>
+          <a:blip r:embed="rId4"/>
           <a:srcRect l="2193" r="24776"/>
           <a:stretch>
             <a:fillRect/>
@@ -7496,37 +7526,6 @@
           <a:xfrm>
             <a:off x="3745010" y="1842268"/>
             <a:ext cx="3576270" cy="3675313"/>
-          </a:xfrm>
-          <a:prstGeom prst="rect">
-            <a:avLst/>
-          </a:prstGeom>
-        </p:spPr>
-      </p:pic>
-      <p:pic>
-        <p:nvPicPr>
-          <p:cNvPr id="17" name="Picture 16">
-            <a:extLst>
-              <a:ext uri="{FF2B5EF4-FFF2-40B4-BE49-F238E27FC236}">
-                <a16:creationId xmlns:a16="http://schemas.microsoft.com/office/drawing/2014/main" id="{9C2722EB-82CC-99AE-B645-39EB95BABF92}"/>
-              </a:ext>
-            </a:extLst>
-          </p:cNvPr>
-          <p:cNvPicPr>
-            <a:picLocks noChangeAspect="1"/>
-          </p:cNvPicPr>
-          <p:nvPr/>
-        </p:nvPicPr>
-        <p:blipFill>
-          <a:blip r:embed="rId4"/>
-          <a:srcRect l="8791"/>
-          <a:stretch>
-            <a:fillRect/>
-          </a:stretch>
-        </p:blipFill>
-        <p:spPr>
-          <a:xfrm>
-            <a:off x="7321280" y="1842268"/>
-            <a:ext cx="4387403" cy="3610329"/>
           </a:xfrm>
           <a:prstGeom prst="rect">
             <a:avLst/>
@@ -8288,37 +8287,6 @@
           </a:p>
         </p:txBody>
       </p:sp>
-      <p:pic>
-        <p:nvPicPr>
-          <p:cNvPr id="34" name="Picture 33">
-            <a:extLst>
-              <a:ext uri="{FF2B5EF4-FFF2-40B4-BE49-F238E27FC236}">
-                <a16:creationId xmlns:a16="http://schemas.microsoft.com/office/drawing/2014/main" id="{EAB931B3-373B-3E1C-3561-65BD0004AAEA}"/>
-              </a:ext>
-            </a:extLst>
-          </p:cNvPr>
-          <p:cNvPicPr>
-            <a:picLocks noChangeAspect="1"/>
-          </p:cNvPicPr>
-          <p:nvPr/>
-        </p:nvPicPr>
-        <p:blipFill>
-          <a:blip r:embed="rId5"/>
-          <a:srcRect l="25163" t="41191" r="26613" b="34140"/>
-          <a:stretch>
-            <a:fillRect/>
-          </a:stretch>
-        </p:blipFill>
-        <p:spPr>
-          <a:xfrm>
-            <a:off x="1419874" y="5734050"/>
-            <a:ext cx="6541216" cy="1003862"/>
-          </a:xfrm>
-          <a:prstGeom prst="rect">
-            <a:avLst/>
-          </a:prstGeom>
-        </p:spPr>
-      </p:pic>
       <p:sp>
         <p:nvSpPr>
           <p:cNvPr id="3" name="Rectangle 2">
@@ -8396,6 +8364,37 @@
           <a:xfrm>
             <a:off x="4435431" y="3099707"/>
             <a:ext cx="1013798" cy="128762"/>
+          </a:xfrm>
+          <a:prstGeom prst="rect">
+            <a:avLst/>
+          </a:prstGeom>
+        </p:spPr>
+      </p:pic>
+      <p:pic>
+        <p:nvPicPr>
+          <p:cNvPr id="5" name="Picture 4">
+            <a:extLst>
+              <a:ext uri="{FF2B5EF4-FFF2-40B4-BE49-F238E27FC236}">
+                <a16:creationId xmlns:a16="http://schemas.microsoft.com/office/drawing/2014/main" id="{180ECAD3-0C79-C496-25E1-B5202C24BE53}"/>
+              </a:ext>
+            </a:extLst>
+          </p:cNvPr>
+          <p:cNvPicPr>
+            <a:picLocks noChangeAspect="1"/>
+          </p:cNvPicPr>
+          <p:nvPr/>
+        </p:nvPicPr>
+        <p:blipFill>
+          <a:blip r:embed="rId5"/>
+          <a:srcRect l="24438" t="41096" r="25993" b="34290"/>
+          <a:stretch>
+            <a:fillRect/>
+          </a:stretch>
+        </p:blipFill>
+        <p:spPr>
+          <a:xfrm>
+            <a:off x="1312945" y="5696717"/>
+            <a:ext cx="6721583" cy="1001236"/>
           </a:xfrm>
           <a:prstGeom prst="rect">
             <a:avLst/>
@@ -8680,10 +8679,10 @@
       </p:grpSpPr>
       <p:pic>
         <p:nvPicPr>
-          <p:cNvPr id="15" name="Picture 14">
-            <a:extLst>
-              <a:ext uri="{FF2B5EF4-FFF2-40B4-BE49-F238E27FC236}">
-                <a16:creationId xmlns:a16="http://schemas.microsoft.com/office/drawing/2014/main" id="{CA21A4DF-2FD2-2536-3AD6-3FC70E6011CD}"/>
+          <p:cNvPr id="3" name="Picture 2">
+            <a:extLst>
+              <a:ext uri="{FF2B5EF4-FFF2-40B4-BE49-F238E27FC236}">
+                <a16:creationId xmlns:a16="http://schemas.microsoft.com/office/drawing/2014/main" id="{98F1A68F-3818-B41E-CE5F-3A2CD714ACA6}"/>
               </a:ext>
             </a:extLst>
           </p:cNvPr>
@@ -8700,8 +8699,8 @@
         </p:blipFill>
         <p:spPr>
           <a:xfrm>
-            <a:off x="2545492" y="4611031"/>
-            <a:ext cx="4493938" cy="2246969"/>
+            <a:off x="2534657" y="4593449"/>
+            <a:ext cx="4493937" cy="2246969"/>
           </a:xfrm>
           <a:prstGeom prst="rect">
             <a:avLst/>
@@ -8926,10 +8925,10 @@
       </p:grpSpPr>
       <p:pic>
         <p:nvPicPr>
-          <p:cNvPr id="3" name="Picture 2">
-            <a:extLst>
-              <a:ext uri="{FF2B5EF4-FFF2-40B4-BE49-F238E27FC236}">
-                <a16:creationId xmlns:a16="http://schemas.microsoft.com/office/drawing/2014/main" id="{5A694F39-970F-97C9-AAEF-421C6356269C}"/>
+          <p:cNvPr id="18" name="Picture 17">
+            <a:extLst>
+              <a:ext uri="{FF2B5EF4-FFF2-40B4-BE49-F238E27FC236}">
+                <a16:creationId xmlns:a16="http://schemas.microsoft.com/office/drawing/2014/main" id="{DAA82645-09CB-B803-B916-9EB17C399C9B}"/>
               </a:ext>
             </a:extLst>
           </p:cNvPr>
@@ -8940,14 +8939,45 @@
         </p:nvPicPr>
         <p:blipFill>
           <a:blip r:embed="rId2"/>
+          <a:srcRect t="42026" b="33007"/>
           <a:stretch>
             <a:fillRect/>
           </a:stretch>
         </p:blipFill>
         <p:spPr>
           <a:xfrm>
-            <a:off x="1498630" y="167387"/>
-            <a:ext cx="6400388" cy="2880175"/>
+            <a:off x="1410755" y="5685184"/>
+            <a:ext cx="6550336" cy="981249"/>
+          </a:xfrm>
+          <a:prstGeom prst="rect">
+            <a:avLst/>
+          </a:prstGeom>
+        </p:spPr>
+      </p:pic>
+      <p:pic>
+        <p:nvPicPr>
+          <p:cNvPr id="8" name="Picture 7">
+            <a:extLst>
+              <a:ext uri="{FF2B5EF4-FFF2-40B4-BE49-F238E27FC236}">
+                <a16:creationId xmlns:a16="http://schemas.microsoft.com/office/drawing/2014/main" id="{88F8CDB0-6A4E-9F02-7527-865679F6B129}"/>
+              </a:ext>
+            </a:extLst>
+          </p:cNvPr>
+          <p:cNvPicPr>
+            <a:picLocks noChangeAspect="1"/>
+          </p:cNvPicPr>
+          <p:nvPr/>
+        </p:nvPicPr>
+        <p:blipFill>
+          <a:blip r:embed="rId3"/>
+          <a:stretch>
+            <a:fillRect/>
+          </a:stretch>
+        </p:blipFill>
+        <p:spPr>
+          <a:xfrm>
+            <a:off x="1663039" y="143306"/>
+            <a:ext cx="6054497" cy="3027249"/>
           </a:xfrm>
           <a:prstGeom prst="rect">
             <a:avLst/>
@@ -9012,7 +9042,7 @@
           <p:nvPr/>
         </p:nvPicPr>
         <p:blipFill>
-          <a:blip r:embed="rId3"/>
+          <a:blip r:embed="rId4"/>
           <a:srcRect t="32153" b="35673"/>
           <a:stretch>
             <a:fillRect/>
@@ -9198,7 +9228,7 @@
           <p:nvPr/>
         </p:nvPicPr>
         <p:blipFill>
-          <a:blip r:embed="rId4"/>
+          <a:blip r:embed="rId5"/>
           <a:srcRect t="41998" b="36391"/>
           <a:stretch>
             <a:fillRect/>
@@ -9208,37 +9238,6 @@
           <a:xfrm>
             <a:off x="1419874" y="4611850"/>
             <a:ext cx="6541216" cy="848153"/>
-          </a:xfrm>
-          <a:prstGeom prst="rect">
-            <a:avLst/>
-          </a:prstGeom>
-        </p:spPr>
-      </p:pic>
-      <p:pic>
-        <p:nvPicPr>
-          <p:cNvPr id="9" name="Picture 8">
-            <a:extLst>
-              <a:ext uri="{FF2B5EF4-FFF2-40B4-BE49-F238E27FC236}">
-                <a16:creationId xmlns:a16="http://schemas.microsoft.com/office/drawing/2014/main" id="{28404A84-4B15-A024-278A-A2F3821DBF13}"/>
-              </a:ext>
-            </a:extLst>
-          </p:cNvPr>
-          <p:cNvPicPr>
-            <a:picLocks noChangeAspect="1"/>
-          </p:cNvPicPr>
-          <p:nvPr/>
-        </p:nvPicPr>
-        <p:blipFill>
-          <a:blip r:embed="rId5"/>
-          <a:srcRect t="41998" b="35745"/>
-          <a:stretch>
-            <a:fillRect/>
-          </a:stretch>
-        </p:blipFill>
-        <p:spPr>
-          <a:xfrm>
-            <a:off x="1419874" y="5688559"/>
-            <a:ext cx="6541216" cy="873549"/>
           </a:xfrm>
           <a:prstGeom prst="rect">
             <a:avLst/>

--- a/figures/fig1_diagram.pptx
+++ b/figures/fig1_diagram.pptx
@@ -265,7 +265,7 @@
           <a:p>
             <a:fld id="{75A9CF98-CC55-774D-9AE2-4D7D2CE05F38}" type="datetimeFigureOut">
               <a:rPr lang="en-US" smtClean="0"/>
-              <a:t>9/18/25</a:t>
+              <a:t>10/8/25</a:t>
             </a:fld>
             <a:endParaRPr lang="en-US"/>
           </a:p>
@@ -463,7 +463,7 @@
           <a:p>
             <a:fld id="{75A9CF98-CC55-774D-9AE2-4D7D2CE05F38}" type="datetimeFigureOut">
               <a:rPr lang="en-US" smtClean="0"/>
-              <a:t>9/18/25</a:t>
+              <a:t>10/8/25</a:t>
             </a:fld>
             <a:endParaRPr lang="en-US"/>
           </a:p>
@@ -671,7 +671,7 @@
           <a:p>
             <a:fld id="{75A9CF98-CC55-774D-9AE2-4D7D2CE05F38}" type="datetimeFigureOut">
               <a:rPr lang="en-US" smtClean="0"/>
-              <a:t>9/18/25</a:t>
+              <a:t>10/8/25</a:t>
             </a:fld>
             <a:endParaRPr lang="en-US"/>
           </a:p>
@@ -869,7 +869,7 @@
           <a:p>
             <a:fld id="{75A9CF98-CC55-774D-9AE2-4D7D2CE05F38}" type="datetimeFigureOut">
               <a:rPr lang="en-US" smtClean="0"/>
-              <a:t>9/18/25</a:t>
+              <a:t>10/8/25</a:t>
             </a:fld>
             <a:endParaRPr lang="en-US"/>
           </a:p>
@@ -1144,7 +1144,7 @@
           <a:p>
             <a:fld id="{75A9CF98-CC55-774D-9AE2-4D7D2CE05F38}" type="datetimeFigureOut">
               <a:rPr lang="en-US" smtClean="0"/>
-              <a:t>9/18/25</a:t>
+              <a:t>10/8/25</a:t>
             </a:fld>
             <a:endParaRPr lang="en-US"/>
           </a:p>
@@ -1409,7 +1409,7 @@
           <a:p>
             <a:fld id="{75A9CF98-CC55-774D-9AE2-4D7D2CE05F38}" type="datetimeFigureOut">
               <a:rPr lang="en-US" smtClean="0"/>
-              <a:t>9/18/25</a:t>
+              <a:t>10/8/25</a:t>
             </a:fld>
             <a:endParaRPr lang="en-US"/>
           </a:p>
@@ -1821,7 +1821,7 @@
           <a:p>
             <a:fld id="{75A9CF98-CC55-774D-9AE2-4D7D2CE05F38}" type="datetimeFigureOut">
               <a:rPr lang="en-US" smtClean="0"/>
-              <a:t>9/18/25</a:t>
+              <a:t>10/8/25</a:t>
             </a:fld>
             <a:endParaRPr lang="en-US"/>
           </a:p>
@@ -1962,7 +1962,7 @@
           <a:p>
             <a:fld id="{75A9CF98-CC55-774D-9AE2-4D7D2CE05F38}" type="datetimeFigureOut">
               <a:rPr lang="en-US" smtClean="0"/>
-              <a:t>9/18/25</a:t>
+              <a:t>10/8/25</a:t>
             </a:fld>
             <a:endParaRPr lang="en-US"/>
           </a:p>
@@ -2075,7 +2075,7 @@
           <a:p>
             <a:fld id="{75A9CF98-CC55-774D-9AE2-4D7D2CE05F38}" type="datetimeFigureOut">
               <a:rPr lang="en-US" smtClean="0"/>
-              <a:t>9/18/25</a:t>
+              <a:t>10/8/25</a:t>
             </a:fld>
             <a:endParaRPr lang="en-US"/>
           </a:p>
@@ -2386,7 +2386,7 @@
           <a:p>
             <a:fld id="{75A9CF98-CC55-774D-9AE2-4D7D2CE05F38}" type="datetimeFigureOut">
               <a:rPr lang="en-US" smtClean="0"/>
-              <a:t>9/18/25</a:t>
+              <a:t>10/8/25</a:t>
             </a:fld>
             <a:endParaRPr lang="en-US"/>
           </a:p>
@@ -2674,7 +2674,7 @@
           <a:p>
             <a:fld id="{75A9CF98-CC55-774D-9AE2-4D7D2CE05F38}" type="datetimeFigureOut">
               <a:rPr lang="en-US" smtClean="0"/>
-              <a:t>9/18/25</a:t>
+              <a:t>10/8/25</a:t>
             </a:fld>
             <a:endParaRPr lang="en-US"/>
           </a:p>
@@ -2915,7 +2915,7 @@
           <a:p>
             <a:fld id="{75A9CF98-CC55-774D-9AE2-4D7D2CE05F38}" type="datetimeFigureOut">
               <a:rPr lang="en-US" smtClean="0"/>
-              <a:t>9/18/25</a:t>
+              <a:t>10/8/25</a:t>
             </a:fld>
             <a:endParaRPr lang="en-US"/>
           </a:p>
@@ -3334,10 +3334,10 @@
       </p:grpSpPr>
       <p:grpSp>
         <p:nvGrpSpPr>
-          <p:cNvPr id="51" name="Group 50">
-            <a:extLst>
-              <a:ext uri="{FF2B5EF4-FFF2-40B4-BE49-F238E27FC236}">
-                <a16:creationId xmlns:a16="http://schemas.microsoft.com/office/drawing/2014/main" id="{1F933198-D151-ACB7-7ECE-CB8000C78E49}"/>
+          <p:cNvPr id="43" name="Group 42">
+            <a:extLst>
+              <a:ext uri="{FF2B5EF4-FFF2-40B4-BE49-F238E27FC236}">
+                <a16:creationId xmlns:a16="http://schemas.microsoft.com/office/drawing/2014/main" id="{2A6A0A46-B159-BB3F-829A-864D74E9EEBF}"/>
               </a:ext>
             </a:extLst>
           </p:cNvPr>
@@ -3346,345 +3346,94 @@
         </p:nvGrpSpPr>
         <p:grpSpPr>
           <a:xfrm>
-            <a:off x="428264" y="514975"/>
-            <a:ext cx="7257736" cy="5828049"/>
-            <a:chOff x="428264" y="514975"/>
-            <a:chExt cx="7257736" cy="5828049"/>
+            <a:off x="428264" y="4743499"/>
+            <a:ext cx="7257736" cy="1599525"/>
+            <a:chOff x="2397714" y="2651360"/>
+            <a:chExt cx="12839743" cy="2494384"/>
           </a:xfrm>
         </p:grpSpPr>
-        <p:grpSp>
-          <p:nvGrpSpPr>
-            <p:cNvPr id="43" name="Group 42">
-              <a:extLst>
-                <a:ext uri="{FF2B5EF4-FFF2-40B4-BE49-F238E27FC236}">
-                  <a16:creationId xmlns:a16="http://schemas.microsoft.com/office/drawing/2014/main" id="{2A6A0A46-B159-BB3F-829A-864D74E9EEBF}"/>
-                </a:ext>
-              </a:extLst>
-            </p:cNvPr>
-            <p:cNvGrpSpPr/>
-            <p:nvPr/>
-          </p:nvGrpSpPr>
-          <p:grpSpPr>
-            <a:xfrm>
-              <a:off x="428264" y="4743499"/>
-              <a:ext cx="7257736" cy="1599525"/>
-              <a:chOff x="2397714" y="2651360"/>
-              <a:chExt cx="12839742" cy="2494384"/>
-            </a:xfrm>
-          </p:grpSpPr>
-          <mc:AlternateContent xmlns:mc="http://schemas.openxmlformats.org/markup-compatibility/2006" xmlns:a14="http://schemas.microsoft.com/office/drawing/2010/main">
-            <mc:Choice Requires="a14">
-              <p:sp>
-                <p:nvSpPr>
-                  <p:cNvPr id="44" name="TextBox 43">
-                    <a:extLst>
-                      <a:ext uri="{FF2B5EF4-FFF2-40B4-BE49-F238E27FC236}">
-                        <a16:creationId xmlns:a16="http://schemas.microsoft.com/office/drawing/2014/main" id="{B5D75DFC-C9AC-7488-D035-FDAF2B520D25}"/>
-                      </a:ext>
-                    </a:extLst>
-                  </p:cNvPr>
-                  <p:cNvSpPr txBox="1"/>
-                  <p:nvPr/>
-                </p:nvSpPr>
-                <p:spPr>
-                  <a:xfrm>
-                    <a:off x="2397714" y="2702605"/>
-                    <a:ext cx="3997270" cy="2116338"/>
-                  </a:xfrm>
-                  <a:prstGeom prst="rect">
-                    <a:avLst/>
-                  </a:prstGeom>
-                  <a:noFill/>
-                </p:spPr>
-                <p:txBody>
-                  <a:bodyPr wrap="square" rtlCol="0">
-                    <a:spAutoFit/>
-                  </a:bodyPr>
-                  <a:lstStyle/>
-                  <a:p>
-                    <a:pPr algn="ctr"/>
-                    <a:r>
-                      <a:rPr lang="en-US" b="1" dirty="0">
-                        <a:solidFill>
-                          <a:schemeClr val="tx1"/>
-                        </a:solidFill>
-                        <a:latin typeface="Aptos" panose="020B0004020202020204" pitchFamily="34" charset="0"/>
-                      </a:rPr>
-                      <a:t>1. </a:t>
-                    </a:r>
-                    <a:r>
-                      <a:rPr lang="en-US" b="1" dirty="0" err="1">
-                        <a:solidFill>
-                          <a:schemeClr val="tx1"/>
-                        </a:solidFill>
-                        <a:latin typeface="Aptos" panose="020B0004020202020204" pitchFamily="34" charset="0"/>
-                      </a:rPr>
-                      <a:t>SINDy</a:t>
-                    </a:r>
-                    <a:endParaRPr lang="en-US" b="1" dirty="0">
+        <mc:AlternateContent xmlns:mc="http://schemas.openxmlformats.org/markup-compatibility/2006">
+          <mc:Choice xmlns:a14="http://schemas.microsoft.com/office/drawing/2010/main" Requires="a14">
+            <p:sp>
+              <p:nvSpPr>
+                <p:cNvPr id="44" name="TextBox 43">
+                  <a:extLst>
+                    <a:ext uri="{FF2B5EF4-FFF2-40B4-BE49-F238E27FC236}">
+                      <a16:creationId xmlns:a16="http://schemas.microsoft.com/office/drawing/2014/main" id="{B5D75DFC-C9AC-7488-D035-FDAF2B520D25}"/>
+                    </a:ext>
+                  </a:extLst>
+                </p:cNvPr>
+                <p:cNvSpPr txBox="1"/>
+                <p:nvPr/>
+              </p:nvSpPr>
+              <p:spPr>
+                <a:xfrm>
+                  <a:off x="2397714" y="2702605"/>
+                  <a:ext cx="3997270" cy="2116338"/>
+                </a:xfrm>
+                <a:prstGeom prst="rect">
+                  <a:avLst/>
+                </a:prstGeom>
+                <a:noFill/>
+              </p:spPr>
+              <p:txBody>
+                <a:bodyPr wrap="square" rtlCol="0">
+                  <a:spAutoFit/>
+                </a:bodyPr>
+                <a:lstStyle/>
+                <a:p>
+                  <a:pPr algn="ctr"/>
+                  <a:r>
+                    <a:rPr lang="en-US" b="1" dirty="0">
                       <a:solidFill>
                         <a:schemeClr val="tx1"/>
                       </a:solidFill>
                       <a:latin typeface="Aptos" panose="020B0004020202020204" pitchFamily="34" charset="0"/>
-                    </a:endParaRPr>
-                  </a:p>
-                  <a:p>
-                    <a:pPr algn="ctr"/>
-                    <a:endParaRPr lang="en-US" b="1" dirty="0">
+                    </a:rPr>
+                    <a:t>1. </a:t>
+                  </a:r>
+                  <a:r>
+                    <a:rPr lang="en-US" b="1" dirty="0" err="1">
                       <a:solidFill>
                         <a:schemeClr val="tx1"/>
                       </a:solidFill>
                       <a:latin typeface="Aptos" panose="020B0004020202020204" pitchFamily="34" charset="0"/>
-                    </a:endParaRPr>
-                  </a:p>
-                  <a:p>
-                    <a:pPr algn="ctr"/>
-                    <a:endParaRPr lang="en-US" sz="1200" b="1" dirty="0">
-                      <a:solidFill>
-                        <a:schemeClr val="tx1"/>
-                      </a:solidFill>
-                      <a:latin typeface="Aptos" panose="020B0004020202020204" pitchFamily="34" charset="0"/>
-                    </a:endParaRPr>
-                  </a:p>
-                  <a:p>
-                    <a:pPr algn="ctr"/>
-                    <a14:m>
-                      <m:oMathPara xmlns:m="http://schemas.openxmlformats.org/officeDocument/2006/math">
-                        <m:oMathParaPr>
-                          <m:jc m:val="centerGroup"/>
-                        </m:oMathParaPr>
-                        <m:oMath xmlns:m="http://schemas.openxmlformats.org/officeDocument/2006/math">
-                          <m:f>
-                            <m:fPr>
-                              <m:ctrlPr>
-                                <a:rPr lang="en-US" b="1" i="1" smtClean="0">
-                                  <a:solidFill>
-                                    <a:schemeClr val="tx1"/>
-                                  </a:solidFill>
-                                  <a:latin typeface="Cambria Math" panose="02040503050406030204" pitchFamily="18" charset="0"/>
-                                </a:rPr>
-                              </m:ctrlPr>
-                            </m:fPr>
-                            <m:num>
-                              <m:r>
-                                <a:rPr lang="en-US" b="1" i="1" smtClean="0">
-                                  <a:solidFill>
-                                    <a:schemeClr val="tx1"/>
-                                  </a:solidFill>
-                                  <a:latin typeface="Cambria Math" panose="02040503050406030204" pitchFamily="18" charset="0"/>
-                                </a:rPr>
-                                <m:t>𝒅𝒛</m:t>
-                              </m:r>
-                            </m:num>
-                            <m:den>
-                              <m:r>
-                                <a:rPr lang="en-US" b="1" i="1" smtClean="0">
-                                  <a:solidFill>
-                                    <a:schemeClr val="tx1"/>
-                                  </a:solidFill>
-                                  <a:latin typeface="Cambria Math" panose="02040503050406030204" pitchFamily="18" charset="0"/>
-                                </a:rPr>
-                                <m:t>𝒅𝒕</m:t>
-                              </m:r>
-                            </m:den>
-                          </m:f>
-                          <m:r>
-                            <a:rPr lang="en-US" b="1" i="1" smtClean="0">
-                              <a:solidFill>
-                                <a:schemeClr val="tx1"/>
-                              </a:solidFill>
-                              <a:latin typeface="Cambria Math" panose="02040503050406030204" pitchFamily="18" charset="0"/>
-                            </a:rPr>
-                            <m:t>=</m:t>
-                          </m:r>
-                          <m:r>
-                            <a:rPr lang="en-US" b="1" i="0" smtClean="0">
-                              <a:solidFill>
-                                <a:schemeClr val="tx1"/>
-                              </a:solidFill>
-                              <a:latin typeface="Cambria Math" panose="02040503050406030204" pitchFamily="18" charset="0"/>
-                            </a:rPr>
-                            <m:t>𝚽</m:t>
-                          </m:r>
-                          <m:d>
-                            <m:dPr>
-                              <m:ctrlPr>
-                                <a:rPr lang="en-US" b="1" i="1" smtClean="0">
-                                  <a:solidFill>
-                                    <a:schemeClr val="tx1"/>
-                                  </a:solidFill>
-                                  <a:latin typeface="Cambria Math" panose="02040503050406030204" pitchFamily="18" charset="0"/>
-                                </a:rPr>
-                              </m:ctrlPr>
-                            </m:dPr>
-                            <m:e>
-                              <m:r>
-                                <a:rPr lang="en-US" b="1" i="0" smtClean="0">
-                                  <a:solidFill>
-                                    <a:schemeClr val="tx1"/>
-                                  </a:solidFill>
-                                  <a:latin typeface="Cambria Math" panose="02040503050406030204" pitchFamily="18" charset="0"/>
-                                </a:rPr>
-                                <m:t>𝐳</m:t>
-                              </m:r>
-                            </m:e>
-                          </m:d>
-                          <m:r>
-                            <a:rPr lang="en-US" b="1" i="1" smtClean="0">
-                              <a:solidFill>
-                                <a:schemeClr val="tx1"/>
-                              </a:solidFill>
-                              <a:latin typeface="Cambria Math" panose="02040503050406030204" pitchFamily="18" charset="0"/>
-                            </a:rPr>
-                            <m:t>𝝃</m:t>
-                          </m:r>
-                        </m:oMath>
-                      </m:oMathPara>
-                    </a14:m>
-                    <a:endParaRPr lang="en-US" b="1" dirty="0">
-                      <a:solidFill>
-                        <a:schemeClr val="tx1"/>
-                      </a:solidFill>
-                      <a:latin typeface="Aptos" panose="020B0004020202020204" pitchFamily="34" charset="0"/>
-                    </a:endParaRPr>
-                  </a:p>
-                </p:txBody>
-              </p:sp>
-            </mc:Choice>
-            <mc:Fallback xmlns="">
-              <p:sp>
-                <p:nvSpPr>
-                  <p:cNvPr id="44" name="TextBox 43">
-                    <a:extLst>
-                      <a:ext uri="{FF2B5EF4-FFF2-40B4-BE49-F238E27FC236}">
-                        <a16:creationId xmlns:a16="http://schemas.microsoft.com/office/drawing/2014/main" id="{B5D75DFC-C9AC-7488-D035-FDAF2B520D25}"/>
-                      </a:ext>
-                    </a:extLst>
-                  </p:cNvPr>
-                  <p:cNvSpPr txBox="1">
-                    <a:spLocks noRot="1" noChangeAspect="1" noMove="1" noResize="1" noEditPoints="1" noAdjustHandles="1" noChangeArrowheads="1" noChangeShapeType="1" noTextEdit="1"/>
-                  </p:cNvSpPr>
-                  <p:nvPr/>
-                </p:nvSpPr>
-                <p:spPr>
-                  <a:xfrm>
-                    <a:off x="2397714" y="2702605"/>
-                    <a:ext cx="3997270" cy="2116338"/>
-                  </a:xfrm>
-                  <a:prstGeom prst="rect">
-                    <a:avLst/>
-                  </a:prstGeom>
-                  <a:blipFill>
-                    <a:blip r:embed="rId3"/>
-                    <a:stretch>
-                      <a:fillRect t="-2804" b="-1869"/>
-                    </a:stretch>
-                  </a:blipFill>
-                </p:spPr>
-                <p:txBody>
-                  <a:bodyPr/>
-                  <a:lstStyle/>
-                  <a:p>
-                    <a:r>
-                      <a:rPr lang="en-US">
-                        <a:noFill/>
-                      </a:rPr>
-                      <a:t> </a:t>
-                    </a:r>
-                  </a:p>
-                </p:txBody>
-              </p:sp>
-            </mc:Fallback>
-          </mc:AlternateContent>
-          <mc:AlternateContent xmlns:mc="http://schemas.openxmlformats.org/markup-compatibility/2006" xmlns:a14="http://schemas.microsoft.com/office/drawing/2010/main">
-            <mc:Choice Requires="a14">
-              <p:sp>
-                <p:nvSpPr>
-                  <p:cNvPr id="45" name="TextBox 44">
-                    <a:extLst>
-                      <a:ext uri="{FF2B5EF4-FFF2-40B4-BE49-F238E27FC236}">
-                        <a16:creationId xmlns:a16="http://schemas.microsoft.com/office/drawing/2014/main" id="{DB0B8590-04C9-31C2-9D9A-323B479DD323}"/>
-                      </a:ext>
-                    </a:extLst>
-                  </p:cNvPr>
-                  <p:cNvSpPr txBox="1"/>
-                  <p:nvPr/>
-                </p:nvSpPr>
-                <p:spPr>
-                  <a:xfrm>
-                    <a:off x="6342476" y="2702479"/>
-                    <a:ext cx="3997270" cy="2070342"/>
-                  </a:xfrm>
-                  <a:prstGeom prst="rect">
-                    <a:avLst/>
-                  </a:prstGeom>
-                  <a:noFill/>
-                </p:spPr>
-                <p:txBody>
-                  <a:bodyPr wrap="square" rtlCol="0">
-                    <a:spAutoFit/>
-                  </a:bodyPr>
-                  <a:lstStyle/>
-                  <a:p>
-                    <a:pPr algn="ctr"/>
-                    <a:r>
-                      <a:rPr lang="en-US" b="1" dirty="0">
-                        <a:solidFill>
-                          <a:schemeClr val="tx1"/>
-                        </a:solidFill>
-                        <a:latin typeface="Aptos" panose="020B0004020202020204" pitchFamily="34" charset="0"/>
-                      </a:rPr>
-                      <a:t>2. NN-driven</a:t>
-                    </a:r>
-                  </a:p>
-                  <a:p>
-                    <a:pPr algn="ctr"/>
-                    <a:endParaRPr lang="en-US" b="1" dirty="0">
-                      <a:solidFill>
-                        <a:schemeClr val="tx1"/>
-                      </a:solidFill>
-                      <a:latin typeface="Aptos" panose="020B0004020202020204" pitchFamily="34" charset="0"/>
-                    </a:endParaRPr>
-                  </a:p>
-                  <a:p>
-                    <a:pPr algn="ctr"/>
-                    <a:endParaRPr lang="en-US" b="1" dirty="0">
-                      <a:solidFill>
-                        <a:schemeClr val="tx1"/>
-                      </a:solidFill>
-                      <a:latin typeface="Aptos" panose="020B0004020202020204" pitchFamily="34" charset="0"/>
-                    </a:endParaRPr>
-                  </a:p>
-                  <a:p>
-                    <a14:m>
+                    </a:rPr>
+                    <a:t>SINDy</a:t>
+                  </a:r>
+                  <a:endParaRPr lang="en-US" b="1" dirty="0">
+                    <a:solidFill>
+                      <a:schemeClr val="tx1"/>
+                    </a:solidFill>
+                    <a:latin typeface="Aptos" panose="020B0004020202020204" pitchFamily="34" charset="0"/>
+                  </a:endParaRPr>
+                </a:p>
+                <a:p>
+                  <a:pPr algn="ctr"/>
+                  <a:endParaRPr lang="en-US" b="1" dirty="0">
+                    <a:solidFill>
+                      <a:schemeClr val="tx1"/>
+                    </a:solidFill>
+                    <a:latin typeface="Aptos" panose="020B0004020202020204" pitchFamily="34" charset="0"/>
+                  </a:endParaRPr>
+                </a:p>
+                <a:p>
+                  <a:pPr algn="ctr"/>
+                  <a:endParaRPr lang="en-US" sz="1200" b="1" dirty="0">
+                    <a:solidFill>
+                      <a:schemeClr val="tx1"/>
+                    </a:solidFill>
+                    <a:latin typeface="Aptos" panose="020B0004020202020204" pitchFamily="34" charset="0"/>
+                  </a:endParaRPr>
+                </a:p>
+                <a:p>
+                  <a:pPr algn="ctr"/>
+                  <a14:m>
+                    <m:oMathPara xmlns:m="http://schemas.openxmlformats.org/officeDocument/2006/math">
+                      <m:oMathParaPr>
+                        <m:jc m:val="centerGroup"/>
+                      </m:oMathParaPr>
                       <m:oMath xmlns:m="http://schemas.openxmlformats.org/officeDocument/2006/math">
-                        <m:r>
-                          <a:rPr lang="en-US" b="1" i="1" smtClean="0">
-                            <a:solidFill>
-                              <a:schemeClr val="tx1"/>
-                            </a:solidFill>
-                            <a:latin typeface="Cambria Math" panose="02040503050406030204" pitchFamily="18" charset="0"/>
-                          </a:rPr>
-                          <m:t>   </m:t>
-                        </m:r>
-                        <m:r>
-                          <a:rPr lang="en-US" b="1" i="1" smtClean="0">
-                            <a:solidFill>
-                              <a:schemeClr val="tx1"/>
-                            </a:solidFill>
-                            <a:latin typeface="Cambria Math" panose="02040503050406030204" pitchFamily="18" charset="0"/>
-                          </a:rPr>
-                          <m:t>𝒛</m:t>
-                        </m:r>
-                        <m:r>
-                          <a:rPr lang="en-US" b="1" i="1" smtClean="0">
-                            <a:solidFill>
-                              <a:schemeClr val="tx1"/>
-                            </a:solidFill>
-                            <a:latin typeface="Cambria Math" panose="02040503050406030204" pitchFamily="18" charset="0"/>
-                          </a:rPr>
-                          <m:t>                                </m:t>
-                        </m:r>
                         <m:f>
                           <m:fPr>
                             <m:ctrlPr>
@@ -3719,188 +3468,26 @@
                             </m:r>
                           </m:den>
                         </m:f>
-                      </m:oMath>
-                    </a14:m>
-                    <a:r>
-                      <a:rPr lang="en-US" b="1" dirty="0">
-                        <a:solidFill>
-                          <a:schemeClr val="tx1"/>
-                        </a:solidFill>
-                        <a:latin typeface="Aptos" panose="020B0004020202020204" pitchFamily="34" charset="0"/>
-                      </a:rPr>
-                      <a:t>   </a:t>
-                    </a:r>
-                  </a:p>
-                </p:txBody>
-              </p:sp>
-            </mc:Choice>
-            <mc:Fallback xmlns="">
-              <p:sp>
-                <p:nvSpPr>
-                  <p:cNvPr id="45" name="TextBox 44">
-                    <a:extLst>
-                      <a:ext uri="{FF2B5EF4-FFF2-40B4-BE49-F238E27FC236}">
-                        <a16:creationId xmlns:a16="http://schemas.microsoft.com/office/drawing/2014/main" id="{DB0B8590-04C9-31C2-9D9A-323B479DD323}"/>
-                      </a:ext>
-                    </a:extLst>
-                  </p:cNvPr>
-                  <p:cNvSpPr txBox="1">
-                    <a:spLocks noRot="1" noChangeAspect="1" noMove="1" noResize="1" noEditPoints="1" noAdjustHandles="1" noChangeArrowheads="1" noChangeShapeType="1" noTextEdit="1"/>
-                  </p:cNvSpPr>
-                  <p:nvPr/>
-                </p:nvSpPr>
-                <p:spPr>
-                  <a:xfrm>
-                    <a:off x="6342476" y="2702479"/>
-                    <a:ext cx="3997270" cy="2070342"/>
-                  </a:xfrm>
-                  <a:prstGeom prst="rect">
-                    <a:avLst/>
-                  </a:prstGeom>
-                  <a:blipFill>
-                    <a:blip r:embed="rId4"/>
-                    <a:stretch>
-                      <a:fillRect l="-1117" t="-2857" r="-1117"/>
-                    </a:stretch>
-                  </a:blipFill>
-                </p:spPr>
-                <p:txBody>
-                  <a:bodyPr/>
-                  <a:lstStyle/>
-                  <a:p>
-                    <a:r>
-                      <a:rPr lang="en-US">
-                        <a:noFill/>
-                      </a:rPr>
-                      <a:t> </a:t>
-                    </a:r>
-                  </a:p>
-                </p:txBody>
-              </p:sp>
-            </mc:Fallback>
-          </mc:AlternateContent>
-          <p:pic>
-            <p:nvPicPr>
-              <p:cNvPr id="46" name="Picture 2" descr="Generated image">
-                <a:extLst>
-                  <a:ext uri="{FF2B5EF4-FFF2-40B4-BE49-F238E27FC236}">
-                    <a16:creationId xmlns:a16="http://schemas.microsoft.com/office/drawing/2014/main" id="{5DA3E199-BD9C-54FF-3A77-201DAB165920}"/>
-                  </a:ext>
-                </a:extLst>
-              </p:cNvPr>
-              <p:cNvPicPr>
-                <a:picLocks noChangeAspect="1" noChangeArrowheads="1"/>
-              </p:cNvPicPr>
-              <p:nvPr/>
-            </p:nvPicPr>
-            <p:blipFill rotWithShape="1">
-              <a:blip r:embed="rId5">
-                <a:clrChange>
-                  <a:clrFrom>
-                    <a:srgbClr val="FFFFFA"/>
-                  </a:clrFrom>
-                  <a:clrTo>
-                    <a:srgbClr val="FFFFFA">
-                      <a:alpha val="0"/>
-                    </a:srgbClr>
-                  </a:clrTo>
-                </a:clrChange>
-                <a:biLevel thresh="75000"/>
-                <a:extLst>
-                  <a:ext uri="{28A0092B-C50C-407E-A947-70E740481C1C}">
-                    <a14:useLocalDpi xmlns:a14="http://schemas.microsoft.com/office/drawing/2010/main" val="0"/>
-                  </a:ext>
-                </a:extLst>
-              </a:blip>
-              <a:srcRect l="18742" t="20900" r="19546" b="23955"/>
-              <a:stretch>
-                <a:fillRect/>
-              </a:stretch>
-            </p:blipFill>
-            <p:spPr bwMode="auto">
-              <a:xfrm>
-                <a:off x="7205985" y="3373070"/>
-                <a:ext cx="2581514" cy="1537842"/>
-              </a:xfrm>
-              <a:prstGeom prst="rect">
-                <a:avLst/>
-              </a:prstGeom>
-              <a:noFill/>
-              <a:extLst>
-                <a:ext uri="{909E8E84-426E-40DD-AFC4-6F175D3DCCD1}">
-                  <a14:hiddenFill xmlns:a14="http://schemas.microsoft.com/office/drawing/2010/main">
-                    <a:solidFill>
-                      <a:srgbClr val="FFFFFF"/>
-                    </a:solidFill>
-                  </a14:hiddenFill>
-                </a:ext>
-              </a:extLst>
-            </p:spPr>
-          </p:pic>
-          <mc:AlternateContent xmlns:mc="http://schemas.openxmlformats.org/markup-compatibility/2006" xmlns:a14="http://schemas.microsoft.com/office/drawing/2010/main">
-            <mc:Choice Requires="a14">
-              <p:sp>
-                <p:nvSpPr>
-                  <p:cNvPr id="47" name="TextBox 46">
-                    <a:extLst>
-                      <a:ext uri="{FF2B5EF4-FFF2-40B4-BE49-F238E27FC236}">
-                        <a16:creationId xmlns:a16="http://schemas.microsoft.com/office/drawing/2014/main" id="{C92EADA5-2FDF-BF80-976C-ECBF2A0A0375}"/>
-                      </a:ext>
-                    </a:extLst>
-                  </p:cNvPr>
-                  <p:cNvSpPr txBox="1"/>
-                  <p:nvPr/>
-                </p:nvSpPr>
-                <p:spPr>
-                  <a:xfrm>
-                    <a:off x="10888715" y="2651360"/>
-                    <a:ext cx="4348741" cy="1559400"/>
-                  </a:xfrm>
-                  <a:prstGeom prst="rect">
-                    <a:avLst/>
-                  </a:prstGeom>
-                  <a:noFill/>
-                </p:spPr>
-                <p:txBody>
-                  <a:bodyPr wrap="square" rtlCol="0">
-                    <a:spAutoFit/>
-                  </a:bodyPr>
-                  <a:lstStyle/>
-                  <a:p>
-                    <a:pPr algn="ctr"/>
-                    <a:r>
-                      <a:rPr lang="en-US" b="1" dirty="0">
-                        <a:solidFill>
-                          <a:schemeClr val="tx1"/>
-                        </a:solidFill>
-                        <a:latin typeface="Aptos" panose="020B0004020202020204" pitchFamily="34" charset="0"/>
-                      </a:rPr>
-                      <a:t>3. Autoregressive (AR)</a:t>
-                    </a:r>
-                  </a:p>
-                  <a:p>
-                    <a:pPr algn="ctr"/>
-                    <a:endParaRPr lang="en-US" b="1" dirty="0">
-                      <a:solidFill>
-                        <a:schemeClr val="tx1"/>
-                      </a:solidFill>
-                      <a:latin typeface="Aptos" panose="020B0004020202020204" pitchFamily="34" charset="0"/>
-                    </a:endParaRPr>
-                  </a:p>
-                  <a:p>
-                    <a:pPr algn="ctr"/>
-                    <a:endParaRPr lang="en-US" b="1" dirty="0">
-                      <a:solidFill>
-                        <a:schemeClr val="tx1"/>
-                      </a:solidFill>
-                      <a:latin typeface="Aptos" panose="020B0004020202020204" pitchFamily="34" charset="0"/>
-                    </a:endParaRPr>
-                  </a:p>
-                  <a:p>
-                    <a14:m>
-                      <m:oMath xmlns:m="http://schemas.openxmlformats.org/officeDocument/2006/math">
-                        <m:sSub>
-                          <m:sSubPr>
+                        <m:r>
+                          <a:rPr lang="en-US" b="1" i="1" smtClean="0">
+                            <a:solidFill>
+                              <a:schemeClr val="tx1"/>
+                            </a:solidFill>
+                            <a:latin typeface="Cambria Math" panose="02040503050406030204" pitchFamily="18" charset="0"/>
+                          </a:rPr>
+                          <m:t>=</m:t>
+                        </m:r>
+                        <m:r>
+                          <a:rPr lang="en-US" b="1" i="0" smtClean="0">
+                            <a:solidFill>
+                              <a:schemeClr val="tx1"/>
+                            </a:solidFill>
+                            <a:latin typeface="Cambria Math" panose="02040503050406030204" pitchFamily="18" charset="0"/>
+                          </a:rPr>
+                          <m:t>𝚽</m:t>
+                        </m:r>
+                        <m:d>
+                          <m:dPr>
                             <m:ctrlPr>
                               <a:rPr lang="en-US" b="1" i="1" smtClean="0">
                                 <a:solidFill>
@@ -3909,30 +3496,19 @@
                                 <a:latin typeface="Cambria Math" panose="02040503050406030204" pitchFamily="18" charset="0"/>
                               </a:rPr>
                             </m:ctrlPr>
-                          </m:sSubPr>
+                          </m:dPr>
                           <m:e>
                             <m:r>
-                              <a:rPr lang="en-US" b="1" i="1" smtClean="0">
+                              <a:rPr lang="en-US" b="1" i="0" smtClean="0">
                                 <a:solidFill>
                                   <a:schemeClr val="tx1"/>
                                 </a:solidFill>
                                 <a:latin typeface="Cambria Math" panose="02040503050406030204" pitchFamily="18" charset="0"/>
                               </a:rPr>
-                              <m:t>𝒛</m:t>
+                              <m:t>𝐳</m:t>
                             </m:r>
                           </m:e>
-                          <m:sub>
-                            <m:r>
-                              <a:rPr lang="en-US" b="1" i="1" smtClean="0">
-                                <a:solidFill>
-                                  <a:schemeClr val="tx1"/>
-                                </a:solidFill>
-                                <a:latin typeface="Cambria Math" panose="02040503050406030204" pitchFamily="18" charset="0"/>
-                              </a:rPr>
-                              <m:t>𝒕</m:t>
-                            </m:r>
-                          </m:sub>
-                        </m:sSub>
+                        </m:d>
                         <m:r>
                           <a:rPr lang="en-US" b="1" i="1" smtClean="0">
                             <a:solidFill>
@@ -3940,1012 +3516,28 @@
                             </a:solidFill>
                             <a:latin typeface="Cambria Math" panose="02040503050406030204" pitchFamily="18" charset="0"/>
                           </a:rPr>
-                          <m:t>                            </m:t>
-                        </m:r>
-                        <m:sSub>
-                          <m:sSubPr>
-                            <m:ctrlPr>
-                              <a:rPr lang="en-US" b="1" i="1" smtClean="0">
-                                <a:solidFill>
-                                  <a:schemeClr val="tx1"/>
-                                </a:solidFill>
-                                <a:latin typeface="Cambria Math" panose="02040503050406030204" pitchFamily="18" charset="0"/>
-                              </a:rPr>
-                            </m:ctrlPr>
-                          </m:sSubPr>
-                          <m:e>
-                            <m:r>
-                              <a:rPr lang="en-US" b="1" i="1" smtClean="0">
-                                <a:solidFill>
-                                  <a:schemeClr val="tx1"/>
-                                </a:solidFill>
-                                <a:latin typeface="Cambria Math" panose="02040503050406030204" pitchFamily="18" charset="0"/>
-                              </a:rPr>
-                              <m:t>        </m:t>
-                            </m:r>
-                            <m:r>
-                              <a:rPr lang="en-US" b="1" i="1" smtClean="0">
-                                <a:solidFill>
-                                  <a:schemeClr val="tx1"/>
-                                </a:solidFill>
-                                <a:latin typeface="Cambria Math" panose="02040503050406030204" pitchFamily="18" charset="0"/>
-                              </a:rPr>
-                              <m:t>𝒛</m:t>
-                            </m:r>
-                          </m:e>
-                          <m:sub>
-                            <m:r>
-                              <a:rPr lang="en-US" b="1" i="1" smtClean="0">
-                                <a:solidFill>
-                                  <a:schemeClr val="tx1"/>
-                                </a:solidFill>
-                                <a:latin typeface="Cambria Math" panose="02040503050406030204" pitchFamily="18" charset="0"/>
-                              </a:rPr>
-                              <m:t>𝒕</m:t>
-                            </m:r>
-                            <m:r>
-                              <a:rPr lang="en-US" b="1" i="1" smtClean="0">
-                                <a:solidFill>
-                                  <a:schemeClr val="tx1"/>
-                                </a:solidFill>
-                                <a:latin typeface="Cambria Math" panose="02040503050406030204" pitchFamily="18" charset="0"/>
-                              </a:rPr>
-                              <m:t>+</m:t>
-                            </m:r>
-                            <m:r>
-                              <a:rPr lang="en-US" b="1" i="1" smtClean="0">
-                                <a:solidFill>
-                                  <a:schemeClr val="tx1"/>
-                                </a:solidFill>
-                                <a:latin typeface="Cambria Math" panose="02040503050406030204" pitchFamily="18" charset="0"/>
-                              </a:rPr>
-                              <m:t>𝟏</m:t>
-                            </m:r>
-                          </m:sub>
-                        </m:sSub>
-                      </m:oMath>
-                    </a14:m>
-                    <a:r>
-                      <a:rPr lang="en-US" b="1" dirty="0">
-                        <a:solidFill>
-                          <a:schemeClr val="tx1"/>
-                        </a:solidFill>
-                        <a:latin typeface="Aptos" panose="020B0004020202020204" pitchFamily="34" charset="0"/>
-                      </a:rPr>
-                      <a:t> </a:t>
-                    </a:r>
-                  </a:p>
-                </p:txBody>
-              </p:sp>
-            </mc:Choice>
-            <mc:Fallback xmlns="">
-              <p:sp>
-                <p:nvSpPr>
-                  <p:cNvPr id="47" name="TextBox 46">
-                    <a:extLst>
-                      <a:ext uri="{FF2B5EF4-FFF2-40B4-BE49-F238E27FC236}">
-                        <a16:creationId xmlns:a16="http://schemas.microsoft.com/office/drawing/2014/main" id="{C92EADA5-2FDF-BF80-976C-ECBF2A0A0375}"/>
-                      </a:ext>
-                    </a:extLst>
-                  </p:cNvPr>
-                  <p:cNvSpPr txBox="1">
-                    <a:spLocks noRot="1" noChangeAspect="1" noMove="1" noResize="1" noEditPoints="1" noAdjustHandles="1" noChangeArrowheads="1" noChangeShapeType="1" noTextEdit="1"/>
-                  </p:cNvSpPr>
-                  <p:nvPr/>
-                </p:nvSpPr>
-                <p:spPr>
-                  <a:xfrm>
-                    <a:off x="10888715" y="2651360"/>
-                    <a:ext cx="4348741" cy="1559400"/>
-                  </a:xfrm>
-                  <a:prstGeom prst="rect">
-                    <a:avLst/>
-                  </a:prstGeom>
-                  <a:blipFill>
-                    <a:blip r:embed="rId6"/>
-                    <a:stretch>
-                      <a:fillRect l="-1538" t="-2500" r="-5128" b="-25000"/>
-                    </a:stretch>
-                  </a:blipFill>
-                </p:spPr>
-                <p:txBody>
-                  <a:bodyPr/>
-                  <a:lstStyle/>
-                  <a:p>
-                    <a:r>
-                      <a:rPr lang="en-US">
-                        <a:noFill/>
-                      </a:rPr>
-                      <a:t> </a:t>
-                    </a:r>
-                  </a:p>
-                </p:txBody>
-              </p:sp>
-            </mc:Fallback>
-          </mc:AlternateContent>
-          <p:pic>
-            <p:nvPicPr>
-              <p:cNvPr id="48" name="Picture 2" descr="Generated image">
-                <a:extLst>
-                  <a:ext uri="{FF2B5EF4-FFF2-40B4-BE49-F238E27FC236}">
-                    <a16:creationId xmlns:a16="http://schemas.microsoft.com/office/drawing/2014/main" id="{DE840911-758B-4418-D637-F5E161FC5ECC}"/>
-                  </a:ext>
-                </a:extLst>
-              </p:cNvPr>
-              <p:cNvPicPr>
-                <a:picLocks noChangeAspect="1" noChangeArrowheads="1"/>
-              </p:cNvPicPr>
-              <p:nvPr/>
-            </p:nvPicPr>
-            <p:blipFill rotWithShape="1">
-              <a:blip r:embed="rId5">
-                <a:clrChange>
-                  <a:clrFrom>
-                    <a:srgbClr val="FFFFFA"/>
-                  </a:clrFrom>
-                  <a:clrTo>
-                    <a:srgbClr val="FFFFFA">
-                      <a:alpha val="0"/>
-                    </a:srgbClr>
-                  </a:clrTo>
-                </a:clrChange>
-                <a:biLevel thresh="75000"/>
-                <a:extLst>
-                  <a:ext uri="{28A0092B-C50C-407E-A947-70E740481C1C}">
-                    <a14:useLocalDpi xmlns:a14="http://schemas.microsoft.com/office/drawing/2010/main" val="0"/>
-                  </a:ext>
-                </a:extLst>
-              </a:blip>
-              <a:srcRect l="18742" t="20900" r="19546" b="23955"/>
-              <a:stretch>
-                <a:fillRect/>
-              </a:stretch>
-            </p:blipFill>
-            <p:spPr bwMode="auto">
-              <a:xfrm>
-                <a:off x="11548685" y="3283768"/>
-                <a:ext cx="2581514" cy="1537842"/>
-              </a:xfrm>
-              <a:prstGeom prst="rect">
-                <a:avLst/>
-              </a:prstGeom>
-              <a:noFill/>
-              <a:extLst>
-                <a:ext uri="{909E8E84-426E-40DD-AFC4-6F175D3DCCD1}">
-                  <a14:hiddenFill xmlns:a14="http://schemas.microsoft.com/office/drawing/2010/main">
-                    <a:solidFill>
-                      <a:srgbClr val="FFFFFF"/>
-                    </a:solidFill>
-                  </a14:hiddenFill>
-                </a:ext>
-              </a:extLst>
-            </p:spPr>
-          </p:pic>
-          <p:cxnSp>
-            <p:nvCxnSpPr>
-              <p:cNvPr id="49" name="Straight Connector 48">
-                <a:extLst>
-                  <a:ext uri="{FF2B5EF4-FFF2-40B4-BE49-F238E27FC236}">
-                    <a16:creationId xmlns:a16="http://schemas.microsoft.com/office/drawing/2014/main" id="{63767579-5BAB-67C3-F886-9D0D17F4C808}"/>
-                  </a:ext>
-                </a:extLst>
-              </p:cNvPr>
-              <p:cNvCxnSpPr>
-                <a:cxnSpLocks/>
-              </p:cNvCxnSpPr>
-              <p:nvPr/>
-            </p:nvCxnSpPr>
-            <p:spPr>
-              <a:xfrm>
-                <a:off x="6342476" y="2702479"/>
-                <a:ext cx="0" cy="2434092"/>
-              </a:xfrm>
-              <a:prstGeom prst="line">
-                <a:avLst/>
-              </a:prstGeom>
-              <a:ln w="19050">
-                <a:solidFill>
-                  <a:schemeClr val="tx1"/>
-                </a:solidFill>
-              </a:ln>
-            </p:spPr>
-            <p:style>
-              <a:lnRef idx="1">
-                <a:schemeClr val="accent1"/>
-              </a:lnRef>
-              <a:fillRef idx="0">
-                <a:schemeClr val="accent1"/>
-              </a:fillRef>
-              <a:effectRef idx="0">
-                <a:schemeClr val="accent1"/>
-              </a:effectRef>
-              <a:fontRef idx="minor">
-                <a:schemeClr val="tx1"/>
-              </a:fontRef>
-            </p:style>
-          </p:cxnSp>
-          <p:cxnSp>
-            <p:nvCxnSpPr>
-              <p:cNvPr id="50" name="Straight Connector 49">
-                <a:extLst>
-                  <a:ext uri="{FF2B5EF4-FFF2-40B4-BE49-F238E27FC236}">
-                    <a16:creationId xmlns:a16="http://schemas.microsoft.com/office/drawing/2014/main" id="{A24EA94C-ED97-32E0-DF05-82E04BEE9E97}"/>
-                  </a:ext>
-                </a:extLst>
-              </p:cNvPr>
-              <p:cNvCxnSpPr>
-                <a:cxnSpLocks/>
-              </p:cNvCxnSpPr>
-              <p:nvPr/>
-            </p:nvCxnSpPr>
-            <p:spPr>
-              <a:xfrm>
-                <a:off x="10535191" y="2711652"/>
-                <a:ext cx="0" cy="2434092"/>
-              </a:xfrm>
-              <a:prstGeom prst="line">
-                <a:avLst/>
-              </a:prstGeom>
-              <a:ln w="19050">
-                <a:solidFill>
-                  <a:schemeClr val="tx1"/>
-                </a:solidFill>
-              </a:ln>
-            </p:spPr>
-            <p:style>
-              <a:lnRef idx="1">
-                <a:schemeClr val="accent1"/>
-              </a:lnRef>
-              <a:fillRef idx="0">
-                <a:schemeClr val="accent1"/>
-              </a:fillRef>
-              <a:effectRef idx="0">
-                <a:schemeClr val="accent1"/>
-              </a:effectRef>
-              <a:fontRef idx="minor">
-                <a:schemeClr val="tx1"/>
-              </a:fontRef>
-            </p:style>
-          </p:cxnSp>
-        </p:grpSp>
-        <p:cxnSp>
-          <p:nvCxnSpPr>
-            <p:cNvPr id="82" name="Straight Connector 81">
-              <a:extLst>
-                <a:ext uri="{FF2B5EF4-FFF2-40B4-BE49-F238E27FC236}">
-                  <a16:creationId xmlns:a16="http://schemas.microsoft.com/office/drawing/2014/main" id="{E63484FE-86D3-F9CD-2D68-FF96FBF3B514}"/>
-                </a:ext>
-              </a:extLst>
-            </p:cNvPr>
-            <p:cNvCxnSpPr>
-              <a:cxnSpLocks/>
-            </p:cNvCxnSpPr>
-            <p:nvPr/>
-          </p:nvCxnSpPr>
-          <p:spPr>
-            <a:xfrm>
-              <a:off x="843320" y="4112732"/>
-              <a:ext cx="6789831" cy="0"/>
-            </a:xfrm>
-            <a:prstGeom prst="line">
-              <a:avLst/>
-            </a:prstGeom>
-          </p:spPr>
-          <p:style>
-            <a:lnRef idx="2">
-              <a:schemeClr val="dk1"/>
-            </a:lnRef>
-            <a:fillRef idx="0">
-              <a:schemeClr val="dk1"/>
-            </a:fillRef>
-            <a:effectRef idx="1">
-              <a:schemeClr val="dk1"/>
-            </a:effectRef>
-            <a:fontRef idx="minor">
-              <a:schemeClr val="tx1"/>
-            </a:fontRef>
-          </p:style>
-        </p:cxnSp>
-        <p:sp>
-          <p:nvSpPr>
-            <p:cNvPr id="9" name="Trapezoid 8">
-              <a:extLst>
-                <a:ext uri="{FF2B5EF4-FFF2-40B4-BE49-F238E27FC236}">
-                  <a16:creationId xmlns:a16="http://schemas.microsoft.com/office/drawing/2014/main" id="{731F69AB-64A2-6DA5-614F-35A32C377816}"/>
-                </a:ext>
-              </a:extLst>
-            </p:cNvPr>
-            <p:cNvSpPr/>
-            <p:nvPr/>
-          </p:nvSpPr>
-          <p:spPr>
-            <a:xfrm rot="5400000">
-              <a:off x="2211295" y="1000840"/>
-              <a:ext cx="1661786" cy="829568"/>
-            </a:xfrm>
-            <a:prstGeom prst="trapezoid">
-              <a:avLst>
-                <a:gd name="adj" fmla="val 57461"/>
-              </a:avLst>
-            </a:prstGeom>
-            <a:solidFill>
-              <a:schemeClr val="accent4">
-                <a:lumMod val="40000"/>
-                <a:lumOff val="60000"/>
-              </a:schemeClr>
-            </a:solidFill>
-          </p:spPr>
-          <p:style>
-            <a:lnRef idx="2">
-              <a:schemeClr val="accent1">
-                <a:shade val="15000"/>
-              </a:schemeClr>
-            </a:lnRef>
-            <a:fillRef idx="1">
-              <a:schemeClr val="accent1"/>
-            </a:fillRef>
-            <a:effectRef idx="0">
-              <a:schemeClr val="accent1"/>
-            </a:effectRef>
-            <a:fontRef idx="minor">
-              <a:schemeClr val="lt1"/>
-            </a:fontRef>
-          </p:style>
-          <p:txBody>
-            <a:bodyPr rtlCol="0" anchor="ctr"/>
-            <a:lstStyle>
-              <a:defPPr>
-                <a:defRPr lang="en-US"/>
-              </a:defPPr>
-              <a:lvl1pPr marL="0" algn="l" defTabSz="914400" rtl="0" eaLnBrk="1" latinLnBrk="0" hangingPunct="1">
-                <a:defRPr sz="1800" kern="1200">
-                  <a:solidFill>
-                    <a:schemeClr val="lt1"/>
-                  </a:solidFill>
-                  <a:latin typeface="+mn-lt"/>
-                  <a:ea typeface="+mn-ea"/>
-                  <a:cs typeface="+mn-cs"/>
-                </a:defRPr>
-              </a:lvl1pPr>
-              <a:lvl2pPr marL="457200" algn="l" defTabSz="914400" rtl="0" eaLnBrk="1" latinLnBrk="0" hangingPunct="1">
-                <a:defRPr sz="1800" kern="1200">
-                  <a:solidFill>
-                    <a:schemeClr val="lt1"/>
-                  </a:solidFill>
-                  <a:latin typeface="+mn-lt"/>
-                  <a:ea typeface="+mn-ea"/>
-                  <a:cs typeface="+mn-cs"/>
-                </a:defRPr>
-              </a:lvl2pPr>
-              <a:lvl3pPr marL="914400" algn="l" defTabSz="914400" rtl="0" eaLnBrk="1" latinLnBrk="0" hangingPunct="1">
-                <a:defRPr sz="1800" kern="1200">
-                  <a:solidFill>
-                    <a:schemeClr val="lt1"/>
-                  </a:solidFill>
-                  <a:latin typeface="+mn-lt"/>
-                  <a:ea typeface="+mn-ea"/>
-                  <a:cs typeface="+mn-cs"/>
-                </a:defRPr>
-              </a:lvl3pPr>
-              <a:lvl4pPr marL="1371600" algn="l" defTabSz="914400" rtl="0" eaLnBrk="1" latinLnBrk="0" hangingPunct="1">
-                <a:defRPr sz="1800" kern="1200">
-                  <a:solidFill>
-                    <a:schemeClr val="lt1"/>
-                  </a:solidFill>
-                  <a:latin typeface="+mn-lt"/>
-                  <a:ea typeface="+mn-ea"/>
-                  <a:cs typeface="+mn-cs"/>
-                </a:defRPr>
-              </a:lvl4pPr>
-              <a:lvl5pPr marL="1828800" algn="l" defTabSz="914400" rtl="0" eaLnBrk="1" latinLnBrk="0" hangingPunct="1">
-                <a:defRPr sz="1800" kern="1200">
-                  <a:solidFill>
-                    <a:schemeClr val="lt1"/>
-                  </a:solidFill>
-                  <a:latin typeface="+mn-lt"/>
-                  <a:ea typeface="+mn-ea"/>
-                  <a:cs typeface="+mn-cs"/>
-                </a:defRPr>
-              </a:lvl5pPr>
-              <a:lvl6pPr marL="2286000" algn="l" defTabSz="914400" rtl="0" eaLnBrk="1" latinLnBrk="0" hangingPunct="1">
-                <a:defRPr sz="1800" kern="1200">
-                  <a:solidFill>
-                    <a:schemeClr val="lt1"/>
-                  </a:solidFill>
-                  <a:latin typeface="+mn-lt"/>
-                  <a:ea typeface="+mn-ea"/>
-                  <a:cs typeface="+mn-cs"/>
-                </a:defRPr>
-              </a:lvl6pPr>
-              <a:lvl7pPr marL="2743200" algn="l" defTabSz="914400" rtl="0" eaLnBrk="1" latinLnBrk="0" hangingPunct="1">
-                <a:defRPr sz="1800" kern="1200">
-                  <a:solidFill>
-                    <a:schemeClr val="lt1"/>
-                  </a:solidFill>
-                  <a:latin typeface="+mn-lt"/>
-                  <a:ea typeface="+mn-ea"/>
-                  <a:cs typeface="+mn-cs"/>
-                </a:defRPr>
-              </a:lvl7pPr>
-              <a:lvl8pPr marL="3200400" algn="l" defTabSz="914400" rtl="0" eaLnBrk="1" latinLnBrk="0" hangingPunct="1">
-                <a:defRPr sz="1800" kern="1200">
-                  <a:solidFill>
-                    <a:schemeClr val="lt1"/>
-                  </a:solidFill>
-                  <a:latin typeface="+mn-lt"/>
-                  <a:ea typeface="+mn-ea"/>
-                  <a:cs typeface="+mn-cs"/>
-                </a:defRPr>
-              </a:lvl8pPr>
-              <a:lvl9pPr marL="3657600" algn="l" defTabSz="914400" rtl="0" eaLnBrk="1" latinLnBrk="0" hangingPunct="1">
-                <a:defRPr sz="1800" kern="1200">
-                  <a:solidFill>
-                    <a:schemeClr val="lt1"/>
-                  </a:solidFill>
-                  <a:latin typeface="+mn-lt"/>
-                  <a:ea typeface="+mn-ea"/>
-                  <a:cs typeface="+mn-cs"/>
-                </a:defRPr>
-              </a:lvl9pPr>
-            </a:lstStyle>
-            <a:p>
-              <a:pPr algn="ctr"/>
-              <a:r>
-                <a:rPr lang="en-US" b="1" i="1" dirty="0">
-                  <a:solidFill>
-                    <a:schemeClr val="tx1"/>
-                  </a:solidFill>
-                  <a:latin typeface="Aptos" panose="020B0004020202020204" pitchFamily="34" charset="0"/>
-                </a:rPr>
-                <a:t>E</a:t>
-              </a:r>
-            </a:p>
-            <a:p>
-              <a:pPr algn="ctr"/>
-              <a:r>
-                <a:rPr lang="en-US" sz="1600" i="1" dirty="0">
-                  <a:solidFill>
-                    <a:schemeClr val="tx1"/>
-                  </a:solidFill>
-                  <a:latin typeface="Aptos" panose="020B0004020202020204" pitchFamily="34" charset="0"/>
-                </a:rPr>
-                <a:t>Encoder</a:t>
-              </a:r>
-            </a:p>
-          </p:txBody>
-        </p:sp>
-        <p:sp>
-          <p:nvSpPr>
-            <p:cNvPr id="10" name="Trapezoid 9">
-              <a:extLst>
-                <a:ext uri="{FF2B5EF4-FFF2-40B4-BE49-F238E27FC236}">
-                  <a16:creationId xmlns:a16="http://schemas.microsoft.com/office/drawing/2014/main" id="{76C7DFCC-FAD5-E3E7-81C8-9ECF6B6A2219}"/>
-                </a:ext>
-              </a:extLst>
-            </p:cNvPr>
-            <p:cNvSpPr/>
-            <p:nvPr/>
-          </p:nvSpPr>
-          <p:spPr>
-            <a:xfrm rot="5400000" flipV="1">
-              <a:off x="4543705" y="977432"/>
-              <a:ext cx="1638778" cy="853373"/>
-            </a:xfrm>
-            <a:prstGeom prst="trapezoid">
-              <a:avLst>
-                <a:gd name="adj" fmla="val 52795"/>
-              </a:avLst>
-            </a:prstGeom>
-            <a:solidFill>
-              <a:schemeClr val="accent4">
-                <a:lumMod val="40000"/>
-                <a:lumOff val="60000"/>
-              </a:schemeClr>
-            </a:solidFill>
-          </p:spPr>
-          <p:style>
-            <a:lnRef idx="2">
-              <a:schemeClr val="accent1">
-                <a:shade val="15000"/>
-              </a:schemeClr>
-            </a:lnRef>
-            <a:fillRef idx="1">
-              <a:schemeClr val="accent1"/>
-            </a:fillRef>
-            <a:effectRef idx="0">
-              <a:schemeClr val="accent1"/>
-            </a:effectRef>
-            <a:fontRef idx="minor">
-              <a:schemeClr val="lt1"/>
-            </a:fontRef>
-          </p:style>
-          <p:txBody>
-            <a:bodyPr rtlCol="0" anchor="ctr"/>
-            <a:lstStyle>
-              <a:defPPr>
-                <a:defRPr lang="en-US"/>
-              </a:defPPr>
-              <a:lvl1pPr marL="0" algn="l" defTabSz="914400" rtl="0" eaLnBrk="1" latinLnBrk="0" hangingPunct="1">
-                <a:defRPr sz="1800" kern="1200">
-                  <a:solidFill>
-                    <a:schemeClr val="lt1"/>
-                  </a:solidFill>
-                  <a:latin typeface="+mn-lt"/>
-                  <a:ea typeface="+mn-ea"/>
-                  <a:cs typeface="+mn-cs"/>
-                </a:defRPr>
-              </a:lvl1pPr>
-              <a:lvl2pPr marL="457200" algn="l" defTabSz="914400" rtl="0" eaLnBrk="1" latinLnBrk="0" hangingPunct="1">
-                <a:defRPr sz="1800" kern="1200">
-                  <a:solidFill>
-                    <a:schemeClr val="lt1"/>
-                  </a:solidFill>
-                  <a:latin typeface="+mn-lt"/>
-                  <a:ea typeface="+mn-ea"/>
-                  <a:cs typeface="+mn-cs"/>
-                </a:defRPr>
-              </a:lvl2pPr>
-              <a:lvl3pPr marL="914400" algn="l" defTabSz="914400" rtl="0" eaLnBrk="1" latinLnBrk="0" hangingPunct="1">
-                <a:defRPr sz="1800" kern="1200">
-                  <a:solidFill>
-                    <a:schemeClr val="lt1"/>
-                  </a:solidFill>
-                  <a:latin typeface="+mn-lt"/>
-                  <a:ea typeface="+mn-ea"/>
-                  <a:cs typeface="+mn-cs"/>
-                </a:defRPr>
-              </a:lvl3pPr>
-              <a:lvl4pPr marL="1371600" algn="l" defTabSz="914400" rtl="0" eaLnBrk="1" latinLnBrk="0" hangingPunct="1">
-                <a:defRPr sz="1800" kern="1200">
-                  <a:solidFill>
-                    <a:schemeClr val="lt1"/>
-                  </a:solidFill>
-                  <a:latin typeface="+mn-lt"/>
-                  <a:ea typeface="+mn-ea"/>
-                  <a:cs typeface="+mn-cs"/>
-                </a:defRPr>
-              </a:lvl4pPr>
-              <a:lvl5pPr marL="1828800" algn="l" defTabSz="914400" rtl="0" eaLnBrk="1" latinLnBrk="0" hangingPunct="1">
-                <a:defRPr sz="1800" kern="1200">
-                  <a:solidFill>
-                    <a:schemeClr val="lt1"/>
-                  </a:solidFill>
-                  <a:latin typeface="+mn-lt"/>
-                  <a:ea typeface="+mn-ea"/>
-                  <a:cs typeface="+mn-cs"/>
-                </a:defRPr>
-              </a:lvl5pPr>
-              <a:lvl6pPr marL="2286000" algn="l" defTabSz="914400" rtl="0" eaLnBrk="1" latinLnBrk="0" hangingPunct="1">
-                <a:defRPr sz="1800" kern="1200">
-                  <a:solidFill>
-                    <a:schemeClr val="lt1"/>
-                  </a:solidFill>
-                  <a:latin typeface="+mn-lt"/>
-                  <a:ea typeface="+mn-ea"/>
-                  <a:cs typeface="+mn-cs"/>
-                </a:defRPr>
-              </a:lvl6pPr>
-              <a:lvl7pPr marL="2743200" algn="l" defTabSz="914400" rtl="0" eaLnBrk="1" latinLnBrk="0" hangingPunct="1">
-                <a:defRPr sz="1800" kern="1200">
-                  <a:solidFill>
-                    <a:schemeClr val="lt1"/>
-                  </a:solidFill>
-                  <a:latin typeface="+mn-lt"/>
-                  <a:ea typeface="+mn-ea"/>
-                  <a:cs typeface="+mn-cs"/>
-                </a:defRPr>
-              </a:lvl7pPr>
-              <a:lvl8pPr marL="3200400" algn="l" defTabSz="914400" rtl="0" eaLnBrk="1" latinLnBrk="0" hangingPunct="1">
-                <a:defRPr sz="1800" kern="1200">
-                  <a:solidFill>
-                    <a:schemeClr val="lt1"/>
-                  </a:solidFill>
-                  <a:latin typeface="+mn-lt"/>
-                  <a:ea typeface="+mn-ea"/>
-                  <a:cs typeface="+mn-cs"/>
-                </a:defRPr>
-              </a:lvl8pPr>
-              <a:lvl9pPr marL="3657600" algn="l" defTabSz="914400" rtl="0" eaLnBrk="1" latinLnBrk="0" hangingPunct="1">
-                <a:defRPr sz="1800" kern="1200">
-                  <a:solidFill>
-                    <a:schemeClr val="lt1"/>
-                  </a:solidFill>
-                  <a:latin typeface="+mn-lt"/>
-                  <a:ea typeface="+mn-ea"/>
-                  <a:cs typeface="+mn-cs"/>
-                </a:defRPr>
-              </a:lvl9pPr>
-            </a:lstStyle>
-            <a:p>
-              <a:pPr algn="ctr"/>
-              <a:r>
-                <a:rPr lang="en-US" b="1" i="1" dirty="0">
-                  <a:solidFill>
-                    <a:schemeClr val="tx1"/>
-                  </a:solidFill>
-                  <a:latin typeface="Aptos" panose="020B0004020202020204" pitchFamily="34" charset="0"/>
-                </a:rPr>
-                <a:t>D</a:t>
-              </a:r>
-            </a:p>
-            <a:p>
-              <a:pPr algn="ctr"/>
-              <a:r>
-                <a:rPr lang="en-US" sz="1600" i="1" dirty="0">
-                  <a:solidFill>
-                    <a:schemeClr val="tx1"/>
-                  </a:solidFill>
-                  <a:latin typeface="Aptos" panose="020B0004020202020204" pitchFamily="34" charset="0"/>
-                </a:rPr>
-                <a:t>Decoder</a:t>
-              </a:r>
-            </a:p>
-          </p:txBody>
-        </p:sp>
-        <p:sp>
-          <p:nvSpPr>
-            <p:cNvPr id="11" name="Oval 10">
-              <a:extLst>
-                <a:ext uri="{FF2B5EF4-FFF2-40B4-BE49-F238E27FC236}">
-                  <a16:creationId xmlns:a16="http://schemas.microsoft.com/office/drawing/2014/main" id="{933451D1-B605-E6C2-5998-BB6554215312}"/>
-                </a:ext>
-              </a:extLst>
-            </p:cNvPr>
-            <p:cNvSpPr/>
-            <p:nvPr/>
-          </p:nvSpPr>
-          <p:spPr>
-            <a:xfrm>
-              <a:off x="3338134" y="2451741"/>
-              <a:ext cx="1741989" cy="883115"/>
-            </a:xfrm>
-            <a:prstGeom prst="ellipse">
-              <a:avLst/>
-            </a:prstGeom>
-            <a:solidFill>
-              <a:schemeClr val="accent6">
-                <a:lumMod val="60000"/>
-                <a:lumOff val="40000"/>
-              </a:schemeClr>
-            </a:solidFill>
-          </p:spPr>
-          <p:style>
-            <a:lnRef idx="2">
-              <a:schemeClr val="accent1">
-                <a:shade val="15000"/>
-              </a:schemeClr>
-            </a:lnRef>
-            <a:fillRef idx="1">
-              <a:schemeClr val="accent1"/>
-            </a:fillRef>
-            <a:effectRef idx="0">
-              <a:schemeClr val="accent1"/>
-            </a:effectRef>
-            <a:fontRef idx="minor">
-              <a:schemeClr val="lt1"/>
-            </a:fontRef>
-          </p:style>
-          <p:txBody>
-            <a:bodyPr rtlCol="0" anchor="ctr"/>
-            <a:lstStyle>
-              <a:defPPr>
-                <a:defRPr lang="en-US"/>
-              </a:defPPr>
-              <a:lvl1pPr marL="0" algn="l" defTabSz="914400" rtl="0" eaLnBrk="1" latinLnBrk="0" hangingPunct="1">
-                <a:defRPr sz="1800" kern="1200">
-                  <a:solidFill>
-                    <a:schemeClr val="lt1"/>
-                  </a:solidFill>
-                  <a:latin typeface="+mn-lt"/>
-                  <a:ea typeface="+mn-ea"/>
-                  <a:cs typeface="+mn-cs"/>
-                </a:defRPr>
-              </a:lvl1pPr>
-              <a:lvl2pPr marL="457200" algn="l" defTabSz="914400" rtl="0" eaLnBrk="1" latinLnBrk="0" hangingPunct="1">
-                <a:defRPr sz="1800" kern="1200">
-                  <a:solidFill>
-                    <a:schemeClr val="lt1"/>
-                  </a:solidFill>
-                  <a:latin typeface="+mn-lt"/>
-                  <a:ea typeface="+mn-ea"/>
-                  <a:cs typeface="+mn-cs"/>
-                </a:defRPr>
-              </a:lvl2pPr>
-              <a:lvl3pPr marL="914400" algn="l" defTabSz="914400" rtl="0" eaLnBrk="1" latinLnBrk="0" hangingPunct="1">
-                <a:defRPr sz="1800" kern="1200">
-                  <a:solidFill>
-                    <a:schemeClr val="lt1"/>
-                  </a:solidFill>
-                  <a:latin typeface="+mn-lt"/>
-                  <a:ea typeface="+mn-ea"/>
-                  <a:cs typeface="+mn-cs"/>
-                </a:defRPr>
-              </a:lvl3pPr>
-              <a:lvl4pPr marL="1371600" algn="l" defTabSz="914400" rtl="0" eaLnBrk="1" latinLnBrk="0" hangingPunct="1">
-                <a:defRPr sz="1800" kern="1200">
-                  <a:solidFill>
-                    <a:schemeClr val="lt1"/>
-                  </a:solidFill>
-                  <a:latin typeface="+mn-lt"/>
-                  <a:ea typeface="+mn-ea"/>
-                  <a:cs typeface="+mn-cs"/>
-                </a:defRPr>
-              </a:lvl4pPr>
-              <a:lvl5pPr marL="1828800" algn="l" defTabSz="914400" rtl="0" eaLnBrk="1" latinLnBrk="0" hangingPunct="1">
-                <a:defRPr sz="1800" kern="1200">
-                  <a:solidFill>
-                    <a:schemeClr val="lt1"/>
-                  </a:solidFill>
-                  <a:latin typeface="+mn-lt"/>
-                  <a:ea typeface="+mn-ea"/>
-                  <a:cs typeface="+mn-cs"/>
-                </a:defRPr>
-              </a:lvl5pPr>
-              <a:lvl6pPr marL="2286000" algn="l" defTabSz="914400" rtl="0" eaLnBrk="1" latinLnBrk="0" hangingPunct="1">
-                <a:defRPr sz="1800" kern="1200">
-                  <a:solidFill>
-                    <a:schemeClr val="lt1"/>
-                  </a:solidFill>
-                  <a:latin typeface="+mn-lt"/>
-                  <a:ea typeface="+mn-ea"/>
-                  <a:cs typeface="+mn-cs"/>
-                </a:defRPr>
-              </a:lvl6pPr>
-              <a:lvl7pPr marL="2743200" algn="l" defTabSz="914400" rtl="0" eaLnBrk="1" latinLnBrk="0" hangingPunct="1">
-                <a:defRPr sz="1800" kern="1200">
-                  <a:solidFill>
-                    <a:schemeClr val="lt1"/>
-                  </a:solidFill>
-                  <a:latin typeface="+mn-lt"/>
-                  <a:ea typeface="+mn-ea"/>
-                  <a:cs typeface="+mn-cs"/>
-                </a:defRPr>
-              </a:lvl7pPr>
-              <a:lvl8pPr marL="3200400" algn="l" defTabSz="914400" rtl="0" eaLnBrk="1" latinLnBrk="0" hangingPunct="1">
-                <a:defRPr sz="1800" kern="1200">
-                  <a:solidFill>
-                    <a:schemeClr val="lt1"/>
-                  </a:solidFill>
-                  <a:latin typeface="+mn-lt"/>
-                  <a:ea typeface="+mn-ea"/>
-                  <a:cs typeface="+mn-cs"/>
-                </a:defRPr>
-              </a:lvl8pPr>
-              <a:lvl9pPr marL="3657600" algn="l" defTabSz="914400" rtl="0" eaLnBrk="1" latinLnBrk="0" hangingPunct="1">
-                <a:defRPr sz="1800" kern="1200">
-                  <a:solidFill>
-                    <a:schemeClr val="lt1"/>
-                  </a:solidFill>
-                  <a:latin typeface="+mn-lt"/>
-                  <a:ea typeface="+mn-ea"/>
-                  <a:cs typeface="+mn-cs"/>
-                </a:defRPr>
-              </a:lvl9pPr>
-            </a:lstStyle>
-            <a:p>
-              <a:pPr algn="ctr"/>
-              <a:r>
-                <a:rPr lang="en-US" b="1" i="1" dirty="0">
-                  <a:solidFill>
-                    <a:schemeClr val="tx1"/>
-                  </a:solidFill>
-                  <a:latin typeface="Aptos" panose="020B0004020202020204" pitchFamily="34" charset="0"/>
-                </a:rPr>
-                <a:t>F</a:t>
-              </a:r>
-            </a:p>
-            <a:p>
-              <a:pPr algn="ctr"/>
-              <a:r>
-                <a:rPr lang="en-US" sz="1600" i="1" dirty="0">
-                  <a:solidFill>
-                    <a:schemeClr val="tx1"/>
-                  </a:solidFill>
-                  <a:latin typeface="Aptos" panose="020B0004020202020204" pitchFamily="34" charset="0"/>
-                </a:rPr>
-                <a:t>Dynamics</a:t>
-              </a:r>
-            </a:p>
-          </p:txBody>
-        </p:sp>
-        <p:cxnSp>
-          <p:nvCxnSpPr>
-            <p:cNvPr id="17" name="Straight Arrow Connector 16">
-              <a:extLst>
-                <a:ext uri="{FF2B5EF4-FFF2-40B4-BE49-F238E27FC236}">
-                  <a16:creationId xmlns:a16="http://schemas.microsoft.com/office/drawing/2014/main" id="{1349A17B-03ED-B02A-6DD4-AEA2CB33B2AD}"/>
-                </a:ext>
-              </a:extLst>
-            </p:cNvPr>
-            <p:cNvCxnSpPr>
-              <a:cxnSpLocks/>
-            </p:cNvCxnSpPr>
-            <p:nvPr/>
-          </p:nvCxnSpPr>
-          <p:spPr>
-            <a:xfrm>
-              <a:off x="2216526" y="1482978"/>
-              <a:ext cx="362477" cy="312"/>
-            </a:xfrm>
-            <a:prstGeom prst="straightConnector1">
-              <a:avLst/>
-            </a:prstGeom>
-            <a:ln w="38100">
-              <a:solidFill>
-                <a:schemeClr val="tx1"/>
-              </a:solidFill>
-              <a:tailEnd type="triangle"/>
-            </a:ln>
-          </p:spPr>
-          <p:style>
-            <a:lnRef idx="2">
-              <a:schemeClr val="accent1"/>
-            </a:lnRef>
-            <a:fillRef idx="0">
-              <a:schemeClr val="accent1"/>
-            </a:fillRef>
-            <a:effectRef idx="1">
-              <a:schemeClr val="accent1"/>
-            </a:effectRef>
-            <a:fontRef idx="minor">
-              <a:schemeClr val="tx1"/>
-            </a:fontRef>
-          </p:style>
-        </p:cxnSp>
-        <mc:AlternateContent xmlns:mc="http://schemas.openxmlformats.org/markup-compatibility/2006" xmlns:a14="http://schemas.microsoft.com/office/drawing/2010/main">
-          <mc:Choice Requires="a14">
-            <p:sp>
-              <p:nvSpPr>
-                <p:cNvPr id="20" name="TextBox 35">
-                  <a:extLst>
-                    <a:ext uri="{FF2B5EF4-FFF2-40B4-BE49-F238E27FC236}">
-                      <a16:creationId xmlns:a16="http://schemas.microsoft.com/office/drawing/2014/main" id="{D042E131-C70A-6E8E-F7D4-2159F277E9A8}"/>
-                    </a:ext>
-                  </a:extLst>
-                </p:cNvPr>
-                <p:cNvSpPr txBox="1"/>
-                <p:nvPr/>
-              </p:nvSpPr>
-              <p:spPr>
-                <a:xfrm>
-                  <a:off x="3921267" y="1324752"/>
-                  <a:ext cx="575725" cy="369332"/>
-                </a:xfrm>
-                <a:prstGeom prst="rect">
-                  <a:avLst/>
-                </a:prstGeom>
-                <a:noFill/>
-              </p:spPr>
-              <p:txBody>
-                <a:bodyPr wrap="square" lIns="0" tIns="0" rIns="0" bIns="0" rtlCol="0">
-                  <a:spAutoFit/>
-                </a:bodyPr>
-                <a:lstStyle>
-                  <a:defPPr>
-                    <a:defRPr lang="en-US"/>
-                  </a:defPPr>
-                  <a:lvl1pPr marL="0" algn="l" defTabSz="914400" rtl="0" eaLnBrk="1" latinLnBrk="0" hangingPunct="1">
-                    <a:defRPr sz="1800" kern="1200">
-                      <a:solidFill>
-                        <a:schemeClr val="tx1"/>
-                      </a:solidFill>
-                      <a:latin typeface="+mn-lt"/>
-                      <a:ea typeface="+mn-ea"/>
-                      <a:cs typeface="+mn-cs"/>
-                    </a:defRPr>
-                  </a:lvl1pPr>
-                  <a:lvl2pPr marL="457200" algn="l" defTabSz="914400" rtl="0" eaLnBrk="1" latinLnBrk="0" hangingPunct="1">
-                    <a:defRPr sz="1800" kern="1200">
-                      <a:solidFill>
-                        <a:schemeClr val="tx1"/>
-                      </a:solidFill>
-                      <a:latin typeface="+mn-lt"/>
-                      <a:ea typeface="+mn-ea"/>
-                      <a:cs typeface="+mn-cs"/>
-                    </a:defRPr>
-                  </a:lvl2pPr>
-                  <a:lvl3pPr marL="914400" algn="l" defTabSz="914400" rtl="0" eaLnBrk="1" latinLnBrk="0" hangingPunct="1">
-                    <a:defRPr sz="1800" kern="1200">
-                      <a:solidFill>
-                        <a:schemeClr val="tx1"/>
-                      </a:solidFill>
-                      <a:latin typeface="+mn-lt"/>
-                      <a:ea typeface="+mn-ea"/>
-                      <a:cs typeface="+mn-cs"/>
-                    </a:defRPr>
-                  </a:lvl3pPr>
-                  <a:lvl4pPr marL="1371600" algn="l" defTabSz="914400" rtl="0" eaLnBrk="1" latinLnBrk="0" hangingPunct="1">
-                    <a:defRPr sz="1800" kern="1200">
-                      <a:solidFill>
-                        <a:schemeClr val="tx1"/>
-                      </a:solidFill>
-                      <a:latin typeface="+mn-lt"/>
-                      <a:ea typeface="+mn-ea"/>
-                      <a:cs typeface="+mn-cs"/>
-                    </a:defRPr>
-                  </a:lvl4pPr>
-                  <a:lvl5pPr marL="1828800" algn="l" defTabSz="914400" rtl="0" eaLnBrk="1" latinLnBrk="0" hangingPunct="1">
-                    <a:defRPr sz="1800" kern="1200">
-                      <a:solidFill>
-                        <a:schemeClr val="tx1"/>
-                      </a:solidFill>
-                      <a:latin typeface="+mn-lt"/>
-                      <a:ea typeface="+mn-ea"/>
-                      <a:cs typeface="+mn-cs"/>
-                    </a:defRPr>
-                  </a:lvl5pPr>
-                  <a:lvl6pPr marL="2286000" algn="l" defTabSz="914400" rtl="0" eaLnBrk="1" latinLnBrk="0" hangingPunct="1">
-                    <a:defRPr sz="1800" kern="1200">
-                      <a:solidFill>
-                        <a:schemeClr val="tx1"/>
-                      </a:solidFill>
-                      <a:latin typeface="+mn-lt"/>
-                      <a:ea typeface="+mn-ea"/>
-                      <a:cs typeface="+mn-cs"/>
-                    </a:defRPr>
-                  </a:lvl6pPr>
-                  <a:lvl7pPr marL="2743200" algn="l" defTabSz="914400" rtl="0" eaLnBrk="1" latinLnBrk="0" hangingPunct="1">
-                    <a:defRPr sz="1800" kern="1200">
-                      <a:solidFill>
-                        <a:schemeClr val="tx1"/>
-                      </a:solidFill>
-                      <a:latin typeface="+mn-lt"/>
-                      <a:ea typeface="+mn-ea"/>
-                      <a:cs typeface="+mn-cs"/>
-                    </a:defRPr>
-                  </a:lvl7pPr>
-                  <a:lvl8pPr marL="3200400" algn="l" defTabSz="914400" rtl="0" eaLnBrk="1" latinLnBrk="0" hangingPunct="1">
-                    <a:defRPr sz="1800" kern="1200">
-                      <a:solidFill>
-                        <a:schemeClr val="tx1"/>
-                      </a:solidFill>
-                      <a:latin typeface="+mn-lt"/>
-                      <a:ea typeface="+mn-ea"/>
-                      <a:cs typeface="+mn-cs"/>
-                    </a:defRPr>
-                  </a:lvl8pPr>
-                  <a:lvl9pPr marL="3657600" algn="l" defTabSz="914400" rtl="0" eaLnBrk="1" latinLnBrk="0" hangingPunct="1">
-                    <a:defRPr sz="1800" kern="1200">
-                      <a:solidFill>
-                        <a:schemeClr val="tx1"/>
-                      </a:solidFill>
-                      <a:latin typeface="+mn-lt"/>
-                      <a:ea typeface="+mn-ea"/>
-                      <a:cs typeface="+mn-cs"/>
-                    </a:defRPr>
-                  </a:lvl9pPr>
-                </a:lstStyle>
-                <a:p>
-                  <a:pPr/>
-                  <a14:m>
-                    <m:oMathPara xmlns:m="http://schemas.openxmlformats.org/officeDocument/2006/math">
-                      <m:oMathParaPr>
-                        <m:jc m:val="centerGroup"/>
-                      </m:oMathParaPr>
-                      <m:oMath xmlns:m="http://schemas.openxmlformats.org/officeDocument/2006/math">
-                        <m:r>
-                          <a:rPr lang="en-US" sz="2400" b="1" i="1" smtClean="0">
-                            <a:latin typeface="Cambria Math" panose="02040503050406030204" pitchFamily="18" charset="0"/>
-                          </a:rPr>
-                          <m:t>𝒛</m:t>
+                          <m:t>𝝃</m:t>
                         </m:r>
                       </m:oMath>
                     </m:oMathPara>
                   </a14:m>
-                  <a:endParaRPr lang="en-US" sz="2400" b="1" dirty="0">
+                  <a:endParaRPr lang="en-US" b="1" dirty="0">
+                    <a:solidFill>
+                      <a:schemeClr val="tx1"/>
+                    </a:solidFill>
                     <a:latin typeface="Aptos" panose="020B0004020202020204" pitchFamily="34" charset="0"/>
                   </a:endParaRPr>
                 </a:p>
               </p:txBody>
             </p:sp>
           </mc:Choice>
-          <mc:Fallback xmlns="">
+          <mc:Fallback>
             <p:sp>
               <p:nvSpPr>
-                <p:cNvPr id="20" name="TextBox 35">
+                <p:cNvPr id="44" name="TextBox 43">
                   <a:extLst>
                     <a:ext uri="{FF2B5EF4-FFF2-40B4-BE49-F238E27FC236}">
-                      <a16:creationId xmlns:a16="http://schemas.microsoft.com/office/drawing/2014/main" id="{D042E131-C70A-6E8E-F7D4-2159F277E9A8}"/>
+                      <a16:creationId xmlns:a16="http://schemas.microsoft.com/office/drawing/2014/main" id="{B5D75DFC-C9AC-7488-D035-FDAF2B520D25}"/>
                     </a:ext>
                   </a:extLst>
                 </p:cNvPr>
@@ -4956,16 +3548,16 @@
               </p:nvSpPr>
               <p:spPr>
                 <a:xfrm>
-                  <a:off x="3921267" y="1324752"/>
-                  <a:ext cx="575725" cy="369332"/>
+                  <a:off x="2397714" y="2702605"/>
+                  <a:ext cx="3997270" cy="2116338"/>
                 </a:xfrm>
                 <a:prstGeom prst="rect">
                   <a:avLst/>
                 </a:prstGeom>
                 <a:blipFill>
-                  <a:blip r:embed="rId7"/>
+                  <a:blip r:embed="rId2"/>
                   <a:stretch>
-                    <a:fillRect/>
+                    <a:fillRect t="-2804" b="-1869"/>
                   </a:stretch>
                 </a:blipFill>
               </p:spPr>
@@ -4984,160 +3576,14 @@
             </p:sp>
           </mc:Fallback>
         </mc:AlternateContent>
-        <p:cxnSp>
-          <p:nvCxnSpPr>
-            <p:cNvPr id="23" name="Straight Arrow Connector 22">
-              <a:extLst>
-                <a:ext uri="{FF2B5EF4-FFF2-40B4-BE49-F238E27FC236}">
-                  <a16:creationId xmlns:a16="http://schemas.microsoft.com/office/drawing/2014/main" id="{F563CF4E-A1EC-D01D-5497-2D352643F318}"/>
-                </a:ext>
-              </a:extLst>
-            </p:cNvPr>
-            <p:cNvCxnSpPr>
-              <a:cxnSpLocks/>
-            </p:cNvCxnSpPr>
-            <p:nvPr/>
-          </p:nvCxnSpPr>
-          <p:spPr>
-            <a:xfrm>
-              <a:off x="3593242" y="1454635"/>
-              <a:ext cx="439089" cy="0"/>
-            </a:xfrm>
-            <a:prstGeom prst="straightConnector1">
-              <a:avLst/>
-            </a:prstGeom>
-            <a:ln w="38100">
-              <a:solidFill>
-                <a:schemeClr val="tx1"/>
-              </a:solidFill>
-              <a:tailEnd type="triangle"/>
-            </a:ln>
-          </p:spPr>
-          <p:style>
-            <a:lnRef idx="2">
-              <a:schemeClr val="accent1"/>
-            </a:lnRef>
-            <a:fillRef idx="0">
-              <a:schemeClr val="accent1"/>
-            </a:fillRef>
-            <a:effectRef idx="1">
-              <a:schemeClr val="accent1"/>
-            </a:effectRef>
-            <a:fontRef idx="minor">
-              <a:schemeClr val="tx1"/>
-            </a:fontRef>
-          </p:style>
-        </p:cxnSp>
-        <p:cxnSp>
-          <p:nvCxnSpPr>
-            <p:cNvPr id="24" name="Straight Arrow Connector 23">
-              <a:extLst>
-                <a:ext uri="{FF2B5EF4-FFF2-40B4-BE49-F238E27FC236}">
-                  <a16:creationId xmlns:a16="http://schemas.microsoft.com/office/drawing/2014/main" id="{3400ACC8-E5D1-E738-BB9D-821402F49EC2}"/>
-                </a:ext>
-              </a:extLst>
-            </p:cNvPr>
-            <p:cNvCxnSpPr>
-              <a:cxnSpLocks/>
-            </p:cNvCxnSpPr>
-            <p:nvPr/>
-          </p:nvCxnSpPr>
-          <p:spPr>
-            <a:xfrm>
-              <a:off x="4496992" y="1462216"/>
-              <a:ext cx="384023" cy="0"/>
-            </a:xfrm>
-            <a:prstGeom prst="straightConnector1">
-              <a:avLst/>
-            </a:prstGeom>
-            <a:ln w="38100">
-              <a:solidFill>
-                <a:schemeClr val="tx1"/>
-              </a:solidFill>
-              <a:tailEnd type="triangle"/>
-            </a:ln>
-          </p:spPr>
-          <p:style>
-            <a:lnRef idx="2">
-              <a:schemeClr val="accent1"/>
-            </a:lnRef>
-            <a:fillRef idx="0">
-              <a:schemeClr val="accent1"/>
-            </a:fillRef>
-            <a:effectRef idx="1">
-              <a:schemeClr val="accent1"/>
-            </a:effectRef>
-            <a:fontRef idx="minor">
-              <a:schemeClr val="tx1"/>
-            </a:fontRef>
-          </p:style>
-        </p:cxnSp>
-        <p:sp>
-          <p:nvSpPr>
-            <p:cNvPr id="52" name="Rectangle 51">
-              <a:extLst>
-                <a:ext uri="{FF2B5EF4-FFF2-40B4-BE49-F238E27FC236}">
-                  <a16:creationId xmlns:a16="http://schemas.microsoft.com/office/drawing/2014/main" id="{D46695C8-C3FC-FF4F-A331-734B7150B70A}"/>
-                </a:ext>
-              </a:extLst>
-            </p:cNvPr>
-            <p:cNvSpPr/>
-            <p:nvPr/>
-          </p:nvSpPr>
-          <p:spPr>
-            <a:xfrm rot="5400000">
-              <a:off x="1171275" y="1300617"/>
-              <a:ext cx="1707721" cy="275943"/>
-            </a:xfrm>
-            <a:prstGeom prst="rect">
-              <a:avLst/>
-            </a:prstGeom>
-            <a:solidFill>
-              <a:schemeClr val="bg2">
-                <a:lumMod val="90000"/>
-              </a:schemeClr>
-            </a:solidFill>
-          </p:spPr>
-          <p:style>
-            <a:lnRef idx="2">
-              <a:schemeClr val="accent1">
-                <a:shade val="15000"/>
-              </a:schemeClr>
-            </a:lnRef>
-            <a:fillRef idx="1">
-              <a:schemeClr val="accent1"/>
-            </a:fillRef>
-            <a:effectRef idx="0">
-              <a:schemeClr val="accent1"/>
-            </a:effectRef>
-            <a:fontRef idx="minor">
-              <a:schemeClr val="lt1"/>
-            </a:fontRef>
-          </p:style>
-          <p:txBody>
-            <a:bodyPr rtlCol="0" anchor="ctr"/>
-            <a:lstStyle/>
-            <a:p>
-              <a:pPr algn="ctr"/>
-              <a:r>
-                <a:rPr lang="en-US" sz="1600" i="1" dirty="0">
-                  <a:solidFill>
-                    <a:schemeClr val="tx1"/>
-                  </a:solidFill>
-                </a:rPr>
-                <a:t>Normalize</a:t>
-              </a:r>
-            </a:p>
-          </p:txBody>
-        </p:sp>
-        <mc:AlternateContent xmlns:mc="http://schemas.openxmlformats.org/markup-compatibility/2006" xmlns:a14="http://schemas.microsoft.com/office/drawing/2010/main">
-          <mc:Choice Requires="a14">
+        <mc:AlternateContent xmlns:mc="http://schemas.openxmlformats.org/markup-compatibility/2006">
+          <mc:Choice xmlns:a14="http://schemas.microsoft.com/office/drawing/2010/main" Requires="a14">
             <p:sp>
               <p:nvSpPr>
-                <p:cNvPr id="53" name="TextBox 35">
+                <p:cNvPr id="45" name="TextBox 44">
                   <a:extLst>
                     <a:ext uri="{FF2B5EF4-FFF2-40B4-BE49-F238E27FC236}">
-                      <a16:creationId xmlns:a16="http://schemas.microsoft.com/office/drawing/2014/main" id="{FA236886-EE14-722D-BC2D-E80E2EBDC0F7}"/>
+                      <a16:creationId xmlns:a16="http://schemas.microsoft.com/office/drawing/2014/main" id="{DB0B8590-04C9-31C2-9D9A-323B479DD323}"/>
                     </a:ext>
                   </a:extLst>
                 </p:cNvPr>
@@ -5146,8 +3592,8 @@
               </p:nvSpPr>
               <p:spPr>
                 <a:xfrm>
-                  <a:off x="909742" y="1273245"/>
-                  <a:ext cx="575725" cy="369332"/>
+                  <a:off x="6342476" y="2702479"/>
+                  <a:ext cx="3997270" cy="2070342"/>
                 </a:xfrm>
                 <a:prstGeom prst="rect">
                   <a:avLst/>
@@ -5155,135 +3601,126 @@
                 <a:noFill/>
               </p:spPr>
               <p:txBody>
-                <a:bodyPr wrap="square" lIns="0" tIns="0" rIns="0" bIns="0" rtlCol="0">
+                <a:bodyPr wrap="square" rtlCol="0">
                   <a:spAutoFit/>
                 </a:bodyPr>
-                <a:lstStyle>
-                  <a:defPPr>
-                    <a:defRPr lang="en-US"/>
-                  </a:defPPr>
-                  <a:lvl1pPr marL="0" algn="l" defTabSz="914400" rtl="0" eaLnBrk="1" latinLnBrk="0" hangingPunct="1">
-                    <a:defRPr sz="1800" kern="1200">
+                <a:lstStyle/>
+                <a:p>
+                  <a:pPr algn="ctr"/>
+                  <a:r>
+                    <a:rPr lang="en-US" b="1" dirty="0">
                       <a:solidFill>
                         <a:schemeClr val="tx1"/>
                       </a:solidFill>
-                      <a:latin typeface="+mn-lt"/>
-                      <a:ea typeface="+mn-ea"/>
-                      <a:cs typeface="+mn-cs"/>
-                    </a:defRPr>
-                  </a:lvl1pPr>
-                  <a:lvl2pPr marL="457200" algn="l" defTabSz="914400" rtl="0" eaLnBrk="1" latinLnBrk="0" hangingPunct="1">
-                    <a:defRPr sz="1800" kern="1200">
+                      <a:latin typeface="Aptos" panose="020B0004020202020204" pitchFamily="34" charset="0"/>
+                    </a:rPr>
+                    <a:t>2. NN-driven</a:t>
+                  </a:r>
+                </a:p>
+                <a:p>
+                  <a:pPr algn="ctr"/>
+                  <a:endParaRPr lang="en-US" b="1" dirty="0">
+                    <a:solidFill>
+                      <a:schemeClr val="tx1"/>
+                    </a:solidFill>
+                    <a:latin typeface="Aptos" panose="020B0004020202020204" pitchFamily="34" charset="0"/>
+                  </a:endParaRPr>
+                </a:p>
+                <a:p>
+                  <a:pPr algn="ctr"/>
+                  <a:endParaRPr lang="en-US" b="1" dirty="0">
+                    <a:solidFill>
+                      <a:schemeClr val="tx1"/>
+                    </a:solidFill>
+                    <a:latin typeface="Aptos" panose="020B0004020202020204" pitchFamily="34" charset="0"/>
+                  </a:endParaRPr>
+                </a:p>
+                <a:p>
+                  <a14:m>
+                    <m:oMath xmlns:m="http://schemas.openxmlformats.org/officeDocument/2006/math">
+                      <m:r>
+                        <a:rPr lang="en-US" b="1" i="1" smtClean="0">
+                          <a:solidFill>
+                            <a:schemeClr val="tx1"/>
+                          </a:solidFill>
+                          <a:latin typeface="Cambria Math" panose="02040503050406030204" pitchFamily="18" charset="0"/>
+                        </a:rPr>
+                        <m:t>   </m:t>
+                      </m:r>
+                      <m:r>
+                        <a:rPr lang="en-US" b="1" i="1" smtClean="0">
+                          <a:solidFill>
+                            <a:schemeClr val="tx1"/>
+                          </a:solidFill>
+                          <a:latin typeface="Cambria Math" panose="02040503050406030204" pitchFamily="18" charset="0"/>
+                        </a:rPr>
+                        <m:t>𝒛</m:t>
+                      </m:r>
+                      <m:r>
+                        <a:rPr lang="en-US" b="1" i="1" smtClean="0">
+                          <a:solidFill>
+                            <a:schemeClr val="tx1"/>
+                          </a:solidFill>
+                          <a:latin typeface="Cambria Math" panose="02040503050406030204" pitchFamily="18" charset="0"/>
+                        </a:rPr>
+                        <m:t>                                </m:t>
+                      </m:r>
+                      <m:f>
+                        <m:fPr>
+                          <m:ctrlPr>
+                            <a:rPr lang="en-US" b="1" i="1" smtClean="0">
+                              <a:solidFill>
+                                <a:schemeClr val="tx1"/>
+                              </a:solidFill>
+                              <a:latin typeface="Cambria Math" panose="02040503050406030204" pitchFamily="18" charset="0"/>
+                            </a:rPr>
+                          </m:ctrlPr>
+                        </m:fPr>
+                        <m:num>
+                          <m:r>
+                            <a:rPr lang="en-US" b="1" i="1" smtClean="0">
+                              <a:solidFill>
+                                <a:schemeClr val="tx1"/>
+                              </a:solidFill>
+                              <a:latin typeface="Cambria Math" panose="02040503050406030204" pitchFamily="18" charset="0"/>
+                            </a:rPr>
+                            <m:t>𝒅𝒛</m:t>
+                          </m:r>
+                        </m:num>
+                        <m:den>
+                          <m:r>
+                            <a:rPr lang="en-US" b="1" i="1" smtClean="0">
+                              <a:solidFill>
+                                <a:schemeClr val="tx1"/>
+                              </a:solidFill>
+                              <a:latin typeface="Cambria Math" panose="02040503050406030204" pitchFamily="18" charset="0"/>
+                            </a:rPr>
+                            <m:t>𝒅𝒕</m:t>
+                          </m:r>
+                        </m:den>
+                      </m:f>
+                    </m:oMath>
+                  </a14:m>
+                  <a:r>
+                    <a:rPr lang="en-US" b="1" dirty="0">
                       <a:solidFill>
                         <a:schemeClr val="tx1"/>
                       </a:solidFill>
-                      <a:latin typeface="+mn-lt"/>
-                      <a:ea typeface="+mn-ea"/>
-                      <a:cs typeface="+mn-cs"/>
-                    </a:defRPr>
-                  </a:lvl2pPr>
-                  <a:lvl3pPr marL="914400" algn="l" defTabSz="914400" rtl="0" eaLnBrk="1" latinLnBrk="0" hangingPunct="1">
-                    <a:defRPr sz="1800" kern="1200">
-                      <a:solidFill>
-                        <a:schemeClr val="tx1"/>
-                      </a:solidFill>
-                      <a:latin typeface="+mn-lt"/>
-                      <a:ea typeface="+mn-ea"/>
-                      <a:cs typeface="+mn-cs"/>
-                    </a:defRPr>
-                  </a:lvl3pPr>
-                  <a:lvl4pPr marL="1371600" algn="l" defTabSz="914400" rtl="0" eaLnBrk="1" latinLnBrk="0" hangingPunct="1">
-                    <a:defRPr sz="1800" kern="1200">
-                      <a:solidFill>
-                        <a:schemeClr val="tx1"/>
-                      </a:solidFill>
-                      <a:latin typeface="+mn-lt"/>
-                      <a:ea typeface="+mn-ea"/>
-                      <a:cs typeface="+mn-cs"/>
-                    </a:defRPr>
-                  </a:lvl4pPr>
-                  <a:lvl5pPr marL="1828800" algn="l" defTabSz="914400" rtl="0" eaLnBrk="1" latinLnBrk="0" hangingPunct="1">
-                    <a:defRPr sz="1800" kern="1200">
-                      <a:solidFill>
-                        <a:schemeClr val="tx1"/>
-                      </a:solidFill>
-                      <a:latin typeface="+mn-lt"/>
-                      <a:ea typeface="+mn-ea"/>
-                      <a:cs typeface="+mn-cs"/>
-                    </a:defRPr>
-                  </a:lvl5pPr>
-                  <a:lvl6pPr marL="2286000" algn="l" defTabSz="914400" rtl="0" eaLnBrk="1" latinLnBrk="0" hangingPunct="1">
-                    <a:defRPr sz="1800" kern="1200">
-                      <a:solidFill>
-                        <a:schemeClr val="tx1"/>
-                      </a:solidFill>
-                      <a:latin typeface="+mn-lt"/>
-                      <a:ea typeface="+mn-ea"/>
-                      <a:cs typeface="+mn-cs"/>
-                    </a:defRPr>
-                  </a:lvl6pPr>
-                  <a:lvl7pPr marL="2743200" algn="l" defTabSz="914400" rtl="0" eaLnBrk="1" latinLnBrk="0" hangingPunct="1">
-                    <a:defRPr sz="1800" kern="1200">
-                      <a:solidFill>
-                        <a:schemeClr val="tx1"/>
-                      </a:solidFill>
-                      <a:latin typeface="+mn-lt"/>
-                      <a:ea typeface="+mn-ea"/>
-                      <a:cs typeface="+mn-cs"/>
-                    </a:defRPr>
-                  </a:lvl7pPr>
-                  <a:lvl8pPr marL="3200400" algn="l" defTabSz="914400" rtl="0" eaLnBrk="1" latinLnBrk="0" hangingPunct="1">
-                    <a:defRPr sz="1800" kern="1200">
-                      <a:solidFill>
-                        <a:schemeClr val="tx1"/>
-                      </a:solidFill>
-                      <a:latin typeface="+mn-lt"/>
-                      <a:ea typeface="+mn-ea"/>
-                      <a:cs typeface="+mn-cs"/>
-                    </a:defRPr>
-                  </a:lvl8pPr>
-                  <a:lvl9pPr marL="3657600" algn="l" defTabSz="914400" rtl="0" eaLnBrk="1" latinLnBrk="0" hangingPunct="1">
-                    <a:defRPr sz="1800" kern="1200">
-                      <a:solidFill>
-                        <a:schemeClr val="tx1"/>
-                      </a:solidFill>
-                      <a:latin typeface="+mn-lt"/>
-                      <a:ea typeface="+mn-ea"/>
-                      <a:cs typeface="+mn-cs"/>
-                    </a:defRPr>
-                  </a:lvl9pPr>
-                </a:lstStyle>
-                <a:p>
-                  <a:pPr/>
-                  <a14:m>
-                    <m:oMathPara xmlns:m="http://schemas.openxmlformats.org/officeDocument/2006/math">
-                      <m:oMathParaPr>
-                        <m:jc m:val="centerGroup"/>
-                      </m:oMathParaPr>
-                      <m:oMath xmlns:m="http://schemas.openxmlformats.org/officeDocument/2006/math">
-                        <m:r>
-                          <a:rPr lang="en-US" sz="2400" b="1" i="1" smtClean="0">
-                            <a:latin typeface="Cambria Math" panose="02040503050406030204" pitchFamily="18" charset="0"/>
-                          </a:rPr>
-                          <m:t>𝒙</m:t>
-                        </m:r>
-                      </m:oMath>
-                    </m:oMathPara>
-                  </a14:m>
-                  <a:endParaRPr lang="en-US" sz="2400" b="1" dirty="0">
-                    <a:latin typeface="Aptos" panose="020B0004020202020204" pitchFamily="34" charset="0"/>
-                  </a:endParaRPr>
+                      <a:latin typeface="Aptos" panose="020B0004020202020204" pitchFamily="34" charset="0"/>
+                    </a:rPr>
+                    <a:t>   </a:t>
+                  </a:r>
                 </a:p>
               </p:txBody>
             </p:sp>
           </mc:Choice>
-          <mc:Fallback xmlns="">
+          <mc:Fallback>
             <p:sp>
               <p:nvSpPr>
-                <p:cNvPr id="53" name="TextBox 35">
+                <p:cNvPr id="45" name="TextBox 44">
                   <a:extLst>
                     <a:ext uri="{FF2B5EF4-FFF2-40B4-BE49-F238E27FC236}">
-                      <a16:creationId xmlns:a16="http://schemas.microsoft.com/office/drawing/2014/main" id="{FA236886-EE14-722D-BC2D-E80E2EBDC0F7}"/>
+                      <a16:creationId xmlns:a16="http://schemas.microsoft.com/office/drawing/2014/main" id="{DB0B8590-04C9-31C2-9D9A-323B479DD323}"/>
                     </a:ext>
                   </a:extLst>
                 </p:cNvPr>
@@ -5294,16 +3731,16 @@
               </p:nvSpPr>
               <p:spPr>
                 <a:xfrm>
-                  <a:off x="909742" y="1273245"/>
-                  <a:ext cx="575725" cy="369332"/>
+                  <a:off x="6342476" y="2702479"/>
+                  <a:ext cx="3997270" cy="2070342"/>
                 </a:xfrm>
                 <a:prstGeom prst="rect">
                   <a:avLst/>
                 </a:prstGeom>
                 <a:blipFill>
-                  <a:blip r:embed="rId8"/>
+                  <a:blip r:embed="rId3"/>
                   <a:stretch>
-                    <a:fillRect/>
+                    <a:fillRect l="-1117" t="-2857" r="-1117"/>
                   </a:stretch>
                 </a:blipFill>
               </p:spPr>
@@ -5322,58 +3759,72 @@
             </p:sp>
           </mc:Fallback>
         </mc:AlternateContent>
-        <p:cxnSp>
-          <p:nvCxnSpPr>
-            <p:cNvPr id="55" name="Straight Arrow Connector 54">
+        <p:pic>
+          <p:nvPicPr>
+            <p:cNvPr id="46" name="Picture 2" descr="Generated image">
               <a:extLst>
                 <a:ext uri="{FF2B5EF4-FFF2-40B4-BE49-F238E27FC236}">
-                  <a16:creationId xmlns:a16="http://schemas.microsoft.com/office/drawing/2014/main" id="{62A900F1-B745-6AD2-0175-CE011B5D95B5}"/>
+                  <a16:creationId xmlns:a16="http://schemas.microsoft.com/office/drawing/2014/main" id="{5DA3E199-BD9C-54FF-3A77-201DAB165920}"/>
                 </a:ext>
               </a:extLst>
             </p:cNvPr>
-            <p:cNvCxnSpPr>
-              <a:cxnSpLocks/>
-            </p:cNvCxnSpPr>
+            <p:cNvPicPr>
+              <a:picLocks noChangeAspect="1" noChangeArrowheads="1"/>
+            </p:cNvPicPr>
             <p:nvPr/>
-          </p:nvCxnSpPr>
-          <p:spPr>
+          </p:nvPicPr>
+          <p:blipFill rotWithShape="1">
+            <a:blip r:embed="rId4">
+              <a:clrChange>
+                <a:clrFrom>
+                  <a:srgbClr val="FFFFFA"/>
+                </a:clrFrom>
+                <a:clrTo>
+                  <a:srgbClr val="FFFFFA">
+                    <a:alpha val="0"/>
+                  </a:srgbClr>
+                </a:clrTo>
+              </a:clrChange>
+              <a:biLevel thresh="75000"/>
+              <a:extLst>
+                <a:ext uri="{28A0092B-C50C-407E-A947-70E740481C1C}">
+                  <a14:useLocalDpi xmlns:a14="http://schemas.microsoft.com/office/drawing/2010/main" val="0"/>
+                </a:ext>
+              </a:extLst>
+            </a:blip>
+            <a:srcRect l="18742" t="20900" r="19546" b="23955"/>
+            <a:stretch>
+              <a:fillRect/>
+            </a:stretch>
+          </p:blipFill>
+          <p:spPr bwMode="auto">
             <a:xfrm>
-              <a:off x="1448625" y="1469130"/>
-              <a:ext cx="362477" cy="312"/>
+              <a:off x="7205985" y="3373070"/>
+              <a:ext cx="2581514" cy="1537842"/>
             </a:xfrm>
-            <a:prstGeom prst="straightConnector1">
+            <a:prstGeom prst="rect">
               <a:avLst/>
             </a:prstGeom>
-            <a:ln w="38100">
-              <a:solidFill>
-                <a:schemeClr val="tx1"/>
-              </a:solidFill>
-              <a:tailEnd type="triangle"/>
-            </a:ln>
+            <a:noFill/>
+            <a:extLst>
+              <a:ext uri="{909E8E84-426E-40DD-AFC4-6F175D3DCCD1}">
+                <a14:hiddenFill xmlns:a14="http://schemas.microsoft.com/office/drawing/2010/main">
+                  <a:solidFill>
+                    <a:srgbClr val="FFFFFF"/>
+                  </a:solidFill>
+                </a14:hiddenFill>
+              </a:ext>
+            </a:extLst>
           </p:spPr>
-          <p:style>
-            <a:lnRef idx="2">
-              <a:schemeClr val="accent1"/>
-            </a:lnRef>
-            <a:fillRef idx="0">
-              <a:schemeClr val="accent1"/>
-            </a:fillRef>
-            <a:effectRef idx="1">
-              <a:schemeClr val="accent1"/>
-            </a:effectRef>
-            <a:fontRef idx="minor">
-              <a:schemeClr val="tx1"/>
-            </a:fontRef>
-          </p:style>
-        </p:cxnSp>
-        <mc:AlternateContent xmlns:mc="http://schemas.openxmlformats.org/markup-compatibility/2006" xmlns:a14="http://schemas.microsoft.com/office/drawing/2010/main">
-          <mc:Choice Requires="a14">
+        </p:pic>
+        <mc:AlternateContent xmlns:mc="http://schemas.openxmlformats.org/markup-compatibility/2006">
+          <mc:Choice xmlns:a14="http://schemas.microsoft.com/office/drawing/2010/main" Requires="a14">
             <p:sp>
               <p:nvSpPr>
-                <p:cNvPr id="56" name="TextBox 35">
+                <p:cNvPr id="47" name="TextBox 46">
                   <a:extLst>
                     <a:ext uri="{FF2B5EF4-FFF2-40B4-BE49-F238E27FC236}">
-                      <a16:creationId xmlns:a16="http://schemas.microsoft.com/office/drawing/2014/main" id="{8C18E4D3-330F-8253-FFFA-1D4D29CB180A}"/>
+                      <a16:creationId xmlns:a16="http://schemas.microsoft.com/office/drawing/2014/main" id="{C92EADA5-2FDF-BF80-976C-ECBF2A0A0375}"/>
                     </a:ext>
                   </a:extLst>
                 </p:cNvPr>
@@ -5382,8 +3833,8 @@
               </p:nvSpPr>
               <p:spPr>
                 <a:xfrm>
-                  <a:off x="7361806" y="1329729"/>
-                  <a:ext cx="275944" cy="369332"/>
+                  <a:off x="10888715" y="2651360"/>
+                  <a:ext cx="4348741" cy="1871857"/>
                 </a:xfrm>
                 <a:prstGeom prst="rect">
                   <a:avLst/>
@@ -5391,135 +3842,169 @@
                 <a:noFill/>
               </p:spPr>
               <p:txBody>
-                <a:bodyPr wrap="square" lIns="0" tIns="0" rIns="0" bIns="0" rtlCol="0">
+                <a:bodyPr wrap="square" rtlCol="0">
                   <a:spAutoFit/>
                 </a:bodyPr>
-                <a:lstStyle>
-                  <a:defPPr>
-                    <a:defRPr lang="en-US"/>
-                  </a:defPPr>
-                  <a:lvl1pPr marL="0" algn="l" defTabSz="914400" rtl="0" eaLnBrk="1" latinLnBrk="0" hangingPunct="1">
-                    <a:defRPr sz="1800" kern="1200">
+                <a:lstStyle/>
+                <a:p>
+                  <a:pPr algn="ctr"/>
+                  <a:r>
+                    <a:rPr lang="en-US" b="1" dirty="0">
                       <a:solidFill>
                         <a:schemeClr val="tx1"/>
                       </a:solidFill>
-                      <a:latin typeface="+mn-lt"/>
-                      <a:ea typeface="+mn-ea"/>
-                      <a:cs typeface="+mn-cs"/>
-                    </a:defRPr>
-                  </a:lvl1pPr>
-                  <a:lvl2pPr marL="457200" algn="l" defTabSz="914400" rtl="0" eaLnBrk="1" latinLnBrk="0" hangingPunct="1">
-                    <a:defRPr sz="1800" kern="1200">
+                      <a:latin typeface="Aptos" panose="020B0004020202020204" pitchFamily="34" charset="0"/>
+                    </a:rPr>
+                    <a:t>3. Autoregressive (AR)</a:t>
+                  </a:r>
+                </a:p>
+                <a:p>
+                  <a:pPr algn="ctr"/>
+                  <a:endParaRPr lang="en-US" b="1" dirty="0">
+                    <a:solidFill>
+                      <a:schemeClr val="tx1"/>
+                    </a:solidFill>
+                    <a:latin typeface="Aptos" panose="020B0004020202020204" pitchFamily="34" charset="0"/>
+                  </a:endParaRPr>
+                </a:p>
+                <a:p>
+                  <a:pPr algn="ctr"/>
+                  <a:endParaRPr lang="en-US" b="1" dirty="0">
+                    <a:solidFill>
+                      <a:schemeClr val="tx1"/>
+                    </a:solidFill>
+                    <a:latin typeface="Aptos" panose="020B0004020202020204" pitchFamily="34" charset="0"/>
+                  </a:endParaRPr>
+                </a:p>
+                <a:p>
+                  <a14:m>
+                    <m:oMath xmlns:m="http://schemas.openxmlformats.org/officeDocument/2006/math">
+                      <m:sSub>
+                        <m:sSubPr>
+                          <m:ctrlPr>
+                            <a:rPr lang="en-US" b="1" i="1" smtClean="0">
+                              <a:solidFill>
+                                <a:schemeClr val="tx1"/>
+                              </a:solidFill>
+                              <a:latin typeface="Cambria Math" panose="02040503050406030204" pitchFamily="18" charset="0"/>
+                            </a:rPr>
+                          </m:ctrlPr>
+                        </m:sSubPr>
+                        <m:e>
+                          <m:r>
+                            <a:rPr lang="en-US" b="1" i="1" smtClean="0">
+                              <a:solidFill>
+                                <a:schemeClr val="tx1"/>
+                              </a:solidFill>
+                              <a:latin typeface="Cambria Math" panose="02040503050406030204" pitchFamily="18" charset="0"/>
+                            </a:rPr>
+                            <m:t>𝒛</m:t>
+                          </m:r>
+                        </m:e>
+                        <m:sub>
+                          <m:r>
+                            <a:rPr lang="en-US" b="1" i="1" smtClean="0">
+                              <a:solidFill>
+                                <a:schemeClr val="tx1"/>
+                              </a:solidFill>
+                              <a:latin typeface="Cambria Math" panose="02040503050406030204" pitchFamily="18" charset="0"/>
+                            </a:rPr>
+                            <m:t>𝒕</m:t>
+                          </m:r>
+                        </m:sub>
+                      </m:sSub>
+                      <m:r>
+                        <a:rPr lang="en-US" b="1" i="1" smtClean="0">
+                          <a:solidFill>
+                            <a:schemeClr val="tx1"/>
+                          </a:solidFill>
+                          <a:latin typeface="Cambria Math" panose="02040503050406030204" pitchFamily="18" charset="0"/>
+                        </a:rPr>
+                        <m:t>                            </m:t>
+                      </m:r>
+                      <m:sSub>
+                        <m:sSubPr>
+                          <m:ctrlPr>
+                            <a:rPr lang="en-US" b="1" i="1" smtClean="0">
+                              <a:solidFill>
+                                <a:schemeClr val="tx1"/>
+                              </a:solidFill>
+                              <a:latin typeface="Cambria Math" panose="02040503050406030204" pitchFamily="18" charset="0"/>
+                            </a:rPr>
+                          </m:ctrlPr>
+                        </m:sSubPr>
+                        <m:e>
+                          <m:r>
+                            <a:rPr lang="en-US" b="1" i="1" smtClean="0">
+                              <a:solidFill>
+                                <a:schemeClr val="tx1"/>
+                              </a:solidFill>
+                              <a:latin typeface="Cambria Math" panose="02040503050406030204" pitchFamily="18" charset="0"/>
+                            </a:rPr>
+                            <m:t>    </m:t>
+                          </m:r>
+                          <m:r>
+                            <a:rPr lang="en-US" b="1" i="1" smtClean="0">
+                              <a:solidFill>
+                                <a:schemeClr val="tx1"/>
+                              </a:solidFill>
+                              <a:latin typeface="Cambria Math" panose="02040503050406030204" pitchFamily="18" charset="0"/>
+                            </a:rPr>
+                            <m:t>𝒛</m:t>
+                          </m:r>
+                        </m:e>
+                        <m:sub>
+                          <m:r>
+                            <a:rPr lang="en-US" b="1" i="1" smtClean="0">
+                              <a:solidFill>
+                                <a:schemeClr val="tx1"/>
+                              </a:solidFill>
+                              <a:latin typeface="Cambria Math" panose="02040503050406030204" pitchFamily="18" charset="0"/>
+                            </a:rPr>
+                            <m:t>𝒕</m:t>
+                          </m:r>
+                          <m:r>
+                            <a:rPr lang="en-US" b="1" i="1" smtClean="0">
+                              <a:solidFill>
+                                <a:schemeClr val="tx1"/>
+                              </a:solidFill>
+                              <a:latin typeface="Cambria Math" panose="02040503050406030204" pitchFamily="18" charset="0"/>
+                            </a:rPr>
+                            <m:t>+</m:t>
+                          </m:r>
+                          <m:r>
+                            <a:rPr lang="en-US" b="1" i="1" smtClean="0">
+                              <a:solidFill>
+                                <a:schemeClr val="tx1"/>
+                              </a:solidFill>
+                              <a:latin typeface="Cambria Math" panose="02040503050406030204" pitchFamily="18" charset="0"/>
+                            </a:rPr>
+                            <m:t>𝟏</m:t>
+                          </m:r>
+                        </m:sub>
+                      </m:sSub>
+                    </m:oMath>
+                  </a14:m>
+                  <a:r>
+                    <a:rPr lang="en-US" b="1" dirty="0">
                       <a:solidFill>
                         <a:schemeClr val="tx1"/>
                       </a:solidFill>
-                      <a:latin typeface="+mn-lt"/>
-                      <a:ea typeface="+mn-ea"/>
-                      <a:cs typeface="+mn-cs"/>
-                    </a:defRPr>
-                  </a:lvl2pPr>
-                  <a:lvl3pPr marL="914400" algn="l" defTabSz="914400" rtl="0" eaLnBrk="1" latinLnBrk="0" hangingPunct="1">
-                    <a:defRPr sz="1800" kern="1200">
-                      <a:solidFill>
-                        <a:schemeClr val="tx1"/>
-                      </a:solidFill>
-                      <a:latin typeface="+mn-lt"/>
-                      <a:ea typeface="+mn-ea"/>
-                      <a:cs typeface="+mn-cs"/>
-                    </a:defRPr>
-                  </a:lvl3pPr>
-                  <a:lvl4pPr marL="1371600" algn="l" defTabSz="914400" rtl="0" eaLnBrk="1" latinLnBrk="0" hangingPunct="1">
-                    <a:defRPr sz="1800" kern="1200">
-                      <a:solidFill>
-                        <a:schemeClr val="tx1"/>
-                      </a:solidFill>
-                      <a:latin typeface="+mn-lt"/>
-                      <a:ea typeface="+mn-ea"/>
-                      <a:cs typeface="+mn-cs"/>
-                    </a:defRPr>
-                  </a:lvl4pPr>
-                  <a:lvl5pPr marL="1828800" algn="l" defTabSz="914400" rtl="0" eaLnBrk="1" latinLnBrk="0" hangingPunct="1">
-                    <a:defRPr sz="1800" kern="1200">
-                      <a:solidFill>
-                        <a:schemeClr val="tx1"/>
-                      </a:solidFill>
-                      <a:latin typeface="+mn-lt"/>
-                      <a:ea typeface="+mn-ea"/>
-                      <a:cs typeface="+mn-cs"/>
-                    </a:defRPr>
-                  </a:lvl5pPr>
-                  <a:lvl6pPr marL="2286000" algn="l" defTabSz="914400" rtl="0" eaLnBrk="1" latinLnBrk="0" hangingPunct="1">
-                    <a:defRPr sz="1800" kern="1200">
-                      <a:solidFill>
-                        <a:schemeClr val="tx1"/>
-                      </a:solidFill>
-                      <a:latin typeface="+mn-lt"/>
-                      <a:ea typeface="+mn-ea"/>
-                      <a:cs typeface="+mn-cs"/>
-                    </a:defRPr>
-                  </a:lvl6pPr>
-                  <a:lvl7pPr marL="2743200" algn="l" defTabSz="914400" rtl="0" eaLnBrk="1" latinLnBrk="0" hangingPunct="1">
-                    <a:defRPr sz="1800" kern="1200">
-                      <a:solidFill>
-                        <a:schemeClr val="tx1"/>
-                      </a:solidFill>
-                      <a:latin typeface="+mn-lt"/>
-                      <a:ea typeface="+mn-ea"/>
-                      <a:cs typeface="+mn-cs"/>
-                    </a:defRPr>
-                  </a:lvl7pPr>
-                  <a:lvl8pPr marL="3200400" algn="l" defTabSz="914400" rtl="0" eaLnBrk="1" latinLnBrk="0" hangingPunct="1">
-                    <a:defRPr sz="1800" kern="1200">
-                      <a:solidFill>
-                        <a:schemeClr val="tx1"/>
-                      </a:solidFill>
-                      <a:latin typeface="+mn-lt"/>
-                      <a:ea typeface="+mn-ea"/>
-                      <a:cs typeface="+mn-cs"/>
-                    </a:defRPr>
-                  </a:lvl8pPr>
-                  <a:lvl9pPr marL="3657600" algn="l" defTabSz="914400" rtl="0" eaLnBrk="1" latinLnBrk="0" hangingPunct="1">
-                    <a:defRPr sz="1800" kern="1200">
-                      <a:solidFill>
-                        <a:schemeClr val="tx1"/>
-                      </a:solidFill>
-                      <a:latin typeface="+mn-lt"/>
-                      <a:ea typeface="+mn-ea"/>
-                      <a:cs typeface="+mn-cs"/>
-                    </a:defRPr>
-                  </a:lvl9pPr>
-                </a:lstStyle>
-                <a:p>
-                  <a:pPr/>
-                  <a14:m>
-                    <m:oMathPara xmlns:m="http://schemas.openxmlformats.org/officeDocument/2006/math">
-                      <m:oMathParaPr>
-                        <m:jc m:val="centerGroup"/>
-                      </m:oMathParaPr>
-                      <m:oMath xmlns:m="http://schemas.openxmlformats.org/officeDocument/2006/math">
-                        <m:r>
-                          <a:rPr lang="en-US" sz="2400" b="1" i="1" smtClean="0">
-                            <a:latin typeface="Cambria Math" panose="02040503050406030204" pitchFamily="18" charset="0"/>
-                          </a:rPr>
-                          <m:t>𝒙</m:t>
-                        </m:r>
-                      </m:oMath>
-                    </m:oMathPara>
-                  </a14:m>
-                  <a:endParaRPr lang="en-US" sz="2400" b="1" dirty="0">
-                    <a:latin typeface="Aptos" panose="020B0004020202020204" pitchFamily="34" charset="0"/>
-                  </a:endParaRPr>
+                      <a:latin typeface="Aptos" panose="020B0004020202020204" pitchFamily="34" charset="0"/>
+                    </a:rPr>
+                    <a:t> </a:t>
+                  </a:r>
                 </a:p>
               </p:txBody>
             </p:sp>
           </mc:Choice>
-          <mc:Fallback xmlns="">
+          <mc:Fallback>
             <p:sp>
               <p:nvSpPr>
-                <p:cNvPr id="56" name="TextBox 35">
+                <p:cNvPr id="47" name="TextBox 46">
                   <a:extLst>
                     <a:ext uri="{FF2B5EF4-FFF2-40B4-BE49-F238E27FC236}">
-                      <a16:creationId xmlns:a16="http://schemas.microsoft.com/office/drawing/2014/main" id="{8C18E4D3-330F-8253-FFFA-1D4D29CB180A}"/>
+                      <a16:creationId xmlns:a16="http://schemas.microsoft.com/office/drawing/2014/main" id="{C92EADA5-2FDF-BF80-976C-ECBF2A0A0375}"/>
                     </a:ext>
                   </a:extLst>
                 </p:cNvPr>
@@ -5530,16 +4015,16 @@
               </p:nvSpPr>
               <p:spPr>
                 <a:xfrm>
-                  <a:off x="7361806" y="1329729"/>
-                  <a:ext cx="275944" cy="369332"/>
+                  <a:off x="10888715" y="2651360"/>
+                  <a:ext cx="4348741" cy="1871857"/>
                 </a:xfrm>
                 <a:prstGeom prst="rect">
                   <a:avLst/>
                 </a:prstGeom>
                 <a:blipFill>
-                  <a:blip r:embed="rId9"/>
+                  <a:blip r:embed="rId5"/>
                   <a:stretch>
-                    <a:fillRect l="-8696" r="-8696"/>
+                    <a:fillRect l="-1538" t="-2083" r="-1538" b="-4167"/>
                   </a:stretch>
                 </a:blipFill>
               </p:spPr>
@@ -5558,70 +4043,70 @@
             </p:sp>
           </mc:Fallback>
         </mc:AlternateContent>
-        <p:sp>
-          <p:nvSpPr>
-            <p:cNvPr id="57" name="Rectangle 56">
+        <p:pic>
+          <p:nvPicPr>
+            <p:cNvPr id="48" name="Picture 2" descr="Generated image">
               <a:extLst>
                 <a:ext uri="{FF2B5EF4-FFF2-40B4-BE49-F238E27FC236}">
-                  <a16:creationId xmlns:a16="http://schemas.microsoft.com/office/drawing/2014/main" id="{08088F81-3654-66D6-034F-13B12EC324C5}"/>
+                  <a16:creationId xmlns:a16="http://schemas.microsoft.com/office/drawing/2014/main" id="{DE840911-758B-4418-D637-F5E161FC5ECC}"/>
                 </a:ext>
               </a:extLst>
             </p:cNvPr>
-            <p:cNvSpPr/>
+            <p:cNvPicPr>
+              <a:picLocks noChangeAspect="1" noChangeArrowheads="1"/>
+            </p:cNvPicPr>
             <p:nvPr/>
-          </p:nvSpPr>
-          <p:spPr>
-            <a:xfrm rot="5400000">
-              <a:off x="5969643" y="1331158"/>
-              <a:ext cx="1707721" cy="275943"/>
+          </p:nvPicPr>
+          <p:blipFill rotWithShape="1">
+            <a:blip r:embed="rId4">
+              <a:clrChange>
+                <a:clrFrom>
+                  <a:srgbClr val="FFFFFA"/>
+                </a:clrFrom>
+                <a:clrTo>
+                  <a:srgbClr val="FFFFFA">
+                    <a:alpha val="0"/>
+                  </a:srgbClr>
+                </a:clrTo>
+              </a:clrChange>
+              <a:biLevel thresh="75000"/>
+              <a:extLst>
+                <a:ext uri="{28A0092B-C50C-407E-A947-70E740481C1C}">
+                  <a14:useLocalDpi xmlns:a14="http://schemas.microsoft.com/office/drawing/2010/main" val="0"/>
+                </a:ext>
+              </a:extLst>
+            </a:blip>
+            <a:srcRect l="18742" t="20900" r="19546" b="23955"/>
+            <a:stretch>
+              <a:fillRect/>
+            </a:stretch>
+          </p:blipFill>
+          <p:spPr bwMode="auto">
+            <a:xfrm>
+              <a:off x="11548685" y="3283768"/>
+              <a:ext cx="2581514" cy="1537842"/>
             </a:xfrm>
             <a:prstGeom prst="rect">
               <a:avLst/>
             </a:prstGeom>
-            <a:solidFill>
-              <a:schemeClr val="bg2">
-                <a:lumMod val="90000"/>
-              </a:schemeClr>
-            </a:solidFill>
+            <a:noFill/>
+            <a:extLst>
+              <a:ext uri="{909E8E84-426E-40DD-AFC4-6F175D3DCCD1}">
+                <a14:hiddenFill xmlns:a14="http://schemas.microsoft.com/office/drawing/2010/main">
+                  <a:solidFill>
+                    <a:srgbClr val="FFFFFF"/>
+                  </a:solidFill>
+                </a14:hiddenFill>
+              </a:ext>
+            </a:extLst>
           </p:spPr>
-          <p:style>
-            <a:lnRef idx="2">
-              <a:schemeClr val="accent1">
-                <a:shade val="15000"/>
-              </a:schemeClr>
-            </a:lnRef>
-            <a:fillRef idx="1">
-              <a:schemeClr val="accent1"/>
-            </a:fillRef>
-            <a:effectRef idx="0">
-              <a:schemeClr val="accent1"/>
-            </a:effectRef>
-            <a:fontRef idx="minor">
-              <a:schemeClr val="lt1"/>
-            </a:fontRef>
-          </p:style>
-          <p:txBody>
-            <a:bodyPr rtlCol="0" anchor="ctr"/>
-            <a:lstStyle/>
-            <a:p>
-              <a:pPr algn="ctr"/>
-              <a:r>
-                <a:rPr lang="en-US" sz="1600" i="1" dirty="0">
-                  <a:solidFill>
-                    <a:schemeClr val="tx1"/>
-                  </a:solidFill>
-                </a:rPr>
-                <a:t>Denormalize</a:t>
-              </a:r>
-            </a:p>
-          </p:txBody>
-        </p:sp>
+        </p:pic>
         <p:cxnSp>
           <p:nvCxnSpPr>
-            <p:cNvPr id="60" name="Straight Arrow Connector 59">
+            <p:cNvPr id="49" name="Straight Connector 48">
               <a:extLst>
                 <a:ext uri="{FF2B5EF4-FFF2-40B4-BE49-F238E27FC236}">
-                  <a16:creationId xmlns:a16="http://schemas.microsoft.com/office/drawing/2014/main" id="{F6EBB918-602D-1C51-D8E0-E7734D1D07CD}"/>
+                  <a16:creationId xmlns:a16="http://schemas.microsoft.com/office/drawing/2014/main" id="{63767579-5BAB-67C3-F886-9D0D17F4C808}"/>
                 </a:ext>
               </a:extLst>
             </p:cNvPr>
@@ -5632,27 +4117,26 @@
           </p:nvCxnSpPr>
           <p:spPr>
             <a:xfrm>
-              <a:off x="5918102" y="1509418"/>
-              <a:ext cx="671541" cy="0"/>
+              <a:off x="6342476" y="2702479"/>
+              <a:ext cx="0" cy="2434092"/>
             </a:xfrm>
-            <a:prstGeom prst="straightConnector1">
+            <a:prstGeom prst="line">
               <a:avLst/>
             </a:prstGeom>
-            <a:ln w="38100">
+            <a:ln w="19050">
               <a:solidFill>
                 <a:schemeClr val="tx1"/>
               </a:solidFill>
-              <a:tailEnd type="triangle"/>
             </a:ln>
           </p:spPr>
           <p:style>
-            <a:lnRef idx="2">
+            <a:lnRef idx="1">
               <a:schemeClr val="accent1"/>
             </a:lnRef>
             <a:fillRef idx="0">
               <a:schemeClr val="accent1"/>
             </a:fillRef>
-            <a:effectRef idx="1">
+            <a:effectRef idx="0">
               <a:schemeClr val="accent1"/>
             </a:effectRef>
             <a:fontRef idx="minor">
@@ -5662,10 +4146,10 @@
         </p:cxnSp>
         <p:cxnSp>
           <p:nvCxnSpPr>
-            <p:cNvPr id="61" name="Straight Arrow Connector 60">
+            <p:cNvPr id="50" name="Straight Connector 49">
               <a:extLst>
                 <a:ext uri="{FF2B5EF4-FFF2-40B4-BE49-F238E27FC236}">
-                  <a16:creationId xmlns:a16="http://schemas.microsoft.com/office/drawing/2014/main" id="{B5B91910-378F-287B-98FC-26449B4ECDB9}"/>
+                  <a16:creationId xmlns:a16="http://schemas.microsoft.com/office/drawing/2014/main" id="{A24EA94C-ED97-32E0-DF05-82E04BEE9E97}"/>
                 </a:ext>
               </a:extLst>
             </p:cNvPr>
@@ -5676,27 +4160,26 @@
           </p:nvCxnSpPr>
           <p:spPr>
             <a:xfrm>
-              <a:off x="6999644" y="1509418"/>
-              <a:ext cx="384023" cy="0"/>
+              <a:off x="10535191" y="2711652"/>
+              <a:ext cx="0" cy="2434092"/>
             </a:xfrm>
-            <a:prstGeom prst="straightConnector1">
+            <a:prstGeom prst="line">
               <a:avLst/>
             </a:prstGeom>
-            <a:ln w="38100">
+            <a:ln w="19050">
               <a:solidFill>
                 <a:schemeClr val="tx1"/>
               </a:solidFill>
-              <a:tailEnd type="triangle"/>
             </a:ln>
           </p:spPr>
           <p:style>
-            <a:lnRef idx="2">
+            <a:lnRef idx="1">
               <a:schemeClr val="accent1"/>
             </a:lnRef>
             <a:fillRef idx="0">
               <a:schemeClr val="accent1"/>
             </a:fillRef>
-            <a:effectRef idx="1">
+            <a:effectRef idx="0">
               <a:schemeClr val="accent1"/>
             </a:effectRef>
             <a:fontRef idx="minor">
@@ -5704,1193 +4187,3269 @@
             </a:fontRef>
           </p:style>
         </p:cxnSp>
-        <p:cxnSp>
-          <p:nvCxnSpPr>
-            <p:cNvPr id="63" name="Curved Connector 62">
-              <a:extLst>
-                <a:ext uri="{FF2B5EF4-FFF2-40B4-BE49-F238E27FC236}">
-                  <a16:creationId xmlns:a16="http://schemas.microsoft.com/office/drawing/2014/main" id="{489D79C0-3471-851F-32D2-1C55D18E5832}"/>
-                </a:ext>
-              </a:extLst>
-            </p:cNvPr>
-            <p:cNvCxnSpPr>
-              <a:cxnSpLocks/>
-              <a:endCxn id="11" idx="2"/>
-            </p:cNvCxnSpPr>
-            <p:nvPr/>
-          </p:nvCxnSpPr>
-          <p:spPr>
-            <a:xfrm rot="5400000">
-              <a:off x="3104258" y="1916747"/>
-              <a:ext cx="1210429" cy="742675"/>
-            </a:xfrm>
-            <a:prstGeom prst="curvedConnector4">
-              <a:avLst>
-                <a:gd name="adj1" fmla="val 31760"/>
-                <a:gd name="adj2" fmla="val 130781"/>
-              </a:avLst>
-            </a:prstGeom>
-            <a:ln w="28575">
-              <a:tailEnd type="triangle"/>
-            </a:ln>
-          </p:spPr>
-          <p:style>
-            <a:lnRef idx="2">
-              <a:schemeClr val="dk1"/>
-            </a:lnRef>
-            <a:fillRef idx="0">
-              <a:schemeClr val="dk1"/>
-            </a:fillRef>
-            <a:effectRef idx="1">
-              <a:schemeClr val="dk1"/>
-            </a:effectRef>
-            <a:fontRef idx="minor">
-              <a:schemeClr val="tx1"/>
-            </a:fontRef>
-          </p:style>
-        </p:cxnSp>
-        <p:cxnSp>
-          <p:nvCxnSpPr>
-            <p:cNvPr id="70" name="Curved Connector 69">
-              <a:extLst>
-                <a:ext uri="{FF2B5EF4-FFF2-40B4-BE49-F238E27FC236}">
-                  <a16:creationId xmlns:a16="http://schemas.microsoft.com/office/drawing/2014/main" id="{182A9C2C-C36D-95E1-6B4A-9F3ABF1AC9AC}"/>
-                </a:ext>
-              </a:extLst>
-            </p:cNvPr>
-            <p:cNvCxnSpPr>
-              <a:cxnSpLocks/>
-              <a:stCxn id="11" idx="6"/>
-            </p:cNvCxnSpPr>
-            <p:nvPr/>
-          </p:nvCxnSpPr>
-          <p:spPr>
-            <a:xfrm flipH="1" flipV="1">
-              <a:off x="4352463" y="1667444"/>
-              <a:ext cx="727660" cy="1225855"/>
-            </a:xfrm>
-            <a:prstGeom prst="curvedConnector4">
-              <a:avLst>
-                <a:gd name="adj1" fmla="val -31416"/>
-                <a:gd name="adj2" fmla="val 68010"/>
-              </a:avLst>
-            </a:prstGeom>
-            <a:ln w="28575">
-              <a:tailEnd type="triangle"/>
-            </a:ln>
-          </p:spPr>
-          <p:style>
-            <a:lnRef idx="2">
-              <a:schemeClr val="dk1"/>
-            </a:lnRef>
-            <a:fillRef idx="0">
-              <a:schemeClr val="dk1"/>
-            </a:fillRef>
-            <a:effectRef idx="1">
-              <a:schemeClr val="dk1"/>
-            </a:effectRef>
-            <a:fontRef idx="minor">
-              <a:schemeClr val="tx1"/>
-            </a:fontRef>
-          </p:style>
-        </p:cxnSp>
-        <p:sp>
-          <p:nvSpPr>
-            <p:cNvPr id="74" name="U-Turn Arrow 73">
-              <a:extLst>
-                <a:ext uri="{FF2B5EF4-FFF2-40B4-BE49-F238E27FC236}">
-                  <a16:creationId xmlns:a16="http://schemas.microsoft.com/office/drawing/2014/main" id="{1EC8087F-D324-5F7F-1953-B77D5AC57506}"/>
-                </a:ext>
-              </a:extLst>
-            </p:cNvPr>
-            <p:cNvSpPr/>
-            <p:nvPr/>
-          </p:nvSpPr>
-          <p:spPr>
-            <a:xfrm rot="10800000">
-              <a:off x="4352461" y="3228044"/>
-              <a:ext cx="472555" cy="500255"/>
-            </a:xfrm>
-            <a:prstGeom prst="uturnArrow">
-              <a:avLst>
-                <a:gd name="adj1" fmla="val 6486"/>
-                <a:gd name="adj2" fmla="val 13099"/>
-                <a:gd name="adj3" fmla="val 22356"/>
-                <a:gd name="adj4" fmla="val 43750"/>
-                <a:gd name="adj5" fmla="val 75000"/>
-              </a:avLst>
-            </a:prstGeom>
-            <a:solidFill>
-              <a:schemeClr val="accent6"/>
-            </a:solidFill>
-            <a:ln>
-              <a:noFill/>
-            </a:ln>
-          </p:spPr>
-          <p:style>
-            <a:lnRef idx="2">
-              <a:schemeClr val="accent1">
-                <a:shade val="15000"/>
-              </a:schemeClr>
-            </a:lnRef>
-            <a:fillRef idx="1">
-              <a:schemeClr val="accent1"/>
-            </a:fillRef>
-            <a:effectRef idx="0">
-              <a:schemeClr val="accent1"/>
-            </a:effectRef>
-            <a:fontRef idx="minor">
-              <a:schemeClr val="lt1"/>
-            </a:fontRef>
-          </p:style>
-          <p:txBody>
-            <a:bodyPr rtlCol="0" anchor="ctr"/>
-            <a:lstStyle/>
-            <a:p>
-              <a:pPr algn="ctr"/>
-              <a:endParaRPr lang="en-US">
+      </p:grpSp>
+      <p:cxnSp>
+        <p:nvCxnSpPr>
+          <p:cNvPr id="82" name="Straight Connector 81">
+            <a:extLst>
+              <a:ext uri="{FF2B5EF4-FFF2-40B4-BE49-F238E27FC236}">
+                <a16:creationId xmlns:a16="http://schemas.microsoft.com/office/drawing/2014/main" id="{E63484FE-86D3-F9CD-2D68-FF96FBF3B514}"/>
+              </a:ext>
+            </a:extLst>
+          </p:cNvPr>
+          <p:cNvCxnSpPr>
+            <a:cxnSpLocks/>
+          </p:cNvCxnSpPr>
+          <p:nvPr/>
+        </p:nvCxnSpPr>
+        <p:spPr>
+          <a:xfrm>
+            <a:off x="843320" y="4112732"/>
+            <a:ext cx="6789831" cy="0"/>
+          </a:xfrm>
+          <a:prstGeom prst="line">
+            <a:avLst/>
+          </a:prstGeom>
+        </p:spPr>
+        <p:style>
+          <a:lnRef idx="2">
+            <a:schemeClr val="dk1"/>
+          </a:lnRef>
+          <a:fillRef idx="0">
+            <a:schemeClr val="dk1"/>
+          </a:fillRef>
+          <a:effectRef idx="1">
+            <a:schemeClr val="dk1"/>
+          </a:effectRef>
+          <a:fontRef idx="minor">
+            <a:schemeClr val="tx1"/>
+          </a:fontRef>
+        </p:style>
+      </p:cxnSp>
+      <p:sp>
+        <p:nvSpPr>
+          <p:cNvPr id="9" name="Trapezoid 8">
+            <a:extLst>
+              <a:ext uri="{FF2B5EF4-FFF2-40B4-BE49-F238E27FC236}">
+                <a16:creationId xmlns:a16="http://schemas.microsoft.com/office/drawing/2014/main" id="{731F69AB-64A2-6DA5-614F-35A32C377816}"/>
+              </a:ext>
+            </a:extLst>
+          </p:cNvPr>
+          <p:cNvSpPr/>
+          <p:nvPr/>
+        </p:nvSpPr>
+        <p:spPr>
+          <a:xfrm rot="5400000">
+            <a:off x="2336310" y="1017195"/>
+            <a:ext cx="1661786" cy="829568"/>
+          </a:xfrm>
+          <a:prstGeom prst="trapezoid">
+            <a:avLst>
+              <a:gd name="adj" fmla="val 57461"/>
+            </a:avLst>
+          </a:prstGeom>
+          <a:solidFill>
+            <a:schemeClr val="accent4">
+              <a:lumMod val="40000"/>
+              <a:lumOff val="60000"/>
+            </a:schemeClr>
+          </a:solidFill>
+        </p:spPr>
+        <p:style>
+          <a:lnRef idx="2">
+            <a:schemeClr val="accent1">
+              <a:shade val="15000"/>
+            </a:schemeClr>
+          </a:lnRef>
+          <a:fillRef idx="1">
+            <a:schemeClr val="accent1"/>
+          </a:fillRef>
+          <a:effectRef idx="0">
+            <a:schemeClr val="accent1"/>
+          </a:effectRef>
+          <a:fontRef idx="minor">
+            <a:schemeClr val="lt1"/>
+          </a:fontRef>
+        </p:style>
+        <p:txBody>
+          <a:bodyPr rtlCol="0" anchor="ctr"/>
+          <a:lstStyle>
+            <a:defPPr>
+              <a:defRPr lang="en-US"/>
+            </a:defPPr>
+            <a:lvl1pPr marL="0" algn="l" defTabSz="914400" rtl="0" eaLnBrk="1" latinLnBrk="0" hangingPunct="1">
+              <a:defRPr sz="1800" kern="1200">
+                <a:solidFill>
+                  <a:schemeClr val="lt1"/>
+                </a:solidFill>
+                <a:latin typeface="+mn-lt"/>
+                <a:ea typeface="+mn-ea"/>
+                <a:cs typeface="+mn-cs"/>
+              </a:defRPr>
+            </a:lvl1pPr>
+            <a:lvl2pPr marL="457200" algn="l" defTabSz="914400" rtl="0" eaLnBrk="1" latinLnBrk="0" hangingPunct="1">
+              <a:defRPr sz="1800" kern="1200">
+                <a:solidFill>
+                  <a:schemeClr val="lt1"/>
+                </a:solidFill>
+                <a:latin typeface="+mn-lt"/>
+                <a:ea typeface="+mn-ea"/>
+                <a:cs typeface="+mn-cs"/>
+              </a:defRPr>
+            </a:lvl2pPr>
+            <a:lvl3pPr marL="914400" algn="l" defTabSz="914400" rtl="0" eaLnBrk="1" latinLnBrk="0" hangingPunct="1">
+              <a:defRPr sz="1800" kern="1200">
+                <a:solidFill>
+                  <a:schemeClr val="lt1"/>
+                </a:solidFill>
+                <a:latin typeface="+mn-lt"/>
+                <a:ea typeface="+mn-ea"/>
+                <a:cs typeface="+mn-cs"/>
+              </a:defRPr>
+            </a:lvl3pPr>
+            <a:lvl4pPr marL="1371600" algn="l" defTabSz="914400" rtl="0" eaLnBrk="1" latinLnBrk="0" hangingPunct="1">
+              <a:defRPr sz="1800" kern="1200">
+                <a:solidFill>
+                  <a:schemeClr val="lt1"/>
+                </a:solidFill>
+                <a:latin typeface="+mn-lt"/>
+                <a:ea typeface="+mn-ea"/>
+                <a:cs typeface="+mn-cs"/>
+              </a:defRPr>
+            </a:lvl4pPr>
+            <a:lvl5pPr marL="1828800" algn="l" defTabSz="914400" rtl="0" eaLnBrk="1" latinLnBrk="0" hangingPunct="1">
+              <a:defRPr sz="1800" kern="1200">
+                <a:solidFill>
+                  <a:schemeClr val="lt1"/>
+                </a:solidFill>
+                <a:latin typeface="+mn-lt"/>
+                <a:ea typeface="+mn-ea"/>
+                <a:cs typeface="+mn-cs"/>
+              </a:defRPr>
+            </a:lvl5pPr>
+            <a:lvl6pPr marL="2286000" algn="l" defTabSz="914400" rtl="0" eaLnBrk="1" latinLnBrk="0" hangingPunct="1">
+              <a:defRPr sz="1800" kern="1200">
+                <a:solidFill>
+                  <a:schemeClr val="lt1"/>
+                </a:solidFill>
+                <a:latin typeface="+mn-lt"/>
+                <a:ea typeface="+mn-ea"/>
+                <a:cs typeface="+mn-cs"/>
+              </a:defRPr>
+            </a:lvl6pPr>
+            <a:lvl7pPr marL="2743200" algn="l" defTabSz="914400" rtl="0" eaLnBrk="1" latinLnBrk="0" hangingPunct="1">
+              <a:defRPr sz="1800" kern="1200">
+                <a:solidFill>
+                  <a:schemeClr val="lt1"/>
+                </a:solidFill>
+                <a:latin typeface="+mn-lt"/>
+                <a:ea typeface="+mn-ea"/>
+                <a:cs typeface="+mn-cs"/>
+              </a:defRPr>
+            </a:lvl7pPr>
+            <a:lvl8pPr marL="3200400" algn="l" defTabSz="914400" rtl="0" eaLnBrk="1" latinLnBrk="0" hangingPunct="1">
+              <a:defRPr sz="1800" kern="1200">
+                <a:solidFill>
+                  <a:schemeClr val="lt1"/>
+                </a:solidFill>
+                <a:latin typeface="+mn-lt"/>
+                <a:ea typeface="+mn-ea"/>
+                <a:cs typeface="+mn-cs"/>
+              </a:defRPr>
+            </a:lvl8pPr>
+            <a:lvl9pPr marL="3657600" algn="l" defTabSz="914400" rtl="0" eaLnBrk="1" latinLnBrk="0" hangingPunct="1">
+              <a:defRPr sz="1800" kern="1200">
+                <a:solidFill>
+                  <a:schemeClr val="lt1"/>
+                </a:solidFill>
+                <a:latin typeface="+mn-lt"/>
+                <a:ea typeface="+mn-ea"/>
+                <a:cs typeface="+mn-cs"/>
+              </a:defRPr>
+            </a:lvl9pPr>
+          </a:lstStyle>
+          <a:p>
+            <a:pPr algn="ctr"/>
+            <a:r>
+              <a:rPr lang="en-US" b="1" i="1" dirty="0">
                 <a:solidFill>
                   <a:schemeClr val="tx1"/>
                 </a:solidFill>
-              </a:endParaRPr>
-            </a:p>
-          </p:txBody>
-        </p:sp>
-        <mc:AlternateContent xmlns:mc="http://schemas.openxmlformats.org/markup-compatibility/2006" xmlns:a14="http://schemas.microsoft.com/office/drawing/2010/main">
-          <mc:Choice Requires="a14">
-            <p:sp>
-              <p:nvSpPr>
-                <p:cNvPr id="76" name="TextBox 35">
-                  <a:extLst>
-                    <a:ext uri="{FF2B5EF4-FFF2-40B4-BE49-F238E27FC236}">
-                      <a16:creationId xmlns:a16="http://schemas.microsoft.com/office/drawing/2014/main" id="{97D320F6-37DE-3C0C-C427-B3EC34CDCB35}"/>
-                    </a:ext>
-                  </a:extLst>
-                </p:cNvPr>
-                <p:cNvSpPr txBox="1"/>
-                <p:nvPr/>
-              </p:nvSpPr>
-              <p:spPr>
-                <a:xfrm>
-                  <a:off x="4718578" y="3300344"/>
-                  <a:ext cx="575725" cy="307777"/>
-                </a:xfrm>
-                <a:prstGeom prst="rect">
-                  <a:avLst/>
-                </a:prstGeom>
-                <a:noFill/>
-              </p:spPr>
-              <p:txBody>
-                <a:bodyPr wrap="square" lIns="0" tIns="0" rIns="0" bIns="0" rtlCol="0">
-                  <a:spAutoFit/>
-                </a:bodyPr>
-                <a:lstStyle>
-                  <a:defPPr>
-                    <a:defRPr lang="en-US"/>
-                  </a:defPPr>
-                  <a:lvl1pPr marL="0" algn="l" defTabSz="914400" rtl="0" eaLnBrk="1" latinLnBrk="0" hangingPunct="1">
-                    <a:defRPr sz="1800" kern="1200">
-                      <a:solidFill>
-                        <a:schemeClr val="tx1"/>
-                      </a:solidFill>
-                      <a:latin typeface="+mn-lt"/>
-                      <a:ea typeface="+mn-ea"/>
-                      <a:cs typeface="+mn-cs"/>
-                    </a:defRPr>
-                  </a:lvl1pPr>
-                  <a:lvl2pPr marL="457200" algn="l" defTabSz="914400" rtl="0" eaLnBrk="1" latinLnBrk="0" hangingPunct="1">
-                    <a:defRPr sz="1800" kern="1200">
-                      <a:solidFill>
-                        <a:schemeClr val="tx1"/>
-                      </a:solidFill>
-                      <a:latin typeface="+mn-lt"/>
-                      <a:ea typeface="+mn-ea"/>
-                      <a:cs typeface="+mn-cs"/>
-                    </a:defRPr>
-                  </a:lvl2pPr>
-                  <a:lvl3pPr marL="914400" algn="l" defTabSz="914400" rtl="0" eaLnBrk="1" latinLnBrk="0" hangingPunct="1">
-                    <a:defRPr sz="1800" kern="1200">
-                      <a:solidFill>
-                        <a:schemeClr val="tx1"/>
-                      </a:solidFill>
-                      <a:latin typeface="+mn-lt"/>
-                      <a:ea typeface="+mn-ea"/>
-                      <a:cs typeface="+mn-cs"/>
-                    </a:defRPr>
-                  </a:lvl3pPr>
-                  <a:lvl4pPr marL="1371600" algn="l" defTabSz="914400" rtl="0" eaLnBrk="1" latinLnBrk="0" hangingPunct="1">
-                    <a:defRPr sz="1800" kern="1200">
-                      <a:solidFill>
-                        <a:schemeClr val="tx1"/>
-                      </a:solidFill>
-                      <a:latin typeface="+mn-lt"/>
-                      <a:ea typeface="+mn-ea"/>
-                      <a:cs typeface="+mn-cs"/>
-                    </a:defRPr>
-                  </a:lvl4pPr>
-                  <a:lvl5pPr marL="1828800" algn="l" defTabSz="914400" rtl="0" eaLnBrk="1" latinLnBrk="0" hangingPunct="1">
-                    <a:defRPr sz="1800" kern="1200">
-                      <a:solidFill>
-                        <a:schemeClr val="tx1"/>
-                      </a:solidFill>
-                      <a:latin typeface="+mn-lt"/>
-                      <a:ea typeface="+mn-ea"/>
-                      <a:cs typeface="+mn-cs"/>
-                    </a:defRPr>
-                  </a:lvl5pPr>
-                  <a:lvl6pPr marL="2286000" algn="l" defTabSz="914400" rtl="0" eaLnBrk="1" latinLnBrk="0" hangingPunct="1">
-                    <a:defRPr sz="1800" kern="1200">
-                      <a:solidFill>
-                        <a:schemeClr val="tx1"/>
-                      </a:solidFill>
-                      <a:latin typeface="+mn-lt"/>
-                      <a:ea typeface="+mn-ea"/>
-                      <a:cs typeface="+mn-cs"/>
-                    </a:defRPr>
-                  </a:lvl6pPr>
-                  <a:lvl7pPr marL="2743200" algn="l" defTabSz="914400" rtl="0" eaLnBrk="1" latinLnBrk="0" hangingPunct="1">
-                    <a:defRPr sz="1800" kern="1200">
-                      <a:solidFill>
-                        <a:schemeClr val="tx1"/>
-                      </a:solidFill>
-                      <a:latin typeface="+mn-lt"/>
-                      <a:ea typeface="+mn-ea"/>
-                      <a:cs typeface="+mn-cs"/>
-                    </a:defRPr>
-                  </a:lvl7pPr>
-                  <a:lvl8pPr marL="3200400" algn="l" defTabSz="914400" rtl="0" eaLnBrk="1" latinLnBrk="0" hangingPunct="1">
-                    <a:defRPr sz="1800" kern="1200">
-                      <a:solidFill>
-                        <a:schemeClr val="tx1"/>
-                      </a:solidFill>
-                      <a:latin typeface="+mn-lt"/>
-                      <a:ea typeface="+mn-ea"/>
-                      <a:cs typeface="+mn-cs"/>
-                    </a:defRPr>
-                  </a:lvl8pPr>
-                  <a:lvl9pPr marL="3657600" algn="l" defTabSz="914400" rtl="0" eaLnBrk="1" latinLnBrk="0" hangingPunct="1">
-                    <a:defRPr sz="1800" kern="1200">
-                      <a:solidFill>
-                        <a:schemeClr val="tx1"/>
-                      </a:solidFill>
-                      <a:latin typeface="+mn-lt"/>
-                      <a:ea typeface="+mn-ea"/>
-                      <a:cs typeface="+mn-cs"/>
-                    </a:defRPr>
-                  </a:lvl9pPr>
-                </a:lstStyle>
-                <a:p>
-                  <a:pPr/>
-                  <a14:m>
-                    <m:oMathPara xmlns:m="http://schemas.openxmlformats.org/officeDocument/2006/math">
-                      <m:oMathParaPr>
-                        <m:jc m:val="centerGroup"/>
-                      </m:oMathParaPr>
-                      <m:oMath xmlns:m="http://schemas.openxmlformats.org/officeDocument/2006/math">
-                        <m:r>
-                          <m:rPr>
-                            <m:sty m:val="p"/>
-                          </m:rPr>
-                          <a:rPr lang="en-US" sz="2000" b="0" i="0" smtClean="0">
-                            <a:solidFill>
-                              <a:schemeClr val="accent6"/>
-                            </a:solidFill>
-                            <a:latin typeface="Cambria Math" panose="02040503050406030204" pitchFamily="18" charset="0"/>
-                          </a:rPr>
-                          <m:t>Δ</m:t>
-                        </m:r>
-                        <m:r>
-                          <a:rPr lang="en-US" sz="2000" b="0" i="1" smtClean="0">
-                            <a:solidFill>
-                              <a:schemeClr val="accent6"/>
-                            </a:solidFill>
-                            <a:latin typeface="Cambria Math" panose="02040503050406030204" pitchFamily="18" charset="0"/>
-                          </a:rPr>
-                          <m:t>𝑡</m:t>
-                        </m:r>
-                      </m:oMath>
-                    </m:oMathPara>
-                  </a14:m>
-                  <a:endParaRPr lang="en-US" sz="2000" dirty="0">
+                <a:latin typeface="Aptos" panose="020B0004020202020204" pitchFamily="34" charset="0"/>
+              </a:rPr>
+              <a:t>E</a:t>
+            </a:r>
+          </a:p>
+          <a:p>
+            <a:pPr algn="ctr"/>
+            <a:r>
+              <a:rPr lang="en-US" sz="1600" i="1" dirty="0">
+                <a:solidFill>
+                  <a:schemeClr val="tx1"/>
+                </a:solidFill>
+                <a:latin typeface="Aptos" panose="020B0004020202020204" pitchFamily="34" charset="0"/>
+              </a:rPr>
+              <a:t>Encoder</a:t>
+            </a:r>
+          </a:p>
+        </p:txBody>
+      </p:sp>
+      <p:sp>
+        <p:nvSpPr>
+          <p:cNvPr id="10" name="Trapezoid 9">
+            <a:extLst>
+              <a:ext uri="{FF2B5EF4-FFF2-40B4-BE49-F238E27FC236}">
+                <a16:creationId xmlns:a16="http://schemas.microsoft.com/office/drawing/2014/main" id="{76C7DFCC-FAD5-E3E7-81C8-9ECF6B6A2219}"/>
+              </a:ext>
+            </a:extLst>
+          </p:cNvPr>
+          <p:cNvSpPr/>
+          <p:nvPr/>
+        </p:nvSpPr>
+        <p:spPr>
+          <a:xfrm rot="5400000" flipV="1">
+            <a:off x="4708906" y="1006588"/>
+            <a:ext cx="1638778" cy="853373"/>
+          </a:xfrm>
+          <a:prstGeom prst="trapezoid">
+            <a:avLst>
+              <a:gd name="adj" fmla="val 52795"/>
+            </a:avLst>
+          </a:prstGeom>
+          <a:solidFill>
+            <a:schemeClr val="accent4">
+              <a:lumMod val="40000"/>
+              <a:lumOff val="60000"/>
+            </a:schemeClr>
+          </a:solidFill>
+        </p:spPr>
+        <p:style>
+          <a:lnRef idx="2">
+            <a:schemeClr val="accent1">
+              <a:shade val="15000"/>
+            </a:schemeClr>
+          </a:lnRef>
+          <a:fillRef idx="1">
+            <a:schemeClr val="accent1"/>
+          </a:fillRef>
+          <a:effectRef idx="0">
+            <a:schemeClr val="accent1"/>
+          </a:effectRef>
+          <a:fontRef idx="minor">
+            <a:schemeClr val="lt1"/>
+          </a:fontRef>
+        </p:style>
+        <p:txBody>
+          <a:bodyPr rtlCol="0" anchor="ctr"/>
+          <a:lstStyle>
+            <a:defPPr>
+              <a:defRPr lang="en-US"/>
+            </a:defPPr>
+            <a:lvl1pPr marL="0" algn="l" defTabSz="914400" rtl="0" eaLnBrk="1" latinLnBrk="0" hangingPunct="1">
+              <a:defRPr sz="1800" kern="1200">
+                <a:solidFill>
+                  <a:schemeClr val="lt1"/>
+                </a:solidFill>
+                <a:latin typeface="+mn-lt"/>
+                <a:ea typeface="+mn-ea"/>
+                <a:cs typeface="+mn-cs"/>
+              </a:defRPr>
+            </a:lvl1pPr>
+            <a:lvl2pPr marL="457200" algn="l" defTabSz="914400" rtl="0" eaLnBrk="1" latinLnBrk="0" hangingPunct="1">
+              <a:defRPr sz="1800" kern="1200">
+                <a:solidFill>
+                  <a:schemeClr val="lt1"/>
+                </a:solidFill>
+                <a:latin typeface="+mn-lt"/>
+                <a:ea typeface="+mn-ea"/>
+                <a:cs typeface="+mn-cs"/>
+              </a:defRPr>
+            </a:lvl2pPr>
+            <a:lvl3pPr marL="914400" algn="l" defTabSz="914400" rtl="0" eaLnBrk="1" latinLnBrk="0" hangingPunct="1">
+              <a:defRPr sz="1800" kern="1200">
+                <a:solidFill>
+                  <a:schemeClr val="lt1"/>
+                </a:solidFill>
+                <a:latin typeface="+mn-lt"/>
+                <a:ea typeface="+mn-ea"/>
+                <a:cs typeface="+mn-cs"/>
+              </a:defRPr>
+            </a:lvl3pPr>
+            <a:lvl4pPr marL="1371600" algn="l" defTabSz="914400" rtl="0" eaLnBrk="1" latinLnBrk="0" hangingPunct="1">
+              <a:defRPr sz="1800" kern="1200">
+                <a:solidFill>
+                  <a:schemeClr val="lt1"/>
+                </a:solidFill>
+                <a:latin typeface="+mn-lt"/>
+                <a:ea typeface="+mn-ea"/>
+                <a:cs typeface="+mn-cs"/>
+              </a:defRPr>
+            </a:lvl4pPr>
+            <a:lvl5pPr marL="1828800" algn="l" defTabSz="914400" rtl="0" eaLnBrk="1" latinLnBrk="0" hangingPunct="1">
+              <a:defRPr sz="1800" kern="1200">
+                <a:solidFill>
+                  <a:schemeClr val="lt1"/>
+                </a:solidFill>
+                <a:latin typeface="+mn-lt"/>
+                <a:ea typeface="+mn-ea"/>
+                <a:cs typeface="+mn-cs"/>
+              </a:defRPr>
+            </a:lvl5pPr>
+            <a:lvl6pPr marL="2286000" algn="l" defTabSz="914400" rtl="0" eaLnBrk="1" latinLnBrk="0" hangingPunct="1">
+              <a:defRPr sz="1800" kern="1200">
+                <a:solidFill>
+                  <a:schemeClr val="lt1"/>
+                </a:solidFill>
+                <a:latin typeface="+mn-lt"/>
+                <a:ea typeface="+mn-ea"/>
+                <a:cs typeface="+mn-cs"/>
+              </a:defRPr>
+            </a:lvl6pPr>
+            <a:lvl7pPr marL="2743200" algn="l" defTabSz="914400" rtl="0" eaLnBrk="1" latinLnBrk="0" hangingPunct="1">
+              <a:defRPr sz="1800" kern="1200">
+                <a:solidFill>
+                  <a:schemeClr val="lt1"/>
+                </a:solidFill>
+                <a:latin typeface="+mn-lt"/>
+                <a:ea typeface="+mn-ea"/>
+                <a:cs typeface="+mn-cs"/>
+              </a:defRPr>
+            </a:lvl7pPr>
+            <a:lvl8pPr marL="3200400" algn="l" defTabSz="914400" rtl="0" eaLnBrk="1" latinLnBrk="0" hangingPunct="1">
+              <a:defRPr sz="1800" kern="1200">
+                <a:solidFill>
+                  <a:schemeClr val="lt1"/>
+                </a:solidFill>
+                <a:latin typeface="+mn-lt"/>
+                <a:ea typeface="+mn-ea"/>
+                <a:cs typeface="+mn-cs"/>
+              </a:defRPr>
+            </a:lvl8pPr>
+            <a:lvl9pPr marL="3657600" algn="l" defTabSz="914400" rtl="0" eaLnBrk="1" latinLnBrk="0" hangingPunct="1">
+              <a:defRPr sz="1800" kern="1200">
+                <a:solidFill>
+                  <a:schemeClr val="lt1"/>
+                </a:solidFill>
+                <a:latin typeface="+mn-lt"/>
+                <a:ea typeface="+mn-ea"/>
+                <a:cs typeface="+mn-cs"/>
+              </a:defRPr>
+            </a:lvl9pPr>
+          </a:lstStyle>
+          <a:p>
+            <a:pPr algn="ctr"/>
+            <a:r>
+              <a:rPr lang="en-US" b="1" i="1" dirty="0">
+                <a:solidFill>
+                  <a:schemeClr val="tx1"/>
+                </a:solidFill>
+                <a:latin typeface="Aptos" panose="020B0004020202020204" pitchFamily="34" charset="0"/>
+              </a:rPr>
+              <a:t>D</a:t>
+            </a:r>
+          </a:p>
+          <a:p>
+            <a:pPr algn="ctr"/>
+            <a:r>
+              <a:rPr lang="en-US" sz="1600" i="1" dirty="0">
+                <a:solidFill>
+                  <a:schemeClr val="tx1"/>
+                </a:solidFill>
+                <a:latin typeface="Aptos" panose="020B0004020202020204" pitchFamily="34" charset="0"/>
+              </a:rPr>
+              <a:t>Decoder</a:t>
+            </a:r>
+          </a:p>
+        </p:txBody>
+      </p:sp>
+      <p:sp>
+        <p:nvSpPr>
+          <p:cNvPr id="11" name="Oval 10">
+            <a:extLst>
+              <a:ext uri="{FF2B5EF4-FFF2-40B4-BE49-F238E27FC236}">
+                <a16:creationId xmlns:a16="http://schemas.microsoft.com/office/drawing/2014/main" id="{933451D1-B605-E6C2-5998-BB6554215312}"/>
+              </a:ext>
+            </a:extLst>
+          </p:cNvPr>
+          <p:cNvSpPr/>
+          <p:nvPr/>
+        </p:nvSpPr>
+        <p:spPr>
+          <a:xfrm>
+            <a:off x="3505441" y="2467824"/>
+            <a:ext cx="1741989" cy="883115"/>
+          </a:xfrm>
+          <a:prstGeom prst="ellipse">
+            <a:avLst/>
+          </a:prstGeom>
+          <a:solidFill>
+            <a:schemeClr val="accent6">
+              <a:lumMod val="60000"/>
+              <a:lumOff val="40000"/>
+            </a:schemeClr>
+          </a:solidFill>
+        </p:spPr>
+        <p:style>
+          <a:lnRef idx="2">
+            <a:schemeClr val="accent1">
+              <a:shade val="15000"/>
+            </a:schemeClr>
+          </a:lnRef>
+          <a:fillRef idx="1">
+            <a:schemeClr val="accent1"/>
+          </a:fillRef>
+          <a:effectRef idx="0">
+            <a:schemeClr val="accent1"/>
+          </a:effectRef>
+          <a:fontRef idx="minor">
+            <a:schemeClr val="lt1"/>
+          </a:fontRef>
+        </p:style>
+        <p:txBody>
+          <a:bodyPr rtlCol="0" anchor="ctr"/>
+          <a:lstStyle>
+            <a:defPPr>
+              <a:defRPr lang="en-US"/>
+            </a:defPPr>
+            <a:lvl1pPr marL="0" algn="l" defTabSz="914400" rtl="0" eaLnBrk="1" latinLnBrk="0" hangingPunct="1">
+              <a:defRPr sz="1800" kern="1200">
+                <a:solidFill>
+                  <a:schemeClr val="lt1"/>
+                </a:solidFill>
+                <a:latin typeface="+mn-lt"/>
+                <a:ea typeface="+mn-ea"/>
+                <a:cs typeface="+mn-cs"/>
+              </a:defRPr>
+            </a:lvl1pPr>
+            <a:lvl2pPr marL="457200" algn="l" defTabSz="914400" rtl="0" eaLnBrk="1" latinLnBrk="0" hangingPunct="1">
+              <a:defRPr sz="1800" kern="1200">
+                <a:solidFill>
+                  <a:schemeClr val="lt1"/>
+                </a:solidFill>
+                <a:latin typeface="+mn-lt"/>
+                <a:ea typeface="+mn-ea"/>
+                <a:cs typeface="+mn-cs"/>
+              </a:defRPr>
+            </a:lvl2pPr>
+            <a:lvl3pPr marL="914400" algn="l" defTabSz="914400" rtl="0" eaLnBrk="1" latinLnBrk="0" hangingPunct="1">
+              <a:defRPr sz="1800" kern="1200">
+                <a:solidFill>
+                  <a:schemeClr val="lt1"/>
+                </a:solidFill>
+                <a:latin typeface="+mn-lt"/>
+                <a:ea typeface="+mn-ea"/>
+                <a:cs typeface="+mn-cs"/>
+              </a:defRPr>
+            </a:lvl3pPr>
+            <a:lvl4pPr marL="1371600" algn="l" defTabSz="914400" rtl="0" eaLnBrk="1" latinLnBrk="0" hangingPunct="1">
+              <a:defRPr sz="1800" kern="1200">
+                <a:solidFill>
+                  <a:schemeClr val="lt1"/>
+                </a:solidFill>
+                <a:latin typeface="+mn-lt"/>
+                <a:ea typeface="+mn-ea"/>
+                <a:cs typeface="+mn-cs"/>
+              </a:defRPr>
+            </a:lvl4pPr>
+            <a:lvl5pPr marL="1828800" algn="l" defTabSz="914400" rtl="0" eaLnBrk="1" latinLnBrk="0" hangingPunct="1">
+              <a:defRPr sz="1800" kern="1200">
+                <a:solidFill>
+                  <a:schemeClr val="lt1"/>
+                </a:solidFill>
+                <a:latin typeface="+mn-lt"/>
+                <a:ea typeface="+mn-ea"/>
+                <a:cs typeface="+mn-cs"/>
+              </a:defRPr>
+            </a:lvl5pPr>
+            <a:lvl6pPr marL="2286000" algn="l" defTabSz="914400" rtl="0" eaLnBrk="1" latinLnBrk="0" hangingPunct="1">
+              <a:defRPr sz="1800" kern="1200">
+                <a:solidFill>
+                  <a:schemeClr val="lt1"/>
+                </a:solidFill>
+                <a:latin typeface="+mn-lt"/>
+                <a:ea typeface="+mn-ea"/>
+                <a:cs typeface="+mn-cs"/>
+              </a:defRPr>
+            </a:lvl6pPr>
+            <a:lvl7pPr marL="2743200" algn="l" defTabSz="914400" rtl="0" eaLnBrk="1" latinLnBrk="0" hangingPunct="1">
+              <a:defRPr sz="1800" kern="1200">
+                <a:solidFill>
+                  <a:schemeClr val="lt1"/>
+                </a:solidFill>
+                <a:latin typeface="+mn-lt"/>
+                <a:ea typeface="+mn-ea"/>
+                <a:cs typeface="+mn-cs"/>
+              </a:defRPr>
+            </a:lvl7pPr>
+            <a:lvl8pPr marL="3200400" algn="l" defTabSz="914400" rtl="0" eaLnBrk="1" latinLnBrk="0" hangingPunct="1">
+              <a:defRPr sz="1800" kern="1200">
+                <a:solidFill>
+                  <a:schemeClr val="lt1"/>
+                </a:solidFill>
+                <a:latin typeface="+mn-lt"/>
+                <a:ea typeface="+mn-ea"/>
+                <a:cs typeface="+mn-cs"/>
+              </a:defRPr>
+            </a:lvl8pPr>
+            <a:lvl9pPr marL="3657600" algn="l" defTabSz="914400" rtl="0" eaLnBrk="1" latinLnBrk="0" hangingPunct="1">
+              <a:defRPr sz="1800" kern="1200">
+                <a:solidFill>
+                  <a:schemeClr val="lt1"/>
+                </a:solidFill>
+                <a:latin typeface="+mn-lt"/>
+                <a:ea typeface="+mn-ea"/>
+                <a:cs typeface="+mn-cs"/>
+              </a:defRPr>
+            </a:lvl9pPr>
+          </a:lstStyle>
+          <a:p>
+            <a:pPr algn="ctr"/>
+            <a:r>
+              <a:rPr lang="en-US" b="1" i="1" dirty="0">
+                <a:solidFill>
+                  <a:schemeClr val="tx1"/>
+                </a:solidFill>
+                <a:latin typeface="Aptos" panose="020B0004020202020204" pitchFamily="34" charset="0"/>
+              </a:rPr>
+              <a:t>F</a:t>
+            </a:r>
+          </a:p>
+          <a:p>
+            <a:pPr algn="ctr"/>
+            <a:r>
+              <a:rPr lang="en-US" sz="1600" i="1" dirty="0">
+                <a:solidFill>
+                  <a:schemeClr val="tx1"/>
+                </a:solidFill>
+                <a:latin typeface="Aptos" panose="020B0004020202020204" pitchFamily="34" charset="0"/>
+              </a:rPr>
+              <a:t>Dynamics</a:t>
+            </a:r>
+          </a:p>
+        </p:txBody>
+      </p:sp>
+      <p:cxnSp>
+        <p:nvCxnSpPr>
+          <p:cNvPr id="17" name="Straight Arrow Connector 16">
+            <a:extLst>
+              <a:ext uri="{FF2B5EF4-FFF2-40B4-BE49-F238E27FC236}">
+                <a16:creationId xmlns:a16="http://schemas.microsoft.com/office/drawing/2014/main" id="{1349A17B-03ED-B02A-6DD4-AEA2CB33B2AD}"/>
+              </a:ext>
+            </a:extLst>
+          </p:cNvPr>
+          <p:cNvCxnSpPr>
+            <a:cxnSpLocks/>
+          </p:cNvCxnSpPr>
+          <p:nvPr/>
+        </p:nvCxnSpPr>
+        <p:spPr>
+          <a:xfrm>
+            <a:off x="2216526" y="1482978"/>
+            <a:ext cx="425556" cy="3917"/>
+          </a:xfrm>
+          <a:prstGeom prst="straightConnector1">
+            <a:avLst/>
+          </a:prstGeom>
+          <a:ln w="38100">
+            <a:solidFill>
+              <a:schemeClr val="tx1"/>
+            </a:solidFill>
+            <a:tailEnd type="triangle"/>
+          </a:ln>
+        </p:spPr>
+        <p:style>
+          <a:lnRef idx="2">
+            <a:schemeClr val="accent1"/>
+          </a:lnRef>
+          <a:fillRef idx="0">
+            <a:schemeClr val="accent1"/>
+          </a:fillRef>
+          <a:effectRef idx="1">
+            <a:schemeClr val="accent1"/>
+          </a:effectRef>
+          <a:fontRef idx="minor">
+            <a:schemeClr val="tx1"/>
+          </a:fontRef>
+        </p:style>
+      </p:cxnSp>
+      <mc:AlternateContent xmlns:mc="http://schemas.openxmlformats.org/markup-compatibility/2006">
+        <mc:Choice xmlns:a14="http://schemas.microsoft.com/office/drawing/2010/main" Requires="a14">
+          <p:sp>
+            <p:nvSpPr>
+              <p:cNvPr id="20" name="TextBox 35">
+                <a:extLst>
+                  <a:ext uri="{FF2B5EF4-FFF2-40B4-BE49-F238E27FC236}">
+                    <a16:creationId xmlns:a16="http://schemas.microsoft.com/office/drawing/2014/main" id="{D042E131-C70A-6E8E-F7D4-2159F277E9A8}"/>
+                  </a:ext>
+                </a:extLst>
+              </p:cNvPr>
+              <p:cNvSpPr txBox="1"/>
+              <p:nvPr/>
+            </p:nvSpPr>
+            <p:spPr>
+              <a:xfrm>
+                <a:off x="4055128" y="1336111"/>
+                <a:ext cx="575725" cy="307777"/>
+              </a:xfrm>
+              <a:prstGeom prst="rect">
+                <a:avLst/>
+              </a:prstGeom>
+              <a:noFill/>
+            </p:spPr>
+            <p:txBody>
+              <a:bodyPr wrap="square" lIns="0" tIns="0" rIns="0" bIns="0" rtlCol="0">
+                <a:spAutoFit/>
+              </a:bodyPr>
+              <a:lstStyle>
+                <a:defPPr>
+                  <a:defRPr lang="en-US"/>
+                </a:defPPr>
+                <a:lvl1pPr marL="0" algn="l" defTabSz="914400" rtl="0" eaLnBrk="1" latinLnBrk="0" hangingPunct="1">
+                  <a:defRPr sz="1800" kern="1200">
                     <a:solidFill>
-                      <a:schemeClr val="accent6"/>
+                      <a:schemeClr val="tx1"/>
                     </a:solidFill>
-                    <a:latin typeface="Aptos" panose="020B0004020202020204" pitchFamily="34" charset="0"/>
-                  </a:endParaRPr>
-                </a:p>
-              </p:txBody>
-            </p:sp>
-          </mc:Choice>
-          <mc:Fallback xmlns="">
-            <p:sp>
-              <p:nvSpPr>
-                <p:cNvPr id="76" name="TextBox 35">
-                  <a:extLst>
-                    <a:ext uri="{FF2B5EF4-FFF2-40B4-BE49-F238E27FC236}">
-                      <a16:creationId xmlns:a16="http://schemas.microsoft.com/office/drawing/2014/main" id="{97D320F6-37DE-3C0C-C427-B3EC34CDCB35}"/>
-                    </a:ext>
-                  </a:extLst>
-                </p:cNvPr>
-                <p:cNvSpPr txBox="1">
-                  <a:spLocks noRot="1" noChangeAspect="1" noMove="1" noResize="1" noEditPoints="1" noAdjustHandles="1" noChangeArrowheads="1" noChangeShapeType="1" noTextEdit="1"/>
-                </p:cNvSpPr>
-                <p:nvPr/>
-              </p:nvSpPr>
-              <p:spPr>
-                <a:xfrm>
-                  <a:off x="4718578" y="3300344"/>
-                  <a:ext cx="575725" cy="307777"/>
-                </a:xfrm>
-                <a:prstGeom prst="rect">
-                  <a:avLst/>
-                </a:prstGeom>
-                <a:blipFill>
-                  <a:blip r:embed="rId10"/>
-                  <a:stretch>
-                    <a:fillRect b="-3846"/>
-                  </a:stretch>
-                </a:blipFill>
-              </p:spPr>
-              <p:txBody>
-                <a:bodyPr/>
-                <a:lstStyle/>
-                <a:p>
-                  <a:r>
-                    <a:rPr lang="en-US">
-                      <a:noFill/>
-                    </a:rPr>
-                    <a:t> </a:t>
-                  </a:r>
-                </a:p>
-              </p:txBody>
-            </p:sp>
-          </mc:Fallback>
-        </mc:AlternateContent>
-        <mc:AlternateContent xmlns:mc="http://schemas.openxmlformats.org/markup-compatibility/2006" xmlns:a14="http://schemas.microsoft.com/office/drawing/2010/main">
-          <mc:Choice Requires="a14">
-            <p:sp>
-              <p:nvSpPr>
-                <p:cNvPr id="77" name="TextBox 35">
-                  <a:extLst>
-                    <a:ext uri="{FF2B5EF4-FFF2-40B4-BE49-F238E27FC236}">
-                      <a16:creationId xmlns:a16="http://schemas.microsoft.com/office/drawing/2014/main" id="{77701C4E-68C1-CE44-96B2-9D0D80161CD2}"/>
-                    </a:ext>
-                  </a:extLst>
-                </p:cNvPr>
-                <p:cNvSpPr txBox="1"/>
-                <p:nvPr/>
-              </p:nvSpPr>
-              <p:spPr>
-                <a:xfrm>
-                  <a:off x="2316598" y="2379305"/>
-                  <a:ext cx="829568" cy="594458"/>
-                </a:xfrm>
-                <a:prstGeom prst="rect">
-                  <a:avLst/>
-                </a:prstGeom>
-                <a:noFill/>
-              </p:spPr>
-              <p:txBody>
-                <a:bodyPr wrap="square" lIns="0" tIns="0" rIns="0" bIns="0" rtlCol="0">
-                  <a:spAutoFit/>
-                </a:bodyPr>
-                <a:lstStyle>
-                  <a:defPPr>
-                    <a:defRPr lang="en-US"/>
-                  </a:defPPr>
-                  <a:lvl1pPr marL="0" algn="l" defTabSz="914400" rtl="0" eaLnBrk="1" latinLnBrk="0" hangingPunct="1">
-                    <a:defRPr sz="1800" kern="1200">
-                      <a:solidFill>
-                        <a:schemeClr val="tx1"/>
-                      </a:solidFill>
-                      <a:latin typeface="+mn-lt"/>
-                      <a:ea typeface="+mn-ea"/>
-                      <a:cs typeface="+mn-cs"/>
-                    </a:defRPr>
-                  </a:lvl1pPr>
-                  <a:lvl2pPr marL="457200" algn="l" defTabSz="914400" rtl="0" eaLnBrk="1" latinLnBrk="0" hangingPunct="1">
-                    <a:defRPr sz="1800" kern="1200">
-                      <a:solidFill>
-                        <a:schemeClr val="tx1"/>
-                      </a:solidFill>
-                      <a:latin typeface="+mn-lt"/>
-                      <a:ea typeface="+mn-ea"/>
-                      <a:cs typeface="+mn-cs"/>
-                    </a:defRPr>
-                  </a:lvl2pPr>
-                  <a:lvl3pPr marL="914400" algn="l" defTabSz="914400" rtl="0" eaLnBrk="1" latinLnBrk="0" hangingPunct="1">
-                    <a:defRPr sz="1800" kern="1200">
-                      <a:solidFill>
-                        <a:schemeClr val="tx1"/>
-                      </a:solidFill>
-                      <a:latin typeface="+mn-lt"/>
-                      <a:ea typeface="+mn-ea"/>
-                      <a:cs typeface="+mn-cs"/>
-                    </a:defRPr>
-                  </a:lvl3pPr>
-                  <a:lvl4pPr marL="1371600" algn="l" defTabSz="914400" rtl="0" eaLnBrk="1" latinLnBrk="0" hangingPunct="1">
-                    <a:defRPr sz="1800" kern="1200">
-                      <a:solidFill>
-                        <a:schemeClr val="tx1"/>
-                      </a:solidFill>
-                      <a:latin typeface="+mn-lt"/>
-                      <a:ea typeface="+mn-ea"/>
-                      <a:cs typeface="+mn-cs"/>
-                    </a:defRPr>
-                  </a:lvl4pPr>
-                  <a:lvl5pPr marL="1828800" algn="l" defTabSz="914400" rtl="0" eaLnBrk="1" latinLnBrk="0" hangingPunct="1">
-                    <a:defRPr sz="1800" kern="1200">
-                      <a:solidFill>
-                        <a:schemeClr val="tx1"/>
-                      </a:solidFill>
-                      <a:latin typeface="+mn-lt"/>
-                      <a:ea typeface="+mn-ea"/>
-                      <a:cs typeface="+mn-cs"/>
-                    </a:defRPr>
-                  </a:lvl5pPr>
-                  <a:lvl6pPr marL="2286000" algn="l" defTabSz="914400" rtl="0" eaLnBrk="1" latinLnBrk="0" hangingPunct="1">
-                    <a:defRPr sz="1800" kern="1200">
-                      <a:solidFill>
-                        <a:schemeClr val="tx1"/>
-                      </a:solidFill>
-                      <a:latin typeface="+mn-lt"/>
-                      <a:ea typeface="+mn-ea"/>
-                      <a:cs typeface="+mn-cs"/>
-                    </a:defRPr>
-                  </a:lvl6pPr>
-                  <a:lvl7pPr marL="2743200" algn="l" defTabSz="914400" rtl="0" eaLnBrk="1" latinLnBrk="0" hangingPunct="1">
-                    <a:defRPr sz="1800" kern="1200">
-                      <a:solidFill>
-                        <a:schemeClr val="tx1"/>
-                      </a:solidFill>
-                      <a:latin typeface="+mn-lt"/>
-                      <a:ea typeface="+mn-ea"/>
-                      <a:cs typeface="+mn-cs"/>
-                    </a:defRPr>
-                  </a:lvl7pPr>
-                  <a:lvl8pPr marL="3200400" algn="l" defTabSz="914400" rtl="0" eaLnBrk="1" latinLnBrk="0" hangingPunct="1">
-                    <a:defRPr sz="1800" kern="1200">
-                      <a:solidFill>
-                        <a:schemeClr val="tx1"/>
-                      </a:solidFill>
-                      <a:latin typeface="+mn-lt"/>
-                      <a:ea typeface="+mn-ea"/>
-                      <a:cs typeface="+mn-cs"/>
-                    </a:defRPr>
-                  </a:lvl8pPr>
-                  <a:lvl9pPr marL="3657600" algn="l" defTabSz="914400" rtl="0" eaLnBrk="1" latinLnBrk="0" hangingPunct="1">
-                    <a:defRPr sz="1800" kern="1200">
-                      <a:solidFill>
-                        <a:schemeClr val="tx1"/>
-                      </a:solidFill>
-                      <a:latin typeface="+mn-lt"/>
-                      <a:ea typeface="+mn-ea"/>
-                      <a:cs typeface="+mn-cs"/>
-                    </a:defRPr>
-                  </a:lvl9pPr>
-                </a:lstStyle>
-                <a:p>
-                  <a:pPr/>
-                  <a14:m>
-                    <m:oMathPara xmlns:m="http://schemas.openxmlformats.org/officeDocument/2006/math">
-                      <m:oMathParaPr>
-                        <m:jc m:val="centerGroup"/>
-                      </m:oMathParaPr>
-                      <m:oMath xmlns:m="http://schemas.openxmlformats.org/officeDocument/2006/math">
-                        <m:d>
-                          <m:dPr>
-                            <m:begChr m:val="["/>
-                            <m:endChr m:val="]"/>
-                            <m:ctrlPr>
-                              <a:rPr lang="en-US" sz="2000" b="1" i="1" smtClean="0">
-                                <a:latin typeface="Cambria Math" panose="02040503050406030204" pitchFamily="18" charset="0"/>
-                              </a:rPr>
-                            </m:ctrlPr>
-                          </m:dPr>
-                          <m:e>
-                            <m:m>
-                              <m:mPr>
-                                <m:mcs>
-                                  <m:mc>
-                                    <m:mcPr>
-                                      <m:count m:val="1"/>
-                                      <m:mcJc m:val="center"/>
-                                    </m:mcPr>
-                                  </m:mc>
-                                </m:mcs>
-                                <m:ctrlPr>
-                                  <a:rPr lang="en-US" sz="2000" b="1" i="1" smtClean="0">
-                                    <a:latin typeface="Cambria Math" panose="02040503050406030204" pitchFamily="18" charset="0"/>
-                                  </a:rPr>
-                                </m:ctrlPr>
-                              </m:mPr>
-                              <m:mr>
-                                <m:e>
-                                  <m:r>
-                                    <m:rPr>
-                                      <m:brk m:alnAt="7"/>
-                                    </m:rPr>
-                                    <a:rPr lang="en-US" sz="2000" b="1" i="1" smtClean="0">
-                                      <a:latin typeface="Cambria Math" panose="02040503050406030204" pitchFamily="18" charset="0"/>
-                                    </a:rPr>
-                                    <m:t>𝒛</m:t>
-                                  </m:r>
-                                  <m:d>
-                                    <m:dPr>
-                                      <m:ctrlPr>
-                                        <a:rPr lang="en-US" sz="2000" i="1" smtClean="0">
-                                          <a:latin typeface="Cambria Math" panose="02040503050406030204" pitchFamily="18" charset="0"/>
-                                        </a:rPr>
-                                      </m:ctrlPr>
-                                    </m:dPr>
-                                    <m:e>
-                                      <m:r>
-                                        <a:rPr lang="en-US" sz="2000" b="0" i="1" smtClean="0">
-                                          <a:latin typeface="Cambria Math" panose="02040503050406030204" pitchFamily="18" charset="0"/>
-                                        </a:rPr>
-                                        <m:t>𝑡</m:t>
-                                      </m:r>
-                                    </m:e>
-                                  </m:d>
-                                </m:e>
-                              </m:mr>
-                              <m:mr>
-                                <m:e>
-                                  <m:r>
-                                    <a:rPr lang="en-US" sz="2000" b="0" i="1" smtClean="0">
-                                      <a:solidFill>
-                                        <a:schemeClr val="tx1">
-                                          <a:lumMod val="50000"/>
-                                          <a:lumOff val="50000"/>
-                                        </a:schemeClr>
-                                      </a:solidFill>
-                                      <a:latin typeface="Cambria Math" panose="02040503050406030204" pitchFamily="18" charset="0"/>
-                                    </a:rPr>
-                                    <m:t>𝑀</m:t>
-                                  </m:r>
-                                  <m:r>
-                                    <a:rPr lang="en-US" sz="2000" b="0" i="1" smtClean="0">
-                                      <a:solidFill>
-                                        <a:schemeClr val="tx1">
-                                          <a:lumMod val="50000"/>
-                                          <a:lumOff val="50000"/>
-                                        </a:schemeClr>
-                                      </a:solidFill>
-                                      <a:latin typeface="Cambria Math" panose="02040503050406030204" pitchFamily="18" charset="0"/>
-                                    </a:rPr>
-                                    <m:t>(</m:t>
-                                  </m:r>
-                                  <m:r>
-                                    <a:rPr lang="en-US" sz="2000" b="0" i="1" smtClean="0">
-                                      <a:solidFill>
-                                        <a:schemeClr val="tx1">
-                                          <a:lumMod val="50000"/>
-                                          <a:lumOff val="50000"/>
-                                        </a:schemeClr>
-                                      </a:solidFill>
-                                      <a:latin typeface="Cambria Math" panose="02040503050406030204" pitchFamily="18" charset="0"/>
-                                    </a:rPr>
-                                    <m:t>𝑡</m:t>
-                                  </m:r>
-                                  <m:r>
-                                    <a:rPr lang="en-US" sz="2000" b="0" i="1" smtClean="0">
-                                      <a:solidFill>
-                                        <a:schemeClr val="tx1">
-                                          <a:lumMod val="50000"/>
-                                          <a:lumOff val="50000"/>
-                                        </a:schemeClr>
-                                      </a:solidFill>
-                                      <a:latin typeface="Cambria Math" panose="02040503050406030204" pitchFamily="18" charset="0"/>
-                                    </a:rPr>
-                                    <m:t>)</m:t>
-                                  </m:r>
-                                </m:e>
-                              </m:mr>
-                            </m:m>
-                          </m:e>
-                        </m:d>
-                      </m:oMath>
-                    </m:oMathPara>
-                  </a14:m>
-                  <a:endParaRPr lang="en-US" sz="2000" dirty="0">
-                    <a:latin typeface="Aptos" panose="020B0004020202020204" pitchFamily="34" charset="0"/>
-                  </a:endParaRPr>
-                </a:p>
-              </p:txBody>
-            </p:sp>
-          </mc:Choice>
-          <mc:Fallback xmlns="">
-            <p:sp>
-              <p:nvSpPr>
-                <p:cNvPr id="77" name="TextBox 35">
-                  <a:extLst>
-                    <a:ext uri="{FF2B5EF4-FFF2-40B4-BE49-F238E27FC236}">
-                      <a16:creationId xmlns:a16="http://schemas.microsoft.com/office/drawing/2014/main" id="{77701C4E-68C1-CE44-96B2-9D0D80161CD2}"/>
-                    </a:ext>
-                  </a:extLst>
-                </p:cNvPr>
-                <p:cNvSpPr txBox="1">
-                  <a:spLocks noRot="1" noChangeAspect="1" noMove="1" noResize="1" noEditPoints="1" noAdjustHandles="1" noChangeArrowheads="1" noChangeShapeType="1" noTextEdit="1"/>
-                </p:cNvSpPr>
-                <p:nvPr/>
-              </p:nvSpPr>
-              <p:spPr>
-                <a:xfrm>
-                  <a:off x="2316598" y="2379305"/>
-                  <a:ext cx="829568" cy="594458"/>
-                </a:xfrm>
-                <a:prstGeom prst="rect">
-                  <a:avLst/>
-                </a:prstGeom>
-                <a:blipFill>
-                  <a:blip r:embed="rId11"/>
-                  <a:stretch>
-                    <a:fillRect b="-18750"/>
-                  </a:stretch>
-                </a:blipFill>
-              </p:spPr>
-              <p:txBody>
-                <a:bodyPr/>
-                <a:lstStyle/>
-                <a:p>
-                  <a:r>
-                    <a:rPr lang="en-US">
-                      <a:noFill/>
-                    </a:rPr>
-                    <a:t> </a:t>
-                  </a:r>
-                </a:p>
-              </p:txBody>
-            </p:sp>
-          </mc:Fallback>
-        </mc:AlternateContent>
-        <p:sp>
-          <p:nvSpPr>
-            <p:cNvPr id="84" name="TextBox 83">
-              <a:extLst>
-                <a:ext uri="{FF2B5EF4-FFF2-40B4-BE49-F238E27FC236}">
-                  <a16:creationId xmlns:a16="http://schemas.microsoft.com/office/drawing/2014/main" id="{2F2404BE-BFCE-CF11-2689-E9664916BFFE}"/>
-                </a:ext>
-              </a:extLst>
-            </p:cNvPr>
-            <p:cNvSpPr txBox="1"/>
-            <p:nvPr/>
-          </p:nvSpPr>
-          <p:spPr>
-            <a:xfrm>
-              <a:off x="815815" y="514975"/>
-              <a:ext cx="538883" cy="369332"/>
-            </a:xfrm>
-            <a:prstGeom prst="rect">
-              <a:avLst/>
-            </a:prstGeom>
+                    <a:latin typeface="+mn-lt"/>
+                    <a:ea typeface="+mn-ea"/>
+                    <a:cs typeface="+mn-cs"/>
+                  </a:defRPr>
+                </a:lvl1pPr>
+                <a:lvl2pPr marL="457200" algn="l" defTabSz="914400" rtl="0" eaLnBrk="1" latinLnBrk="0" hangingPunct="1">
+                  <a:defRPr sz="1800" kern="1200">
+                    <a:solidFill>
+                      <a:schemeClr val="tx1"/>
+                    </a:solidFill>
+                    <a:latin typeface="+mn-lt"/>
+                    <a:ea typeface="+mn-ea"/>
+                    <a:cs typeface="+mn-cs"/>
+                  </a:defRPr>
+                </a:lvl2pPr>
+                <a:lvl3pPr marL="914400" algn="l" defTabSz="914400" rtl="0" eaLnBrk="1" latinLnBrk="0" hangingPunct="1">
+                  <a:defRPr sz="1800" kern="1200">
+                    <a:solidFill>
+                      <a:schemeClr val="tx1"/>
+                    </a:solidFill>
+                    <a:latin typeface="+mn-lt"/>
+                    <a:ea typeface="+mn-ea"/>
+                    <a:cs typeface="+mn-cs"/>
+                  </a:defRPr>
+                </a:lvl3pPr>
+                <a:lvl4pPr marL="1371600" algn="l" defTabSz="914400" rtl="0" eaLnBrk="1" latinLnBrk="0" hangingPunct="1">
+                  <a:defRPr sz="1800" kern="1200">
+                    <a:solidFill>
+                      <a:schemeClr val="tx1"/>
+                    </a:solidFill>
+                    <a:latin typeface="+mn-lt"/>
+                    <a:ea typeface="+mn-ea"/>
+                    <a:cs typeface="+mn-cs"/>
+                  </a:defRPr>
+                </a:lvl4pPr>
+                <a:lvl5pPr marL="1828800" algn="l" defTabSz="914400" rtl="0" eaLnBrk="1" latinLnBrk="0" hangingPunct="1">
+                  <a:defRPr sz="1800" kern="1200">
+                    <a:solidFill>
+                      <a:schemeClr val="tx1"/>
+                    </a:solidFill>
+                    <a:latin typeface="+mn-lt"/>
+                    <a:ea typeface="+mn-ea"/>
+                    <a:cs typeface="+mn-cs"/>
+                  </a:defRPr>
+                </a:lvl5pPr>
+                <a:lvl6pPr marL="2286000" algn="l" defTabSz="914400" rtl="0" eaLnBrk="1" latinLnBrk="0" hangingPunct="1">
+                  <a:defRPr sz="1800" kern="1200">
+                    <a:solidFill>
+                      <a:schemeClr val="tx1"/>
+                    </a:solidFill>
+                    <a:latin typeface="+mn-lt"/>
+                    <a:ea typeface="+mn-ea"/>
+                    <a:cs typeface="+mn-cs"/>
+                  </a:defRPr>
+                </a:lvl6pPr>
+                <a:lvl7pPr marL="2743200" algn="l" defTabSz="914400" rtl="0" eaLnBrk="1" latinLnBrk="0" hangingPunct="1">
+                  <a:defRPr sz="1800" kern="1200">
+                    <a:solidFill>
+                      <a:schemeClr val="tx1"/>
+                    </a:solidFill>
+                    <a:latin typeface="+mn-lt"/>
+                    <a:ea typeface="+mn-ea"/>
+                    <a:cs typeface="+mn-cs"/>
+                  </a:defRPr>
+                </a:lvl7pPr>
+                <a:lvl8pPr marL="3200400" algn="l" defTabSz="914400" rtl="0" eaLnBrk="1" latinLnBrk="0" hangingPunct="1">
+                  <a:defRPr sz="1800" kern="1200">
+                    <a:solidFill>
+                      <a:schemeClr val="tx1"/>
+                    </a:solidFill>
+                    <a:latin typeface="+mn-lt"/>
+                    <a:ea typeface="+mn-ea"/>
+                    <a:cs typeface="+mn-cs"/>
+                  </a:defRPr>
+                </a:lvl8pPr>
+                <a:lvl9pPr marL="3657600" algn="l" defTabSz="914400" rtl="0" eaLnBrk="1" latinLnBrk="0" hangingPunct="1">
+                  <a:defRPr sz="1800" kern="1200">
+                    <a:solidFill>
+                      <a:schemeClr val="tx1"/>
+                    </a:solidFill>
+                    <a:latin typeface="+mn-lt"/>
+                    <a:ea typeface="+mn-ea"/>
+                    <a:cs typeface="+mn-cs"/>
+                  </a:defRPr>
+                </a:lvl9pPr>
+              </a:lstStyle>
+              <a:p>
+                <a:pPr/>
+                <a14:m>
+                  <m:oMathPara xmlns:m="http://schemas.openxmlformats.org/officeDocument/2006/math">
+                    <m:oMathParaPr>
+                      <m:jc m:val="centerGroup"/>
+                    </m:oMathParaPr>
+                    <m:oMath xmlns:m="http://schemas.openxmlformats.org/officeDocument/2006/math">
+                      <m:r>
+                        <a:rPr lang="en-US" sz="2000" b="1" i="1" smtClean="0">
+                          <a:latin typeface="Cambria Math" panose="02040503050406030204" pitchFamily="18" charset="0"/>
+                        </a:rPr>
+                        <m:t>𝒛</m:t>
+                      </m:r>
+                    </m:oMath>
+                  </m:oMathPara>
+                </a14:m>
+                <a:endParaRPr lang="en-US" sz="2000" b="1" dirty="0">
+                  <a:latin typeface="Aptos" panose="020B0004020202020204" pitchFamily="34" charset="0"/>
+                </a:endParaRPr>
+              </a:p>
+            </p:txBody>
+          </p:sp>
+        </mc:Choice>
+        <mc:Fallback>
+          <p:sp>
+            <p:nvSpPr>
+              <p:cNvPr id="20" name="TextBox 35">
+                <a:extLst>
+                  <a:ext uri="{FF2B5EF4-FFF2-40B4-BE49-F238E27FC236}">
+                    <a16:creationId xmlns:a16="http://schemas.microsoft.com/office/drawing/2014/main" id="{D042E131-C70A-6E8E-F7D4-2159F277E9A8}"/>
+                  </a:ext>
+                </a:extLst>
+              </p:cNvPr>
+              <p:cNvSpPr txBox="1">
+                <a:spLocks noRot="1" noChangeAspect="1" noMove="1" noResize="1" noEditPoints="1" noAdjustHandles="1" noChangeArrowheads="1" noChangeShapeType="1" noTextEdit="1"/>
+              </p:cNvSpPr>
+              <p:nvPr/>
+            </p:nvSpPr>
+            <p:spPr>
+              <a:xfrm>
+                <a:off x="4055128" y="1336111"/>
+                <a:ext cx="575725" cy="307777"/>
+              </a:xfrm>
+              <a:prstGeom prst="rect">
+                <a:avLst/>
+              </a:prstGeom>
+              <a:blipFill>
+                <a:blip r:embed="rId6"/>
+                <a:stretch>
+                  <a:fillRect/>
+                </a:stretch>
+              </a:blipFill>
+            </p:spPr>
+            <p:txBody>
+              <a:bodyPr/>
+              <a:lstStyle/>
+              <a:p>
+                <a:r>
+                  <a:rPr lang="en-US">
+                    <a:noFill/>
+                  </a:rPr>
+                  <a:t> </a:t>
+                </a:r>
+              </a:p>
+            </p:txBody>
+          </p:sp>
+        </mc:Fallback>
+      </mc:AlternateContent>
+      <p:cxnSp>
+        <p:nvCxnSpPr>
+          <p:cNvPr id="23" name="Straight Arrow Connector 22">
+            <a:extLst>
+              <a:ext uri="{FF2B5EF4-FFF2-40B4-BE49-F238E27FC236}">
+                <a16:creationId xmlns:a16="http://schemas.microsoft.com/office/drawing/2014/main" id="{F563CF4E-A1EC-D01D-5497-2D352643F318}"/>
+              </a:ext>
+            </a:extLst>
+          </p:cNvPr>
+          <p:cNvCxnSpPr>
+            <a:cxnSpLocks/>
+          </p:cNvCxnSpPr>
+          <p:nvPr/>
+        </p:nvCxnSpPr>
+        <p:spPr>
+          <a:xfrm>
+            <a:off x="3620401" y="1493146"/>
+            <a:ext cx="439089" cy="0"/>
+          </a:xfrm>
+          <a:prstGeom prst="straightConnector1">
+            <a:avLst/>
+          </a:prstGeom>
+          <a:ln w="38100">
+            <a:solidFill>
+              <a:schemeClr val="tx1"/>
+            </a:solidFill>
+            <a:tailEnd type="triangle"/>
+          </a:ln>
+        </p:spPr>
+        <p:style>
+          <a:lnRef idx="2">
+            <a:schemeClr val="accent1"/>
+          </a:lnRef>
+          <a:fillRef idx="0">
+            <a:schemeClr val="accent1"/>
+          </a:fillRef>
+          <a:effectRef idx="1">
+            <a:schemeClr val="accent1"/>
+          </a:effectRef>
+          <a:fontRef idx="minor">
+            <a:schemeClr val="tx1"/>
+          </a:fontRef>
+        </p:style>
+      </p:cxnSp>
+      <p:cxnSp>
+        <p:nvCxnSpPr>
+          <p:cNvPr id="24" name="Straight Arrow Connector 23">
+            <a:extLst>
+              <a:ext uri="{FF2B5EF4-FFF2-40B4-BE49-F238E27FC236}">
+                <a16:creationId xmlns:a16="http://schemas.microsoft.com/office/drawing/2014/main" id="{3400ACC8-E5D1-E738-BB9D-821402F49EC2}"/>
+              </a:ext>
+            </a:extLst>
+          </p:cNvPr>
+          <p:cNvCxnSpPr>
+            <a:cxnSpLocks/>
+          </p:cNvCxnSpPr>
+          <p:nvPr/>
+        </p:nvCxnSpPr>
+        <p:spPr>
+          <a:xfrm>
+            <a:off x="4588622" y="1496163"/>
+            <a:ext cx="417818" cy="13255"/>
+          </a:xfrm>
+          <a:prstGeom prst="straightConnector1">
+            <a:avLst/>
+          </a:prstGeom>
+          <a:ln w="38100">
+            <a:solidFill>
+              <a:schemeClr val="tx1"/>
+            </a:solidFill>
+            <a:tailEnd type="triangle"/>
+          </a:ln>
+        </p:spPr>
+        <p:style>
+          <a:lnRef idx="2">
+            <a:schemeClr val="accent1"/>
+          </a:lnRef>
+          <a:fillRef idx="0">
+            <a:schemeClr val="accent1"/>
+          </a:fillRef>
+          <a:effectRef idx="1">
+            <a:schemeClr val="accent1"/>
+          </a:effectRef>
+          <a:fontRef idx="minor">
+            <a:schemeClr val="tx1"/>
+          </a:fontRef>
+        </p:style>
+      </p:cxnSp>
+      <p:sp>
+        <p:nvSpPr>
+          <p:cNvPr id="52" name="Rectangle 51">
+            <a:extLst>
+              <a:ext uri="{FF2B5EF4-FFF2-40B4-BE49-F238E27FC236}">
+                <a16:creationId xmlns:a16="http://schemas.microsoft.com/office/drawing/2014/main" id="{D46695C8-C3FC-FF4F-A331-734B7150B70A}"/>
+              </a:ext>
+            </a:extLst>
+          </p:cNvPr>
+          <p:cNvSpPr/>
+          <p:nvPr/>
+        </p:nvSpPr>
+        <p:spPr>
+          <a:xfrm rot="5400000">
+            <a:off x="1171275" y="1300617"/>
+            <a:ext cx="1707721" cy="275943"/>
+          </a:xfrm>
+          <a:prstGeom prst="rect">
+            <a:avLst/>
+          </a:prstGeom>
+          <a:solidFill>
+            <a:schemeClr val="bg2">
+              <a:lumMod val="90000"/>
+            </a:schemeClr>
+          </a:solidFill>
+        </p:spPr>
+        <p:style>
+          <a:lnRef idx="2">
+            <a:schemeClr val="accent1">
+              <a:shade val="15000"/>
+            </a:schemeClr>
+          </a:lnRef>
+          <a:fillRef idx="1">
+            <a:schemeClr val="accent1"/>
+          </a:fillRef>
+          <a:effectRef idx="0">
+            <a:schemeClr val="accent1"/>
+          </a:effectRef>
+          <a:fontRef idx="minor">
+            <a:schemeClr val="lt1"/>
+          </a:fontRef>
+        </p:style>
+        <p:txBody>
+          <a:bodyPr rtlCol="0" anchor="ctr"/>
+          <a:lstStyle/>
+          <a:p>
+            <a:pPr algn="ctr"/>
+            <a:r>
+              <a:rPr lang="en-US" sz="1600" i="1" dirty="0">
+                <a:solidFill>
+                  <a:schemeClr val="tx1"/>
+                </a:solidFill>
+              </a:rPr>
+              <a:t>Normalize</a:t>
+            </a:r>
+          </a:p>
+        </p:txBody>
+      </p:sp>
+      <mc:AlternateContent xmlns:mc="http://schemas.openxmlformats.org/markup-compatibility/2006">
+        <mc:Choice xmlns:a14="http://schemas.microsoft.com/office/drawing/2010/main" Requires="a14">
+          <p:sp>
+            <p:nvSpPr>
+              <p:cNvPr id="53" name="TextBox 35">
+                <a:extLst>
+                  <a:ext uri="{FF2B5EF4-FFF2-40B4-BE49-F238E27FC236}">
+                    <a16:creationId xmlns:a16="http://schemas.microsoft.com/office/drawing/2014/main" id="{FA236886-EE14-722D-BC2D-E80E2EBDC0F7}"/>
+                  </a:ext>
+                </a:extLst>
+              </p:cNvPr>
+              <p:cNvSpPr txBox="1"/>
+              <p:nvPr/>
+            </p:nvSpPr>
+            <p:spPr>
+              <a:xfrm>
+                <a:off x="957706" y="1290263"/>
+                <a:ext cx="575725" cy="307777"/>
+              </a:xfrm>
+              <a:prstGeom prst="rect">
+                <a:avLst/>
+              </a:prstGeom>
+              <a:noFill/>
+            </p:spPr>
+            <p:txBody>
+              <a:bodyPr wrap="square" lIns="0" tIns="0" rIns="0" bIns="0" rtlCol="0">
+                <a:spAutoFit/>
+              </a:bodyPr>
+              <a:lstStyle>
+                <a:defPPr>
+                  <a:defRPr lang="en-US"/>
+                </a:defPPr>
+                <a:lvl1pPr marL="0" algn="l" defTabSz="914400" rtl="0" eaLnBrk="1" latinLnBrk="0" hangingPunct="1">
+                  <a:defRPr sz="1800" kern="1200">
+                    <a:solidFill>
+                      <a:schemeClr val="tx1"/>
+                    </a:solidFill>
+                    <a:latin typeface="+mn-lt"/>
+                    <a:ea typeface="+mn-ea"/>
+                    <a:cs typeface="+mn-cs"/>
+                  </a:defRPr>
+                </a:lvl1pPr>
+                <a:lvl2pPr marL="457200" algn="l" defTabSz="914400" rtl="0" eaLnBrk="1" latinLnBrk="0" hangingPunct="1">
+                  <a:defRPr sz="1800" kern="1200">
+                    <a:solidFill>
+                      <a:schemeClr val="tx1"/>
+                    </a:solidFill>
+                    <a:latin typeface="+mn-lt"/>
+                    <a:ea typeface="+mn-ea"/>
+                    <a:cs typeface="+mn-cs"/>
+                  </a:defRPr>
+                </a:lvl2pPr>
+                <a:lvl3pPr marL="914400" algn="l" defTabSz="914400" rtl="0" eaLnBrk="1" latinLnBrk="0" hangingPunct="1">
+                  <a:defRPr sz="1800" kern="1200">
+                    <a:solidFill>
+                      <a:schemeClr val="tx1"/>
+                    </a:solidFill>
+                    <a:latin typeface="+mn-lt"/>
+                    <a:ea typeface="+mn-ea"/>
+                    <a:cs typeface="+mn-cs"/>
+                  </a:defRPr>
+                </a:lvl3pPr>
+                <a:lvl4pPr marL="1371600" algn="l" defTabSz="914400" rtl="0" eaLnBrk="1" latinLnBrk="0" hangingPunct="1">
+                  <a:defRPr sz="1800" kern="1200">
+                    <a:solidFill>
+                      <a:schemeClr val="tx1"/>
+                    </a:solidFill>
+                    <a:latin typeface="+mn-lt"/>
+                    <a:ea typeface="+mn-ea"/>
+                    <a:cs typeface="+mn-cs"/>
+                  </a:defRPr>
+                </a:lvl4pPr>
+                <a:lvl5pPr marL="1828800" algn="l" defTabSz="914400" rtl="0" eaLnBrk="1" latinLnBrk="0" hangingPunct="1">
+                  <a:defRPr sz="1800" kern="1200">
+                    <a:solidFill>
+                      <a:schemeClr val="tx1"/>
+                    </a:solidFill>
+                    <a:latin typeface="+mn-lt"/>
+                    <a:ea typeface="+mn-ea"/>
+                    <a:cs typeface="+mn-cs"/>
+                  </a:defRPr>
+                </a:lvl5pPr>
+                <a:lvl6pPr marL="2286000" algn="l" defTabSz="914400" rtl="0" eaLnBrk="1" latinLnBrk="0" hangingPunct="1">
+                  <a:defRPr sz="1800" kern="1200">
+                    <a:solidFill>
+                      <a:schemeClr val="tx1"/>
+                    </a:solidFill>
+                    <a:latin typeface="+mn-lt"/>
+                    <a:ea typeface="+mn-ea"/>
+                    <a:cs typeface="+mn-cs"/>
+                  </a:defRPr>
+                </a:lvl6pPr>
+                <a:lvl7pPr marL="2743200" algn="l" defTabSz="914400" rtl="0" eaLnBrk="1" latinLnBrk="0" hangingPunct="1">
+                  <a:defRPr sz="1800" kern="1200">
+                    <a:solidFill>
+                      <a:schemeClr val="tx1"/>
+                    </a:solidFill>
+                    <a:latin typeface="+mn-lt"/>
+                    <a:ea typeface="+mn-ea"/>
+                    <a:cs typeface="+mn-cs"/>
+                  </a:defRPr>
+                </a:lvl7pPr>
+                <a:lvl8pPr marL="3200400" algn="l" defTabSz="914400" rtl="0" eaLnBrk="1" latinLnBrk="0" hangingPunct="1">
+                  <a:defRPr sz="1800" kern="1200">
+                    <a:solidFill>
+                      <a:schemeClr val="tx1"/>
+                    </a:solidFill>
+                    <a:latin typeface="+mn-lt"/>
+                    <a:ea typeface="+mn-ea"/>
+                    <a:cs typeface="+mn-cs"/>
+                  </a:defRPr>
+                </a:lvl8pPr>
+                <a:lvl9pPr marL="3657600" algn="l" defTabSz="914400" rtl="0" eaLnBrk="1" latinLnBrk="0" hangingPunct="1">
+                  <a:defRPr sz="1800" kern="1200">
+                    <a:solidFill>
+                      <a:schemeClr val="tx1"/>
+                    </a:solidFill>
+                    <a:latin typeface="+mn-lt"/>
+                    <a:ea typeface="+mn-ea"/>
+                    <a:cs typeface="+mn-cs"/>
+                  </a:defRPr>
+                </a:lvl9pPr>
+              </a:lstStyle>
+              <a:p>
+                <a:pPr/>
+                <a14:m>
+                  <m:oMathPara xmlns:m="http://schemas.openxmlformats.org/officeDocument/2006/math">
+                    <m:oMathParaPr>
+                      <m:jc m:val="centerGroup"/>
+                    </m:oMathParaPr>
+                    <m:oMath xmlns:m="http://schemas.openxmlformats.org/officeDocument/2006/math">
+                      <m:sSub>
+                        <m:sSubPr>
+                          <m:ctrlPr>
+                            <a:rPr lang="en-US" sz="2000" b="1" i="1" smtClean="0">
+                              <a:latin typeface="Cambria Math" panose="02040503050406030204" pitchFamily="18" charset="0"/>
+                            </a:rPr>
+                          </m:ctrlPr>
+                        </m:sSubPr>
+                        <m:e>
+                          <m:r>
+                            <a:rPr lang="en-US" sz="2000" b="1" i="1" smtClean="0">
+                              <a:latin typeface="Cambria Math" panose="02040503050406030204" pitchFamily="18" charset="0"/>
+                            </a:rPr>
+                            <m:t>𝑿</m:t>
+                          </m:r>
+                        </m:e>
+                        <m:sub>
+                          <m:r>
+                            <a:rPr lang="en-US" sz="2000" b="0" i="1" smtClean="0">
+                              <a:latin typeface="Cambria Math" panose="02040503050406030204" pitchFamily="18" charset="0"/>
+                            </a:rPr>
+                            <m:t>𝑡</m:t>
+                          </m:r>
+                        </m:sub>
+                      </m:sSub>
+                    </m:oMath>
+                  </m:oMathPara>
+                </a14:m>
+                <a:endParaRPr lang="en-US" sz="2000" b="1" dirty="0">
+                  <a:latin typeface="Aptos" panose="020B0004020202020204" pitchFamily="34" charset="0"/>
+                </a:endParaRPr>
+              </a:p>
+            </p:txBody>
+          </p:sp>
+        </mc:Choice>
+        <mc:Fallback>
+          <p:sp>
+            <p:nvSpPr>
+              <p:cNvPr id="53" name="TextBox 35">
+                <a:extLst>
+                  <a:ext uri="{FF2B5EF4-FFF2-40B4-BE49-F238E27FC236}">
+                    <a16:creationId xmlns:a16="http://schemas.microsoft.com/office/drawing/2014/main" id="{FA236886-EE14-722D-BC2D-E80E2EBDC0F7}"/>
+                  </a:ext>
+                </a:extLst>
+              </p:cNvPr>
+              <p:cNvSpPr txBox="1">
+                <a:spLocks noRot="1" noChangeAspect="1" noMove="1" noResize="1" noEditPoints="1" noAdjustHandles="1" noChangeArrowheads="1" noChangeShapeType="1" noTextEdit="1"/>
+              </p:cNvSpPr>
+              <p:nvPr/>
+            </p:nvSpPr>
+            <p:spPr>
+              <a:xfrm>
+                <a:off x="957706" y="1290263"/>
+                <a:ext cx="575725" cy="307777"/>
+              </a:xfrm>
+              <a:prstGeom prst="rect">
+                <a:avLst/>
+              </a:prstGeom>
+              <a:blipFill>
+                <a:blip r:embed="rId7"/>
+                <a:stretch>
+                  <a:fillRect b="-16000"/>
+                </a:stretch>
+              </a:blipFill>
+            </p:spPr>
+            <p:txBody>
+              <a:bodyPr/>
+              <a:lstStyle/>
+              <a:p>
+                <a:r>
+                  <a:rPr lang="en-US">
+                    <a:noFill/>
+                  </a:rPr>
+                  <a:t> </a:t>
+                </a:r>
+              </a:p>
+            </p:txBody>
+          </p:sp>
+        </mc:Fallback>
+      </mc:AlternateContent>
+      <p:cxnSp>
+        <p:nvCxnSpPr>
+          <p:cNvPr id="55" name="Straight Arrow Connector 54">
+            <a:extLst>
+              <a:ext uri="{FF2B5EF4-FFF2-40B4-BE49-F238E27FC236}">
+                <a16:creationId xmlns:a16="http://schemas.microsoft.com/office/drawing/2014/main" id="{62A900F1-B745-6AD2-0175-CE011B5D95B5}"/>
+              </a:ext>
+            </a:extLst>
+          </p:cNvPr>
+          <p:cNvCxnSpPr>
+            <a:cxnSpLocks/>
+          </p:cNvCxnSpPr>
+          <p:nvPr/>
+        </p:nvCxnSpPr>
+        <p:spPr>
+          <a:xfrm>
+            <a:off x="1448625" y="1469130"/>
+            <a:ext cx="362477" cy="312"/>
+          </a:xfrm>
+          <a:prstGeom prst="straightConnector1">
+            <a:avLst/>
+          </a:prstGeom>
+          <a:ln w="38100">
+            <a:solidFill>
+              <a:schemeClr val="tx1"/>
+            </a:solidFill>
+            <a:tailEnd type="triangle"/>
+          </a:ln>
+        </p:spPr>
+        <p:style>
+          <a:lnRef idx="2">
+            <a:schemeClr val="accent1"/>
+          </a:lnRef>
+          <a:fillRef idx="0">
+            <a:schemeClr val="accent1"/>
+          </a:fillRef>
+          <a:effectRef idx="1">
+            <a:schemeClr val="accent1"/>
+          </a:effectRef>
+          <a:fontRef idx="minor">
+            <a:schemeClr val="tx1"/>
+          </a:fontRef>
+        </p:style>
+      </p:cxnSp>
+      <mc:AlternateContent xmlns:mc="http://schemas.openxmlformats.org/markup-compatibility/2006">
+        <mc:Choice xmlns:a14="http://schemas.microsoft.com/office/drawing/2010/main" Requires="a14">
+          <p:sp>
+            <p:nvSpPr>
+              <p:cNvPr id="56" name="TextBox 35">
+                <a:extLst>
+                  <a:ext uri="{FF2B5EF4-FFF2-40B4-BE49-F238E27FC236}">
+                    <a16:creationId xmlns:a16="http://schemas.microsoft.com/office/drawing/2014/main" id="{8C18E4D3-330F-8253-FFFA-1D4D29CB180A}"/>
+                  </a:ext>
+                </a:extLst>
+              </p:cNvPr>
+              <p:cNvSpPr txBox="1"/>
+              <p:nvPr/>
+            </p:nvSpPr>
+            <p:spPr>
+              <a:xfrm>
+                <a:off x="7361806" y="1329729"/>
+                <a:ext cx="275944" cy="307777"/>
+              </a:xfrm>
+              <a:prstGeom prst="rect">
+                <a:avLst/>
+              </a:prstGeom>
+              <a:noFill/>
+            </p:spPr>
+            <p:txBody>
+              <a:bodyPr wrap="square" lIns="0" tIns="0" rIns="0" bIns="0" rtlCol="0">
+                <a:spAutoFit/>
+              </a:bodyPr>
+              <a:lstStyle>
+                <a:defPPr>
+                  <a:defRPr lang="en-US"/>
+                </a:defPPr>
+                <a:lvl1pPr marL="0" algn="l" defTabSz="914400" rtl="0" eaLnBrk="1" latinLnBrk="0" hangingPunct="1">
+                  <a:defRPr sz="1800" kern="1200">
+                    <a:solidFill>
+                      <a:schemeClr val="tx1"/>
+                    </a:solidFill>
+                    <a:latin typeface="+mn-lt"/>
+                    <a:ea typeface="+mn-ea"/>
+                    <a:cs typeface="+mn-cs"/>
+                  </a:defRPr>
+                </a:lvl1pPr>
+                <a:lvl2pPr marL="457200" algn="l" defTabSz="914400" rtl="0" eaLnBrk="1" latinLnBrk="0" hangingPunct="1">
+                  <a:defRPr sz="1800" kern="1200">
+                    <a:solidFill>
+                      <a:schemeClr val="tx1"/>
+                    </a:solidFill>
+                    <a:latin typeface="+mn-lt"/>
+                    <a:ea typeface="+mn-ea"/>
+                    <a:cs typeface="+mn-cs"/>
+                  </a:defRPr>
+                </a:lvl2pPr>
+                <a:lvl3pPr marL="914400" algn="l" defTabSz="914400" rtl="0" eaLnBrk="1" latinLnBrk="0" hangingPunct="1">
+                  <a:defRPr sz="1800" kern="1200">
+                    <a:solidFill>
+                      <a:schemeClr val="tx1"/>
+                    </a:solidFill>
+                    <a:latin typeface="+mn-lt"/>
+                    <a:ea typeface="+mn-ea"/>
+                    <a:cs typeface="+mn-cs"/>
+                  </a:defRPr>
+                </a:lvl3pPr>
+                <a:lvl4pPr marL="1371600" algn="l" defTabSz="914400" rtl="0" eaLnBrk="1" latinLnBrk="0" hangingPunct="1">
+                  <a:defRPr sz="1800" kern="1200">
+                    <a:solidFill>
+                      <a:schemeClr val="tx1"/>
+                    </a:solidFill>
+                    <a:latin typeface="+mn-lt"/>
+                    <a:ea typeface="+mn-ea"/>
+                    <a:cs typeface="+mn-cs"/>
+                  </a:defRPr>
+                </a:lvl4pPr>
+                <a:lvl5pPr marL="1828800" algn="l" defTabSz="914400" rtl="0" eaLnBrk="1" latinLnBrk="0" hangingPunct="1">
+                  <a:defRPr sz="1800" kern="1200">
+                    <a:solidFill>
+                      <a:schemeClr val="tx1"/>
+                    </a:solidFill>
+                    <a:latin typeface="+mn-lt"/>
+                    <a:ea typeface="+mn-ea"/>
+                    <a:cs typeface="+mn-cs"/>
+                  </a:defRPr>
+                </a:lvl5pPr>
+                <a:lvl6pPr marL="2286000" algn="l" defTabSz="914400" rtl="0" eaLnBrk="1" latinLnBrk="0" hangingPunct="1">
+                  <a:defRPr sz="1800" kern="1200">
+                    <a:solidFill>
+                      <a:schemeClr val="tx1"/>
+                    </a:solidFill>
+                    <a:latin typeface="+mn-lt"/>
+                    <a:ea typeface="+mn-ea"/>
+                    <a:cs typeface="+mn-cs"/>
+                  </a:defRPr>
+                </a:lvl6pPr>
+                <a:lvl7pPr marL="2743200" algn="l" defTabSz="914400" rtl="0" eaLnBrk="1" latinLnBrk="0" hangingPunct="1">
+                  <a:defRPr sz="1800" kern="1200">
+                    <a:solidFill>
+                      <a:schemeClr val="tx1"/>
+                    </a:solidFill>
+                    <a:latin typeface="+mn-lt"/>
+                    <a:ea typeface="+mn-ea"/>
+                    <a:cs typeface="+mn-cs"/>
+                  </a:defRPr>
+                </a:lvl7pPr>
+                <a:lvl8pPr marL="3200400" algn="l" defTabSz="914400" rtl="0" eaLnBrk="1" latinLnBrk="0" hangingPunct="1">
+                  <a:defRPr sz="1800" kern="1200">
+                    <a:solidFill>
+                      <a:schemeClr val="tx1"/>
+                    </a:solidFill>
+                    <a:latin typeface="+mn-lt"/>
+                    <a:ea typeface="+mn-ea"/>
+                    <a:cs typeface="+mn-cs"/>
+                  </a:defRPr>
+                </a:lvl8pPr>
+                <a:lvl9pPr marL="3657600" algn="l" defTabSz="914400" rtl="0" eaLnBrk="1" latinLnBrk="0" hangingPunct="1">
+                  <a:defRPr sz="1800" kern="1200">
+                    <a:solidFill>
+                      <a:schemeClr val="tx1"/>
+                    </a:solidFill>
+                    <a:latin typeface="+mn-lt"/>
+                    <a:ea typeface="+mn-ea"/>
+                    <a:cs typeface="+mn-cs"/>
+                  </a:defRPr>
+                </a:lvl9pPr>
+              </a:lstStyle>
+              <a:p>
+                <a:pPr/>
+                <a14:m>
+                  <m:oMathPara xmlns:m="http://schemas.openxmlformats.org/officeDocument/2006/math">
+                    <m:oMathParaPr>
+                      <m:jc m:val="centerGroup"/>
+                    </m:oMathParaPr>
+                    <m:oMath xmlns:m="http://schemas.openxmlformats.org/officeDocument/2006/math">
+                      <m:sSub>
+                        <m:sSubPr>
+                          <m:ctrlPr>
+                            <a:rPr lang="en-US" sz="2000" b="1" i="1" smtClean="0">
+                              <a:latin typeface="Cambria Math" panose="02040503050406030204" pitchFamily="18" charset="0"/>
+                            </a:rPr>
+                          </m:ctrlPr>
+                        </m:sSubPr>
+                        <m:e>
+                          <m:r>
+                            <a:rPr lang="en-US" sz="2000" b="1" i="1" smtClean="0">
+                              <a:latin typeface="Cambria Math" panose="02040503050406030204" pitchFamily="18" charset="0"/>
+                            </a:rPr>
+                            <m:t>𝑿</m:t>
+                          </m:r>
+                        </m:e>
+                        <m:sub>
+                          <m:r>
+                            <a:rPr lang="en-US" sz="2000" b="0" i="1" smtClean="0">
+                              <a:latin typeface="Cambria Math" panose="02040503050406030204" pitchFamily="18" charset="0"/>
+                            </a:rPr>
+                            <m:t>𝑡</m:t>
+                          </m:r>
+                          <m:r>
+                            <a:rPr lang="en-US" sz="2000" b="0" i="1" smtClean="0">
+                              <a:latin typeface="Cambria Math" panose="02040503050406030204" pitchFamily="18" charset="0"/>
+                            </a:rPr>
+                            <m:t>+</m:t>
+                          </m:r>
+                          <m:r>
+                            <m:rPr>
+                              <m:sty m:val="p"/>
+                            </m:rPr>
+                            <a:rPr lang="en-US" sz="2000" b="0" i="0" smtClean="0">
+                              <a:latin typeface="Cambria Math" panose="02040503050406030204" pitchFamily="18" charset="0"/>
+                            </a:rPr>
+                            <m:t>Δt</m:t>
+                          </m:r>
+                        </m:sub>
+                      </m:sSub>
+                    </m:oMath>
+                  </m:oMathPara>
+                </a14:m>
+                <a:endParaRPr lang="en-US" sz="2000" b="1" dirty="0">
+                  <a:latin typeface="Aptos" panose="020B0004020202020204" pitchFamily="34" charset="0"/>
+                </a:endParaRPr>
+              </a:p>
+            </p:txBody>
+          </p:sp>
+        </mc:Choice>
+        <mc:Fallback>
+          <p:sp>
+            <p:nvSpPr>
+              <p:cNvPr id="56" name="TextBox 35">
+                <a:extLst>
+                  <a:ext uri="{FF2B5EF4-FFF2-40B4-BE49-F238E27FC236}">
+                    <a16:creationId xmlns:a16="http://schemas.microsoft.com/office/drawing/2014/main" id="{8C18E4D3-330F-8253-FFFA-1D4D29CB180A}"/>
+                  </a:ext>
+                </a:extLst>
+              </p:cNvPr>
+              <p:cNvSpPr txBox="1">
+                <a:spLocks noRot="1" noChangeAspect="1" noMove="1" noResize="1" noEditPoints="1" noAdjustHandles="1" noChangeArrowheads="1" noChangeShapeType="1" noTextEdit="1"/>
+              </p:cNvSpPr>
+              <p:nvPr/>
+            </p:nvSpPr>
+            <p:spPr>
+              <a:xfrm>
+                <a:off x="7361806" y="1329729"/>
+                <a:ext cx="275944" cy="307777"/>
+              </a:xfrm>
+              <a:prstGeom prst="rect">
+                <a:avLst/>
+              </a:prstGeom>
+              <a:blipFill>
+                <a:blip r:embed="rId8"/>
+                <a:stretch>
+                  <a:fillRect l="-26087" r="-130435" b="-11538"/>
+                </a:stretch>
+              </a:blipFill>
+            </p:spPr>
+            <p:txBody>
+              <a:bodyPr/>
+              <a:lstStyle/>
+              <a:p>
+                <a:r>
+                  <a:rPr lang="en-US">
+                    <a:noFill/>
+                  </a:rPr>
+                  <a:t> </a:t>
+                </a:r>
+              </a:p>
+            </p:txBody>
+          </p:sp>
+        </mc:Fallback>
+      </mc:AlternateContent>
+      <p:sp>
+        <p:nvSpPr>
+          <p:cNvPr id="57" name="Rectangle 56">
+            <a:extLst>
+              <a:ext uri="{FF2B5EF4-FFF2-40B4-BE49-F238E27FC236}">
+                <a16:creationId xmlns:a16="http://schemas.microsoft.com/office/drawing/2014/main" id="{08088F81-3654-66D6-034F-13B12EC324C5}"/>
+              </a:ext>
+            </a:extLst>
+          </p:cNvPr>
+          <p:cNvSpPr/>
+          <p:nvPr/>
+        </p:nvSpPr>
+        <p:spPr>
+          <a:xfrm rot="5400000">
+            <a:off x="5969643" y="1331158"/>
+            <a:ext cx="1707721" cy="275943"/>
+          </a:xfrm>
+          <a:prstGeom prst="rect">
+            <a:avLst/>
+          </a:prstGeom>
+          <a:solidFill>
+            <a:schemeClr val="bg2">
+              <a:lumMod val="90000"/>
+            </a:schemeClr>
+          </a:solidFill>
+        </p:spPr>
+        <p:style>
+          <a:lnRef idx="2">
+            <a:schemeClr val="accent1">
+              <a:shade val="15000"/>
+            </a:schemeClr>
+          </a:lnRef>
+          <a:fillRef idx="1">
+            <a:schemeClr val="accent1"/>
+          </a:fillRef>
+          <a:effectRef idx="0">
+            <a:schemeClr val="accent1"/>
+          </a:effectRef>
+          <a:fontRef idx="minor">
+            <a:schemeClr val="lt1"/>
+          </a:fontRef>
+        </p:style>
+        <p:txBody>
+          <a:bodyPr rtlCol="0" anchor="ctr"/>
+          <a:lstStyle/>
+          <a:p>
+            <a:pPr algn="ctr"/>
+            <a:r>
+              <a:rPr lang="en-US" sz="1600" i="1" dirty="0">
+                <a:solidFill>
+                  <a:schemeClr val="tx1"/>
+                </a:solidFill>
+              </a:rPr>
+              <a:t>Denormalize</a:t>
+            </a:r>
+          </a:p>
+        </p:txBody>
+      </p:sp>
+      <p:cxnSp>
+        <p:nvCxnSpPr>
+          <p:cNvPr id="60" name="Straight Arrow Connector 59">
+            <a:extLst>
+              <a:ext uri="{FF2B5EF4-FFF2-40B4-BE49-F238E27FC236}">
+                <a16:creationId xmlns:a16="http://schemas.microsoft.com/office/drawing/2014/main" id="{F6EBB918-602D-1C51-D8E0-E7734D1D07CD}"/>
+              </a:ext>
+            </a:extLst>
+          </p:cNvPr>
+          <p:cNvCxnSpPr>
+            <a:cxnSpLocks/>
+          </p:cNvCxnSpPr>
+          <p:nvPr/>
+        </p:nvCxnSpPr>
+        <p:spPr>
+          <a:xfrm>
+            <a:off x="6029834" y="1533517"/>
+            <a:ext cx="580516" cy="0"/>
+          </a:xfrm>
+          <a:prstGeom prst="straightConnector1">
+            <a:avLst/>
+          </a:prstGeom>
+          <a:ln w="38100">
+            <a:solidFill>
+              <a:schemeClr val="tx1"/>
+            </a:solidFill>
+            <a:tailEnd type="triangle"/>
+          </a:ln>
+        </p:spPr>
+        <p:style>
+          <a:lnRef idx="2">
+            <a:schemeClr val="accent1"/>
+          </a:lnRef>
+          <a:fillRef idx="0">
+            <a:schemeClr val="accent1"/>
+          </a:fillRef>
+          <a:effectRef idx="1">
+            <a:schemeClr val="accent1"/>
+          </a:effectRef>
+          <a:fontRef idx="minor">
+            <a:schemeClr val="tx1"/>
+          </a:fontRef>
+        </p:style>
+      </p:cxnSp>
+      <p:cxnSp>
+        <p:nvCxnSpPr>
+          <p:cNvPr id="61" name="Straight Arrow Connector 60">
+            <a:extLst>
+              <a:ext uri="{FF2B5EF4-FFF2-40B4-BE49-F238E27FC236}">
+                <a16:creationId xmlns:a16="http://schemas.microsoft.com/office/drawing/2014/main" id="{B5B91910-378F-287B-98FC-26449B4ECDB9}"/>
+              </a:ext>
+            </a:extLst>
+          </p:cNvPr>
+          <p:cNvCxnSpPr>
+            <a:cxnSpLocks/>
+          </p:cNvCxnSpPr>
+          <p:nvPr/>
+        </p:nvCxnSpPr>
+        <p:spPr>
+          <a:xfrm>
+            <a:off x="6999644" y="1509418"/>
+            <a:ext cx="384023" cy="0"/>
+          </a:xfrm>
+          <a:prstGeom prst="straightConnector1">
+            <a:avLst/>
+          </a:prstGeom>
+          <a:ln w="38100">
+            <a:solidFill>
+              <a:schemeClr val="tx1"/>
+            </a:solidFill>
+            <a:tailEnd type="triangle"/>
+          </a:ln>
+        </p:spPr>
+        <p:style>
+          <a:lnRef idx="2">
+            <a:schemeClr val="accent1"/>
+          </a:lnRef>
+          <a:fillRef idx="0">
+            <a:schemeClr val="accent1"/>
+          </a:fillRef>
+          <a:effectRef idx="1">
+            <a:schemeClr val="accent1"/>
+          </a:effectRef>
+          <a:fontRef idx="minor">
+            <a:schemeClr val="tx1"/>
+          </a:fontRef>
+        </p:style>
+      </p:cxnSp>
+      <p:cxnSp>
+        <p:nvCxnSpPr>
+          <p:cNvPr id="63" name="Curved Connector 62">
+            <a:extLst>
+              <a:ext uri="{FF2B5EF4-FFF2-40B4-BE49-F238E27FC236}">
+                <a16:creationId xmlns:a16="http://schemas.microsoft.com/office/drawing/2014/main" id="{489D79C0-3471-851F-32D2-1C55D18E5832}"/>
+              </a:ext>
+            </a:extLst>
+          </p:cNvPr>
+          <p:cNvCxnSpPr>
+            <a:cxnSpLocks/>
+            <a:endCxn id="11" idx="2"/>
+          </p:cNvCxnSpPr>
+          <p:nvPr/>
+        </p:nvCxnSpPr>
+        <p:spPr>
+          <a:xfrm rot="5400000">
+            <a:off x="3279519" y="1873651"/>
+            <a:ext cx="1261653" cy="809808"/>
+          </a:xfrm>
+          <a:prstGeom prst="curvedConnector4">
+            <a:avLst>
+              <a:gd name="adj1" fmla="val 32501"/>
+              <a:gd name="adj2" fmla="val 128229"/>
+            </a:avLst>
+          </a:prstGeom>
+          <a:ln w="28575">
+            <a:tailEnd type="triangle"/>
+          </a:ln>
+        </p:spPr>
+        <p:style>
+          <a:lnRef idx="2">
+            <a:schemeClr val="dk1"/>
+          </a:lnRef>
+          <a:fillRef idx="0">
+            <a:schemeClr val="dk1"/>
+          </a:fillRef>
+          <a:effectRef idx="1">
+            <a:schemeClr val="dk1"/>
+          </a:effectRef>
+          <a:fontRef idx="minor">
+            <a:schemeClr val="tx1"/>
+          </a:fontRef>
+        </p:style>
+      </p:cxnSp>
+      <p:cxnSp>
+        <p:nvCxnSpPr>
+          <p:cNvPr id="70" name="Curved Connector 69">
+            <a:extLst>
+              <a:ext uri="{FF2B5EF4-FFF2-40B4-BE49-F238E27FC236}">
+                <a16:creationId xmlns:a16="http://schemas.microsoft.com/office/drawing/2014/main" id="{182A9C2C-C36D-95E1-6B4A-9F3ABF1AC9AC}"/>
+              </a:ext>
+            </a:extLst>
+          </p:cNvPr>
+          <p:cNvCxnSpPr>
+            <a:cxnSpLocks/>
+            <a:stCxn id="11" idx="6"/>
+          </p:cNvCxnSpPr>
+          <p:nvPr/>
+        </p:nvCxnSpPr>
+        <p:spPr>
+          <a:xfrm flipH="1" flipV="1">
+            <a:off x="4599388" y="1647728"/>
+            <a:ext cx="648042" cy="1261654"/>
+          </a:xfrm>
+          <a:prstGeom prst="curvedConnector4">
+            <a:avLst>
+              <a:gd name="adj1" fmla="val -35275"/>
+              <a:gd name="adj2" fmla="val 67499"/>
+            </a:avLst>
+          </a:prstGeom>
+          <a:ln w="28575">
+            <a:tailEnd type="triangle"/>
+          </a:ln>
+        </p:spPr>
+        <p:style>
+          <a:lnRef idx="2">
+            <a:schemeClr val="dk1"/>
+          </a:lnRef>
+          <a:fillRef idx="0">
+            <a:schemeClr val="dk1"/>
+          </a:fillRef>
+          <a:effectRef idx="1">
+            <a:schemeClr val="dk1"/>
+          </a:effectRef>
+          <a:fontRef idx="minor">
+            <a:schemeClr val="tx1"/>
+          </a:fontRef>
+        </p:style>
+      </p:cxnSp>
+      <p:sp>
+        <p:nvSpPr>
+          <p:cNvPr id="74" name="U-Turn Arrow 73">
+            <a:extLst>
+              <a:ext uri="{FF2B5EF4-FFF2-40B4-BE49-F238E27FC236}">
+                <a16:creationId xmlns:a16="http://schemas.microsoft.com/office/drawing/2014/main" id="{1EC8087F-D324-5F7F-1953-B77D5AC57506}"/>
+              </a:ext>
+            </a:extLst>
+          </p:cNvPr>
+          <p:cNvSpPr/>
+          <p:nvPr/>
+        </p:nvSpPr>
+        <p:spPr>
+          <a:xfrm rot="10800000">
+            <a:off x="4437620" y="3297018"/>
+            <a:ext cx="472555" cy="500255"/>
+          </a:xfrm>
+          <a:prstGeom prst="uturnArrow">
+            <a:avLst>
+              <a:gd name="adj1" fmla="val 6486"/>
+              <a:gd name="adj2" fmla="val 13099"/>
+              <a:gd name="adj3" fmla="val 22356"/>
+              <a:gd name="adj4" fmla="val 43750"/>
+              <a:gd name="adj5" fmla="val 75000"/>
+            </a:avLst>
+          </a:prstGeom>
+          <a:solidFill>
+            <a:schemeClr val="accent6"/>
+          </a:solidFill>
+          <a:ln>
             <a:noFill/>
-          </p:spPr>
-          <p:txBody>
-            <a:bodyPr wrap="square" rtlCol="0">
-              <a:spAutoFit/>
-            </a:bodyPr>
-            <a:lstStyle/>
-            <a:p>
-              <a:r>
-                <a:rPr lang="en-US" dirty="0"/>
-                <a:t>a)</a:t>
-              </a:r>
-            </a:p>
-          </p:txBody>
-        </p:sp>
-        <p:sp>
-          <p:nvSpPr>
-            <p:cNvPr id="85" name="TextBox 84">
-              <a:extLst>
-                <a:ext uri="{FF2B5EF4-FFF2-40B4-BE49-F238E27FC236}">
-                  <a16:creationId xmlns:a16="http://schemas.microsoft.com/office/drawing/2014/main" id="{E44666F5-0440-0F6D-5295-5D39F5A42F8A}"/>
-                </a:ext>
-              </a:extLst>
-            </p:cNvPr>
-            <p:cNvSpPr txBox="1"/>
-            <p:nvPr/>
-          </p:nvSpPr>
-          <p:spPr>
-            <a:xfrm>
-              <a:off x="843320" y="4127833"/>
-              <a:ext cx="480822" cy="369332"/>
-            </a:xfrm>
-            <a:prstGeom prst="rect">
-              <a:avLst/>
-            </a:prstGeom>
-            <a:noFill/>
-          </p:spPr>
-          <p:txBody>
-            <a:bodyPr wrap="square" rtlCol="0">
-              <a:spAutoFit/>
-            </a:bodyPr>
-            <a:lstStyle/>
-            <a:p>
-              <a:r>
-                <a:rPr lang="en-US" dirty="0"/>
-                <a:t>b)</a:t>
-              </a:r>
-            </a:p>
-          </p:txBody>
-        </p:sp>
-        <mc:AlternateContent xmlns:mc="http://schemas.openxmlformats.org/markup-compatibility/2006" xmlns:a14="http://schemas.microsoft.com/office/drawing/2010/main">
-          <mc:Choice Requires="a14">
-            <p:sp>
-              <p:nvSpPr>
-                <p:cNvPr id="14" name="TextBox 35">
-                  <a:extLst>
-                    <a:ext uri="{FF2B5EF4-FFF2-40B4-BE49-F238E27FC236}">
-                      <a16:creationId xmlns:a16="http://schemas.microsoft.com/office/drawing/2014/main" id="{858B71BA-09A6-BD82-887F-B096F6501377}"/>
-                    </a:ext>
-                  </a:extLst>
-                </p:cNvPr>
-                <p:cNvSpPr txBox="1"/>
-                <p:nvPr/>
-              </p:nvSpPr>
-              <p:spPr>
-                <a:xfrm>
-                  <a:off x="5322730" y="2379305"/>
-                  <a:ext cx="1282280" cy="602794"/>
-                </a:xfrm>
-                <a:prstGeom prst="rect">
-                  <a:avLst/>
-                </a:prstGeom>
-                <a:noFill/>
-              </p:spPr>
-              <p:txBody>
-                <a:bodyPr wrap="square" lIns="0" tIns="0" rIns="0" bIns="0" rtlCol="0">
-                  <a:spAutoFit/>
-                </a:bodyPr>
-                <a:lstStyle>
-                  <a:defPPr>
-                    <a:defRPr lang="en-US"/>
-                  </a:defPPr>
-                  <a:lvl1pPr marL="0" algn="l" defTabSz="914400" rtl="0" eaLnBrk="1" latinLnBrk="0" hangingPunct="1">
-                    <a:defRPr sz="1800" kern="1200">
-                      <a:solidFill>
-                        <a:schemeClr val="tx1"/>
-                      </a:solidFill>
-                      <a:latin typeface="+mn-lt"/>
-                      <a:ea typeface="+mn-ea"/>
-                      <a:cs typeface="+mn-cs"/>
-                    </a:defRPr>
-                  </a:lvl1pPr>
-                  <a:lvl2pPr marL="457200" algn="l" defTabSz="914400" rtl="0" eaLnBrk="1" latinLnBrk="0" hangingPunct="1">
-                    <a:defRPr sz="1800" kern="1200">
-                      <a:solidFill>
-                        <a:schemeClr val="tx1"/>
-                      </a:solidFill>
-                      <a:latin typeface="+mn-lt"/>
-                      <a:ea typeface="+mn-ea"/>
-                      <a:cs typeface="+mn-cs"/>
-                    </a:defRPr>
-                  </a:lvl2pPr>
-                  <a:lvl3pPr marL="914400" algn="l" defTabSz="914400" rtl="0" eaLnBrk="1" latinLnBrk="0" hangingPunct="1">
-                    <a:defRPr sz="1800" kern="1200">
-                      <a:solidFill>
-                        <a:schemeClr val="tx1"/>
-                      </a:solidFill>
-                      <a:latin typeface="+mn-lt"/>
-                      <a:ea typeface="+mn-ea"/>
-                      <a:cs typeface="+mn-cs"/>
-                    </a:defRPr>
-                  </a:lvl3pPr>
-                  <a:lvl4pPr marL="1371600" algn="l" defTabSz="914400" rtl="0" eaLnBrk="1" latinLnBrk="0" hangingPunct="1">
-                    <a:defRPr sz="1800" kern="1200">
-                      <a:solidFill>
-                        <a:schemeClr val="tx1"/>
-                      </a:solidFill>
-                      <a:latin typeface="+mn-lt"/>
-                      <a:ea typeface="+mn-ea"/>
-                      <a:cs typeface="+mn-cs"/>
-                    </a:defRPr>
-                  </a:lvl4pPr>
-                  <a:lvl5pPr marL="1828800" algn="l" defTabSz="914400" rtl="0" eaLnBrk="1" latinLnBrk="0" hangingPunct="1">
-                    <a:defRPr sz="1800" kern="1200">
-                      <a:solidFill>
-                        <a:schemeClr val="tx1"/>
-                      </a:solidFill>
-                      <a:latin typeface="+mn-lt"/>
-                      <a:ea typeface="+mn-ea"/>
-                      <a:cs typeface="+mn-cs"/>
-                    </a:defRPr>
-                  </a:lvl5pPr>
-                  <a:lvl6pPr marL="2286000" algn="l" defTabSz="914400" rtl="0" eaLnBrk="1" latinLnBrk="0" hangingPunct="1">
-                    <a:defRPr sz="1800" kern="1200">
-                      <a:solidFill>
-                        <a:schemeClr val="tx1"/>
-                      </a:solidFill>
-                      <a:latin typeface="+mn-lt"/>
-                      <a:ea typeface="+mn-ea"/>
-                      <a:cs typeface="+mn-cs"/>
-                    </a:defRPr>
-                  </a:lvl6pPr>
-                  <a:lvl7pPr marL="2743200" algn="l" defTabSz="914400" rtl="0" eaLnBrk="1" latinLnBrk="0" hangingPunct="1">
-                    <a:defRPr sz="1800" kern="1200">
-                      <a:solidFill>
-                        <a:schemeClr val="tx1"/>
-                      </a:solidFill>
-                      <a:latin typeface="+mn-lt"/>
-                      <a:ea typeface="+mn-ea"/>
-                      <a:cs typeface="+mn-cs"/>
-                    </a:defRPr>
-                  </a:lvl7pPr>
-                  <a:lvl8pPr marL="3200400" algn="l" defTabSz="914400" rtl="0" eaLnBrk="1" latinLnBrk="0" hangingPunct="1">
-                    <a:defRPr sz="1800" kern="1200">
-                      <a:solidFill>
-                        <a:schemeClr val="tx1"/>
-                      </a:solidFill>
-                      <a:latin typeface="+mn-lt"/>
-                      <a:ea typeface="+mn-ea"/>
-                      <a:cs typeface="+mn-cs"/>
-                    </a:defRPr>
-                  </a:lvl8pPr>
-                  <a:lvl9pPr marL="3657600" algn="l" defTabSz="914400" rtl="0" eaLnBrk="1" latinLnBrk="0" hangingPunct="1">
-                    <a:defRPr sz="1800" kern="1200">
-                      <a:solidFill>
-                        <a:schemeClr val="tx1"/>
-                      </a:solidFill>
-                      <a:latin typeface="+mn-lt"/>
-                      <a:ea typeface="+mn-ea"/>
-                      <a:cs typeface="+mn-cs"/>
-                    </a:defRPr>
-                  </a:lvl9pPr>
-                </a:lstStyle>
-                <a:p>
-                  <a:pPr/>
-                  <a14:m>
-                    <m:oMathPara xmlns:m="http://schemas.openxmlformats.org/officeDocument/2006/math">
-                      <m:oMathParaPr>
-                        <m:jc m:val="centerGroup"/>
-                      </m:oMathParaPr>
-                      <m:oMath xmlns:m="http://schemas.openxmlformats.org/officeDocument/2006/math">
-                        <m:d>
-                          <m:dPr>
-                            <m:begChr m:val="["/>
-                            <m:endChr m:val="]"/>
-                            <m:ctrlPr>
-                              <a:rPr lang="en-US" sz="2000" b="1" i="1" smtClean="0">
-                                <a:latin typeface="Cambria Math" panose="02040503050406030204" pitchFamily="18" charset="0"/>
-                              </a:rPr>
-                            </m:ctrlPr>
-                          </m:dPr>
-                          <m:e>
-                            <m:m>
-                              <m:mPr>
-                                <m:mcs>
-                                  <m:mc>
-                                    <m:mcPr>
-                                      <m:count m:val="1"/>
-                                      <m:mcJc m:val="center"/>
-                                    </m:mcPr>
-                                  </m:mc>
-                                </m:mcs>
-                                <m:ctrlPr>
-                                  <a:rPr lang="en-US" sz="2000" b="1" i="1" smtClean="0">
-                                    <a:latin typeface="Cambria Math" panose="02040503050406030204" pitchFamily="18" charset="0"/>
-                                  </a:rPr>
-                                </m:ctrlPr>
-                              </m:mPr>
-                              <m:mr>
-                                <m:e>
-                                  <m:r>
-                                    <m:rPr>
-                                      <m:brk m:alnAt="7"/>
-                                    </m:rPr>
-                                    <a:rPr lang="en-US" sz="2000" b="1" i="1" smtClean="0">
-                                      <a:latin typeface="Cambria Math" panose="02040503050406030204" pitchFamily="18" charset="0"/>
-                                    </a:rPr>
-                                    <m:t>𝒛</m:t>
-                                  </m:r>
-                                  <m:d>
-                                    <m:dPr>
-                                      <m:ctrlPr>
-                                        <a:rPr lang="en-US" sz="2000" i="1" smtClean="0">
-                                          <a:latin typeface="Cambria Math" panose="02040503050406030204" pitchFamily="18" charset="0"/>
-                                        </a:rPr>
-                                      </m:ctrlPr>
-                                    </m:dPr>
-                                    <m:e>
-                                      <m:r>
-                                        <a:rPr lang="en-US" sz="2000" b="0" i="1" smtClean="0">
-                                          <a:latin typeface="Cambria Math" panose="02040503050406030204" pitchFamily="18" charset="0"/>
-                                        </a:rPr>
-                                        <m:t>𝑡</m:t>
-                                      </m:r>
-                                      <m:r>
-                                        <a:rPr lang="en-US" sz="2000" b="0" i="1" smtClean="0">
-                                          <a:latin typeface="Cambria Math" panose="02040503050406030204" pitchFamily="18" charset="0"/>
-                                        </a:rPr>
-                                        <m:t>+</m:t>
-                                      </m:r>
-                                      <m:r>
-                                        <m:rPr>
-                                          <m:sty m:val="p"/>
-                                          <m:brk m:alnAt="7"/>
-                                        </m:rPr>
-                                        <a:rPr lang="en-US" sz="2000" b="0" i="0" smtClean="0">
-                                          <a:latin typeface="Cambria Math" panose="02040503050406030204" pitchFamily="18" charset="0"/>
-                                        </a:rPr>
-                                        <m:t>Δ</m:t>
-                                      </m:r>
-                                      <m:r>
-                                        <m:rPr>
-                                          <m:brk m:alnAt="7"/>
-                                        </m:rPr>
-                                        <a:rPr lang="en-US" sz="2000" b="0" i="1" smtClean="0">
-                                          <a:latin typeface="Cambria Math" panose="02040503050406030204" pitchFamily="18" charset="0"/>
-                                        </a:rPr>
-                                        <m:t>𝑡</m:t>
-                                      </m:r>
-                                    </m:e>
-                                  </m:d>
-                                </m:e>
-                              </m:mr>
-                              <m:mr>
-                                <m:e>
-                                  <m:r>
-                                    <a:rPr lang="en-US" sz="2000" b="0" i="1" smtClean="0">
-                                      <a:solidFill>
-                                        <a:schemeClr val="tx1">
-                                          <a:lumMod val="50000"/>
-                                          <a:lumOff val="50000"/>
-                                        </a:schemeClr>
-                                      </a:solidFill>
-                                      <a:latin typeface="Cambria Math" panose="02040503050406030204" pitchFamily="18" charset="0"/>
-                                    </a:rPr>
-                                    <m:t>𝑀</m:t>
-                                  </m:r>
-                                  <m:r>
-                                    <a:rPr lang="en-US" sz="2000" b="0" i="1" smtClean="0">
-                                      <a:solidFill>
-                                        <a:schemeClr val="tx1">
-                                          <a:lumMod val="50000"/>
-                                          <a:lumOff val="50000"/>
-                                        </a:schemeClr>
-                                      </a:solidFill>
-                                      <a:latin typeface="Cambria Math" panose="02040503050406030204" pitchFamily="18" charset="0"/>
-                                    </a:rPr>
-                                    <m:t>(</m:t>
-                                  </m:r>
-                                  <m:r>
-                                    <a:rPr lang="en-US" sz="2000" b="0" i="1" smtClean="0">
-                                      <a:solidFill>
-                                        <a:schemeClr val="tx1">
-                                          <a:lumMod val="50000"/>
-                                          <a:lumOff val="50000"/>
-                                        </a:schemeClr>
-                                      </a:solidFill>
-                                      <a:latin typeface="Cambria Math" panose="02040503050406030204" pitchFamily="18" charset="0"/>
-                                    </a:rPr>
-                                    <m:t>𝑡</m:t>
-                                  </m:r>
-                                  <m:r>
-                                    <a:rPr lang="en-US" sz="2000" b="0" i="1" smtClean="0">
-                                      <a:solidFill>
-                                        <a:schemeClr val="tx1">
-                                          <a:lumMod val="50000"/>
-                                          <a:lumOff val="50000"/>
-                                        </a:schemeClr>
-                                      </a:solidFill>
-                                      <a:latin typeface="Cambria Math" panose="02040503050406030204" pitchFamily="18" charset="0"/>
-                                    </a:rPr>
-                                    <m:t>+</m:t>
-                                  </m:r>
-                                  <m:r>
-                                    <m:rPr>
-                                      <m:sty m:val="p"/>
-                                    </m:rPr>
-                                    <a:rPr lang="en-US" sz="2000" b="0" i="0" smtClean="0">
-                                      <a:solidFill>
-                                        <a:schemeClr val="tx1">
-                                          <a:lumMod val="50000"/>
-                                          <a:lumOff val="50000"/>
-                                        </a:schemeClr>
-                                      </a:solidFill>
-                                      <a:latin typeface="Cambria Math" panose="02040503050406030204" pitchFamily="18" charset="0"/>
-                                    </a:rPr>
-                                    <m:t>Δ</m:t>
-                                  </m:r>
-                                  <m:r>
-                                    <a:rPr lang="en-US" sz="2000" b="0" i="1" smtClean="0">
-                                      <a:solidFill>
-                                        <a:schemeClr val="tx1">
-                                          <a:lumMod val="50000"/>
-                                          <a:lumOff val="50000"/>
-                                        </a:schemeClr>
-                                      </a:solidFill>
-                                      <a:latin typeface="Cambria Math" panose="02040503050406030204" pitchFamily="18" charset="0"/>
-                                    </a:rPr>
-                                    <m:t>𝑡</m:t>
-                                  </m:r>
-                                  <m:r>
-                                    <a:rPr lang="en-US" sz="2000" b="0" i="1" smtClean="0">
-                                      <a:solidFill>
-                                        <a:schemeClr val="tx1">
-                                          <a:lumMod val="50000"/>
-                                          <a:lumOff val="50000"/>
-                                        </a:schemeClr>
-                                      </a:solidFill>
-                                      <a:latin typeface="Cambria Math" panose="02040503050406030204" pitchFamily="18" charset="0"/>
-                                    </a:rPr>
-                                    <m:t>)</m:t>
-                                  </m:r>
-                                </m:e>
-                              </m:mr>
-                            </m:m>
-                          </m:e>
-                        </m:d>
-                      </m:oMath>
-                    </m:oMathPara>
-                  </a14:m>
-                  <a:endParaRPr lang="en-US" sz="2000" dirty="0">
-                    <a:latin typeface="Aptos" panose="020B0004020202020204" pitchFamily="34" charset="0"/>
-                  </a:endParaRPr>
-                </a:p>
-              </p:txBody>
-            </p:sp>
-          </mc:Choice>
-          <mc:Fallback xmlns="">
-            <p:sp>
-              <p:nvSpPr>
-                <p:cNvPr id="14" name="TextBox 35">
-                  <a:extLst>
-                    <a:ext uri="{FF2B5EF4-FFF2-40B4-BE49-F238E27FC236}">
-                      <a16:creationId xmlns:a16="http://schemas.microsoft.com/office/drawing/2014/main" id="{858B71BA-09A6-BD82-887F-B096F6501377}"/>
-                    </a:ext>
-                  </a:extLst>
-                </p:cNvPr>
-                <p:cNvSpPr txBox="1">
-                  <a:spLocks noRot="1" noChangeAspect="1" noMove="1" noResize="1" noEditPoints="1" noAdjustHandles="1" noChangeArrowheads="1" noChangeShapeType="1" noTextEdit="1"/>
-                </p:cNvSpPr>
-                <p:nvPr/>
-              </p:nvSpPr>
-              <p:spPr>
-                <a:xfrm>
-                  <a:off x="5322730" y="2379305"/>
-                  <a:ext cx="1282280" cy="602794"/>
-                </a:xfrm>
-                <a:prstGeom prst="rect">
-                  <a:avLst/>
-                </a:prstGeom>
-                <a:blipFill>
-                  <a:blip r:embed="rId12"/>
-                  <a:stretch>
-                    <a:fillRect r="-2970" b="-18750"/>
-                  </a:stretch>
-                </a:blipFill>
-              </p:spPr>
-              <p:txBody>
-                <a:bodyPr/>
-                <a:lstStyle/>
-                <a:p>
-                  <a:r>
-                    <a:rPr lang="en-US">
-                      <a:noFill/>
-                    </a:rPr>
-                    <a:t> </a:t>
-                  </a:r>
-                </a:p>
-              </p:txBody>
-            </p:sp>
-          </mc:Fallback>
-        </mc:AlternateContent>
-        <p:cxnSp>
-          <p:nvCxnSpPr>
-            <p:cNvPr id="15" name="Curved Connector 14">
-              <a:extLst>
-                <a:ext uri="{FF2B5EF4-FFF2-40B4-BE49-F238E27FC236}">
-                  <a16:creationId xmlns:a16="http://schemas.microsoft.com/office/drawing/2014/main" id="{D2BBC1B0-9C2A-695C-55CA-37A7122AD671}"/>
-                </a:ext>
-              </a:extLst>
-            </p:cNvPr>
-            <p:cNvCxnSpPr>
-              <a:cxnSpLocks/>
-            </p:cNvCxnSpPr>
-            <p:nvPr/>
-          </p:nvCxnSpPr>
-          <p:spPr>
-            <a:xfrm rot="16200000" flipH="1">
-              <a:off x="1978824" y="2487844"/>
-              <a:ext cx="384085" cy="291463"/>
-            </a:xfrm>
-            <a:prstGeom prst="curvedConnector2">
-              <a:avLst/>
-            </a:prstGeom>
-            <a:ln w="38100">
+          </a:ln>
+        </p:spPr>
+        <p:style>
+          <a:lnRef idx="2">
+            <a:schemeClr val="accent1">
+              <a:shade val="15000"/>
+            </a:schemeClr>
+          </a:lnRef>
+          <a:fillRef idx="1">
+            <a:schemeClr val="accent1"/>
+          </a:fillRef>
+          <a:effectRef idx="0">
+            <a:schemeClr val="accent1"/>
+          </a:effectRef>
+          <a:fontRef idx="minor">
+            <a:schemeClr val="lt1"/>
+          </a:fontRef>
+        </p:style>
+        <p:txBody>
+          <a:bodyPr rtlCol="0" anchor="ctr"/>
+          <a:lstStyle/>
+          <a:p>
+            <a:pPr algn="ctr"/>
+            <a:endParaRPr lang="en-US">
               <a:solidFill>
-                <a:schemeClr val="tx1">
-                  <a:lumMod val="50000"/>
-                  <a:lumOff val="50000"/>
-                </a:schemeClr>
+                <a:schemeClr val="tx1"/>
               </a:solidFill>
-              <a:tailEnd type="triangle"/>
-            </a:ln>
-          </p:spPr>
-          <p:style>
-            <a:lnRef idx="2">
-              <a:schemeClr val="dk1"/>
-            </a:lnRef>
-            <a:fillRef idx="0">
-              <a:schemeClr val="dk1"/>
-            </a:fillRef>
-            <a:effectRef idx="1">
-              <a:schemeClr val="dk1"/>
-            </a:effectRef>
-            <a:fontRef idx="minor">
-              <a:schemeClr val="tx1"/>
-            </a:fontRef>
-          </p:style>
-        </p:cxnSp>
-        <p:cxnSp>
-          <p:nvCxnSpPr>
-            <p:cNvPr id="22" name="Curved Connector 21">
-              <a:extLst>
-                <a:ext uri="{FF2B5EF4-FFF2-40B4-BE49-F238E27FC236}">
-                  <a16:creationId xmlns:a16="http://schemas.microsoft.com/office/drawing/2014/main" id="{788B312C-14A7-7BB6-93B3-26604C0609B9}"/>
-                </a:ext>
-              </a:extLst>
-            </p:cNvPr>
-            <p:cNvCxnSpPr>
-              <a:cxnSpLocks/>
-            </p:cNvCxnSpPr>
-            <p:nvPr/>
-          </p:nvCxnSpPr>
-          <p:spPr>
-            <a:xfrm flipV="1">
-              <a:off x="6610411" y="2364205"/>
-              <a:ext cx="264261" cy="450182"/>
-            </a:xfrm>
-            <a:prstGeom prst="curvedConnector2">
-              <a:avLst/>
-            </a:prstGeom>
-            <a:ln w="38100">
-              <a:solidFill>
-                <a:schemeClr val="tx1">
-                  <a:lumMod val="50000"/>
-                  <a:lumOff val="50000"/>
-                </a:schemeClr>
-              </a:solidFill>
-              <a:tailEnd type="triangle"/>
-            </a:ln>
-          </p:spPr>
-          <p:style>
-            <a:lnRef idx="2">
-              <a:schemeClr val="dk1"/>
-            </a:lnRef>
-            <a:fillRef idx="0">
-              <a:schemeClr val="dk1"/>
-            </a:fillRef>
-            <a:effectRef idx="1">
-              <a:schemeClr val="dk1"/>
-            </a:effectRef>
-            <a:fontRef idx="minor">
-              <a:schemeClr val="tx1"/>
-            </a:fontRef>
-          </p:style>
-        </p:cxnSp>
-      </p:grpSp>
+            </a:endParaRPr>
+          </a:p>
+        </p:txBody>
+      </p:sp>
+      <mc:AlternateContent xmlns:mc="http://schemas.openxmlformats.org/markup-compatibility/2006">
+        <mc:Choice xmlns:a14="http://schemas.microsoft.com/office/drawing/2010/main" Requires="a14">
+          <p:sp>
+            <p:nvSpPr>
+              <p:cNvPr id="76" name="TextBox 35">
+                <a:extLst>
+                  <a:ext uri="{FF2B5EF4-FFF2-40B4-BE49-F238E27FC236}">
+                    <a16:creationId xmlns:a16="http://schemas.microsoft.com/office/drawing/2014/main" id="{97D320F6-37DE-3C0C-C427-B3EC34CDCB35}"/>
+                  </a:ext>
+                </a:extLst>
+              </p:cNvPr>
+              <p:cNvSpPr txBox="1"/>
+              <p:nvPr/>
+            </p:nvSpPr>
+            <p:spPr>
+              <a:xfrm>
+                <a:off x="4790940" y="3316353"/>
+                <a:ext cx="575725" cy="307777"/>
+              </a:xfrm>
+              <a:prstGeom prst="rect">
+                <a:avLst/>
+              </a:prstGeom>
+              <a:noFill/>
+            </p:spPr>
+            <p:txBody>
+              <a:bodyPr wrap="square" lIns="0" tIns="0" rIns="0" bIns="0" rtlCol="0">
+                <a:spAutoFit/>
+              </a:bodyPr>
+              <a:lstStyle>
+                <a:defPPr>
+                  <a:defRPr lang="en-US"/>
+                </a:defPPr>
+                <a:lvl1pPr marL="0" algn="l" defTabSz="914400" rtl="0" eaLnBrk="1" latinLnBrk="0" hangingPunct="1">
+                  <a:defRPr sz="1800" kern="1200">
+                    <a:solidFill>
+                      <a:schemeClr val="tx1"/>
+                    </a:solidFill>
+                    <a:latin typeface="+mn-lt"/>
+                    <a:ea typeface="+mn-ea"/>
+                    <a:cs typeface="+mn-cs"/>
+                  </a:defRPr>
+                </a:lvl1pPr>
+                <a:lvl2pPr marL="457200" algn="l" defTabSz="914400" rtl="0" eaLnBrk="1" latinLnBrk="0" hangingPunct="1">
+                  <a:defRPr sz="1800" kern="1200">
+                    <a:solidFill>
+                      <a:schemeClr val="tx1"/>
+                    </a:solidFill>
+                    <a:latin typeface="+mn-lt"/>
+                    <a:ea typeface="+mn-ea"/>
+                    <a:cs typeface="+mn-cs"/>
+                  </a:defRPr>
+                </a:lvl2pPr>
+                <a:lvl3pPr marL="914400" algn="l" defTabSz="914400" rtl="0" eaLnBrk="1" latinLnBrk="0" hangingPunct="1">
+                  <a:defRPr sz="1800" kern="1200">
+                    <a:solidFill>
+                      <a:schemeClr val="tx1"/>
+                    </a:solidFill>
+                    <a:latin typeface="+mn-lt"/>
+                    <a:ea typeface="+mn-ea"/>
+                    <a:cs typeface="+mn-cs"/>
+                  </a:defRPr>
+                </a:lvl3pPr>
+                <a:lvl4pPr marL="1371600" algn="l" defTabSz="914400" rtl="0" eaLnBrk="1" latinLnBrk="0" hangingPunct="1">
+                  <a:defRPr sz="1800" kern="1200">
+                    <a:solidFill>
+                      <a:schemeClr val="tx1"/>
+                    </a:solidFill>
+                    <a:latin typeface="+mn-lt"/>
+                    <a:ea typeface="+mn-ea"/>
+                    <a:cs typeface="+mn-cs"/>
+                  </a:defRPr>
+                </a:lvl4pPr>
+                <a:lvl5pPr marL="1828800" algn="l" defTabSz="914400" rtl="0" eaLnBrk="1" latinLnBrk="0" hangingPunct="1">
+                  <a:defRPr sz="1800" kern="1200">
+                    <a:solidFill>
+                      <a:schemeClr val="tx1"/>
+                    </a:solidFill>
+                    <a:latin typeface="+mn-lt"/>
+                    <a:ea typeface="+mn-ea"/>
+                    <a:cs typeface="+mn-cs"/>
+                  </a:defRPr>
+                </a:lvl5pPr>
+                <a:lvl6pPr marL="2286000" algn="l" defTabSz="914400" rtl="0" eaLnBrk="1" latinLnBrk="0" hangingPunct="1">
+                  <a:defRPr sz="1800" kern="1200">
+                    <a:solidFill>
+                      <a:schemeClr val="tx1"/>
+                    </a:solidFill>
+                    <a:latin typeface="+mn-lt"/>
+                    <a:ea typeface="+mn-ea"/>
+                    <a:cs typeface="+mn-cs"/>
+                  </a:defRPr>
+                </a:lvl6pPr>
+                <a:lvl7pPr marL="2743200" algn="l" defTabSz="914400" rtl="0" eaLnBrk="1" latinLnBrk="0" hangingPunct="1">
+                  <a:defRPr sz="1800" kern="1200">
+                    <a:solidFill>
+                      <a:schemeClr val="tx1"/>
+                    </a:solidFill>
+                    <a:latin typeface="+mn-lt"/>
+                    <a:ea typeface="+mn-ea"/>
+                    <a:cs typeface="+mn-cs"/>
+                  </a:defRPr>
+                </a:lvl7pPr>
+                <a:lvl8pPr marL="3200400" algn="l" defTabSz="914400" rtl="0" eaLnBrk="1" latinLnBrk="0" hangingPunct="1">
+                  <a:defRPr sz="1800" kern="1200">
+                    <a:solidFill>
+                      <a:schemeClr val="tx1"/>
+                    </a:solidFill>
+                    <a:latin typeface="+mn-lt"/>
+                    <a:ea typeface="+mn-ea"/>
+                    <a:cs typeface="+mn-cs"/>
+                  </a:defRPr>
+                </a:lvl8pPr>
+                <a:lvl9pPr marL="3657600" algn="l" defTabSz="914400" rtl="0" eaLnBrk="1" latinLnBrk="0" hangingPunct="1">
+                  <a:defRPr sz="1800" kern="1200">
+                    <a:solidFill>
+                      <a:schemeClr val="tx1"/>
+                    </a:solidFill>
+                    <a:latin typeface="+mn-lt"/>
+                    <a:ea typeface="+mn-ea"/>
+                    <a:cs typeface="+mn-cs"/>
+                  </a:defRPr>
+                </a:lvl9pPr>
+              </a:lstStyle>
+              <a:p>
+                <a:pPr/>
+                <a14:m>
+                  <m:oMathPara xmlns:m="http://schemas.openxmlformats.org/officeDocument/2006/math">
+                    <m:oMathParaPr>
+                      <m:jc m:val="centerGroup"/>
+                    </m:oMathParaPr>
+                    <m:oMath xmlns:m="http://schemas.openxmlformats.org/officeDocument/2006/math">
+                      <m:r>
+                        <m:rPr>
+                          <m:sty m:val="p"/>
+                        </m:rPr>
+                        <a:rPr lang="en-US" sz="2000" b="0" i="0" smtClean="0">
+                          <a:solidFill>
+                            <a:schemeClr val="accent6"/>
+                          </a:solidFill>
+                          <a:latin typeface="Cambria Math" panose="02040503050406030204" pitchFamily="18" charset="0"/>
+                        </a:rPr>
+                        <m:t>Δ</m:t>
+                      </m:r>
+                      <m:r>
+                        <a:rPr lang="en-US" sz="2000" b="0" i="1" smtClean="0">
+                          <a:solidFill>
+                            <a:schemeClr val="accent6"/>
+                          </a:solidFill>
+                          <a:latin typeface="Cambria Math" panose="02040503050406030204" pitchFamily="18" charset="0"/>
+                        </a:rPr>
+                        <m:t>𝑡</m:t>
+                      </m:r>
+                    </m:oMath>
+                  </m:oMathPara>
+                </a14:m>
+                <a:endParaRPr lang="en-US" sz="2000" dirty="0">
+                  <a:solidFill>
+                    <a:schemeClr val="accent6"/>
+                  </a:solidFill>
+                  <a:latin typeface="Aptos" panose="020B0004020202020204" pitchFamily="34" charset="0"/>
+                </a:endParaRPr>
+              </a:p>
+            </p:txBody>
+          </p:sp>
+        </mc:Choice>
+        <mc:Fallback>
+          <p:sp>
+            <p:nvSpPr>
+              <p:cNvPr id="76" name="TextBox 35">
+                <a:extLst>
+                  <a:ext uri="{FF2B5EF4-FFF2-40B4-BE49-F238E27FC236}">
+                    <a16:creationId xmlns:a16="http://schemas.microsoft.com/office/drawing/2014/main" id="{97D320F6-37DE-3C0C-C427-B3EC34CDCB35}"/>
+                  </a:ext>
+                </a:extLst>
+              </p:cNvPr>
+              <p:cNvSpPr txBox="1">
+                <a:spLocks noRot="1" noChangeAspect="1" noMove="1" noResize="1" noEditPoints="1" noAdjustHandles="1" noChangeArrowheads="1" noChangeShapeType="1" noTextEdit="1"/>
+              </p:cNvSpPr>
+              <p:nvPr/>
+            </p:nvSpPr>
+            <p:spPr>
+              <a:xfrm>
+                <a:off x="4790940" y="3316353"/>
+                <a:ext cx="575725" cy="307777"/>
+              </a:xfrm>
+              <a:prstGeom prst="rect">
+                <a:avLst/>
+              </a:prstGeom>
+              <a:blipFill>
+                <a:blip r:embed="rId9"/>
+                <a:stretch>
+                  <a:fillRect b="-8000"/>
+                </a:stretch>
+              </a:blipFill>
+            </p:spPr>
+            <p:txBody>
+              <a:bodyPr/>
+              <a:lstStyle/>
+              <a:p>
+                <a:r>
+                  <a:rPr lang="en-US">
+                    <a:noFill/>
+                  </a:rPr>
+                  <a:t> </a:t>
+                </a:r>
+              </a:p>
+            </p:txBody>
+          </p:sp>
+        </mc:Fallback>
+      </mc:AlternateContent>
+      <mc:AlternateContent xmlns:mc="http://schemas.openxmlformats.org/markup-compatibility/2006">
+        <mc:Choice xmlns:a14="http://schemas.microsoft.com/office/drawing/2010/main" Requires="a14">
+          <p:sp>
+            <p:nvSpPr>
+              <p:cNvPr id="77" name="TextBox 35">
+                <a:extLst>
+                  <a:ext uri="{FF2B5EF4-FFF2-40B4-BE49-F238E27FC236}">
+                    <a16:creationId xmlns:a16="http://schemas.microsoft.com/office/drawing/2014/main" id="{77701C4E-68C1-CE44-96B2-9D0D80161CD2}"/>
+                  </a:ext>
+                </a:extLst>
+              </p:cNvPr>
+              <p:cNvSpPr txBox="1"/>
+              <p:nvPr/>
+            </p:nvSpPr>
+            <p:spPr>
+              <a:xfrm>
+                <a:off x="2262636" y="2779489"/>
+                <a:ext cx="612523" cy="307777"/>
+              </a:xfrm>
+              <a:prstGeom prst="rect">
+                <a:avLst/>
+              </a:prstGeom>
+              <a:noFill/>
+            </p:spPr>
+            <p:txBody>
+              <a:bodyPr wrap="square" lIns="0" tIns="0" rIns="0" bIns="0" rtlCol="0">
+                <a:spAutoFit/>
+              </a:bodyPr>
+              <a:lstStyle>
+                <a:defPPr>
+                  <a:defRPr lang="en-US"/>
+                </a:defPPr>
+                <a:lvl1pPr marL="0" algn="l" defTabSz="914400" rtl="0" eaLnBrk="1" latinLnBrk="0" hangingPunct="1">
+                  <a:defRPr sz="1800" kern="1200">
+                    <a:solidFill>
+                      <a:schemeClr val="tx1"/>
+                    </a:solidFill>
+                    <a:latin typeface="+mn-lt"/>
+                    <a:ea typeface="+mn-ea"/>
+                    <a:cs typeface="+mn-cs"/>
+                  </a:defRPr>
+                </a:lvl1pPr>
+                <a:lvl2pPr marL="457200" algn="l" defTabSz="914400" rtl="0" eaLnBrk="1" latinLnBrk="0" hangingPunct="1">
+                  <a:defRPr sz="1800" kern="1200">
+                    <a:solidFill>
+                      <a:schemeClr val="tx1"/>
+                    </a:solidFill>
+                    <a:latin typeface="+mn-lt"/>
+                    <a:ea typeface="+mn-ea"/>
+                    <a:cs typeface="+mn-cs"/>
+                  </a:defRPr>
+                </a:lvl2pPr>
+                <a:lvl3pPr marL="914400" algn="l" defTabSz="914400" rtl="0" eaLnBrk="1" latinLnBrk="0" hangingPunct="1">
+                  <a:defRPr sz="1800" kern="1200">
+                    <a:solidFill>
+                      <a:schemeClr val="tx1"/>
+                    </a:solidFill>
+                    <a:latin typeface="+mn-lt"/>
+                    <a:ea typeface="+mn-ea"/>
+                    <a:cs typeface="+mn-cs"/>
+                  </a:defRPr>
+                </a:lvl3pPr>
+                <a:lvl4pPr marL="1371600" algn="l" defTabSz="914400" rtl="0" eaLnBrk="1" latinLnBrk="0" hangingPunct="1">
+                  <a:defRPr sz="1800" kern="1200">
+                    <a:solidFill>
+                      <a:schemeClr val="tx1"/>
+                    </a:solidFill>
+                    <a:latin typeface="+mn-lt"/>
+                    <a:ea typeface="+mn-ea"/>
+                    <a:cs typeface="+mn-cs"/>
+                  </a:defRPr>
+                </a:lvl4pPr>
+                <a:lvl5pPr marL="1828800" algn="l" defTabSz="914400" rtl="0" eaLnBrk="1" latinLnBrk="0" hangingPunct="1">
+                  <a:defRPr sz="1800" kern="1200">
+                    <a:solidFill>
+                      <a:schemeClr val="tx1"/>
+                    </a:solidFill>
+                    <a:latin typeface="+mn-lt"/>
+                    <a:ea typeface="+mn-ea"/>
+                    <a:cs typeface="+mn-cs"/>
+                  </a:defRPr>
+                </a:lvl5pPr>
+                <a:lvl6pPr marL="2286000" algn="l" defTabSz="914400" rtl="0" eaLnBrk="1" latinLnBrk="0" hangingPunct="1">
+                  <a:defRPr sz="1800" kern="1200">
+                    <a:solidFill>
+                      <a:schemeClr val="tx1"/>
+                    </a:solidFill>
+                    <a:latin typeface="+mn-lt"/>
+                    <a:ea typeface="+mn-ea"/>
+                    <a:cs typeface="+mn-cs"/>
+                  </a:defRPr>
+                </a:lvl6pPr>
+                <a:lvl7pPr marL="2743200" algn="l" defTabSz="914400" rtl="0" eaLnBrk="1" latinLnBrk="0" hangingPunct="1">
+                  <a:defRPr sz="1800" kern="1200">
+                    <a:solidFill>
+                      <a:schemeClr val="tx1"/>
+                    </a:solidFill>
+                    <a:latin typeface="+mn-lt"/>
+                    <a:ea typeface="+mn-ea"/>
+                    <a:cs typeface="+mn-cs"/>
+                  </a:defRPr>
+                </a:lvl7pPr>
+                <a:lvl8pPr marL="3200400" algn="l" defTabSz="914400" rtl="0" eaLnBrk="1" latinLnBrk="0" hangingPunct="1">
+                  <a:defRPr sz="1800" kern="1200">
+                    <a:solidFill>
+                      <a:schemeClr val="tx1"/>
+                    </a:solidFill>
+                    <a:latin typeface="+mn-lt"/>
+                    <a:ea typeface="+mn-ea"/>
+                    <a:cs typeface="+mn-cs"/>
+                  </a:defRPr>
+                </a:lvl8pPr>
+                <a:lvl9pPr marL="3657600" algn="l" defTabSz="914400" rtl="0" eaLnBrk="1" latinLnBrk="0" hangingPunct="1">
+                  <a:defRPr sz="1800" kern="1200">
+                    <a:solidFill>
+                      <a:schemeClr val="tx1"/>
+                    </a:solidFill>
+                    <a:latin typeface="+mn-lt"/>
+                    <a:ea typeface="+mn-ea"/>
+                    <a:cs typeface="+mn-cs"/>
+                  </a:defRPr>
+                </a:lvl9pPr>
+              </a:lstStyle>
+              <a:p>
+                <a:pPr/>
+                <a14:m>
+                  <m:oMathPara xmlns:m="http://schemas.openxmlformats.org/officeDocument/2006/math">
+                    <m:oMathParaPr>
+                      <m:jc m:val="centerGroup"/>
+                    </m:oMathParaPr>
+                    <m:oMath xmlns:m="http://schemas.openxmlformats.org/officeDocument/2006/math">
+                      <m:sSub>
+                        <m:sSubPr>
+                          <m:ctrlPr>
+                            <a:rPr lang="en-US" sz="2000" b="1" i="1" smtClean="0">
+                              <a:solidFill>
+                                <a:schemeClr val="tx1">
+                                  <a:lumMod val="50000"/>
+                                  <a:lumOff val="50000"/>
+                                </a:schemeClr>
+                              </a:solidFill>
+                              <a:latin typeface="Cambria Math" panose="02040503050406030204" pitchFamily="18" charset="0"/>
+                            </a:rPr>
+                          </m:ctrlPr>
+                        </m:sSubPr>
+                        <m:e>
+                          <m:r>
+                            <a:rPr lang="en-US" sz="2000" b="0" i="1" smtClean="0">
+                              <a:solidFill>
+                                <a:schemeClr val="tx1">
+                                  <a:lumMod val="50000"/>
+                                  <a:lumOff val="50000"/>
+                                </a:schemeClr>
+                              </a:solidFill>
+                              <a:latin typeface="Cambria Math" panose="02040503050406030204" pitchFamily="18" charset="0"/>
+                            </a:rPr>
+                            <m:t>𝑀</m:t>
+                          </m:r>
+                        </m:e>
+                        <m:sub>
+                          <m:r>
+                            <a:rPr lang="en-US" sz="2000" b="0" i="1" smtClean="0">
+                              <a:solidFill>
+                                <a:schemeClr val="tx1">
+                                  <a:lumMod val="50000"/>
+                                  <a:lumOff val="50000"/>
+                                </a:schemeClr>
+                              </a:solidFill>
+                              <a:latin typeface="Cambria Math" panose="02040503050406030204" pitchFamily="18" charset="0"/>
+                            </a:rPr>
+                            <m:t>𝑡</m:t>
+                          </m:r>
+                        </m:sub>
+                      </m:sSub>
+                    </m:oMath>
+                  </m:oMathPara>
+                </a14:m>
+                <a:endParaRPr lang="en-US" sz="2000" dirty="0">
+                  <a:solidFill>
+                    <a:schemeClr val="tx1">
+                      <a:lumMod val="50000"/>
+                      <a:lumOff val="50000"/>
+                    </a:schemeClr>
+                  </a:solidFill>
+                  <a:latin typeface="Aptos" panose="020B0004020202020204" pitchFamily="34" charset="0"/>
+                </a:endParaRPr>
+              </a:p>
+            </p:txBody>
+          </p:sp>
+        </mc:Choice>
+        <mc:Fallback>
+          <p:sp>
+            <p:nvSpPr>
+              <p:cNvPr id="77" name="TextBox 35">
+                <a:extLst>
+                  <a:ext uri="{FF2B5EF4-FFF2-40B4-BE49-F238E27FC236}">
+                    <a16:creationId xmlns:a16="http://schemas.microsoft.com/office/drawing/2014/main" id="{77701C4E-68C1-CE44-96B2-9D0D80161CD2}"/>
+                  </a:ext>
+                </a:extLst>
+              </p:cNvPr>
+              <p:cNvSpPr txBox="1">
+                <a:spLocks noRot="1" noChangeAspect="1" noMove="1" noResize="1" noEditPoints="1" noAdjustHandles="1" noChangeArrowheads="1" noChangeShapeType="1" noTextEdit="1"/>
+              </p:cNvSpPr>
+              <p:nvPr/>
+            </p:nvSpPr>
+            <p:spPr>
+              <a:xfrm>
+                <a:off x="2262636" y="2779489"/>
+                <a:ext cx="612523" cy="307777"/>
+              </a:xfrm>
+              <a:prstGeom prst="rect">
+                <a:avLst/>
+              </a:prstGeom>
+              <a:blipFill>
+                <a:blip r:embed="rId10"/>
+                <a:stretch>
+                  <a:fillRect b="-16000"/>
+                </a:stretch>
+              </a:blipFill>
+            </p:spPr>
+            <p:txBody>
+              <a:bodyPr/>
+              <a:lstStyle/>
+              <a:p>
+                <a:r>
+                  <a:rPr lang="en-US">
+                    <a:noFill/>
+                  </a:rPr>
+                  <a:t> </a:t>
+                </a:r>
+              </a:p>
+            </p:txBody>
+          </p:sp>
+        </mc:Fallback>
+      </mc:AlternateContent>
+      <p:sp>
+        <p:nvSpPr>
+          <p:cNvPr id="84" name="TextBox 83">
+            <a:extLst>
+              <a:ext uri="{FF2B5EF4-FFF2-40B4-BE49-F238E27FC236}">
+                <a16:creationId xmlns:a16="http://schemas.microsoft.com/office/drawing/2014/main" id="{2F2404BE-BFCE-CF11-2689-E9664916BFFE}"/>
+              </a:ext>
+            </a:extLst>
+          </p:cNvPr>
+          <p:cNvSpPr txBox="1"/>
+          <p:nvPr/>
+        </p:nvSpPr>
+        <p:spPr>
+          <a:xfrm>
+            <a:off x="815815" y="514975"/>
+            <a:ext cx="538883" cy="369332"/>
+          </a:xfrm>
+          <a:prstGeom prst="rect">
+            <a:avLst/>
+          </a:prstGeom>
+          <a:noFill/>
+        </p:spPr>
+        <p:txBody>
+          <a:bodyPr wrap="square" rtlCol="0">
+            <a:spAutoFit/>
+          </a:bodyPr>
+          <a:lstStyle/>
+          <a:p>
+            <a:r>
+              <a:rPr lang="en-US" dirty="0"/>
+              <a:t>a)</a:t>
+            </a:r>
+          </a:p>
+        </p:txBody>
+      </p:sp>
+      <p:sp>
+        <p:nvSpPr>
+          <p:cNvPr id="85" name="TextBox 84">
+            <a:extLst>
+              <a:ext uri="{FF2B5EF4-FFF2-40B4-BE49-F238E27FC236}">
+                <a16:creationId xmlns:a16="http://schemas.microsoft.com/office/drawing/2014/main" id="{E44666F5-0440-0F6D-5295-5D39F5A42F8A}"/>
+              </a:ext>
+            </a:extLst>
+          </p:cNvPr>
+          <p:cNvSpPr txBox="1"/>
+          <p:nvPr/>
+        </p:nvSpPr>
+        <p:spPr>
+          <a:xfrm>
+            <a:off x="843320" y="4127833"/>
+            <a:ext cx="480822" cy="369332"/>
+          </a:xfrm>
+          <a:prstGeom prst="rect">
+            <a:avLst/>
+          </a:prstGeom>
+          <a:noFill/>
+        </p:spPr>
+        <p:txBody>
+          <a:bodyPr wrap="square" rtlCol="0">
+            <a:spAutoFit/>
+          </a:bodyPr>
+          <a:lstStyle/>
+          <a:p>
+            <a:r>
+              <a:rPr lang="en-US" dirty="0"/>
+              <a:t>b)</a:t>
+            </a:r>
+          </a:p>
+        </p:txBody>
+      </p:sp>
+      <mc:AlternateContent xmlns:mc="http://schemas.openxmlformats.org/markup-compatibility/2006">
+        <mc:Choice xmlns:a14="http://schemas.microsoft.com/office/drawing/2010/main" Requires="a14">
+          <p:sp>
+            <p:nvSpPr>
+              <p:cNvPr id="14" name="TextBox 35">
+                <a:extLst>
+                  <a:ext uri="{FF2B5EF4-FFF2-40B4-BE49-F238E27FC236}">
+                    <a16:creationId xmlns:a16="http://schemas.microsoft.com/office/drawing/2014/main" id="{858B71BA-09A6-BD82-887F-B096F6501377}"/>
+                  </a:ext>
+                </a:extLst>
+              </p:cNvPr>
+              <p:cNvSpPr txBox="1"/>
+              <p:nvPr/>
+            </p:nvSpPr>
+            <p:spPr>
+              <a:xfrm>
+                <a:off x="6087942" y="2797085"/>
+                <a:ext cx="606923" cy="307777"/>
+              </a:xfrm>
+              <a:prstGeom prst="rect">
+                <a:avLst/>
+              </a:prstGeom>
+              <a:noFill/>
+            </p:spPr>
+            <p:txBody>
+              <a:bodyPr wrap="square" lIns="0" tIns="0" rIns="0" bIns="0" rtlCol="0">
+                <a:spAutoFit/>
+              </a:bodyPr>
+              <a:lstStyle>
+                <a:defPPr>
+                  <a:defRPr lang="en-US"/>
+                </a:defPPr>
+                <a:lvl1pPr marL="0" algn="l" defTabSz="914400" rtl="0" eaLnBrk="1" latinLnBrk="0" hangingPunct="1">
+                  <a:defRPr sz="1800" kern="1200">
+                    <a:solidFill>
+                      <a:schemeClr val="tx1"/>
+                    </a:solidFill>
+                    <a:latin typeface="+mn-lt"/>
+                    <a:ea typeface="+mn-ea"/>
+                    <a:cs typeface="+mn-cs"/>
+                  </a:defRPr>
+                </a:lvl1pPr>
+                <a:lvl2pPr marL="457200" algn="l" defTabSz="914400" rtl="0" eaLnBrk="1" latinLnBrk="0" hangingPunct="1">
+                  <a:defRPr sz="1800" kern="1200">
+                    <a:solidFill>
+                      <a:schemeClr val="tx1"/>
+                    </a:solidFill>
+                    <a:latin typeface="+mn-lt"/>
+                    <a:ea typeface="+mn-ea"/>
+                    <a:cs typeface="+mn-cs"/>
+                  </a:defRPr>
+                </a:lvl2pPr>
+                <a:lvl3pPr marL="914400" algn="l" defTabSz="914400" rtl="0" eaLnBrk="1" latinLnBrk="0" hangingPunct="1">
+                  <a:defRPr sz="1800" kern="1200">
+                    <a:solidFill>
+                      <a:schemeClr val="tx1"/>
+                    </a:solidFill>
+                    <a:latin typeface="+mn-lt"/>
+                    <a:ea typeface="+mn-ea"/>
+                    <a:cs typeface="+mn-cs"/>
+                  </a:defRPr>
+                </a:lvl3pPr>
+                <a:lvl4pPr marL="1371600" algn="l" defTabSz="914400" rtl="0" eaLnBrk="1" latinLnBrk="0" hangingPunct="1">
+                  <a:defRPr sz="1800" kern="1200">
+                    <a:solidFill>
+                      <a:schemeClr val="tx1"/>
+                    </a:solidFill>
+                    <a:latin typeface="+mn-lt"/>
+                    <a:ea typeface="+mn-ea"/>
+                    <a:cs typeface="+mn-cs"/>
+                  </a:defRPr>
+                </a:lvl4pPr>
+                <a:lvl5pPr marL="1828800" algn="l" defTabSz="914400" rtl="0" eaLnBrk="1" latinLnBrk="0" hangingPunct="1">
+                  <a:defRPr sz="1800" kern="1200">
+                    <a:solidFill>
+                      <a:schemeClr val="tx1"/>
+                    </a:solidFill>
+                    <a:latin typeface="+mn-lt"/>
+                    <a:ea typeface="+mn-ea"/>
+                    <a:cs typeface="+mn-cs"/>
+                  </a:defRPr>
+                </a:lvl5pPr>
+                <a:lvl6pPr marL="2286000" algn="l" defTabSz="914400" rtl="0" eaLnBrk="1" latinLnBrk="0" hangingPunct="1">
+                  <a:defRPr sz="1800" kern="1200">
+                    <a:solidFill>
+                      <a:schemeClr val="tx1"/>
+                    </a:solidFill>
+                    <a:latin typeface="+mn-lt"/>
+                    <a:ea typeface="+mn-ea"/>
+                    <a:cs typeface="+mn-cs"/>
+                  </a:defRPr>
+                </a:lvl6pPr>
+                <a:lvl7pPr marL="2743200" algn="l" defTabSz="914400" rtl="0" eaLnBrk="1" latinLnBrk="0" hangingPunct="1">
+                  <a:defRPr sz="1800" kern="1200">
+                    <a:solidFill>
+                      <a:schemeClr val="tx1"/>
+                    </a:solidFill>
+                    <a:latin typeface="+mn-lt"/>
+                    <a:ea typeface="+mn-ea"/>
+                    <a:cs typeface="+mn-cs"/>
+                  </a:defRPr>
+                </a:lvl7pPr>
+                <a:lvl8pPr marL="3200400" algn="l" defTabSz="914400" rtl="0" eaLnBrk="1" latinLnBrk="0" hangingPunct="1">
+                  <a:defRPr sz="1800" kern="1200">
+                    <a:solidFill>
+                      <a:schemeClr val="tx1"/>
+                    </a:solidFill>
+                    <a:latin typeface="+mn-lt"/>
+                    <a:ea typeface="+mn-ea"/>
+                    <a:cs typeface="+mn-cs"/>
+                  </a:defRPr>
+                </a:lvl8pPr>
+                <a:lvl9pPr marL="3657600" algn="l" defTabSz="914400" rtl="0" eaLnBrk="1" latinLnBrk="0" hangingPunct="1">
+                  <a:defRPr sz="1800" kern="1200">
+                    <a:solidFill>
+                      <a:schemeClr val="tx1"/>
+                    </a:solidFill>
+                    <a:latin typeface="+mn-lt"/>
+                    <a:ea typeface="+mn-ea"/>
+                    <a:cs typeface="+mn-cs"/>
+                  </a:defRPr>
+                </a:lvl9pPr>
+              </a:lstStyle>
+              <a:p>
+                <a:pPr/>
+                <a14:m>
+                  <m:oMathPara xmlns:m="http://schemas.openxmlformats.org/officeDocument/2006/math">
+                    <m:oMathParaPr>
+                      <m:jc m:val="centerGroup"/>
+                    </m:oMathParaPr>
+                    <m:oMath xmlns:m="http://schemas.openxmlformats.org/officeDocument/2006/math">
+                      <m:sSub>
+                        <m:sSubPr>
+                          <m:ctrlPr>
+                            <a:rPr lang="en-US" sz="2000" b="1" i="1" smtClean="0">
+                              <a:solidFill>
+                                <a:schemeClr val="tx1">
+                                  <a:lumMod val="50000"/>
+                                  <a:lumOff val="50000"/>
+                                </a:schemeClr>
+                              </a:solidFill>
+                              <a:latin typeface="Cambria Math" panose="02040503050406030204" pitchFamily="18" charset="0"/>
+                            </a:rPr>
+                          </m:ctrlPr>
+                        </m:sSubPr>
+                        <m:e>
+                          <m:r>
+                            <a:rPr lang="en-US" sz="2000" b="0" i="1" smtClean="0">
+                              <a:solidFill>
+                                <a:schemeClr val="tx1">
+                                  <a:lumMod val="50000"/>
+                                  <a:lumOff val="50000"/>
+                                </a:schemeClr>
+                              </a:solidFill>
+                              <a:latin typeface="Cambria Math" panose="02040503050406030204" pitchFamily="18" charset="0"/>
+                            </a:rPr>
+                            <m:t>𝑀</m:t>
+                          </m:r>
+                        </m:e>
+                        <m:sub>
+                          <m:r>
+                            <a:rPr lang="en-US" sz="2000" b="0" i="1" smtClean="0">
+                              <a:solidFill>
+                                <a:schemeClr val="tx1">
+                                  <a:lumMod val="50000"/>
+                                  <a:lumOff val="50000"/>
+                                </a:schemeClr>
+                              </a:solidFill>
+                              <a:latin typeface="Cambria Math" panose="02040503050406030204" pitchFamily="18" charset="0"/>
+                            </a:rPr>
+                            <m:t>𝑡</m:t>
+                          </m:r>
+                          <m:r>
+                            <a:rPr lang="en-US" sz="2000" b="0" i="1" smtClean="0">
+                              <a:solidFill>
+                                <a:schemeClr val="tx1">
+                                  <a:lumMod val="50000"/>
+                                  <a:lumOff val="50000"/>
+                                </a:schemeClr>
+                              </a:solidFill>
+                              <a:latin typeface="Cambria Math" panose="02040503050406030204" pitchFamily="18" charset="0"/>
+                            </a:rPr>
+                            <m:t>+</m:t>
+                          </m:r>
+                          <m:r>
+                            <m:rPr>
+                              <m:sty m:val="p"/>
+                            </m:rPr>
+                            <a:rPr lang="en-US" sz="2000" b="0" i="0" smtClean="0">
+                              <a:solidFill>
+                                <a:schemeClr val="tx1">
+                                  <a:lumMod val="50000"/>
+                                  <a:lumOff val="50000"/>
+                                </a:schemeClr>
+                              </a:solidFill>
+                              <a:latin typeface="Cambria Math" panose="02040503050406030204" pitchFamily="18" charset="0"/>
+                            </a:rPr>
+                            <m:t>Δt</m:t>
+                          </m:r>
+                        </m:sub>
+                      </m:sSub>
+                    </m:oMath>
+                  </m:oMathPara>
+                </a14:m>
+                <a:endParaRPr lang="en-US" sz="2000" dirty="0">
+                  <a:solidFill>
+                    <a:schemeClr val="tx1">
+                      <a:lumMod val="50000"/>
+                      <a:lumOff val="50000"/>
+                    </a:schemeClr>
+                  </a:solidFill>
+                  <a:latin typeface="Aptos" panose="020B0004020202020204" pitchFamily="34" charset="0"/>
+                </a:endParaRPr>
+              </a:p>
+            </p:txBody>
+          </p:sp>
+        </mc:Choice>
+        <mc:Fallback>
+          <p:sp>
+            <p:nvSpPr>
+              <p:cNvPr id="14" name="TextBox 35">
+                <a:extLst>
+                  <a:ext uri="{FF2B5EF4-FFF2-40B4-BE49-F238E27FC236}">
+                    <a16:creationId xmlns:a16="http://schemas.microsoft.com/office/drawing/2014/main" id="{858B71BA-09A6-BD82-887F-B096F6501377}"/>
+                  </a:ext>
+                </a:extLst>
+              </p:cNvPr>
+              <p:cNvSpPr txBox="1">
+                <a:spLocks noRot="1" noChangeAspect="1" noMove="1" noResize="1" noEditPoints="1" noAdjustHandles="1" noChangeArrowheads="1" noChangeShapeType="1" noTextEdit="1"/>
+              </p:cNvSpPr>
+              <p:nvPr/>
+            </p:nvSpPr>
+            <p:spPr>
+              <a:xfrm>
+                <a:off x="6087942" y="2797085"/>
+                <a:ext cx="606923" cy="307777"/>
+              </a:xfrm>
+              <a:prstGeom prst="rect">
+                <a:avLst/>
+              </a:prstGeom>
+              <a:blipFill>
+                <a:blip r:embed="rId11"/>
+                <a:stretch>
+                  <a:fillRect l="-14286" r="-12245" b="-16000"/>
+                </a:stretch>
+              </a:blipFill>
+            </p:spPr>
+            <p:txBody>
+              <a:bodyPr/>
+              <a:lstStyle/>
+              <a:p>
+                <a:r>
+                  <a:rPr lang="en-US">
+                    <a:noFill/>
+                  </a:rPr>
+                  <a:t> </a:t>
+                </a:r>
+              </a:p>
+            </p:txBody>
+          </p:sp>
+        </mc:Fallback>
+      </mc:AlternateContent>
+      <p:cxnSp>
+        <p:nvCxnSpPr>
+          <p:cNvPr id="15" name="Curved Connector 14">
+            <a:extLst>
+              <a:ext uri="{FF2B5EF4-FFF2-40B4-BE49-F238E27FC236}">
+                <a16:creationId xmlns:a16="http://schemas.microsoft.com/office/drawing/2014/main" id="{D2BBC1B0-9C2A-695C-55CA-37A7122AD671}"/>
+              </a:ext>
+            </a:extLst>
+          </p:cNvPr>
+          <p:cNvCxnSpPr>
+            <a:cxnSpLocks/>
+            <a:stCxn id="52" idx="3"/>
+            <a:endCxn id="11" idx="2"/>
+          </p:cNvCxnSpPr>
+          <p:nvPr/>
+        </p:nvCxnSpPr>
+        <p:spPr>
+          <a:xfrm rot="16200000" flipH="1">
+            <a:off x="2456822" y="1860762"/>
+            <a:ext cx="616933" cy="1480306"/>
+          </a:xfrm>
+          <a:prstGeom prst="curvedConnector2">
+            <a:avLst/>
+          </a:prstGeom>
+          <a:ln w="38100">
+            <a:solidFill>
+              <a:schemeClr val="tx1">
+                <a:lumMod val="50000"/>
+                <a:lumOff val="50000"/>
+              </a:schemeClr>
+            </a:solidFill>
+            <a:tailEnd type="triangle"/>
+          </a:ln>
+        </p:spPr>
+        <p:style>
+          <a:lnRef idx="2">
+            <a:schemeClr val="dk1"/>
+          </a:lnRef>
+          <a:fillRef idx="0">
+            <a:schemeClr val="dk1"/>
+          </a:fillRef>
+          <a:effectRef idx="1">
+            <a:schemeClr val="dk1"/>
+          </a:effectRef>
+          <a:fontRef idx="minor">
+            <a:schemeClr val="tx1"/>
+          </a:fontRef>
+        </p:style>
+      </p:cxnSp>
+      <mc:AlternateContent xmlns:mc="http://schemas.openxmlformats.org/markup-compatibility/2006">
+        <mc:Choice xmlns:a14="http://schemas.microsoft.com/office/drawing/2010/main" Requires="a14">
+          <p:sp>
+            <p:nvSpPr>
+              <p:cNvPr id="4" name="TextBox 3">
+                <a:extLst>
+                  <a:ext uri="{FF2B5EF4-FFF2-40B4-BE49-F238E27FC236}">
+                    <a16:creationId xmlns:a16="http://schemas.microsoft.com/office/drawing/2014/main" id="{1D7AC608-04A2-FEC8-348D-7F84A228D8F4}"/>
+                  </a:ext>
+                </a:extLst>
+              </p:cNvPr>
+              <p:cNvSpPr txBox="1"/>
+              <p:nvPr/>
+            </p:nvSpPr>
+            <p:spPr>
+              <a:xfrm>
+                <a:off x="5958517" y="1126546"/>
+                <a:ext cx="383913" cy="400110"/>
+              </a:xfrm>
+              <a:prstGeom prst="rect">
+                <a:avLst/>
+              </a:prstGeom>
+              <a:noFill/>
+            </p:spPr>
+            <p:txBody>
+              <a:bodyPr wrap="square">
+                <a:spAutoFit/>
+              </a:bodyPr>
+              <a:lstStyle/>
+              <a:p>
+                <a:pPr/>
+                <a14:m>
+                  <m:oMathPara xmlns:m="http://schemas.openxmlformats.org/officeDocument/2006/math">
+                    <m:oMathParaPr>
+                      <m:jc m:val="centerGroup"/>
+                    </m:oMathParaPr>
+                    <m:oMath xmlns:m="http://schemas.openxmlformats.org/officeDocument/2006/math">
+                      <m:sSub>
+                        <m:sSubPr>
+                          <m:ctrlPr>
+                            <a:rPr lang="en-US" sz="2000" b="1" i="1" smtClean="0">
+                              <a:latin typeface="Cambria Math" panose="02040503050406030204" pitchFamily="18" charset="0"/>
+                            </a:rPr>
+                          </m:ctrlPr>
+                        </m:sSubPr>
+                        <m:e>
+                          <m:r>
+                            <a:rPr lang="en-US" sz="2000" b="1" i="1" smtClean="0">
+                              <a:latin typeface="Cambria Math" panose="02040503050406030204" pitchFamily="18" charset="0"/>
+                            </a:rPr>
+                            <m:t>𝒙</m:t>
+                          </m:r>
+                        </m:e>
+                        <m:sub>
+                          <m:r>
+                            <a:rPr lang="en-US" sz="2000" b="0" i="1" smtClean="0">
+                              <a:latin typeface="Cambria Math" panose="02040503050406030204" pitchFamily="18" charset="0"/>
+                            </a:rPr>
+                            <m:t>𝑡</m:t>
+                          </m:r>
+                          <m:r>
+                            <a:rPr lang="en-US" sz="2000" b="0" i="1" smtClean="0">
+                              <a:latin typeface="Cambria Math" panose="02040503050406030204" pitchFamily="18" charset="0"/>
+                            </a:rPr>
+                            <m:t>+</m:t>
+                          </m:r>
+                          <m:r>
+                            <m:rPr>
+                              <m:sty m:val="p"/>
+                            </m:rPr>
+                            <a:rPr lang="en-US" sz="2000" b="0" i="0" smtClean="0">
+                              <a:latin typeface="Cambria Math" panose="02040503050406030204" pitchFamily="18" charset="0"/>
+                            </a:rPr>
+                            <m:t>Δt</m:t>
+                          </m:r>
+                        </m:sub>
+                      </m:sSub>
+                    </m:oMath>
+                  </m:oMathPara>
+                </a14:m>
+                <a:endParaRPr lang="en-US" sz="1800" b="1" dirty="0">
+                  <a:latin typeface="Aptos" panose="020B0004020202020204" pitchFamily="34" charset="0"/>
+                </a:endParaRPr>
+              </a:p>
+            </p:txBody>
+          </p:sp>
+        </mc:Choice>
+        <mc:Fallback>
+          <p:sp>
+            <p:nvSpPr>
+              <p:cNvPr id="4" name="TextBox 3">
+                <a:extLst>
+                  <a:ext uri="{FF2B5EF4-FFF2-40B4-BE49-F238E27FC236}">
+                    <a16:creationId xmlns:a16="http://schemas.microsoft.com/office/drawing/2014/main" id="{1D7AC608-04A2-FEC8-348D-7F84A228D8F4}"/>
+                  </a:ext>
+                </a:extLst>
+              </p:cNvPr>
+              <p:cNvSpPr txBox="1">
+                <a:spLocks noRot="1" noChangeAspect="1" noMove="1" noResize="1" noEditPoints="1" noAdjustHandles="1" noChangeArrowheads="1" noChangeShapeType="1" noTextEdit="1"/>
+              </p:cNvSpPr>
+              <p:nvPr/>
+            </p:nvSpPr>
+            <p:spPr>
+              <a:xfrm>
+                <a:off x="5958517" y="1126546"/>
+                <a:ext cx="383913" cy="400110"/>
+              </a:xfrm>
+              <a:prstGeom prst="rect">
+                <a:avLst/>
+              </a:prstGeom>
+              <a:blipFill>
+                <a:blip r:embed="rId12"/>
+                <a:stretch>
+                  <a:fillRect r="-84375"/>
+                </a:stretch>
+              </a:blipFill>
+            </p:spPr>
+            <p:txBody>
+              <a:bodyPr/>
+              <a:lstStyle/>
+              <a:p>
+                <a:r>
+                  <a:rPr lang="en-US">
+                    <a:noFill/>
+                  </a:rPr>
+                  <a:t> </a:t>
+                </a:r>
+              </a:p>
+            </p:txBody>
+          </p:sp>
+        </mc:Fallback>
+      </mc:AlternateContent>
+      <mc:AlternateContent xmlns:mc="http://schemas.openxmlformats.org/markup-compatibility/2006">
+        <mc:Choice xmlns:a14="http://schemas.microsoft.com/office/drawing/2010/main" Requires="a14">
+          <p:sp>
+            <p:nvSpPr>
+              <p:cNvPr id="5" name="TextBox 4">
+                <a:extLst>
+                  <a:ext uri="{FF2B5EF4-FFF2-40B4-BE49-F238E27FC236}">
+                    <a16:creationId xmlns:a16="http://schemas.microsoft.com/office/drawing/2014/main" id="{9AF0F8D1-16B8-817C-00F7-40AE14771DAD}"/>
+                  </a:ext>
+                </a:extLst>
+              </p:cNvPr>
+              <p:cNvSpPr txBox="1"/>
+              <p:nvPr/>
+            </p:nvSpPr>
+            <p:spPr>
+              <a:xfrm>
+                <a:off x="2189898" y="1093036"/>
+                <a:ext cx="383913" cy="400110"/>
+              </a:xfrm>
+              <a:prstGeom prst="rect">
+                <a:avLst/>
+              </a:prstGeom>
+              <a:noFill/>
+            </p:spPr>
+            <p:txBody>
+              <a:bodyPr wrap="square">
+                <a:spAutoFit/>
+              </a:bodyPr>
+              <a:lstStyle/>
+              <a:p>
+                <a:pPr/>
+                <a14:m>
+                  <m:oMathPara xmlns:m="http://schemas.openxmlformats.org/officeDocument/2006/math">
+                    <m:oMathParaPr>
+                      <m:jc m:val="centerGroup"/>
+                    </m:oMathParaPr>
+                    <m:oMath xmlns:m="http://schemas.openxmlformats.org/officeDocument/2006/math">
+                      <m:sSub>
+                        <m:sSubPr>
+                          <m:ctrlPr>
+                            <a:rPr lang="en-US" sz="2000" b="1" i="1" smtClean="0">
+                              <a:latin typeface="Cambria Math" panose="02040503050406030204" pitchFamily="18" charset="0"/>
+                            </a:rPr>
+                          </m:ctrlPr>
+                        </m:sSubPr>
+                        <m:e>
+                          <m:r>
+                            <a:rPr lang="en-US" sz="2000" b="1" i="1" smtClean="0">
+                              <a:latin typeface="Cambria Math" panose="02040503050406030204" pitchFamily="18" charset="0"/>
+                            </a:rPr>
+                            <m:t>𝒙</m:t>
+                          </m:r>
+                        </m:e>
+                        <m:sub>
+                          <m:r>
+                            <a:rPr lang="en-US" sz="2000" b="1" i="1" smtClean="0">
+                              <a:latin typeface="Cambria Math" panose="02040503050406030204" pitchFamily="18" charset="0"/>
+                            </a:rPr>
+                            <m:t>𝒕</m:t>
+                          </m:r>
+                        </m:sub>
+                      </m:sSub>
+                    </m:oMath>
+                  </m:oMathPara>
+                </a14:m>
+                <a:endParaRPr lang="en-US" sz="1800" b="1" dirty="0">
+                  <a:latin typeface="Aptos" panose="020B0004020202020204" pitchFamily="34" charset="0"/>
+                </a:endParaRPr>
+              </a:p>
+            </p:txBody>
+          </p:sp>
+        </mc:Choice>
+        <mc:Fallback>
+          <p:sp>
+            <p:nvSpPr>
+              <p:cNvPr id="5" name="TextBox 4">
+                <a:extLst>
+                  <a:ext uri="{FF2B5EF4-FFF2-40B4-BE49-F238E27FC236}">
+                    <a16:creationId xmlns:a16="http://schemas.microsoft.com/office/drawing/2014/main" id="{9AF0F8D1-16B8-817C-00F7-40AE14771DAD}"/>
+                  </a:ext>
+                </a:extLst>
+              </p:cNvPr>
+              <p:cNvSpPr txBox="1">
+                <a:spLocks noRot="1" noChangeAspect="1" noMove="1" noResize="1" noEditPoints="1" noAdjustHandles="1" noChangeArrowheads="1" noChangeShapeType="1" noTextEdit="1"/>
+              </p:cNvSpPr>
+              <p:nvPr/>
+            </p:nvSpPr>
+            <p:spPr>
+              <a:xfrm>
+                <a:off x="2189898" y="1093036"/>
+                <a:ext cx="383913" cy="400110"/>
+              </a:xfrm>
+              <a:prstGeom prst="rect">
+                <a:avLst/>
+              </a:prstGeom>
+              <a:blipFill>
+                <a:blip r:embed="rId13"/>
+                <a:stretch>
+                  <a:fillRect/>
+                </a:stretch>
+              </a:blipFill>
+            </p:spPr>
+            <p:txBody>
+              <a:bodyPr/>
+              <a:lstStyle/>
+              <a:p>
+                <a:r>
+                  <a:rPr lang="en-US">
+                    <a:noFill/>
+                  </a:rPr>
+                  <a:t> </a:t>
+                </a:r>
+              </a:p>
+            </p:txBody>
+          </p:sp>
+        </mc:Fallback>
+      </mc:AlternateContent>
+      <p:cxnSp>
+        <p:nvCxnSpPr>
+          <p:cNvPr id="29" name="Curved Connector 28">
+            <a:extLst>
+              <a:ext uri="{FF2B5EF4-FFF2-40B4-BE49-F238E27FC236}">
+                <a16:creationId xmlns:a16="http://schemas.microsoft.com/office/drawing/2014/main" id="{9280A2C6-F0F1-C233-218B-6042BE5D15F1}"/>
+              </a:ext>
+            </a:extLst>
+          </p:cNvPr>
+          <p:cNvCxnSpPr>
+            <a:cxnSpLocks/>
+            <a:stCxn id="11" idx="6"/>
+            <a:endCxn id="57" idx="3"/>
+          </p:cNvCxnSpPr>
+          <p:nvPr/>
+        </p:nvCxnSpPr>
+        <p:spPr>
+          <a:xfrm flipV="1">
+            <a:off x="5247430" y="2322990"/>
+            <a:ext cx="1576073" cy="586392"/>
+          </a:xfrm>
+          <a:prstGeom prst="curvedConnector2">
+            <a:avLst/>
+          </a:prstGeom>
+          <a:ln w="38100">
+            <a:solidFill>
+              <a:schemeClr val="tx1">
+                <a:lumMod val="50000"/>
+                <a:lumOff val="50000"/>
+              </a:schemeClr>
+            </a:solidFill>
+            <a:tailEnd type="triangle"/>
+          </a:ln>
+        </p:spPr>
+        <p:style>
+          <a:lnRef idx="2">
+            <a:schemeClr val="dk1"/>
+          </a:lnRef>
+          <a:fillRef idx="0">
+            <a:schemeClr val="dk1"/>
+          </a:fillRef>
+          <a:effectRef idx="1">
+            <a:schemeClr val="dk1"/>
+          </a:effectRef>
+          <a:fontRef idx="minor">
+            <a:schemeClr val="tx1"/>
+          </a:fontRef>
+        </p:style>
+      </p:cxnSp>
+      <mc:AlternateContent xmlns:mc="http://schemas.openxmlformats.org/markup-compatibility/2006">
+        <mc:Choice xmlns:a14="http://schemas.microsoft.com/office/drawing/2010/main" Requires="a14">
+          <p:sp>
+            <p:nvSpPr>
+              <p:cNvPr id="36" name="TextBox 35">
+                <a:extLst>
+                  <a:ext uri="{FF2B5EF4-FFF2-40B4-BE49-F238E27FC236}">
+                    <a16:creationId xmlns:a16="http://schemas.microsoft.com/office/drawing/2014/main" id="{C84410AE-CD91-76D0-831E-EE4D4705820D}"/>
+                  </a:ext>
+                </a:extLst>
+              </p:cNvPr>
+              <p:cNvSpPr txBox="1"/>
+              <p:nvPr/>
+            </p:nvSpPr>
+            <p:spPr>
+              <a:xfrm>
+                <a:off x="3304612" y="2090463"/>
+                <a:ext cx="575725" cy="307777"/>
+              </a:xfrm>
+              <a:prstGeom prst="rect">
+                <a:avLst/>
+              </a:prstGeom>
+              <a:noFill/>
+            </p:spPr>
+            <p:txBody>
+              <a:bodyPr wrap="square" lIns="0" tIns="0" rIns="0" bIns="0" rtlCol="0">
+                <a:spAutoFit/>
+              </a:bodyPr>
+              <a:lstStyle>
+                <a:defPPr>
+                  <a:defRPr lang="en-US"/>
+                </a:defPPr>
+                <a:lvl1pPr marL="0" algn="l" defTabSz="914400" rtl="0" eaLnBrk="1" latinLnBrk="0" hangingPunct="1">
+                  <a:defRPr sz="1800" kern="1200">
+                    <a:solidFill>
+                      <a:schemeClr val="tx1"/>
+                    </a:solidFill>
+                    <a:latin typeface="+mn-lt"/>
+                    <a:ea typeface="+mn-ea"/>
+                    <a:cs typeface="+mn-cs"/>
+                  </a:defRPr>
+                </a:lvl1pPr>
+                <a:lvl2pPr marL="457200" algn="l" defTabSz="914400" rtl="0" eaLnBrk="1" latinLnBrk="0" hangingPunct="1">
+                  <a:defRPr sz="1800" kern="1200">
+                    <a:solidFill>
+                      <a:schemeClr val="tx1"/>
+                    </a:solidFill>
+                    <a:latin typeface="+mn-lt"/>
+                    <a:ea typeface="+mn-ea"/>
+                    <a:cs typeface="+mn-cs"/>
+                  </a:defRPr>
+                </a:lvl2pPr>
+                <a:lvl3pPr marL="914400" algn="l" defTabSz="914400" rtl="0" eaLnBrk="1" latinLnBrk="0" hangingPunct="1">
+                  <a:defRPr sz="1800" kern="1200">
+                    <a:solidFill>
+                      <a:schemeClr val="tx1"/>
+                    </a:solidFill>
+                    <a:latin typeface="+mn-lt"/>
+                    <a:ea typeface="+mn-ea"/>
+                    <a:cs typeface="+mn-cs"/>
+                  </a:defRPr>
+                </a:lvl3pPr>
+                <a:lvl4pPr marL="1371600" algn="l" defTabSz="914400" rtl="0" eaLnBrk="1" latinLnBrk="0" hangingPunct="1">
+                  <a:defRPr sz="1800" kern="1200">
+                    <a:solidFill>
+                      <a:schemeClr val="tx1"/>
+                    </a:solidFill>
+                    <a:latin typeface="+mn-lt"/>
+                    <a:ea typeface="+mn-ea"/>
+                    <a:cs typeface="+mn-cs"/>
+                  </a:defRPr>
+                </a:lvl4pPr>
+                <a:lvl5pPr marL="1828800" algn="l" defTabSz="914400" rtl="0" eaLnBrk="1" latinLnBrk="0" hangingPunct="1">
+                  <a:defRPr sz="1800" kern="1200">
+                    <a:solidFill>
+                      <a:schemeClr val="tx1"/>
+                    </a:solidFill>
+                    <a:latin typeface="+mn-lt"/>
+                    <a:ea typeface="+mn-ea"/>
+                    <a:cs typeface="+mn-cs"/>
+                  </a:defRPr>
+                </a:lvl5pPr>
+                <a:lvl6pPr marL="2286000" algn="l" defTabSz="914400" rtl="0" eaLnBrk="1" latinLnBrk="0" hangingPunct="1">
+                  <a:defRPr sz="1800" kern="1200">
+                    <a:solidFill>
+                      <a:schemeClr val="tx1"/>
+                    </a:solidFill>
+                    <a:latin typeface="+mn-lt"/>
+                    <a:ea typeface="+mn-ea"/>
+                    <a:cs typeface="+mn-cs"/>
+                  </a:defRPr>
+                </a:lvl6pPr>
+                <a:lvl7pPr marL="2743200" algn="l" defTabSz="914400" rtl="0" eaLnBrk="1" latinLnBrk="0" hangingPunct="1">
+                  <a:defRPr sz="1800" kern="1200">
+                    <a:solidFill>
+                      <a:schemeClr val="tx1"/>
+                    </a:solidFill>
+                    <a:latin typeface="+mn-lt"/>
+                    <a:ea typeface="+mn-ea"/>
+                    <a:cs typeface="+mn-cs"/>
+                  </a:defRPr>
+                </a:lvl7pPr>
+                <a:lvl8pPr marL="3200400" algn="l" defTabSz="914400" rtl="0" eaLnBrk="1" latinLnBrk="0" hangingPunct="1">
+                  <a:defRPr sz="1800" kern="1200">
+                    <a:solidFill>
+                      <a:schemeClr val="tx1"/>
+                    </a:solidFill>
+                    <a:latin typeface="+mn-lt"/>
+                    <a:ea typeface="+mn-ea"/>
+                    <a:cs typeface="+mn-cs"/>
+                  </a:defRPr>
+                </a:lvl8pPr>
+                <a:lvl9pPr marL="3657600" algn="l" defTabSz="914400" rtl="0" eaLnBrk="1" latinLnBrk="0" hangingPunct="1">
+                  <a:defRPr sz="1800" kern="1200">
+                    <a:solidFill>
+                      <a:schemeClr val="tx1"/>
+                    </a:solidFill>
+                    <a:latin typeface="+mn-lt"/>
+                    <a:ea typeface="+mn-ea"/>
+                    <a:cs typeface="+mn-cs"/>
+                  </a:defRPr>
+                </a:lvl9pPr>
+              </a:lstStyle>
+              <a:p>
+                <a:pPr/>
+                <a14:m>
+                  <m:oMathPara xmlns:m="http://schemas.openxmlformats.org/officeDocument/2006/math">
+                    <m:oMathParaPr>
+                      <m:jc m:val="centerGroup"/>
+                    </m:oMathParaPr>
+                    <m:oMath xmlns:m="http://schemas.openxmlformats.org/officeDocument/2006/math">
+                      <m:sSub>
+                        <m:sSubPr>
+                          <m:ctrlPr>
+                            <a:rPr lang="en-US" sz="2000" b="1" i="1" smtClean="0">
+                              <a:latin typeface="Cambria Math" panose="02040503050406030204" pitchFamily="18" charset="0"/>
+                            </a:rPr>
+                          </m:ctrlPr>
+                        </m:sSubPr>
+                        <m:e>
+                          <m:r>
+                            <a:rPr lang="en-US" sz="2000" b="1" i="1" smtClean="0">
+                              <a:latin typeface="Cambria Math" panose="02040503050406030204" pitchFamily="18" charset="0"/>
+                            </a:rPr>
+                            <m:t>𝒛</m:t>
+                          </m:r>
+                        </m:e>
+                        <m:sub>
+                          <m:r>
+                            <a:rPr lang="en-US" sz="2000" b="1" i="1" smtClean="0">
+                              <a:latin typeface="Cambria Math" panose="02040503050406030204" pitchFamily="18" charset="0"/>
+                            </a:rPr>
+                            <m:t>𝒕</m:t>
+                          </m:r>
+                        </m:sub>
+                      </m:sSub>
+                    </m:oMath>
+                  </m:oMathPara>
+                </a14:m>
+                <a:endParaRPr lang="en-US" sz="2000" b="1" dirty="0">
+                  <a:latin typeface="Aptos" panose="020B0004020202020204" pitchFamily="34" charset="0"/>
+                </a:endParaRPr>
+              </a:p>
+            </p:txBody>
+          </p:sp>
+        </mc:Choice>
+        <mc:Fallback>
+          <p:sp>
+            <p:nvSpPr>
+              <p:cNvPr id="36" name="TextBox 35">
+                <a:extLst>
+                  <a:ext uri="{FF2B5EF4-FFF2-40B4-BE49-F238E27FC236}">
+                    <a16:creationId xmlns:a16="http://schemas.microsoft.com/office/drawing/2014/main" id="{C84410AE-CD91-76D0-831E-EE4D4705820D}"/>
+                  </a:ext>
+                </a:extLst>
+              </p:cNvPr>
+              <p:cNvSpPr txBox="1">
+                <a:spLocks noRot="1" noChangeAspect="1" noMove="1" noResize="1" noEditPoints="1" noAdjustHandles="1" noChangeArrowheads="1" noChangeShapeType="1" noTextEdit="1"/>
+              </p:cNvSpPr>
+              <p:nvPr/>
+            </p:nvSpPr>
+            <p:spPr>
+              <a:xfrm>
+                <a:off x="3304612" y="2090463"/>
+                <a:ext cx="575725" cy="307777"/>
+              </a:xfrm>
+              <a:prstGeom prst="rect">
+                <a:avLst/>
+              </a:prstGeom>
+              <a:blipFill>
+                <a:blip r:embed="rId14"/>
+                <a:stretch>
+                  <a:fillRect b="-16000"/>
+                </a:stretch>
+              </a:blipFill>
+            </p:spPr>
+            <p:txBody>
+              <a:bodyPr/>
+              <a:lstStyle/>
+              <a:p>
+                <a:r>
+                  <a:rPr lang="en-US">
+                    <a:noFill/>
+                  </a:rPr>
+                  <a:t> </a:t>
+                </a:r>
+              </a:p>
+            </p:txBody>
+          </p:sp>
+        </mc:Fallback>
+      </mc:AlternateContent>
+      <mc:AlternateContent xmlns:mc="http://schemas.openxmlformats.org/markup-compatibility/2006">
+        <mc:Choice xmlns:a14="http://schemas.microsoft.com/office/drawing/2010/main" Requires="a14">
+          <p:sp>
+            <p:nvSpPr>
+              <p:cNvPr id="39" name="TextBox 38">
+                <a:extLst>
+                  <a:ext uri="{FF2B5EF4-FFF2-40B4-BE49-F238E27FC236}">
+                    <a16:creationId xmlns:a16="http://schemas.microsoft.com/office/drawing/2014/main" id="{70F8DA71-C65B-5292-13CB-4ECC8E5D0881}"/>
+                  </a:ext>
+                </a:extLst>
+              </p:cNvPr>
+              <p:cNvSpPr txBox="1"/>
+              <p:nvPr/>
+            </p:nvSpPr>
+            <p:spPr>
+              <a:xfrm>
+                <a:off x="4718578" y="2061327"/>
+                <a:ext cx="575725" cy="307777"/>
+              </a:xfrm>
+              <a:prstGeom prst="rect">
+                <a:avLst/>
+              </a:prstGeom>
+              <a:noFill/>
+            </p:spPr>
+            <p:txBody>
+              <a:bodyPr wrap="square" lIns="0" tIns="0" rIns="0" bIns="0" rtlCol="0">
+                <a:spAutoFit/>
+              </a:bodyPr>
+              <a:lstStyle>
+                <a:defPPr>
+                  <a:defRPr lang="en-US"/>
+                </a:defPPr>
+                <a:lvl1pPr marL="0" algn="l" defTabSz="914400" rtl="0" eaLnBrk="1" latinLnBrk="0" hangingPunct="1">
+                  <a:defRPr sz="1800" kern="1200">
+                    <a:solidFill>
+                      <a:schemeClr val="tx1"/>
+                    </a:solidFill>
+                    <a:latin typeface="+mn-lt"/>
+                    <a:ea typeface="+mn-ea"/>
+                    <a:cs typeface="+mn-cs"/>
+                  </a:defRPr>
+                </a:lvl1pPr>
+                <a:lvl2pPr marL="457200" algn="l" defTabSz="914400" rtl="0" eaLnBrk="1" latinLnBrk="0" hangingPunct="1">
+                  <a:defRPr sz="1800" kern="1200">
+                    <a:solidFill>
+                      <a:schemeClr val="tx1"/>
+                    </a:solidFill>
+                    <a:latin typeface="+mn-lt"/>
+                    <a:ea typeface="+mn-ea"/>
+                    <a:cs typeface="+mn-cs"/>
+                  </a:defRPr>
+                </a:lvl2pPr>
+                <a:lvl3pPr marL="914400" algn="l" defTabSz="914400" rtl="0" eaLnBrk="1" latinLnBrk="0" hangingPunct="1">
+                  <a:defRPr sz="1800" kern="1200">
+                    <a:solidFill>
+                      <a:schemeClr val="tx1"/>
+                    </a:solidFill>
+                    <a:latin typeface="+mn-lt"/>
+                    <a:ea typeface="+mn-ea"/>
+                    <a:cs typeface="+mn-cs"/>
+                  </a:defRPr>
+                </a:lvl3pPr>
+                <a:lvl4pPr marL="1371600" algn="l" defTabSz="914400" rtl="0" eaLnBrk="1" latinLnBrk="0" hangingPunct="1">
+                  <a:defRPr sz="1800" kern="1200">
+                    <a:solidFill>
+                      <a:schemeClr val="tx1"/>
+                    </a:solidFill>
+                    <a:latin typeface="+mn-lt"/>
+                    <a:ea typeface="+mn-ea"/>
+                    <a:cs typeface="+mn-cs"/>
+                  </a:defRPr>
+                </a:lvl4pPr>
+                <a:lvl5pPr marL="1828800" algn="l" defTabSz="914400" rtl="0" eaLnBrk="1" latinLnBrk="0" hangingPunct="1">
+                  <a:defRPr sz="1800" kern="1200">
+                    <a:solidFill>
+                      <a:schemeClr val="tx1"/>
+                    </a:solidFill>
+                    <a:latin typeface="+mn-lt"/>
+                    <a:ea typeface="+mn-ea"/>
+                    <a:cs typeface="+mn-cs"/>
+                  </a:defRPr>
+                </a:lvl5pPr>
+                <a:lvl6pPr marL="2286000" algn="l" defTabSz="914400" rtl="0" eaLnBrk="1" latinLnBrk="0" hangingPunct="1">
+                  <a:defRPr sz="1800" kern="1200">
+                    <a:solidFill>
+                      <a:schemeClr val="tx1"/>
+                    </a:solidFill>
+                    <a:latin typeface="+mn-lt"/>
+                    <a:ea typeface="+mn-ea"/>
+                    <a:cs typeface="+mn-cs"/>
+                  </a:defRPr>
+                </a:lvl6pPr>
+                <a:lvl7pPr marL="2743200" algn="l" defTabSz="914400" rtl="0" eaLnBrk="1" latinLnBrk="0" hangingPunct="1">
+                  <a:defRPr sz="1800" kern="1200">
+                    <a:solidFill>
+                      <a:schemeClr val="tx1"/>
+                    </a:solidFill>
+                    <a:latin typeface="+mn-lt"/>
+                    <a:ea typeface="+mn-ea"/>
+                    <a:cs typeface="+mn-cs"/>
+                  </a:defRPr>
+                </a:lvl7pPr>
+                <a:lvl8pPr marL="3200400" algn="l" defTabSz="914400" rtl="0" eaLnBrk="1" latinLnBrk="0" hangingPunct="1">
+                  <a:defRPr sz="1800" kern="1200">
+                    <a:solidFill>
+                      <a:schemeClr val="tx1"/>
+                    </a:solidFill>
+                    <a:latin typeface="+mn-lt"/>
+                    <a:ea typeface="+mn-ea"/>
+                    <a:cs typeface="+mn-cs"/>
+                  </a:defRPr>
+                </a:lvl8pPr>
+                <a:lvl9pPr marL="3657600" algn="l" defTabSz="914400" rtl="0" eaLnBrk="1" latinLnBrk="0" hangingPunct="1">
+                  <a:defRPr sz="1800" kern="1200">
+                    <a:solidFill>
+                      <a:schemeClr val="tx1"/>
+                    </a:solidFill>
+                    <a:latin typeface="+mn-lt"/>
+                    <a:ea typeface="+mn-ea"/>
+                    <a:cs typeface="+mn-cs"/>
+                  </a:defRPr>
+                </a:lvl9pPr>
+              </a:lstStyle>
+              <a:p>
+                <a:pPr/>
+                <a14:m>
+                  <m:oMathPara xmlns:m="http://schemas.openxmlformats.org/officeDocument/2006/math">
+                    <m:oMathParaPr>
+                      <m:jc m:val="centerGroup"/>
+                    </m:oMathParaPr>
+                    <m:oMath xmlns:m="http://schemas.openxmlformats.org/officeDocument/2006/math">
+                      <m:sSub>
+                        <m:sSubPr>
+                          <m:ctrlPr>
+                            <a:rPr lang="en-US" sz="2000" b="1" i="1" smtClean="0">
+                              <a:latin typeface="Cambria Math" panose="02040503050406030204" pitchFamily="18" charset="0"/>
+                            </a:rPr>
+                          </m:ctrlPr>
+                        </m:sSubPr>
+                        <m:e>
+                          <m:r>
+                            <a:rPr lang="en-US" sz="2000" b="1" i="1" smtClean="0">
+                              <a:latin typeface="Cambria Math" panose="02040503050406030204" pitchFamily="18" charset="0"/>
+                            </a:rPr>
+                            <m:t>𝒛</m:t>
+                          </m:r>
+                        </m:e>
+                        <m:sub>
+                          <m:r>
+                            <a:rPr lang="en-US" sz="2000" b="0" i="1" smtClean="0">
+                              <a:latin typeface="Cambria Math" panose="02040503050406030204" pitchFamily="18" charset="0"/>
+                            </a:rPr>
+                            <m:t>𝑡</m:t>
+                          </m:r>
+                          <m:r>
+                            <a:rPr lang="en-US" sz="2000" b="0" i="1" smtClean="0">
+                              <a:latin typeface="Cambria Math" panose="02040503050406030204" pitchFamily="18" charset="0"/>
+                            </a:rPr>
+                            <m:t>+</m:t>
+                          </m:r>
+                          <m:r>
+                            <m:rPr>
+                              <m:sty m:val="p"/>
+                            </m:rPr>
+                            <a:rPr lang="en-US" sz="2000" b="0" i="0" smtClean="0">
+                              <a:latin typeface="Cambria Math" panose="02040503050406030204" pitchFamily="18" charset="0"/>
+                            </a:rPr>
+                            <m:t>Δt</m:t>
+                          </m:r>
+                        </m:sub>
+                      </m:sSub>
+                    </m:oMath>
+                  </m:oMathPara>
+                </a14:m>
+                <a:endParaRPr lang="en-US" sz="2000" b="1" dirty="0">
+                  <a:latin typeface="Aptos" panose="020B0004020202020204" pitchFamily="34" charset="0"/>
+                </a:endParaRPr>
+              </a:p>
+            </p:txBody>
+          </p:sp>
+        </mc:Choice>
+        <mc:Fallback>
+          <p:sp>
+            <p:nvSpPr>
+              <p:cNvPr id="39" name="TextBox 38">
+                <a:extLst>
+                  <a:ext uri="{FF2B5EF4-FFF2-40B4-BE49-F238E27FC236}">
+                    <a16:creationId xmlns:a16="http://schemas.microsoft.com/office/drawing/2014/main" id="{70F8DA71-C65B-5292-13CB-4ECC8E5D0881}"/>
+                  </a:ext>
+                </a:extLst>
+              </p:cNvPr>
+              <p:cNvSpPr txBox="1">
+                <a:spLocks noRot="1" noChangeAspect="1" noMove="1" noResize="1" noEditPoints="1" noAdjustHandles="1" noChangeArrowheads="1" noChangeShapeType="1" noTextEdit="1"/>
+              </p:cNvSpPr>
+              <p:nvPr/>
+            </p:nvSpPr>
+            <p:spPr>
+              <a:xfrm>
+                <a:off x="4718578" y="2061327"/>
+                <a:ext cx="575725" cy="307777"/>
+              </a:xfrm>
+              <a:prstGeom prst="rect">
+                <a:avLst/>
+              </a:prstGeom>
+              <a:blipFill>
+                <a:blip r:embed="rId15"/>
+                <a:stretch>
+                  <a:fillRect l="-10870" r="-8696" b="-16000"/>
+                </a:stretch>
+              </a:blipFill>
+            </p:spPr>
+            <p:txBody>
+              <a:bodyPr/>
+              <a:lstStyle/>
+              <a:p>
+                <a:r>
+                  <a:rPr lang="en-US">
+                    <a:noFill/>
+                  </a:rPr>
+                  <a:t> </a:t>
+                </a:r>
+              </a:p>
+            </p:txBody>
+          </p:sp>
+        </mc:Fallback>
+      </mc:AlternateContent>
     </p:spTree>
     <p:extLst>
       <p:ext uri="{BB962C8B-B14F-4D97-AF65-F5344CB8AC3E}">
@@ -9027,37 +9586,6 @@
           </a:p>
         </p:txBody>
       </p:sp>
-      <p:pic>
-        <p:nvPicPr>
-          <p:cNvPr id="5" name="Picture 4">
-            <a:extLst>
-              <a:ext uri="{FF2B5EF4-FFF2-40B4-BE49-F238E27FC236}">
-                <a16:creationId xmlns:a16="http://schemas.microsoft.com/office/drawing/2014/main" id="{6D16E929-6A65-B67E-D260-12BDE50EF2D8}"/>
-              </a:ext>
-            </a:extLst>
-          </p:cNvPr>
-          <p:cNvPicPr>
-            <a:picLocks noChangeAspect="1"/>
-          </p:cNvPicPr>
-          <p:nvPr/>
-        </p:nvPicPr>
-        <p:blipFill>
-          <a:blip r:embed="rId4"/>
-          <a:srcRect t="32153" b="35673"/>
-          <a:stretch>
-            <a:fillRect/>
-          </a:stretch>
-        </p:blipFill>
-        <p:spPr>
-          <a:xfrm>
-            <a:off x="1419874" y="3121223"/>
-            <a:ext cx="6541216" cy="1262754"/>
-          </a:xfrm>
-          <a:prstGeom prst="rect">
-            <a:avLst/>
-          </a:prstGeom>
-        </p:spPr>
-      </p:pic>
       <p:sp>
         <p:nvSpPr>
           <p:cNvPr id="21" name="TextBox 20">
@@ -9167,7 +9695,7 @@
             </a:r>
             <a:r>
               <a:rPr lang="en-US" sz="1200" dirty="0"/>
-              <a:t>NN-driven*</a:t>
+              <a:t>NN-driven</a:t>
             </a:r>
             <a:endParaRPr lang="en-US" sz="1200" b="1" dirty="0"/>
           </a:p>
@@ -9228,7 +9756,7 @@
           <p:nvPr/>
         </p:nvPicPr>
         <p:blipFill>
-          <a:blip r:embed="rId5"/>
+          <a:blip r:embed="rId4"/>
           <a:srcRect t="41998" b="36391"/>
           <a:stretch>
             <a:fillRect/>
@@ -9246,56 +9774,6 @@
       </p:pic>
       <p:sp>
         <p:nvSpPr>
-          <p:cNvPr id="11" name="Rectangle 10">
-            <a:extLst>
-              <a:ext uri="{FF2B5EF4-FFF2-40B4-BE49-F238E27FC236}">
-                <a16:creationId xmlns:a16="http://schemas.microsoft.com/office/drawing/2014/main" id="{19D2A339-2D89-085D-23ED-8CDAC6B960F4}"/>
-              </a:ext>
-            </a:extLst>
-          </p:cNvPr>
-          <p:cNvSpPr/>
-          <p:nvPr/>
-        </p:nvSpPr>
-        <p:spPr>
-          <a:xfrm>
-            <a:off x="6301780" y="3665285"/>
-            <a:ext cx="45719" cy="2872758"/>
-          </a:xfrm>
-          <a:prstGeom prst="rect">
-            <a:avLst/>
-          </a:prstGeom>
-          <a:noFill/>
-          <a:ln>
-            <a:solidFill>
-              <a:schemeClr val="bg1"/>
-            </a:solidFill>
-          </a:ln>
-        </p:spPr>
-        <p:style>
-          <a:lnRef idx="2">
-            <a:schemeClr val="accent2"/>
-          </a:lnRef>
-          <a:fillRef idx="1">
-            <a:schemeClr val="lt1"/>
-          </a:fillRef>
-          <a:effectRef idx="0">
-            <a:schemeClr val="accent2"/>
-          </a:effectRef>
-          <a:fontRef idx="minor">
-            <a:schemeClr val="dk1"/>
-          </a:fontRef>
-        </p:style>
-        <p:txBody>
-          <a:bodyPr rtlCol="0" anchor="ctr"/>
-          <a:lstStyle/>
-          <a:p>
-            <a:pPr algn="ctr"/>
-            <a:endParaRPr lang="en-US"/>
-          </a:p>
-        </p:txBody>
-      </p:sp>
-      <p:sp>
-        <p:nvSpPr>
           <p:cNvPr id="12" name="TextBox 11">
             <a:extLst>
               <a:ext uri="{FF2B5EF4-FFF2-40B4-BE49-F238E27FC236}">
@@ -9308,7 +9786,7 @@
         </p:nvSpPr>
         <p:spPr>
           <a:xfrm>
-            <a:off x="6099829" y="6453084"/>
+            <a:off x="6954792" y="6472393"/>
             <a:ext cx="704486" cy="261610"/>
           </a:xfrm>
           <a:prstGeom prst="rect">
@@ -9331,56 +9809,6 @@
       </p:sp>
       <p:sp>
         <p:nvSpPr>
-          <p:cNvPr id="14" name="Rectangle 13">
-            <a:extLst>
-              <a:ext uri="{FF2B5EF4-FFF2-40B4-BE49-F238E27FC236}">
-                <a16:creationId xmlns:a16="http://schemas.microsoft.com/office/drawing/2014/main" id="{82416DC7-C611-E1EE-8FE3-4FEDEC06BB01}"/>
-              </a:ext>
-            </a:extLst>
-          </p:cNvPr>
-          <p:cNvSpPr/>
-          <p:nvPr/>
-        </p:nvSpPr>
-        <p:spPr>
-          <a:xfrm>
-            <a:off x="6646427" y="3652754"/>
-            <a:ext cx="45719" cy="730539"/>
-          </a:xfrm>
-          <a:prstGeom prst="rect">
-            <a:avLst/>
-          </a:prstGeom>
-          <a:noFill/>
-          <a:ln>
-            <a:solidFill>
-              <a:schemeClr val="bg1"/>
-            </a:solidFill>
-          </a:ln>
-        </p:spPr>
-        <p:style>
-          <a:lnRef idx="2">
-            <a:schemeClr val="accent2"/>
-          </a:lnRef>
-          <a:fillRef idx="1">
-            <a:schemeClr val="lt1"/>
-          </a:fillRef>
-          <a:effectRef idx="0">
-            <a:schemeClr val="accent2"/>
-          </a:effectRef>
-          <a:fontRef idx="minor">
-            <a:schemeClr val="dk1"/>
-          </a:fontRef>
-        </p:style>
-        <p:txBody>
-          <a:bodyPr rtlCol="0" anchor="ctr"/>
-          <a:lstStyle/>
-          <a:p>
-            <a:pPr algn="ctr"/>
-            <a:endParaRPr lang="en-US"/>
-          </a:p>
-        </p:txBody>
-      </p:sp>
-      <p:sp>
-        <p:nvSpPr>
           <p:cNvPr id="15" name="TextBox 14">
             <a:extLst>
               <a:ext uri="{FF2B5EF4-FFF2-40B4-BE49-F238E27FC236}">
@@ -9393,7 +9821,7 @@
         </p:nvSpPr>
         <p:spPr>
           <a:xfrm>
-            <a:off x="6547851" y="6455008"/>
+            <a:off x="2499926" y="6475530"/>
             <a:ext cx="704486" cy="261610"/>
           </a:xfrm>
           <a:prstGeom prst="rect">
@@ -9416,56 +9844,6 @@
       </p:sp>
       <p:sp>
         <p:nvSpPr>
-          <p:cNvPr id="16" name="Rectangle 15">
-            <a:extLst>
-              <a:ext uri="{FF2B5EF4-FFF2-40B4-BE49-F238E27FC236}">
-                <a16:creationId xmlns:a16="http://schemas.microsoft.com/office/drawing/2014/main" id="{D0E2B3F0-7BEC-CA63-AB30-0AD9881FD89D}"/>
-              </a:ext>
-            </a:extLst>
-          </p:cNvPr>
-          <p:cNvSpPr/>
-          <p:nvPr/>
-        </p:nvSpPr>
-        <p:spPr>
-          <a:xfrm>
-            <a:off x="6401272" y="3634838"/>
-            <a:ext cx="45719" cy="2872758"/>
-          </a:xfrm>
-          <a:prstGeom prst="rect">
-            <a:avLst/>
-          </a:prstGeom>
-          <a:noFill/>
-          <a:ln>
-            <a:solidFill>
-              <a:schemeClr val="bg1"/>
-            </a:solidFill>
-          </a:ln>
-        </p:spPr>
-        <p:style>
-          <a:lnRef idx="2">
-            <a:schemeClr val="accent2"/>
-          </a:lnRef>
-          <a:fillRef idx="1">
-            <a:schemeClr val="lt1"/>
-          </a:fillRef>
-          <a:effectRef idx="0">
-            <a:schemeClr val="accent2"/>
-          </a:effectRef>
-          <a:fontRef idx="minor">
-            <a:schemeClr val="dk1"/>
-          </a:fontRef>
-        </p:style>
-        <p:txBody>
-          <a:bodyPr rtlCol="0" anchor="ctr"/>
-          <a:lstStyle/>
-          <a:p>
-            <a:pPr algn="ctr"/>
-            <a:endParaRPr lang="en-US"/>
-          </a:p>
-        </p:txBody>
-      </p:sp>
-      <p:sp>
-        <p:nvSpPr>
           <p:cNvPr id="17" name="TextBox 16">
             <a:extLst>
               <a:ext uri="{FF2B5EF4-FFF2-40B4-BE49-F238E27FC236}">
@@ -9478,7 +9856,7 @@
         </p:nvSpPr>
         <p:spPr>
           <a:xfrm>
-            <a:off x="6294184" y="6453084"/>
+            <a:off x="5621327" y="6494979"/>
             <a:ext cx="459331" cy="261610"/>
           </a:xfrm>
           <a:prstGeom prst="rect">
@@ -9501,56 +9879,6 @@
       </p:sp>
       <p:sp>
         <p:nvSpPr>
-          <p:cNvPr id="19" name="Rectangle 18">
-            <a:extLst>
-              <a:ext uri="{FF2B5EF4-FFF2-40B4-BE49-F238E27FC236}">
-                <a16:creationId xmlns:a16="http://schemas.microsoft.com/office/drawing/2014/main" id="{320DCEEB-7A41-8B19-9225-4A2FF4C76745}"/>
-              </a:ext>
-            </a:extLst>
-          </p:cNvPr>
-          <p:cNvSpPr/>
-          <p:nvPr/>
-        </p:nvSpPr>
-        <p:spPr>
-          <a:xfrm>
-            <a:off x="2808359" y="3652755"/>
-            <a:ext cx="45719" cy="688239"/>
-          </a:xfrm>
-          <a:prstGeom prst="rect">
-            <a:avLst/>
-          </a:prstGeom>
-          <a:noFill/>
-          <a:ln>
-            <a:solidFill>
-              <a:schemeClr val="bg1"/>
-            </a:solidFill>
-          </a:ln>
-        </p:spPr>
-        <p:style>
-          <a:lnRef idx="2">
-            <a:schemeClr val="accent2"/>
-          </a:lnRef>
-          <a:fillRef idx="1">
-            <a:schemeClr val="lt1"/>
-          </a:fillRef>
-          <a:effectRef idx="0">
-            <a:schemeClr val="accent2"/>
-          </a:effectRef>
-          <a:fontRef idx="minor">
-            <a:schemeClr val="dk1"/>
-          </a:fontRef>
-        </p:style>
-        <p:txBody>
-          <a:bodyPr rtlCol="0" anchor="ctr"/>
-          <a:lstStyle/>
-          <a:p>
-            <a:pPr algn="ctr"/>
-            <a:endParaRPr lang="en-US"/>
-          </a:p>
-        </p:txBody>
-      </p:sp>
-      <p:sp>
-        <p:nvSpPr>
           <p:cNvPr id="29" name="TextBox 28">
             <a:extLst>
               <a:ext uri="{FF2B5EF4-FFF2-40B4-BE49-F238E27FC236}">
@@ -9563,7 +9891,7 @@
         </p:nvSpPr>
         <p:spPr>
           <a:xfrm>
-            <a:off x="2642601" y="6459929"/>
+            <a:off x="2852169" y="6482920"/>
             <a:ext cx="704486" cy="261610"/>
           </a:xfrm>
           <a:prstGeom prst="rect">
@@ -9584,206 +9912,208 @@
           </a:p>
         </p:txBody>
       </p:sp>
-      <p:sp>
-        <p:nvSpPr>
-          <p:cNvPr id="33" name="Rectangle 32">
-            <a:extLst>
-              <a:ext uri="{FF2B5EF4-FFF2-40B4-BE49-F238E27FC236}">
-                <a16:creationId xmlns:a16="http://schemas.microsoft.com/office/drawing/2014/main" id="{90E05789-5089-0136-B22F-3B8047594817}"/>
-              </a:ext>
-            </a:extLst>
-          </p:cNvPr>
-          <p:cNvSpPr/>
+      <p:grpSp>
+        <p:nvGrpSpPr>
+          <p:cNvPr id="6" name="Group 5">
+            <a:extLst>
+              <a:ext uri="{FF2B5EF4-FFF2-40B4-BE49-F238E27FC236}">
+                <a16:creationId xmlns:a16="http://schemas.microsoft.com/office/drawing/2014/main" id="{68DB1792-4BAE-2038-EC19-764BCEE5B5F8}"/>
+              </a:ext>
+            </a:extLst>
+          </p:cNvPr>
+          <p:cNvGrpSpPr/>
           <p:nvPr/>
-        </p:nvSpPr>
-        <p:spPr>
+        </p:nvGrpSpPr>
+        <p:grpSpPr>
           <a:xfrm>
-            <a:off x="6646427" y="4782548"/>
-            <a:ext cx="45719" cy="730539"/>
+            <a:off x="1419874" y="3121223"/>
+            <a:ext cx="6541216" cy="3398903"/>
+            <a:chOff x="1419874" y="3121223"/>
+            <a:chExt cx="6541216" cy="3398903"/>
           </a:xfrm>
-          <a:prstGeom prst="rect">
-            <a:avLst/>
-          </a:prstGeom>
-          <a:noFill/>
-          <a:ln>
-            <a:solidFill>
-              <a:schemeClr val="bg1"/>
-            </a:solidFill>
-          </a:ln>
-        </p:spPr>
-        <p:style>
-          <a:lnRef idx="2">
-            <a:schemeClr val="accent2"/>
-          </a:lnRef>
-          <a:fillRef idx="1">
-            <a:schemeClr val="lt1"/>
-          </a:fillRef>
-          <a:effectRef idx="0">
-            <a:schemeClr val="accent2"/>
-          </a:effectRef>
-          <a:fontRef idx="minor">
-            <a:schemeClr val="dk1"/>
-          </a:fontRef>
-        </p:style>
-        <p:txBody>
-          <a:bodyPr rtlCol="0" anchor="ctr"/>
-          <a:lstStyle/>
-          <a:p>
-            <a:pPr algn="ctr"/>
-            <a:endParaRPr lang="en-US"/>
-          </a:p>
-        </p:txBody>
-      </p:sp>
-      <p:sp>
-        <p:nvSpPr>
-          <p:cNvPr id="35" name="Rectangle 34">
-            <a:extLst>
-              <a:ext uri="{FF2B5EF4-FFF2-40B4-BE49-F238E27FC236}">
-                <a16:creationId xmlns:a16="http://schemas.microsoft.com/office/drawing/2014/main" id="{05F29C22-400C-84DC-A7BF-3D840740C484}"/>
-              </a:ext>
-            </a:extLst>
-          </p:cNvPr>
-          <p:cNvSpPr/>
-          <p:nvPr/>
-        </p:nvSpPr>
-        <p:spPr>
-          <a:xfrm>
-            <a:off x="6646426" y="5813659"/>
-            <a:ext cx="54232" cy="693937"/>
-          </a:xfrm>
-          <a:prstGeom prst="rect">
-            <a:avLst/>
-          </a:prstGeom>
-          <a:noFill/>
-          <a:ln>
-            <a:solidFill>
-              <a:schemeClr val="bg1"/>
-            </a:solidFill>
-          </a:ln>
-        </p:spPr>
-        <p:style>
-          <a:lnRef idx="2">
-            <a:schemeClr val="accent2"/>
-          </a:lnRef>
-          <a:fillRef idx="1">
-            <a:schemeClr val="lt1"/>
-          </a:fillRef>
-          <a:effectRef idx="0">
-            <a:schemeClr val="accent2"/>
-          </a:effectRef>
-          <a:fontRef idx="minor">
-            <a:schemeClr val="dk1"/>
-          </a:fontRef>
-        </p:style>
-        <p:txBody>
-          <a:bodyPr rtlCol="0" anchor="ctr"/>
-          <a:lstStyle/>
-          <a:p>
-            <a:pPr algn="ctr"/>
-            <a:endParaRPr lang="en-US"/>
-          </a:p>
-        </p:txBody>
-      </p:sp>
-      <p:sp>
-        <p:nvSpPr>
-          <p:cNvPr id="37" name="Rectangle 36">
-            <a:extLst>
-              <a:ext uri="{FF2B5EF4-FFF2-40B4-BE49-F238E27FC236}">
-                <a16:creationId xmlns:a16="http://schemas.microsoft.com/office/drawing/2014/main" id="{11E8E405-1451-24BB-DC99-8A019728D276}"/>
-              </a:ext>
-            </a:extLst>
-          </p:cNvPr>
-          <p:cNvSpPr/>
-          <p:nvPr/>
-        </p:nvSpPr>
-        <p:spPr>
-          <a:xfrm>
-            <a:off x="2804102" y="4765395"/>
-            <a:ext cx="54232" cy="693937"/>
-          </a:xfrm>
-          <a:prstGeom prst="rect">
-            <a:avLst/>
-          </a:prstGeom>
-          <a:noFill/>
-          <a:ln>
-            <a:solidFill>
-              <a:schemeClr val="bg1"/>
-            </a:solidFill>
-          </a:ln>
-        </p:spPr>
-        <p:style>
-          <a:lnRef idx="2">
-            <a:schemeClr val="accent2"/>
-          </a:lnRef>
-          <a:fillRef idx="1">
-            <a:schemeClr val="lt1"/>
-          </a:fillRef>
-          <a:effectRef idx="0">
-            <a:schemeClr val="accent2"/>
-          </a:effectRef>
-          <a:fontRef idx="minor">
-            <a:schemeClr val="dk1"/>
-          </a:fontRef>
-        </p:style>
-        <p:txBody>
-          <a:bodyPr rtlCol="0" anchor="ctr"/>
-          <a:lstStyle/>
-          <a:p>
-            <a:pPr algn="ctr"/>
-            <a:endParaRPr lang="en-US"/>
-          </a:p>
-        </p:txBody>
-      </p:sp>
-      <p:sp>
-        <p:nvSpPr>
-          <p:cNvPr id="38" name="Rectangle 37">
-            <a:extLst>
-              <a:ext uri="{FF2B5EF4-FFF2-40B4-BE49-F238E27FC236}">
-                <a16:creationId xmlns:a16="http://schemas.microsoft.com/office/drawing/2014/main" id="{B5D93E19-6A82-FE05-F233-AE6A193CD1F8}"/>
-              </a:ext>
-            </a:extLst>
-          </p:cNvPr>
-          <p:cNvSpPr/>
-          <p:nvPr/>
-        </p:nvSpPr>
-        <p:spPr>
-          <a:xfrm>
-            <a:off x="2804102" y="5813659"/>
-            <a:ext cx="54232" cy="693937"/>
-          </a:xfrm>
-          <a:prstGeom prst="rect">
-            <a:avLst/>
-          </a:prstGeom>
-          <a:noFill/>
-          <a:ln>
-            <a:solidFill>
-              <a:schemeClr val="bg1"/>
-            </a:solidFill>
-          </a:ln>
-        </p:spPr>
-        <p:style>
-          <a:lnRef idx="2">
-            <a:schemeClr val="accent2"/>
-          </a:lnRef>
-          <a:fillRef idx="1">
-            <a:schemeClr val="lt1"/>
-          </a:fillRef>
-          <a:effectRef idx="0">
-            <a:schemeClr val="accent2"/>
-          </a:effectRef>
-          <a:fontRef idx="minor">
-            <a:schemeClr val="dk1"/>
-          </a:fontRef>
-        </p:style>
-        <p:txBody>
-          <a:bodyPr rtlCol="0" anchor="ctr"/>
-          <a:lstStyle/>
-          <a:p>
-            <a:pPr algn="ctr"/>
-            <a:endParaRPr lang="en-US"/>
-          </a:p>
-        </p:txBody>
-      </p:sp>
+        </p:grpSpPr>
+        <p:pic>
+          <p:nvPicPr>
+            <p:cNvPr id="5" name="Picture 4">
+              <a:extLst>
+                <a:ext uri="{FF2B5EF4-FFF2-40B4-BE49-F238E27FC236}">
+                  <a16:creationId xmlns:a16="http://schemas.microsoft.com/office/drawing/2014/main" id="{6D16E929-6A65-B67E-D260-12BDE50EF2D8}"/>
+                </a:ext>
+              </a:extLst>
+            </p:cNvPr>
+            <p:cNvPicPr>
+              <a:picLocks noChangeAspect="1"/>
+            </p:cNvPicPr>
+            <p:nvPr/>
+          </p:nvPicPr>
+          <p:blipFill>
+            <a:blip r:embed="rId5"/>
+            <a:srcRect t="32153" b="35673"/>
+            <a:stretch>
+              <a:fillRect/>
+            </a:stretch>
+          </p:blipFill>
+          <p:spPr>
+            <a:xfrm>
+              <a:off x="1419874" y="3121223"/>
+              <a:ext cx="6541216" cy="1262754"/>
+            </a:xfrm>
+            <a:prstGeom prst="rect">
+              <a:avLst/>
+            </a:prstGeom>
+          </p:spPr>
+        </p:pic>
+        <p:sp>
+          <p:nvSpPr>
+            <p:cNvPr id="19" name="Rectangle 18">
+              <a:extLst>
+                <a:ext uri="{FF2B5EF4-FFF2-40B4-BE49-F238E27FC236}">
+                  <a16:creationId xmlns:a16="http://schemas.microsoft.com/office/drawing/2014/main" id="{320DCEEB-7A41-8B19-9225-4A2FF4C76745}"/>
+                </a:ext>
+              </a:extLst>
+            </p:cNvPr>
+            <p:cNvSpPr/>
+            <p:nvPr/>
+          </p:nvSpPr>
+          <p:spPr>
+            <a:xfrm>
+              <a:off x="2769961" y="3665285"/>
+              <a:ext cx="45719" cy="688239"/>
+            </a:xfrm>
+            <a:prstGeom prst="rect">
+              <a:avLst/>
+            </a:prstGeom>
+            <a:noFill/>
+            <a:ln>
+              <a:solidFill>
+                <a:schemeClr val="bg1"/>
+              </a:solidFill>
+            </a:ln>
+          </p:spPr>
+          <p:style>
+            <a:lnRef idx="2">
+              <a:schemeClr val="accent2"/>
+            </a:lnRef>
+            <a:fillRef idx="1">
+              <a:schemeClr val="lt1"/>
+            </a:fillRef>
+            <a:effectRef idx="0">
+              <a:schemeClr val="accent2"/>
+            </a:effectRef>
+            <a:fontRef idx="minor">
+              <a:schemeClr val="dk1"/>
+            </a:fontRef>
+          </p:style>
+          <p:txBody>
+            <a:bodyPr rtlCol="0" anchor="ctr"/>
+            <a:lstStyle/>
+            <a:p>
+              <a:pPr algn="ctr"/>
+              <a:endParaRPr lang="en-US"/>
+            </a:p>
+          </p:txBody>
+        </p:sp>
+        <p:sp>
+          <p:nvSpPr>
+            <p:cNvPr id="37" name="Rectangle 36">
+              <a:extLst>
+                <a:ext uri="{FF2B5EF4-FFF2-40B4-BE49-F238E27FC236}">
+                  <a16:creationId xmlns:a16="http://schemas.microsoft.com/office/drawing/2014/main" id="{11E8E405-1451-24BB-DC99-8A019728D276}"/>
+                </a:ext>
+              </a:extLst>
+            </p:cNvPr>
+            <p:cNvSpPr/>
+            <p:nvPr/>
+          </p:nvSpPr>
+          <p:spPr>
+            <a:xfrm>
+              <a:off x="2765704" y="4737079"/>
+              <a:ext cx="54232" cy="693937"/>
+            </a:xfrm>
+            <a:prstGeom prst="rect">
+              <a:avLst/>
+            </a:prstGeom>
+            <a:noFill/>
+            <a:ln>
+              <a:solidFill>
+                <a:schemeClr val="bg1"/>
+              </a:solidFill>
+            </a:ln>
+          </p:spPr>
+          <p:style>
+            <a:lnRef idx="2">
+              <a:schemeClr val="accent2"/>
+            </a:lnRef>
+            <a:fillRef idx="1">
+              <a:schemeClr val="lt1"/>
+            </a:fillRef>
+            <a:effectRef idx="0">
+              <a:schemeClr val="accent2"/>
+            </a:effectRef>
+            <a:fontRef idx="minor">
+              <a:schemeClr val="dk1"/>
+            </a:fontRef>
+          </p:style>
+          <p:txBody>
+            <a:bodyPr rtlCol="0" anchor="ctr"/>
+            <a:lstStyle/>
+            <a:p>
+              <a:pPr algn="ctr"/>
+              <a:endParaRPr lang="en-US"/>
+            </a:p>
+          </p:txBody>
+        </p:sp>
+        <p:sp>
+          <p:nvSpPr>
+            <p:cNvPr id="38" name="Rectangle 37">
+              <a:extLst>
+                <a:ext uri="{FF2B5EF4-FFF2-40B4-BE49-F238E27FC236}">
+                  <a16:creationId xmlns:a16="http://schemas.microsoft.com/office/drawing/2014/main" id="{B5D93E19-6A82-FE05-F233-AE6A193CD1F8}"/>
+                </a:ext>
+              </a:extLst>
+            </p:cNvPr>
+            <p:cNvSpPr/>
+            <p:nvPr/>
+          </p:nvSpPr>
+          <p:spPr>
+            <a:xfrm>
+              <a:off x="2765704" y="5826189"/>
+              <a:ext cx="54232" cy="693937"/>
+            </a:xfrm>
+            <a:prstGeom prst="rect">
+              <a:avLst/>
+            </a:prstGeom>
+            <a:noFill/>
+            <a:ln>
+              <a:solidFill>
+                <a:schemeClr val="bg1"/>
+              </a:solidFill>
+            </a:ln>
+          </p:spPr>
+          <p:style>
+            <a:lnRef idx="2">
+              <a:schemeClr val="accent2"/>
+            </a:lnRef>
+            <a:fillRef idx="1">
+              <a:schemeClr val="lt1"/>
+            </a:fillRef>
+            <a:effectRef idx="0">
+              <a:schemeClr val="accent2"/>
+            </a:effectRef>
+            <a:fontRef idx="minor">
+              <a:schemeClr val="dk1"/>
+            </a:fontRef>
+          </p:style>
+          <p:txBody>
+            <a:bodyPr rtlCol="0" anchor="ctr"/>
+            <a:lstStyle/>
+            <a:p>
+              <a:pPr algn="ctr"/>
+              <a:endParaRPr lang="en-US"/>
+            </a:p>
+          </p:txBody>
+        </p:sp>
+      </p:grpSp>
       <p:sp>
         <p:nvSpPr>
           <p:cNvPr id="2" name="Rectangle 1">
@@ -9867,6 +10197,325 @@
           </a:prstGeom>
         </p:spPr>
       </p:pic>
+      <p:sp>
+        <p:nvSpPr>
+          <p:cNvPr id="16" name="Rectangle 15">
+            <a:extLst>
+              <a:ext uri="{FF2B5EF4-FFF2-40B4-BE49-F238E27FC236}">
+                <a16:creationId xmlns:a16="http://schemas.microsoft.com/office/drawing/2014/main" id="{D0E2B3F0-7BEC-CA63-AB30-0AD9881FD89D}"/>
+              </a:ext>
+            </a:extLst>
+          </p:cNvPr>
+          <p:cNvSpPr/>
+          <p:nvPr/>
+        </p:nvSpPr>
+        <p:spPr>
+          <a:xfrm>
+            <a:off x="2966262" y="3665285"/>
+            <a:ext cx="45719" cy="2872758"/>
+          </a:xfrm>
+          <a:prstGeom prst="rect">
+            <a:avLst/>
+          </a:prstGeom>
+          <a:noFill/>
+          <a:ln>
+            <a:solidFill>
+              <a:schemeClr val="bg1"/>
+            </a:solidFill>
+          </a:ln>
+        </p:spPr>
+        <p:style>
+          <a:lnRef idx="2">
+            <a:schemeClr val="accent2"/>
+          </a:lnRef>
+          <a:fillRef idx="1">
+            <a:schemeClr val="lt1"/>
+          </a:fillRef>
+          <a:effectRef idx="0">
+            <a:schemeClr val="accent2"/>
+          </a:effectRef>
+          <a:fontRef idx="minor">
+            <a:schemeClr val="dk1"/>
+          </a:fontRef>
+        </p:style>
+        <p:txBody>
+          <a:bodyPr rtlCol="0" anchor="ctr"/>
+          <a:lstStyle/>
+          <a:p>
+            <a:pPr algn="ctr"/>
+            <a:endParaRPr lang="en-US" dirty="0"/>
+          </a:p>
+          <a:p>
+            <a:pPr algn="ctr"/>
+            <a:endParaRPr lang="en-US" dirty="0"/>
+          </a:p>
+        </p:txBody>
+      </p:sp>
+      <p:sp>
+        <p:nvSpPr>
+          <p:cNvPr id="9" name="Rectangle 8">
+            <a:extLst>
+              <a:ext uri="{FF2B5EF4-FFF2-40B4-BE49-F238E27FC236}">
+                <a16:creationId xmlns:a16="http://schemas.microsoft.com/office/drawing/2014/main" id="{B7B8798B-A781-88D0-7E69-193E70B955FD}"/>
+              </a:ext>
+            </a:extLst>
+          </p:cNvPr>
+          <p:cNvSpPr/>
+          <p:nvPr/>
+        </p:nvSpPr>
+        <p:spPr>
+          <a:xfrm>
+            <a:off x="5805273" y="3647668"/>
+            <a:ext cx="45719" cy="2872758"/>
+          </a:xfrm>
+          <a:prstGeom prst="rect">
+            <a:avLst/>
+          </a:prstGeom>
+          <a:noFill/>
+          <a:ln>
+            <a:solidFill>
+              <a:schemeClr val="bg1"/>
+            </a:solidFill>
+          </a:ln>
+        </p:spPr>
+        <p:style>
+          <a:lnRef idx="2">
+            <a:schemeClr val="accent2"/>
+          </a:lnRef>
+          <a:fillRef idx="1">
+            <a:schemeClr val="lt1"/>
+          </a:fillRef>
+          <a:effectRef idx="0">
+            <a:schemeClr val="accent2"/>
+          </a:effectRef>
+          <a:fontRef idx="minor">
+            <a:schemeClr val="dk1"/>
+          </a:fontRef>
+        </p:style>
+        <p:txBody>
+          <a:bodyPr rtlCol="0" anchor="ctr"/>
+          <a:lstStyle/>
+          <a:p>
+            <a:pPr algn="ctr"/>
+            <a:endParaRPr lang="en-US" dirty="0"/>
+          </a:p>
+          <a:p>
+            <a:pPr algn="ctr"/>
+            <a:endParaRPr lang="en-US" dirty="0"/>
+          </a:p>
+        </p:txBody>
+      </p:sp>
+      <p:sp>
+        <p:nvSpPr>
+          <p:cNvPr id="13" name="TextBox 12">
+            <a:extLst>
+              <a:ext uri="{FF2B5EF4-FFF2-40B4-BE49-F238E27FC236}">
+                <a16:creationId xmlns:a16="http://schemas.microsoft.com/office/drawing/2014/main" id="{32F58C06-E888-9C20-0C72-600BEAF8706C}"/>
+              </a:ext>
+            </a:extLst>
+          </p:cNvPr>
+          <p:cNvSpPr txBox="1"/>
+          <p:nvPr/>
+        </p:nvSpPr>
+        <p:spPr>
+          <a:xfrm>
+            <a:off x="1472618" y="3241257"/>
+            <a:ext cx="1240060" cy="276999"/>
+          </a:xfrm>
+          <a:prstGeom prst="rect">
+            <a:avLst/>
+          </a:prstGeom>
+          <a:noFill/>
+        </p:spPr>
+        <p:txBody>
+          <a:bodyPr wrap="square" rtlCol="0">
+            <a:spAutoFit/>
+          </a:bodyPr>
+          <a:lstStyle/>
+          <a:p>
+            <a:r>
+              <a:rPr lang="en-US" sz="1200" b="1" dirty="0"/>
+              <a:t>b) </a:t>
+            </a:r>
+            <a:r>
+              <a:rPr lang="en-US" sz="1200" dirty="0" err="1"/>
+              <a:t>SINDy</a:t>
+            </a:r>
+            <a:endParaRPr lang="en-US" sz="1200" b="1" dirty="0"/>
+          </a:p>
+        </p:txBody>
+      </p:sp>
+      <p:grpSp>
+        <p:nvGrpSpPr>
+          <p:cNvPr id="3" name="Group 2">
+            <a:extLst>
+              <a:ext uri="{FF2B5EF4-FFF2-40B4-BE49-F238E27FC236}">
+                <a16:creationId xmlns:a16="http://schemas.microsoft.com/office/drawing/2014/main" id="{D825DA9F-C07D-7F75-9948-3D1507F1FD02}"/>
+              </a:ext>
+            </a:extLst>
+          </p:cNvPr>
+          <p:cNvGrpSpPr/>
+          <p:nvPr/>
+        </p:nvGrpSpPr>
+        <p:grpSpPr>
+          <a:xfrm>
+            <a:off x="7084684" y="3640137"/>
+            <a:ext cx="54232" cy="2854842"/>
+            <a:chOff x="6646426" y="3652754"/>
+            <a:chExt cx="54232" cy="2854842"/>
+          </a:xfrm>
+        </p:grpSpPr>
+        <p:sp>
+          <p:nvSpPr>
+            <p:cNvPr id="14" name="Rectangle 13">
+              <a:extLst>
+                <a:ext uri="{FF2B5EF4-FFF2-40B4-BE49-F238E27FC236}">
+                  <a16:creationId xmlns:a16="http://schemas.microsoft.com/office/drawing/2014/main" id="{82416DC7-C611-E1EE-8FE3-4FEDEC06BB01}"/>
+                </a:ext>
+              </a:extLst>
+            </p:cNvPr>
+            <p:cNvSpPr/>
+            <p:nvPr/>
+          </p:nvSpPr>
+          <p:spPr>
+            <a:xfrm>
+              <a:off x="6646427" y="3652754"/>
+              <a:ext cx="45719" cy="730539"/>
+            </a:xfrm>
+            <a:prstGeom prst="rect">
+              <a:avLst/>
+            </a:prstGeom>
+            <a:noFill/>
+            <a:ln>
+              <a:solidFill>
+                <a:schemeClr val="bg1"/>
+              </a:solidFill>
+            </a:ln>
+          </p:spPr>
+          <p:style>
+            <a:lnRef idx="2">
+              <a:schemeClr val="accent2"/>
+            </a:lnRef>
+            <a:fillRef idx="1">
+              <a:schemeClr val="lt1"/>
+            </a:fillRef>
+            <a:effectRef idx="0">
+              <a:schemeClr val="accent2"/>
+            </a:effectRef>
+            <a:fontRef idx="minor">
+              <a:schemeClr val="dk1"/>
+            </a:fontRef>
+          </p:style>
+          <p:txBody>
+            <a:bodyPr rtlCol="0" anchor="ctr"/>
+            <a:lstStyle/>
+            <a:p>
+              <a:pPr algn="ctr"/>
+              <a:endParaRPr lang="en-US"/>
+            </a:p>
+          </p:txBody>
+        </p:sp>
+        <p:sp>
+          <p:nvSpPr>
+            <p:cNvPr id="33" name="Rectangle 32">
+              <a:extLst>
+                <a:ext uri="{FF2B5EF4-FFF2-40B4-BE49-F238E27FC236}">
+                  <a16:creationId xmlns:a16="http://schemas.microsoft.com/office/drawing/2014/main" id="{90E05789-5089-0136-B22F-3B8047594817}"/>
+                </a:ext>
+              </a:extLst>
+            </p:cNvPr>
+            <p:cNvSpPr/>
+            <p:nvPr/>
+          </p:nvSpPr>
+          <p:spPr>
+            <a:xfrm>
+              <a:off x="6646427" y="4782548"/>
+              <a:ext cx="45719" cy="730539"/>
+            </a:xfrm>
+            <a:prstGeom prst="rect">
+              <a:avLst/>
+            </a:prstGeom>
+            <a:noFill/>
+            <a:ln>
+              <a:solidFill>
+                <a:schemeClr val="bg1"/>
+              </a:solidFill>
+            </a:ln>
+          </p:spPr>
+          <p:style>
+            <a:lnRef idx="2">
+              <a:schemeClr val="accent2"/>
+            </a:lnRef>
+            <a:fillRef idx="1">
+              <a:schemeClr val="lt1"/>
+            </a:fillRef>
+            <a:effectRef idx="0">
+              <a:schemeClr val="accent2"/>
+            </a:effectRef>
+            <a:fontRef idx="minor">
+              <a:schemeClr val="dk1"/>
+            </a:fontRef>
+          </p:style>
+          <p:txBody>
+            <a:bodyPr rtlCol="0" anchor="ctr"/>
+            <a:lstStyle/>
+            <a:p>
+              <a:pPr algn="ctr"/>
+              <a:endParaRPr lang="en-US"/>
+            </a:p>
+          </p:txBody>
+        </p:sp>
+        <p:sp>
+          <p:nvSpPr>
+            <p:cNvPr id="35" name="Rectangle 34">
+              <a:extLst>
+                <a:ext uri="{FF2B5EF4-FFF2-40B4-BE49-F238E27FC236}">
+                  <a16:creationId xmlns:a16="http://schemas.microsoft.com/office/drawing/2014/main" id="{05F29C22-400C-84DC-A7BF-3D840740C484}"/>
+                </a:ext>
+              </a:extLst>
+            </p:cNvPr>
+            <p:cNvSpPr/>
+            <p:nvPr/>
+          </p:nvSpPr>
+          <p:spPr>
+            <a:xfrm>
+              <a:off x="6646426" y="5813659"/>
+              <a:ext cx="54232" cy="693937"/>
+            </a:xfrm>
+            <a:prstGeom prst="rect">
+              <a:avLst/>
+            </a:prstGeom>
+            <a:noFill/>
+            <a:ln>
+              <a:solidFill>
+                <a:schemeClr val="bg1"/>
+              </a:solidFill>
+            </a:ln>
+          </p:spPr>
+          <p:style>
+            <a:lnRef idx="2">
+              <a:schemeClr val="accent2"/>
+            </a:lnRef>
+            <a:fillRef idx="1">
+              <a:schemeClr val="lt1"/>
+            </a:fillRef>
+            <a:effectRef idx="0">
+              <a:schemeClr val="accent2"/>
+            </a:effectRef>
+            <a:fontRef idx="minor">
+              <a:schemeClr val="dk1"/>
+            </a:fontRef>
+          </p:style>
+          <p:txBody>
+            <a:bodyPr rtlCol="0" anchor="ctr"/>
+            <a:lstStyle/>
+            <a:p>
+              <a:pPr algn="ctr"/>
+              <a:endParaRPr lang="en-US"/>
+            </a:p>
+          </p:txBody>
+        </p:sp>
+      </p:grpSp>
     </p:spTree>
     <p:extLst>
       <p:ext uri="{BB962C8B-B14F-4D97-AF65-F5344CB8AC3E}">
